--- a/納品レポート/ホテル別レポート/comfort_hakata_口コミ分析レポート.pptx
+++ b/納品レポート/ホテル別レポート/comfort_hakata_口コミ分析レポート.pptx
@@ -205,7 +205,7 @@
                 <c:formatCode>General</c:formatCode>
                 <c:ptCount val="5"/>
                 <c:pt idx="0">
-                  <c:v>9.06</c:v>
+                  <c:v>9.07</c:v>
                 </c:pt>
                 <c:pt idx="1">
                   <c:v>7.45</c:v>
@@ -214,7 +214,7 @@
                   <c:v>7.13</c:v>
                 </c:pt>
                 <c:pt idx="3">
-                  <c:v>7.08</c:v>
+                  <c:v>7.11</c:v>
                 </c:pt>
                 <c:pt idx="4">
                   <c:v>6</c:v>
@@ -560,7 +560,7 @@
               <c:numCache>
                 <c:ptCount val="3"/>
                 <c:pt idx="0">
-                  <c:v>92</c:v>
+                  <c:v>95</c:v>
                 </c:pt>
                 <c:pt idx="1">
                   <c:v>30</c:v>
@@ -831,13 +831,13 @@
                 <c:formatCode>General</c:formatCode>
                 <c:ptCount val="10"/>
                 <c:pt idx="0">
-                  <c:v>44</c:v>
+                  <c:v>45</c:v>
                 </c:pt>
                 <c:pt idx="1">
-                  <c:v>14</c:v>
+                  <c:v>15</c:v>
                 </c:pt>
                 <c:pt idx="2">
-                  <c:v>34</c:v>
+                  <c:v>35</c:v>
                 </c:pt>
                 <c:pt idx="3">
                   <c:v>8</c:v>
@@ -2809,7 +2809,7 @@
                 <a:ea typeface="Arial" pitchFamily="34" charset="-122"/>
                 <a:cs typeface="Arial" pitchFamily="34" charset="-120"/>
               </a:rPr>
-              <a:t>レビュー総数：136件（5サイト）</a:t>
+              <a:t>レビュー総数：139件（5サイト）</a:t>
             </a:r>
             <a:endParaRPr lang="en-US" sz="1000" dirty="0"/>
           </a:p>
@@ -2829,7 +2829,7 @@
                 <a:ea typeface="Arial" pitchFamily="34" charset="-122"/>
                 <a:cs typeface="Arial" pitchFamily="34" charset="-120"/>
               </a:rPr>
-              <a:t>作成日：2026年3月17日</a:t>
+              <a:t>作成日：2026年3月18日</a:t>
             </a:r>
             <a:endParaRPr lang="en-US" sz="1000" dirty="0"/>
           </a:p>
@@ -3375,7 +3375,7 @@
                           <a:ea typeface="Arial" pitchFamily="34" charset="-122"/>
                           <a:cs typeface="Arial" pitchFamily="34" charset="-120"/>
                         </a:rPr>
-                        <a:t>7.87点</a:t>
+                        <a:t>7.89点</a:t>
                       </a:r>
                       <a:endParaRPr lang="en-US" sz="1000" dirty="0">
                         <a:latin typeface="Arial" charset="0"/>
@@ -3649,7 +3649,7 @@
                           <a:ea typeface="Arial" pitchFamily="34" charset="-122"/>
                           <a:cs typeface="Arial" pitchFamily="34" charset="-120"/>
                         </a:rPr>
-                        <a:t>67.6%</a:t>
+                        <a:t>68.3%</a:t>
                       </a:r>
                       <a:endParaRPr lang="en-US" sz="1000" dirty="0">
                         <a:latin typeface="Arial" charset="0"/>
@@ -3923,7 +3923,7 @@
                           <a:ea typeface="Arial" pitchFamily="34" charset="-122"/>
                           <a:cs typeface="Arial" pitchFamily="34" charset="-120"/>
                         </a:rPr>
-                        <a:t>10.3%</a:t>
+                        <a:t>10.1%</a:t>
                       </a:r>
                       <a:endParaRPr lang="en-US" sz="1000" dirty="0">
                         <a:latin typeface="Arial" charset="0"/>
@@ -5384,7 +5384,7 @@
                 <a:ea typeface="Arial" pitchFamily="34" charset="-122"/>
                 <a:cs typeface="Arial" pitchFamily="34" charset="-120"/>
               </a:rPr>
-              <a:t>7.87</a:t>
+              <a:t>7.89</a:t>
             </a:r>
             <a:endParaRPr lang="en-US" sz="3200" dirty="0"/>
           </a:p>
@@ -5509,7 +5509,7 @@
                 <a:ea typeface="Arial" pitchFamily="34" charset="-122"/>
                 <a:cs typeface="Arial" pitchFamily="34" charset="-120"/>
               </a:rPr>
-              <a:t>67.6%</a:t>
+              <a:t>68.3%</a:t>
             </a:r>
             <a:endParaRPr lang="en-US" sz="3200" dirty="0"/>
           </a:p>
@@ -5634,7 +5634,7 @@
                 <a:ea typeface="Arial" pitchFamily="34" charset="-122"/>
                 <a:cs typeface="Arial" pitchFamily="34" charset="-120"/>
               </a:rPr>
-              <a:t>10.3%</a:t>
+              <a:t>10.1%</a:t>
             </a:r>
             <a:endParaRPr lang="en-US" sz="3200" dirty="0"/>
           </a:p>
@@ -5759,7 +5759,7 @@
                 <a:ea typeface="Arial" pitchFamily="34" charset="-122"/>
                 <a:cs typeface="Arial" pitchFamily="34" charset="-120"/>
               </a:rPr>
-              <a:t>136件</a:t>
+              <a:t>139件</a:t>
             </a:r>
             <a:endParaRPr lang="en-US" sz="3200" dirty="0"/>
           </a:p>
@@ -5907,7 +5907,7 @@
                 <a:ea typeface="Arial" pitchFamily="34" charset="-122"/>
                 <a:cs typeface="Arial" pitchFamily="34" charset="-120"/>
               </a:rPr>
-              <a:t>  地點理想，近火車站，購物食野都好方便而且去神社都好近，實在太便利，而且酒店仲送埋早餐，實在太好了，可以再入住 立地...</a:t>
+              <a:t>  立地が良く、交通の便も良く、朝食も美味しく、スイートルームも快適でした</a:t>
             </a:r>
             <a:endParaRPr lang="en-US" sz="1100" dirty="0"/>
           </a:p>
@@ -5947,7 +5947,7 @@
                 <a:ea typeface="Arial" pitchFamily="34" charset="-122"/>
                 <a:cs typeface="Arial" pitchFamily="34" charset="-120"/>
               </a:rPr>
-              <a:t>  信じられないほど便利で、しかも朝食付きなのも素晴らしい</a:t>
+              <a:t>  立地が良く、交通の便も良く、朝食も美味しく、スイートルームも快適でした</a:t>
             </a:r>
             <a:endParaRPr lang="en-US" sz="1100" dirty="0"/>
           </a:p>
@@ -6568,7 +6568,7 @@
                 <a:ea typeface="Arial" pitchFamily="34" charset="-122"/>
                 <a:cs typeface="Arial" pitchFamily="34" charset="-120"/>
               </a:rPr>
-              <a:t>7.87</a:t>
+              <a:t>7.89</a:t>
             </a:r>
             <a:endParaRPr lang="en-US" sz="3200" dirty="0"/>
           </a:p>
@@ -6693,7 +6693,7 @@
                 <a:ea typeface="Arial" pitchFamily="34" charset="-122"/>
                 <a:cs typeface="Arial" pitchFamily="34" charset="-120"/>
               </a:rPr>
-              <a:t>67.6%</a:t>
+              <a:t>68.3%</a:t>
             </a:r>
             <a:endParaRPr lang="en-US" sz="3200" dirty="0"/>
           </a:p>
@@ -6818,7 +6818,7 @@
                 <a:ea typeface="Arial" pitchFamily="34" charset="-122"/>
                 <a:cs typeface="Arial" pitchFamily="34" charset="-120"/>
               </a:rPr>
-              <a:t>10.3%</a:t>
+              <a:t>10.1%</a:t>
             </a:r>
             <a:endParaRPr lang="en-US" sz="3200" dirty="0"/>
           </a:p>
@@ -6943,7 +6943,7 @@
                 <a:ea typeface="Arial" pitchFamily="34" charset="-122"/>
                 <a:cs typeface="Arial" pitchFamily="34" charset="-120"/>
               </a:rPr>
-              <a:t>136件</a:t>
+              <a:t>139件</a:t>
             </a:r>
             <a:endParaRPr lang="en-US" sz="3200" dirty="0"/>
           </a:p>
@@ -7364,7 +7364,7 @@
                 <a:ea typeface="Arial" pitchFamily="34" charset="-122"/>
                 <a:cs typeface="Arial" pitchFamily="34" charset="-120"/>
               </a:rPr>
-              <a:t>Trip.com(9.06)が最高スコア。</a:t>
+              <a:t>Trip.com(9.07)が最高スコア。</a:t>
             </a:r>
             <a:endParaRPr lang="en-US" sz="1100" dirty="0"/>
           </a:p>
@@ -7922,7 +7922,7 @@
                           <a:ea typeface="Arial" pitchFamily="34" charset="-122"/>
                           <a:cs typeface="Arial" pitchFamily="34" charset="-120"/>
                         </a:rPr>
-                        <a:t>54</a:t>
+                        <a:t>56</a:t>
                       </a:r>
                       <a:endParaRPr lang="en-US" sz="900" dirty="0">
                         <a:latin typeface="Arial" charset="0"/>
@@ -7990,7 +7990,7 @@
                           <a:ea typeface="Arial" pitchFamily="34" charset="-122"/>
                           <a:cs typeface="Arial" pitchFamily="34" charset="-120"/>
                         </a:rPr>
-                        <a:t>9.06</a:t>
+                        <a:t>9.07</a:t>
                       </a:r>
                       <a:endParaRPr lang="en-US" sz="900" dirty="0">
                         <a:latin typeface="Arial" charset="0"/>
@@ -8126,7 +8126,7 @@
                           <a:ea typeface="Arial" pitchFamily="34" charset="-122"/>
                           <a:cs typeface="Arial" pitchFamily="34" charset="-120"/>
                         </a:rPr>
-                        <a:t>9.06</a:t>
+                        <a:t>9.07</a:t>
                       </a:r>
                       <a:endParaRPr lang="en-US" sz="900" dirty="0">
                         <a:latin typeface="Arial" charset="0"/>
@@ -8948,7 +8948,7 @@
                           <a:ea typeface="Arial" pitchFamily="34" charset="-122"/>
                           <a:cs typeface="Arial" pitchFamily="34" charset="-120"/>
                         </a:rPr>
-                        <a:t>36</a:t>
+                        <a:t>37</a:t>
                       </a:r>
                       <a:endParaRPr lang="en-US" sz="900" dirty="0">
                         <a:latin typeface="Arial" charset="0"/>
@@ -9016,7 +9016,7 @@
                           <a:ea typeface="Arial" pitchFamily="34" charset="-122"/>
                           <a:cs typeface="Arial" pitchFamily="34" charset="-120"/>
                         </a:rPr>
-                        <a:t>7.08</a:t>
+                        <a:t>7.11</a:t>
                       </a:r>
                       <a:endParaRPr lang="en-US" sz="900" dirty="0">
                         <a:latin typeface="Arial" charset="0"/>
@@ -9152,7 +9152,7 @@
                           <a:ea typeface="Arial" pitchFamily="34" charset="-122"/>
                           <a:cs typeface="Arial" pitchFamily="34" charset="-120"/>
                         </a:rPr>
-                        <a:t>7.08</a:t>
+                        <a:t>7.11</a:t>
                       </a:r>
                       <a:endParaRPr lang="en-US" sz="900" dirty="0">
                         <a:latin typeface="Arial" charset="0"/>
@@ -9902,7 +9902,7 @@
                 <a:ea typeface="Arial" pitchFamily="34" charset="-122"/>
                 <a:cs typeface="Arial" pitchFamily="34" charset="-120"/>
               </a:rPr>
-              <a:t>92件（67.6%）</a:t>
+              <a:t>95件（68.3%）</a:t>
             </a:r>
             <a:endParaRPr lang="en-US" sz="1100" dirty="0"/>
           </a:p>
@@ -10000,7 +10000,7 @@
                 <a:ea typeface="Arial" pitchFamily="34" charset="-122"/>
                 <a:cs typeface="Arial" pitchFamily="34" charset="-120"/>
               </a:rPr>
-              <a:t>30件（22.1%）</a:t>
+              <a:t>30件（21.6%）</a:t>
             </a:r>
             <a:endParaRPr lang="en-US" sz="1100" dirty="0"/>
           </a:p>
@@ -10098,7 +10098,7 @@
                 <a:ea typeface="Arial" pitchFamily="34" charset="-122"/>
                 <a:cs typeface="Arial" pitchFamily="34" charset="-120"/>
               </a:rPr>
-              <a:t>14件（10.3%）</a:t>
+              <a:t>14件（10.1%）</a:t>
             </a:r>
             <a:endParaRPr lang="en-US" sz="1100" dirty="0"/>
           </a:p>
@@ -10510,7 +10510,7 @@
                 <a:ea typeface="Arial" pitchFamily="34" charset="-122"/>
                 <a:cs typeface="Arial" pitchFamily="34" charset="-120"/>
               </a:rPr>
-              <a:t>地點理想，近火車站，購物食野都好方便而且去神社都好近，實在太便利，而且酒店仲送埋早餐，實在太好了，可以再入住 立地...</a:t>
+              <a:t>立地が良く、交通の便も良く、朝食も美味しく、スイートルームも快適でした</a:t>
             </a:r>
             <a:endParaRPr lang="en-US" sz="900" dirty="0"/>
           </a:p>
@@ -10549,7 +10549,7 @@
                 <a:ea typeface="Arial" pitchFamily="34" charset="-122"/>
                 <a:cs typeface="Arial" pitchFamily="34" charset="-120"/>
               </a:rPr>
-              <a:t>「駅から近い」</a:t>
+              <a:t>「ヒーターの音は無知でした^^;洗面台の冷水絞りで水がずっと流れ落ちたのですがカウンターに届けませんでしたㅜ博多駅の...」</a:t>
             </a:r>
             <a:endParaRPr lang="en-US" sz="900" dirty="0"/>
           </a:p>
@@ -10733,7 +10733,7 @@
                 <a:ea typeface="Arial" pitchFamily="34" charset="-122"/>
                 <a:cs typeface="Arial" pitchFamily="34" charset="-120"/>
               </a:rPr>
-              <a:t>信じられないほど便利で、しかも朝食付きなのも素晴らしい</a:t>
+              <a:t>立地が良く、交通の便も良く、朝食も美味しく、スイートルームも快適でした</a:t>
             </a:r>
             <a:endParaRPr lang="en-US" sz="900" dirty="0"/>
           </a:p>
@@ -10772,7 +10772,7 @@
                 <a:ea typeface="Arial" pitchFamily="34" charset="-122"/>
                 <a:cs typeface="Arial" pitchFamily="34" charset="-120"/>
               </a:rPr>
-              <a:t>「朝食付きです」</a:t>
+              <a:t>「信じられないほど便利で、しかも朝食付きなのも素晴らしい」</a:t>
             </a:r>
             <a:endParaRPr lang="en-US" sz="900" dirty="0"/>
           </a:p>
@@ -11402,7 +11402,7 @@
                 <a:ea typeface="Arial" pitchFamily="34" charset="-122"/>
                 <a:cs typeface="Arial" pitchFamily="34" charset="-120"/>
               </a:rPr>
-              <a:t>地點極佳，交通方便，設備稍舊，乾淨舒適</a:t>
+              <a:t>立地が良く、交通の便も良く、朝食も美味しく、スイートルームも快適でした</a:t>
             </a:r>
             <a:endParaRPr lang="en-US" sz="900" dirty="0"/>
           </a:p>
@@ -11441,7 +11441,7 @@
                 <a:ea typeface="Arial" pitchFamily="34" charset="-122"/>
                 <a:cs typeface="Arial" pitchFamily="34" charset="-120"/>
               </a:rPr>
-              <a:t>「ランドリー設備、自動販売機、喫煙室、荷物預かり所（重量測定機能付き）、そして親切なスタッフ」</a:t>
+              <a:t>「地點極佳，交通方便，設備稍舊，乾淨舒適」</a:t>
             </a:r>
             <a:endParaRPr lang="en-US" sz="900" dirty="0"/>
           </a:p>
@@ -11625,7 +11625,7 @@
                 <a:ea typeface="Arial" pitchFamily="34" charset="-122"/>
                 <a:cs typeface="Arial" pitchFamily="34" charset="-120"/>
               </a:rPr>
-              <a:t>周辺で買い物してしばらく立ち寄っておくのも良く、周辺のグルメも多いです</a:t>
+              <a:t>地點吸引，係正博多站對面，購物同食野都方便 立地は魅力的で、正広駅の真向かいに位置しているため、買い物や食事に便利です</a:t>
             </a:r>
             <a:endParaRPr lang="en-US" sz="900" dirty="0"/>
           </a:p>
@@ -11664,7 +11664,7 @@
                 <a:ea typeface="Arial" pitchFamily="34" charset="-122"/>
                 <a:cs typeface="Arial" pitchFamily="34" charset="-120"/>
               </a:rPr>
-              <a:t>「駅は通りの向かい側にあるので、買い物や食事には全く問題ありません」</a:t>
+              <a:t>「周辺で買い物してしばらく立ち寄っておくのも良く、周辺のグルメも多いです」</a:t>
             </a:r>
             <a:endParaRPr lang="en-US" sz="900" dirty="0"/>
           </a:p>
@@ -13656,7 +13656,7 @@
                           <a:ea typeface="Arial" pitchFamily="34" charset="-122"/>
                           <a:cs typeface="Arial" pitchFamily="34" charset="-120"/>
                         </a:rPr>
-                        <a:t>窓・採光</a:t>
+                        <a:t>防音性能</a:t>
                       </a:r>
                       <a:endParaRPr lang="en-US" sz="900" dirty="0">
                         <a:latin typeface="Arial" charset="0"/>
@@ -13724,7 +13724,7 @@
                           <a:ea typeface="Arial" pitchFamily="34" charset="-122"/>
                           <a:cs typeface="Arial" pitchFamily="34" charset="-120"/>
                         </a:rPr>
-                        <a:t>このホテルは、窓から博多駅の景色が望める便利な立地を誇っています</a:t>
+                        <a:t>ヒーターの音は無知でした^^;洗面台の冷水絞りで水がずっと流れ落ちたのですがカウンターに届けませんでしたㅜ博多駅の...</a:t>
                       </a:r>
                       <a:endParaRPr lang="en-US" sz="900" dirty="0">
                         <a:latin typeface="Arial" charset="0"/>
@@ -13792,7 +13792,7 @@
                           <a:ea typeface="Arial" pitchFamily="34" charset="-122"/>
                           <a:cs typeface="Arial" pitchFamily="34" charset="-120"/>
                         </a:rPr>
-                        <a:t>8件</a:t>
+                        <a:t>7件</a:t>
                       </a:r>
                       <a:endParaRPr lang="en-US" sz="900" dirty="0">
                         <a:latin typeface="Arial" charset="0"/>
@@ -13930,7 +13930,7 @@
                           <a:ea typeface="Arial" pitchFamily="34" charset="-122"/>
                           <a:cs typeface="Arial" pitchFamily="34" charset="-120"/>
                         </a:rPr>
-                        <a:t>防音性能</a:t>
+                        <a:t>窓・採光</a:t>
                       </a:r>
                       <a:endParaRPr lang="en-US" sz="900" dirty="0">
                         <a:latin typeface="Arial" charset="0"/>
@@ -13998,7 +13998,7 @@
                           <a:ea typeface="Arial" pitchFamily="34" charset="-122"/>
                           <a:cs typeface="Arial" pitchFamily="34" charset="-120"/>
                         </a:rPr>
-                        <a:t>部屋の防音はひどく、隣の部屋のテレビの音や廊下で子供が叫んでいる声が時々聞こえました</a:t>
+                        <a:t>このホテルは、窓から博多駅の景色が望める便利な立地を誇っています</a:t>
                       </a:r>
                       <a:endParaRPr lang="en-US" sz="900" dirty="0">
                         <a:latin typeface="Arial" charset="0"/>
@@ -14066,7 +14066,7 @@
                           <a:ea typeface="Arial" pitchFamily="34" charset="-122"/>
                           <a:cs typeface="Arial" pitchFamily="34" charset="-120"/>
                         </a:rPr>
-                        <a:t>6件</a:t>
+                        <a:t>7件</a:t>
                       </a:r>
                       <a:endParaRPr lang="en-US" sz="900" dirty="0">
                         <a:latin typeface="Arial" charset="0"/>

--- a/納品レポート/ホテル別レポート/comfort_hakata_口コミ分析レポート.pptx
+++ b/納品レポート/ホテル別レポート/comfort_hakata_口コミ分析レポート.pptx
@@ -205,16 +205,16 @@
                 <c:formatCode>General</c:formatCode>
                 <c:ptCount val="5"/>
                 <c:pt idx="0">
-                  <c:v>9.07</c:v>
+                  <c:v>9.09</c:v>
                 </c:pt>
                 <c:pt idx="1">
                   <c:v>7.45</c:v>
                 </c:pt>
                 <c:pt idx="2">
-                  <c:v>7.13</c:v>
+                  <c:v>7.23</c:v>
                 </c:pt>
                 <c:pt idx="3">
-                  <c:v>7.11</c:v>
+                  <c:v>6.95</c:v>
                 </c:pt>
                 <c:pt idx="4">
                   <c:v>6</c:v>
@@ -566,7 +566,7 @@
                   <c:v>30</c:v>
                 </c:pt>
                 <c:pt idx="2">
-                  <c:v>14</c:v>
+                  <c:v>15</c:v>
                 </c:pt>
               </c:numCache>
             </c:numRef>
@@ -852,7 +852,7 @@
                   <c:v>8</c:v>
                 </c:pt>
                 <c:pt idx="7">
-                  <c:v>3</c:v>
+                  <c:v>4</c:v>
                 </c:pt>
                 <c:pt idx="8">
                   <c:v>2</c:v>
@@ -2809,7 +2809,7 @@
                 <a:ea typeface="Arial" pitchFamily="34" charset="-122"/>
                 <a:cs typeface="Arial" pitchFamily="34" charset="-120"/>
               </a:rPr>
-              <a:t>レビュー総数：139件（5サイト）</a:t>
+              <a:t>レビュー総数：140件（5サイト）</a:t>
             </a:r>
             <a:endParaRPr lang="en-US" sz="1000" dirty="0"/>
           </a:p>
@@ -2829,7 +2829,7 @@
                 <a:ea typeface="Arial" pitchFamily="34" charset="-122"/>
                 <a:cs typeface="Arial" pitchFamily="34" charset="-120"/>
               </a:rPr>
-              <a:t>作成日：2026年3月18日</a:t>
+              <a:t>作成日：2026年3月19日</a:t>
             </a:r>
             <a:endParaRPr lang="en-US" sz="1000" dirty="0"/>
           </a:p>
@@ -3375,7 +3375,7 @@
                           <a:ea typeface="Arial" pitchFamily="34" charset="-122"/>
                           <a:cs typeface="Arial" pitchFamily="34" charset="-120"/>
                         </a:rPr>
-                        <a:t>7.89点</a:t>
+                        <a:t>7.86点</a:t>
                       </a:r>
                       <a:endParaRPr lang="en-US" sz="1000" dirty="0">
                         <a:latin typeface="Arial" charset="0"/>
@@ -3649,7 +3649,7 @@
                           <a:ea typeface="Arial" pitchFamily="34" charset="-122"/>
                           <a:cs typeface="Arial" pitchFamily="34" charset="-120"/>
                         </a:rPr>
-                        <a:t>68.3%</a:t>
+                        <a:t>67.9%</a:t>
                       </a:r>
                       <a:endParaRPr lang="en-US" sz="1000" dirty="0">
                         <a:latin typeface="Arial" charset="0"/>
@@ -3923,7 +3923,7 @@
                           <a:ea typeface="Arial" pitchFamily="34" charset="-122"/>
                           <a:cs typeface="Arial" pitchFamily="34" charset="-120"/>
                         </a:rPr>
-                        <a:t>10.1%</a:t>
+                        <a:t>10.7%</a:t>
                       </a:r>
                       <a:endParaRPr lang="en-US" sz="1000" dirty="0">
                         <a:latin typeface="Arial" charset="0"/>
@@ -3991,7 +3991,7 @@
                           <a:ea typeface="Arial" pitchFamily="34" charset="-122"/>
                           <a:cs typeface="Arial" pitchFamily="34" charset="-120"/>
                         </a:rPr>
-                        <a:t>5%以下</a:t>
+                        <a:t>6%以下</a:t>
                       </a:r>
                       <a:endParaRPr lang="en-US" sz="1000" dirty="0">
                         <a:latin typeface="Arial" charset="0"/>
@@ -4745,7 +4745,7 @@
                           <a:ea typeface="Arial" pitchFamily="34" charset="-122"/>
                           <a:cs typeface="Arial" pitchFamily="34" charset="-120"/>
                         </a:rPr>
-                        <a:t>約20件/期間</a:t>
+                        <a:t>約18件/期間</a:t>
                       </a:r>
                       <a:endParaRPr lang="en-US" sz="1000" dirty="0">
                         <a:latin typeface="Arial" charset="0"/>
@@ -4813,7 +4813,7 @@
                           <a:ea typeface="Arial" pitchFamily="34" charset="-122"/>
                           <a:cs typeface="Arial" pitchFamily="34" charset="-120"/>
                         </a:rPr>
-                        <a:t>10件以下</a:t>
+                        <a:t>9件以下</a:t>
                       </a:r>
                       <a:endParaRPr lang="en-US" sz="1000" dirty="0">
                         <a:latin typeface="Arial" charset="0"/>
@@ -5384,7 +5384,7 @@
                 <a:ea typeface="Arial" pitchFamily="34" charset="-122"/>
                 <a:cs typeface="Arial" pitchFamily="34" charset="-120"/>
               </a:rPr>
-              <a:t>7.89</a:t>
+              <a:t>7.86</a:t>
             </a:r>
             <a:endParaRPr lang="en-US" sz="3200" dirty="0"/>
           </a:p>
@@ -5509,7 +5509,7 @@
                 <a:ea typeface="Arial" pitchFamily="34" charset="-122"/>
                 <a:cs typeface="Arial" pitchFamily="34" charset="-120"/>
               </a:rPr>
-              <a:t>68.3%</a:t>
+              <a:t>67.9%</a:t>
             </a:r>
             <a:endParaRPr lang="en-US" sz="3200" dirty="0"/>
           </a:p>
@@ -5634,7 +5634,7 @@
                 <a:ea typeface="Arial" pitchFamily="34" charset="-122"/>
                 <a:cs typeface="Arial" pitchFamily="34" charset="-120"/>
               </a:rPr>
-              <a:t>10.1%</a:t>
+              <a:t>10.7%</a:t>
             </a:r>
             <a:endParaRPr lang="en-US" sz="3200" dirty="0"/>
           </a:p>
@@ -5759,7 +5759,7 @@
                 <a:ea typeface="Arial" pitchFamily="34" charset="-122"/>
                 <a:cs typeface="Arial" pitchFamily="34" charset="-120"/>
               </a:rPr>
-              <a:t>139件</a:t>
+              <a:t>140件</a:t>
             </a:r>
             <a:endParaRPr lang="en-US" sz="3200" dirty="0"/>
           </a:p>
@@ -5907,7 +5907,7 @@
                 <a:ea typeface="Arial" pitchFamily="34" charset="-122"/>
                 <a:cs typeface="Arial" pitchFamily="34" charset="-120"/>
               </a:rPr>
-              <a:t>  立地が良く、交通の便も良く、朝食も美味しく、スイートルームも快適でした</a:t>
+              <a:t>  旅行の手配、清潔さ、立地、そして毎日の朝食まで、すべてが素晴らしかったです</a:t>
             </a:r>
             <a:endParaRPr lang="en-US" sz="1100" dirty="0"/>
           </a:p>
@@ -5947,7 +5947,7 @@
                 <a:ea typeface="Arial" pitchFamily="34" charset="-122"/>
                 <a:cs typeface="Arial" pitchFamily="34" charset="-120"/>
               </a:rPr>
-              <a:t>  立地が良く、交通の便も良く、朝食も美味しく、スイートルームも快適でした</a:t>
+              <a:t>  旅行の手配、清潔さ、立地、そして毎日の朝食まで、すべてが素晴らしかったです</a:t>
             </a:r>
             <a:endParaRPr lang="en-US" sz="1100" dirty="0"/>
           </a:p>
@@ -5987,7 +5987,7 @@
                 <a:ea typeface="Arial" pitchFamily="34" charset="-122"/>
                 <a:cs typeface="Arial" pitchFamily="34" charset="-120"/>
               </a:rPr>
-              <a:t>  ランドリー設備、自動販売機、喫煙室、荷物預かり所（重量測定機能付き）、そして親切なスタッフ</a:t>
+              <a:t>  早い時間に到着して、デスクスタッフの方が親切にキャリア保管などご案内いただきありがとうございました</a:t>
             </a:r>
             <a:endParaRPr lang="en-US" sz="1100" dirty="0"/>
           </a:p>
@@ -6175,7 +6175,7 @@
                 <a:ea typeface="Arial" pitchFamily="34" charset="-122"/>
                 <a:cs typeface="Arial" pitchFamily="34" charset="-120"/>
               </a:rPr>
-              <a:t>  Lobby check-in &amp; check-out machines very convenient for t...</a:t>
+              <a:t>  風呂、トイレが少し汚く、生乾きの匂いがするのが残念 又、手元のライトが壊れててつかなかった</a:t>
             </a:r>
             <a:endParaRPr lang="en-US" sz="1100" dirty="0"/>
           </a:p>
@@ -6568,7 +6568,7 @@
                 <a:ea typeface="Arial" pitchFamily="34" charset="-122"/>
                 <a:cs typeface="Arial" pitchFamily="34" charset="-120"/>
               </a:rPr>
-              <a:t>7.89</a:t>
+              <a:t>7.86</a:t>
             </a:r>
             <a:endParaRPr lang="en-US" sz="3200" dirty="0"/>
           </a:p>
@@ -6693,7 +6693,7 @@
                 <a:ea typeface="Arial" pitchFamily="34" charset="-122"/>
                 <a:cs typeface="Arial" pitchFamily="34" charset="-120"/>
               </a:rPr>
-              <a:t>68.3%</a:t>
+              <a:t>67.9%</a:t>
             </a:r>
             <a:endParaRPr lang="en-US" sz="3200" dirty="0"/>
           </a:p>
@@ -6818,7 +6818,7 @@
                 <a:ea typeface="Arial" pitchFamily="34" charset="-122"/>
                 <a:cs typeface="Arial" pitchFamily="34" charset="-120"/>
               </a:rPr>
-              <a:t>10.1%</a:t>
+              <a:t>10.7%</a:t>
             </a:r>
             <a:endParaRPr lang="en-US" sz="3200" dirty="0"/>
           </a:p>
@@ -6943,7 +6943,7 @@
                 <a:ea typeface="Arial" pitchFamily="34" charset="-122"/>
                 <a:cs typeface="Arial" pitchFamily="34" charset="-120"/>
               </a:rPr>
-              <a:t>139件</a:t>
+              <a:t>140件</a:t>
             </a:r>
             <a:endParaRPr lang="en-US" sz="3200" dirty="0"/>
           </a:p>
@@ -7364,7 +7364,7 @@
                 <a:ea typeface="Arial" pitchFamily="34" charset="-122"/>
                 <a:cs typeface="Arial" pitchFamily="34" charset="-120"/>
               </a:rPr>
-              <a:t>Trip.com(9.07)が最高スコア。</a:t>
+              <a:t>Trip.com(9.09)が最高スコア。</a:t>
             </a:r>
             <a:endParaRPr lang="en-US" sz="1100" dirty="0"/>
           </a:p>
@@ -7922,7 +7922,7 @@
                           <a:ea typeface="Arial" pitchFamily="34" charset="-122"/>
                           <a:cs typeface="Arial" pitchFamily="34" charset="-120"/>
                         </a:rPr>
-                        <a:t>56</a:t>
+                        <a:t>55</a:t>
                       </a:r>
                       <a:endParaRPr lang="en-US" sz="900" dirty="0">
                         <a:latin typeface="Arial" charset="0"/>
@@ -7990,7 +7990,7 @@
                           <a:ea typeface="Arial" pitchFamily="34" charset="-122"/>
                           <a:cs typeface="Arial" pitchFamily="34" charset="-120"/>
                         </a:rPr>
-                        <a:t>9.07</a:t>
+                        <a:t>9.09</a:t>
                       </a:r>
                       <a:endParaRPr lang="en-US" sz="900" dirty="0">
                         <a:latin typeface="Arial" charset="0"/>
@@ -8126,7 +8126,7 @@
                           <a:ea typeface="Arial" pitchFamily="34" charset="-122"/>
                           <a:cs typeface="Arial" pitchFamily="34" charset="-120"/>
                         </a:rPr>
-                        <a:t>9.07</a:t>
+                        <a:t>9.09</a:t>
                       </a:r>
                       <a:endParaRPr lang="en-US" sz="900" dirty="0">
                         <a:latin typeface="Arial" charset="0"/>
@@ -8606,7 +8606,7 @@
                           <a:ea typeface="Arial" pitchFamily="34" charset="-122"/>
                           <a:cs typeface="Arial" pitchFamily="34" charset="-120"/>
                         </a:rPr>
-                        <a:t>30</a:t>
+                        <a:t>31</a:t>
                       </a:r>
                       <a:endParaRPr lang="en-US" sz="900" dirty="0">
                         <a:latin typeface="Arial" charset="0"/>
@@ -8674,7 +8674,7 @@
                           <a:ea typeface="Arial" pitchFamily="34" charset="-122"/>
                           <a:cs typeface="Arial" pitchFamily="34" charset="-120"/>
                         </a:rPr>
-                        <a:t>3.57</a:t>
+                        <a:t>3.61</a:t>
                       </a:r>
                       <a:endParaRPr lang="en-US" sz="900" dirty="0">
                         <a:latin typeface="Arial" charset="0"/>
@@ -8810,7 +8810,7 @@
                           <a:ea typeface="Arial" pitchFamily="34" charset="-122"/>
                           <a:cs typeface="Arial" pitchFamily="34" charset="-120"/>
                         </a:rPr>
-                        <a:t>7.13</a:t>
+                        <a:t>7.23</a:t>
                       </a:r>
                       <a:endParaRPr lang="en-US" sz="900" dirty="0">
                         <a:latin typeface="Arial" charset="0"/>
@@ -8948,7 +8948,7 @@
                           <a:ea typeface="Arial" pitchFamily="34" charset="-122"/>
                           <a:cs typeface="Arial" pitchFamily="34" charset="-120"/>
                         </a:rPr>
-                        <a:t>37</a:t>
+                        <a:t>38</a:t>
                       </a:r>
                       <a:endParaRPr lang="en-US" sz="900" dirty="0">
                         <a:latin typeface="Arial" charset="0"/>
@@ -9016,7 +9016,7 @@
                           <a:ea typeface="Arial" pitchFamily="34" charset="-122"/>
                           <a:cs typeface="Arial" pitchFamily="34" charset="-120"/>
                         </a:rPr>
-                        <a:t>7.11</a:t>
+                        <a:t>6.95</a:t>
                       </a:r>
                       <a:endParaRPr lang="en-US" sz="900" dirty="0">
                         <a:latin typeface="Arial" charset="0"/>
@@ -9152,7 +9152,7 @@
                           <a:ea typeface="Arial" pitchFamily="34" charset="-122"/>
                           <a:cs typeface="Arial" pitchFamily="34" charset="-120"/>
                         </a:rPr>
-                        <a:t>7.11</a:t>
+                        <a:t>6.95</a:t>
                       </a:r>
                       <a:endParaRPr lang="en-US" sz="900" dirty="0">
                         <a:latin typeface="Arial" charset="0"/>
@@ -9902,7 +9902,7 @@
                 <a:ea typeface="Arial" pitchFamily="34" charset="-122"/>
                 <a:cs typeface="Arial" pitchFamily="34" charset="-120"/>
               </a:rPr>
-              <a:t>95件（68.3%）</a:t>
+              <a:t>95件（67.9%）</a:t>
             </a:r>
             <a:endParaRPr lang="en-US" sz="1100" dirty="0"/>
           </a:p>
@@ -10000,7 +10000,7 @@
                 <a:ea typeface="Arial" pitchFamily="34" charset="-122"/>
                 <a:cs typeface="Arial" pitchFamily="34" charset="-120"/>
               </a:rPr>
-              <a:t>30件（21.6%）</a:t>
+              <a:t>30件（21.4%）</a:t>
             </a:r>
             <a:endParaRPr lang="en-US" sz="1100" dirty="0"/>
           </a:p>
@@ -10098,7 +10098,7 @@
                 <a:ea typeface="Arial" pitchFamily="34" charset="-122"/>
                 <a:cs typeface="Arial" pitchFamily="34" charset="-120"/>
               </a:rPr>
-              <a:t>14件（10.1%）</a:t>
+              <a:t>15件（10.7%）</a:t>
             </a:r>
             <a:endParaRPr lang="en-US" sz="1100" dirty="0"/>
           </a:p>
@@ -10510,7 +10510,7 @@
                 <a:ea typeface="Arial" pitchFamily="34" charset="-122"/>
                 <a:cs typeface="Arial" pitchFamily="34" charset="-120"/>
               </a:rPr>
-              <a:t>立地が良く、交通の便も良く、朝食も美味しく、スイートルームも快適でした</a:t>
+              <a:t>旅行の手配、清潔さ、立地、そして毎日の朝食まで、すべてが素晴らしかったです</a:t>
             </a:r>
             <a:endParaRPr lang="en-US" sz="900" dirty="0"/>
           </a:p>
@@ -10549,7 +10549,7 @@
                 <a:ea typeface="Arial" pitchFamily="34" charset="-122"/>
                 <a:cs typeface="Arial" pitchFamily="34" charset="-120"/>
               </a:rPr>
-              <a:t>「ヒーターの音は無知でした^^;洗面台の冷水絞りで水がずっと流れ落ちたのですがカウンターに届けませんでしたㅜ博多駅の...」</a:t>
+              <a:t>「立地が良く、交通の便も良く、朝食も美味しく、スイートルームも快適でした」</a:t>
             </a:r>
             <a:endParaRPr lang="en-US" sz="900" dirty="0"/>
           </a:p>
@@ -10733,7 +10733,7 @@
                 <a:ea typeface="Arial" pitchFamily="34" charset="-122"/>
                 <a:cs typeface="Arial" pitchFamily="34" charset="-120"/>
               </a:rPr>
-              <a:t>立地が良く、交通の便も良く、朝食も美味しく、スイートルームも快適でした</a:t>
+              <a:t>旅行の手配、清潔さ、立地、そして毎日の朝食まで、すべてが素晴らしかったです</a:t>
             </a:r>
             <a:endParaRPr lang="en-US" sz="900" dirty="0"/>
           </a:p>
@@ -10772,7 +10772,7 @@
                 <a:ea typeface="Arial" pitchFamily="34" charset="-122"/>
                 <a:cs typeface="Arial" pitchFamily="34" charset="-120"/>
               </a:rPr>
-              <a:t>「信じられないほど便利で、しかも朝食付きなのも素晴らしい」</a:t>
+              <a:t>「朝ごはんの種類が多くて美味しい」</a:t>
             </a:r>
             <a:endParaRPr lang="en-US" sz="900" dirty="0"/>
           </a:p>
@@ -10956,7 +10956,7 @@
                 <a:ea typeface="Arial" pitchFamily="34" charset="-122"/>
                 <a:cs typeface="Arial" pitchFamily="34" charset="-120"/>
               </a:rPr>
-              <a:t>ランドリー設備、自動販売機、喫煙室、荷物預かり所（重量測定機能付き）、そして親切なスタッフ</a:t>
+              <a:t>早い時間に到着して、デスクスタッフの方が親切にキャリア保管などご案内いただきありがとうございました</a:t>
             </a:r>
             <a:endParaRPr lang="en-US" sz="900" dirty="0"/>
           </a:p>
@@ -10995,7 +10995,7 @@
                 <a:ea typeface="Arial" pitchFamily="34" charset="-122"/>
                 <a:cs typeface="Arial" pitchFamily="34" charset="-120"/>
               </a:rPr>
-              <a:t>「博多駅前でとても便利な立地  部屋もキレイで3人ベットでも全く狭さも感じることもなく  大きなお風呂に旅の疲れもと...」</a:t>
+              <a:t>「ランドリー設備、自動販売機、喫煙室、荷物預かり所（重量測定機能付き）、そして親切なスタッフ」</a:t>
             </a:r>
             <a:endParaRPr lang="en-US" sz="900" dirty="0"/>
           </a:p>
@@ -11179,7 +11179,7 @@
                 <a:ea typeface="Arial" pitchFamily="34" charset="-122"/>
                 <a:cs typeface="Arial" pitchFamily="34" charset="-120"/>
               </a:rPr>
-              <a:t>博多駅前でとても便利な立地  部屋もキレイで3人ベットでも全く狭さも感じることもなく  大きなお風呂に旅の疲れもと...</a:t>
+              <a:t>旅行の手配、清潔さ、立地、そして毎日の朝食まで、すべてが素晴らしかったです</a:t>
             </a:r>
             <a:endParaRPr lang="en-US" sz="900" dirty="0"/>
           </a:p>
@@ -11218,7 +11218,7 @@
                 <a:ea typeface="Arial" pitchFamily="34" charset="-122"/>
                 <a:cs typeface="Arial" pitchFamily="34" charset="-120"/>
               </a:rPr>
-              <a:t>「部屋は新しくはありませんでしたが、広々としていて清潔でした」</a:t>
+              <a:t>「部屋はとても綺麗」</a:t>
             </a:r>
             <a:endParaRPr lang="en-US" sz="900" dirty="0"/>
           </a:p>
@@ -11402,7 +11402,7 @@
                 <a:ea typeface="Arial" pitchFamily="34" charset="-122"/>
                 <a:cs typeface="Arial" pitchFamily="34" charset="-120"/>
               </a:rPr>
-              <a:t>立地が良く、交通の便も良く、朝食も美味しく、スイートルームも快適でした</a:t>
+              <a:t>足と臀部のマッサージ機能があり、とても快適です</a:t>
             </a:r>
             <a:endParaRPr lang="en-US" sz="900" dirty="0"/>
           </a:p>
@@ -11441,7 +11441,7 @@
                 <a:ea typeface="Arial" pitchFamily="34" charset="-122"/>
                 <a:cs typeface="Arial" pitchFamily="34" charset="-120"/>
               </a:rPr>
-              <a:t>「地點極佳，交通方便，設備稍舊，乾淨舒適」</a:t>
+              <a:t>「立地が良く、交通の便も良く、朝食も美味しく、スイートルームも快適でした」</a:t>
             </a:r>
             <a:endParaRPr lang="en-US" sz="900" dirty="0"/>
           </a:p>
@@ -12422,7 +12422,7 @@
                           <a:ea typeface="Arial" pitchFamily="34" charset="-122"/>
                           <a:cs typeface="Arial" pitchFamily="34" charset="-120"/>
                         </a:rPr>
-                        <a:t>20件</a:t>
+                        <a:t>18件</a:t>
                       </a:r>
                       <a:endParaRPr lang="en-US" sz="900" dirty="0">
                         <a:latin typeface="Arial" charset="0"/>
@@ -12628,7 +12628,7 @@
                           <a:ea typeface="Arial" pitchFamily="34" charset="-122"/>
                           <a:cs typeface="Arial" pitchFamily="34" charset="-120"/>
                         </a:rPr>
-                        <a:t>Lobby check-in &amp; check-out machines very convenient for t...</a:t>
+                        <a:t>風呂、トイレが少し汚く、生乾きの匂いがするのが残念 又、手元のライトが壊れててつかなかった</a:t>
                       </a:r>
                       <a:endParaRPr lang="en-US" sz="900" dirty="0">
                         <a:latin typeface="Arial" charset="0"/>
@@ -12696,7 +12696,7 @@
                           <a:ea typeface="Arial" pitchFamily="34" charset="-122"/>
                           <a:cs typeface="Arial" pitchFamily="34" charset="-120"/>
                         </a:rPr>
-                        <a:t>19件</a:t>
+                        <a:t>18件</a:t>
                       </a:r>
                       <a:endParaRPr lang="en-US" sz="900" dirty="0">
                         <a:latin typeface="Arial" charset="0"/>
@@ -13176,7 +13176,7 @@
                           <a:ea typeface="Arial" pitchFamily="34" charset="-122"/>
                           <a:cs typeface="Arial" pitchFamily="34" charset="-120"/>
                         </a:rPr>
-                        <a:t>確かに経年による老朽感は否めませんが、掃除も行き届いていて設備も丁寧に使われてて、不快な感じは全くありませんでした...</a:t>
+                        <a:t>風呂、トイレが少し汚く、生乾きの匂いがするのが残念 又、手元のライトが壊れててつかなかった</a:t>
                       </a:r>
                       <a:endParaRPr lang="en-US" sz="900" dirty="0">
                         <a:latin typeface="Arial" charset="0"/>
@@ -13244,7 +13244,7 @@
                           <a:ea typeface="Arial" pitchFamily="34" charset="-122"/>
                           <a:cs typeface="Arial" pitchFamily="34" charset="-120"/>
                         </a:rPr>
-                        <a:t>9件</a:t>
+                        <a:t>10件</a:t>
                       </a:r>
                       <a:endParaRPr lang="en-US" sz="900" dirty="0">
                         <a:latin typeface="Arial" charset="0"/>
@@ -13930,7 +13930,7 @@
                           <a:ea typeface="Arial" pitchFamily="34" charset="-122"/>
                           <a:cs typeface="Arial" pitchFamily="34" charset="-120"/>
                         </a:rPr>
-                        <a:t>窓・採光</a:t>
+                        <a:t>臭い・匂い</a:t>
                       </a:r>
                       <a:endParaRPr lang="en-US" sz="900" dirty="0">
                         <a:latin typeface="Arial" charset="0"/>
@@ -13998,7 +13998,7 @@
                           <a:ea typeface="Arial" pitchFamily="34" charset="-122"/>
                           <a:cs typeface="Arial" pitchFamily="34" charset="-120"/>
                         </a:rPr>
-                        <a:t>このホテルは、窓から博多駅の景色が望める便利な立地を誇っています</a:t>
+                        <a:t>風呂、トイレが少し汚く、生乾きの匂いがするのが残念 又、手元のライトが壊れててつかなかった</a:t>
                       </a:r>
                       <a:endParaRPr lang="en-US" sz="900" dirty="0">
                         <a:latin typeface="Arial" charset="0"/>
@@ -14204,7 +14204,7 @@
                           <a:ea typeface="Arial" pitchFamily="34" charset="-122"/>
                           <a:cs typeface="Arial" pitchFamily="34" charset="-120"/>
                         </a:rPr>
-                        <a:t>臭い・匂い</a:t>
+                        <a:t>窓・採光</a:t>
                       </a:r>
                       <a:endParaRPr lang="en-US" sz="900" dirty="0">
                         <a:latin typeface="Arial" charset="0"/>
@@ -14272,7 +14272,7 @@
                           <a:ea typeface="Arial" pitchFamily="34" charset="-122"/>
                           <a:cs typeface="Arial" pitchFamily="34" charset="-120"/>
                         </a:rPr>
-                        <a:t>2つ目は全室禁煙と表示されていたのですが、廊下を歩いていると明らかにタバコの臭いが…  スタッフの方に伝えましたが...</a:t>
+                        <a:t>このホテルは、窓から博多駅の景色が望める便利な立地を誇っています</a:t>
                       </a:r>
                       <a:endParaRPr lang="en-US" sz="900" dirty="0">
                         <a:latin typeface="Arial" charset="0"/>
@@ -14340,7 +14340,7 @@
                           <a:ea typeface="Arial" pitchFamily="34" charset="-122"/>
                           <a:cs typeface="Arial" pitchFamily="34" charset="-120"/>
                         </a:rPr>
-                        <a:t>6件</a:t>
+                        <a:t>7件</a:t>
                       </a:r>
                       <a:endParaRPr lang="en-US" sz="900" dirty="0">
                         <a:latin typeface="Arial" charset="0"/>
@@ -14546,7 +14546,7 @@
                           <a:ea typeface="Arial" pitchFamily="34" charset="-122"/>
                           <a:cs typeface="Arial" pitchFamily="34" charset="-120"/>
                         </a:rPr>
-                        <a:t>残念 トイレが全体的に悪い</a:t>
+                        <a:t>風呂、トイレが少し汚く、生乾きの匂いがするのが残念 又、手元のライトが壊れててつかなかった</a:t>
                       </a:r>
                       <a:endParaRPr lang="en-US" sz="900" dirty="0">
                         <a:latin typeface="Arial" charset="0"/>

--- a/納品レポート/ホテル別レポート/comfort_hakata_口コミ分析レポート.pptx
+++ b/納品レポート/ホテル別レポート/comfort_hakata_口コミ分析レポート.pptx
@@ -205,16 +205,16 @@
                 <c:formatCode>General</c:formatCode>
                 <c:ptCount val="5"/>
                 <c:pt idx="0">
-                  <c:v>9.09</c:v>
+                  <c:v>9.13</c:v>
                 </c:pt>
                 <c:pt idx="1">
-                  <c:v>7.45</c:v>
+                  <c:v>7.27</c:v>
                 </c:pt>
                 <c:pt idx="2">
-                  <c:v>7.23</c:v>
+                  <c:v>7.15</c:v>
                 </c:pt>
                 <c:pt idx="3">
-                  <c:v>6.95</c:v>
+                  <c:v>6.89</c:v>
                 </c:pt>
                 <c:pt idx="4">
                   <c:v>6</c:v>
@@ -560,13 +560,13 @@
               <c:numCache>
                 <c:ptCount val="3"/>
                 <c:pt idx="0">
-                  <c:v>95</c:v>
+                  <c:v>94</c:v>
                 </c:pt>
                 <c:pt idx="1">
                   <c:v>30</c:v>
                 </c:pt>
                 <c:pt idx="2">
-                  <c:v>15</c:v>
+                  <c:v>16</c:v>
                 </c:pt>
               </c:numCache>
             </c:numRef>
@@ -831,22 +831,22 @@
                 <c:formatCode>General</c:formatCode>
                 <c:ptCount val="10"/>
                 <c:pt idx="0">
-                  <c:v>45</c:v>
+                  <c:v>44</c:v>
                 </c:pt>
                 <c:pt idx="1">
-                  <c:v>15</c:v>
+                  <c:v>14</c:v>
                 </c:pt>
                 <c:pt idx="2">
-                  <c:v>35</c:v>
+                  <c:v>36</c:v>
                 </c:pt>
                 <c:pt idx="3">
                   <c:v>8</c:v>
                 </c:pt>
                 <c:pt idx="4">
-                  <c:v>20</c:v>
+                  <c:v>21</c:v>
                 </c:pt>
                 <c:pt idx="5">
-                  <c:v>2</c:v>
+                  <c:v>1</c:v>
                 </c:pt>
                 <c:pt idx="6">
                   <c:v>8</c:v>
@@ -855,7 +855,7 @@
                   <c:v>4</c:v>
                 </c:pt>
                 <c:pt idx="8">
-                  <c:v>2</c:v>
+                  <c:v>3</c:v>
                 </c:pt>
                 <c:pt idx="9">
                   <c:v>1</c:v>
@@ -2829,7 +2829,7 @@
                 <a:ea typeface="Arial" pitchFamily="34" charset="-122"/>
                 <a:cs typeface="Arial" pitchFamily="34" charset="-120"/>
               </a:rPr>
-              <a:t>作成日：2026年3月19日</a:t>
+              <a:t>作成日：2026年3月20日</a:t>
             </a:r>
             <a:endParaRPr lang="en-US" sz="1000" dirty="0"/>
           </a:p>
@@ -3375,7 +3375,7 @@
                           <a:ea typeface="Arial" pitchFamily="34" charset="-122"/>
                           <a:cs typeface="Arial" pitchFamily="34" charset="-120"/>
                         </a:rPr>
-                        <a:t>7.86点</a:t>
+                        <a:t>7.80点</a:t>
                       </a:r>
                       <a:endParaRPr lang="en-US" sz="1000" dirty="0">
                         <a:latin typeface="Arial" charset="0"/>
@@ -3443,7 +3443,7 @@
                           <a:ea typeface="Arial" pitchFamily="34" charset="-122"/>
                           <a:cs typeface="Arial" pitchFamily="34" charset="-120"/>
                         </a:rPr>
-                        <a:t>8.4点以上</a:t>
+                        <a:t>8.3点以上</a:t>
                       </a:r>
                       <a:endParaRPr lang="en-US" sz="1000" dirty="0">
                         <a:latin typeface="Arial" charset="0"/>
@@ -3649,7 +3649,7 @@
                           <a:ea typeface="Arial" pitchFamily="34" charset="-122"/>
                           <a:cs typeface="Arial" pitchFamily="34" charset="-120"/>
                         </a:rPr>
-                        <a:t>67.9%</a:t>
+                        <a:t>67.1%</a:t>
                       </a:r>
                       <a:endParaRPr lang="en-US" sz="1000" dirty="0">
                         <a:latin typeface="Arial" charset="0"/>
@@ -3717,7 +3717,7 @@
                           <a:ea typeface="Arial" pitchFamily="34" charset="-122"/>
                           <a:cs typeface="Arial" pitchFamily="34" charset="-120"/>
                         </a:rPr>
-                        <a:t>78%以上</a:t>
+                        <a:t>77%以上</a:t>
                       </a:r>
                       <a:endParaRPr lang="en-US" sz="1000" dirty="0">
                         <a:latin typeface="Arial" charset="0"/>
@@ -3923,7 +3923,7 @@
                           <a:ea typeface="Arial" pitchFamily="34" charset="-122"/>
                           <a:cs typeface="Arial" pitchFamily="34" charset="-120"/>
                         </a:rPr>
-                        <a:t>10.7%</a:t>
+                        <a:t>11.4%</a:t>
                       </a:r>
                       <a:endParaRPr lang="en-US" sz="1000" dirty="0">
                         <a:latin typeface="Arial" charset="0"/>
@@ -4745,7 +4745,7 @@
                           <a:ea typeface="Arial" pitchFamily="34" charset="-122"/>
                           <a:cs typeface="Arial" pitchFamily="34" charset="-120"/>
                         </a:rPr>
-                        <a:t>約18件/期間</a:t>
+                        <a:t>約20件/期間</a:t>
                       </a:r>
                       <a:endParaRPr lang="en-US" sz="1000" dirty="0">
                         <a:latin typeface="Arial" charset="0"/>
@@ -4813,7 +4813,7 @@
                           <a:ea typeface="Arial" pitchFamily="34" charset="-122"/>
                           <a:cs typeface="Arial" pitchFamily="34" charset="-120"/>
                         </a:rPr>
-                        <a:t>9件以下</a:t>
+                        <a:t>10件以下</a:t>
                       </a:r>
                       <a:endParaRPr lang="en-US" sz="1000" dirty="0">
                         <a:latin typeface="Arial" charset="0"/>
@@ -5384,7 +5384,7 @@
                 <a:ea typeface="Arial" pitchFamily="34" charset="-122"/>
                 <a:cs typeface="Arial" pitchFamily="34" charset="-120"/>
               </a:rPr>
-              <a:t>7.86</a:t>
+              <a:t>7.80</a:t>
             </a:r>
             <a:endParaRPr lang="en-US" sz="3200" dirty="0"/>
           </a:p>
@@ -5509,7 +5509,7 @@
                 <a:ea typeface="Arial" pitchFamily="34" charset="-122"/>
                 <a:cs typeface="Arial" pitchFamily="34" charset="-120"/>
               </a:rPr>
-              <a:t>67.9%</a:t>
+              <a:t>67.1%</a:t>
             </a:r>
             <a:endParaRPr lang="en-US" sz="3200" dirty="0"/>
           </a:p>
@@ -5634,7 +5634,7 @@
                 <a:ea typeface="Arial" pitchFamily="34" charset="-122"/>
                 <a:cs typeface="Arial" pitchFamily="34" charset="-120"/>
               </a:rPr>
-              <a:t>10.7%</a:t>
+              <a:t>11.4%</a:t>
             </a:r>
             <a:endParaRPr lang="en-US" sz="3200" dirty="0"/>
           </a:p>
@@ -5907,7 +5907,7 @@
                 <a:ea typeface="Arial" pitchFamily="34" charset="-122"/>
                 <a:cs typeface="Arial" pitchFamily="34" charset="-120"/>
               </a:rPr>
-              <a:t>  旅行の手配、清潔さ、立地、そして毎日の朝食まで、すべてが素晴らしかったです</a:t>
+              <a:t>  博多駅前の立地が最高で、とても便利です</a:t>
             </a:r>
             <a:endParaRPr lang="en-US" sz="1100" dirty="0"/>
           </a:p>
@@ -5947,7 +5947,7 @@
                 <a:ea typeface="Arial" pitchFamily="34" charset="-122"/>
                 <a:cs typeface="Arial" pitchFamily="34" charset="-120"/>
               </a:rPr>
-              <a:t>  旅行の手配、清潔さ、立地、そして毎日の朝食まで、すべてが素晴らしかったです</a:t>
+              <a:t>  朝食はほぼ毎日同じです</a:t>
             </a:r>
             <a:endParaRPr lang="en-US" sz="1100" dirty="0"/>
           </a:p>
@@ -6135,7 +6135,7 @@
                 <a:ea typeface="Arial" pitchFamily="34" charset="-122"/>
                 <a:cs typeface="Arial" pitchFamily="34" charset="-120"/>
               </a:rPr>
-              <a:t>  Lobby check-in &amp; check-out machines very convenient for t...</a:t>
+              <a:t>  部屋の中、特にユニットバスが古い造りで、洗面所の蛇口が2口式なのが残念ですが、それ以外は快適でした</a:t>
             </a:r>
             <a:endParaRPr lang="en-US" sz="1100" dirty="0"/>
           </a:p>
@@ -6175,7 +6175,7 @@
                 <a:ea typeface="Arial" pitchFamily="34" charset="-122"/>
                 <a:cs typeface="Arial" pitchFamily="34" charset="-120"/>
               </a:rPr>
-              <a:t>  風呂、トイレが少し汚く、生乾きの匂いがするのが残念 又、手元のライトが壊れててつかなかった</a:t>
+              <a:t>  部屋の中、特にユニットバスが古い造りで、洗面所の蛇口が2口式なのが残念ですが、それ以外は快適でした</a:t>
             </a:r>
             <a:endParaRPr lang="en-US" sz="1100" dirty="0"/>
           </a:p>
@@ -6215,7 +6215,7 @@
                 <a:ea typeface="Arial" pitchFamily="34" charset="-122"/>
                 <a:cs typeface="Arial" pitchFamily="34" charset="-120"/>
               </a:rPr>
-              <a:t>  Lobby check-in &amp; check-out machines very convenient for t...</a:t>
+              <a:t>  Bien qu'en face de la gare, très bonne insonorisation de ...</a:t>
             </a:r>
             <a:endParaRPr lang="en-US" sz="1100" dirty="0"/>
           </a:p>
@@ -6568,7 +6568,7 @@
                 <a:ea typeface="Arial" pitchFamily="34" charset="-122"/>
                 <a:cs typeface="Arial" pitchFamily="34" charset="-120"/>
               </a:rPr>
-              <a:t>7.86</a:t>
+              <a:t>7.80</a:t>
             </a:r>
             <a:endParaRPr lang="en-US" sz="3200" dirty="0"/>
           </a:p>
@@ -6693,7 +6693,7 @@
                 <a:ea typeface="Arial" pitchFamily="34" charset="-122"/>
                 <a:cs typeface="Arial" pitchFamily="34" charset="-120"/>
               </a:rPr>
-              <a:t>67.9%</a:t>
+              <a:t>67.1%</a:t>
             </a:r>
             <a:endParaRPr lang="en-US" sz="3200" dirty="0"/>
           </a:p>
@@ -6818,7 +6818,7 @@
                 <a:ea typeface="Arial" pitchFamily="34" charset="-122"/>
                 <a:cs typeface="Arial" pitchFamily="34" charset="-120"/>
               </a:rPr>
-              <a:t>10.7%</a:t>
+              <a:t>11.4%</a:t>
             </a:r>
             <a:endParaRPr lang="en-US" sz="3200" dirty="0"/>
           </a:p>
@@ -7364,7 +7364,7 @@
                 <a:ea typeface="Arial" pitchFamily="34" charset="-122"/>
                 <a:cs typeface="Arial" pitchFamily="34" charset="-120"/>
               </a:rPr>
-              <a:t>Trip.com(9.09)が最高スコア。</a:t>
+              <a:t>Trip.com(9.13)が最高スコア。</a:t>
             </a:r>
             <a:endParaRPr lang="en-US" sz="1100" dirty="0"/>
           </a:p>
@@ -7922,7 +7922,7 @@
                           <a:ea typeface="Arial" pitchFamily="34" charset="-122"/>
                           <a:cs typeface="Arial" pitchFamily="34" charset="-120"/>
                         </a:rPr>
-                        <a:t>55</a:t>
+                        <a:t>53</a:t>
                       </a:r>
                       <a:endParaRPr lang="en-US" sz="900" dirty="0">
                         <a:latin typeface="Arial" charset="0"/>
@@ -7990,7 +7990,7 @@
                           <a:ea typeface="Arial" pitchFamily="34" charset="-122"/>
                           <a:cs typeface="Arial" pitchFamily="34" charset="-120"/>
                         </a:rPr>
-                        <a:t>9.09</a:t>
+                        <a:t>9.13</a:t>
                       </a:r>
                       <a:endParaRPr lang="en-US" sz="900" dirty="0">
                         <a:latin typeface="Arial" charset="0"/>
@@ -8126,7 +8126,7 @@
                           <a:ea typeface="Arial" pitchFamily="34" charset="-122"/>
                           <a:cs typeface="Arial" pitchFamily="34" charset="-120"/>
                         </a:rPr>
-                        <a:t>9.09</a:t>
+                        <a:t>9.13</a:t>
                       </a:r>
                       <a:endParaRPr lang="en-US" sz="900" dirty="0">
                         <a:latin typeface="Arial" charset="0"/>
@@ -8332,7 +8332,7 @@
                           <a:ea typeface="Arial" pitchFamily="34" charset="-122"/>
                           <a:cs typeface="Arial" pitchFamily="34" charset="-120"/>
                         </a:rPr>
-                        <a:t>3.73</a:t>
+                        <a:t>3.64</a:t>
                       </a:r>
                       <a:endParaRPr lang="en-US" sz="900" dirty="0">
                         <a:latin typeface="Arial" charset="0"/>
@@ -8468,7 +8468,7 @@
                           <a:ea typeface="Arial" pitchFamily="34" charset="-122"/>
                           <a:cs typeface="Arial" pitchFamily="34" charset="-120"/>
                         </a:rPr>
-                        <a:t>7.45</a:t>
+                        <a:t>7.27</a:t>
                       </a:r>
                       <a:endParaRPr lang="en-US" sz="900" dirty="0">
                         <a:latin typeface="Arial" charset="0"/>
@@ -8606,7 +8606,7 @@
                           <a:ea typeface="Arial" pitchFamily="34" charset="-122"/>
                           <a:cs typeface="Arial" pitchFamily="34" charset="-120"/>
                         </a:rPr>
-                        <a:t>31</a:t>
+                        <a:t>33</a:t>
                       </a:r>
                       <a:endParaRPr lang="en-US" sz="900" dirty="0">
                         <a:latin typeface="Arial" charset="0"/>
@@ -8674,7 +8674,7 @@
                           <a:ea typeface="Arial" pitchFamily="34" charset="-122"/>
                           <a:cs typeface="Arial" pitchFamily="34" charset="-120"/>
                         </a:rPr>
-                        <a:t>3.61</a:t>
+                        <a:t>3.58</a:t>
                       </a:r>
                       <a:endParaRPr lang="en-US" sz="900" dirty="0">
                         <a:latin typeface="Arial" charset="0"/>
@@ -8810,7 +8810,7 @@
                           <a:ea typeface="Arial" pitchFamily="34" charset="-122"/>
                           <a:cs typeface="Arial" pitchFamily="34" charset="-120"/>
                         </a:rPr>
-                        <a:t>7.23</a:t>
+                        <a:t>7.15</a:t>
                       </a:r>
                       <a:endParaRPr lang="en-US" sz="900" dirty="0">
                         <a:latin typeface="Arial" charset="0"/>
@@ -9016,7 +9016,7 @@
                           <a:ea typeface="Arial" pitchFamily="34" charset="-122"/>
                           <a:cs typeface="Arial" pitchFamily="34" charset="-120"/>
                         </a:rPr>
-                        <a:t>6.95</a:t>
+                        <a:t>6.89</a:t>
                       </a:r>
                       <a:endParaRPr lang="en-US" sz="900" dirty="0">
                         <a:latin typeface="Arial" charset="0"/>
@@ -9152,7 +9152,7 @@
                           <a:ea typeface="Arial" pitchFamily="34" charset="-122"/>
                           <a:cs typeface="Arial" pitchFamily="34" charset="-120"/>
                         </a:rPr>
-                        <a:t>6.95</a:t>
+                        <a:t>6.89</a:t>
                       </a:r>
                       <a:endParaRPr lang="en-US" sz="900" dirty="0">
                         <a:latin typeface="Arial" charset="0"/>
@@ -9902,7 +9902,7 @@
                 <a:ea typeface="Arial" pitchFamily="34" charset="-122"/>
                 <a:cs typeface="Arial" pitchFamily="34" charset="-120"/>
               </a:rPr>
-              <a:t>95件（67.9%）</a:t>
+              <a:t>94件（67.1%）</a:t>
             </a:r>
             <a:endParaRPr lang="en-US" sz="1100" dirty="0"/>
           </a:p>
@@ -10098,7 +10098,7 @@
                 <a:ea typeface="Arial" pitchFamily="34" charset="-122"/>
                 <a:cs typeface="Arial" pitchFamily="34" charset="-120"/>
               </a:rPr>
-              <a:t>15件（10.7%）</a:t>
+              <a:t>16件（11.4%）</a:t>
             </a:r>
             <a:endParaRPr lang="en-US" sz="1100" dirty="0"/>
           </a:p>
@@ -10510,7 +10510,7 @@
                 <a:ea typeface="Arial" pitchFamily="34" charset="-122"/>
                 <a:cs typeface="Arial" pitchFamily="34" charset="-120"/>
               </a:rPr>
-              <a:t>旅行の手配、清潔さ、立地、そして毎日の朝食まで、すべてが素晴らしかったです</a:t>
+              <a:t>博多駅前の立地が最高で、とても便利です</a:t>
             </a:r>
             <a:endParaRPr lang="en-US" sz="900" dirty="0"/>
           </a:p>
@@ -10549,7 +10549,7 @@
                 <a:ea typeface="Arial" pitchFamily="34" charset="-122"/>
                 <a:cs typeface="Arial" pitchFamily="34" charset="-120"/>
               </a:rPr>
-              <a:t>「立地が良く、交通の便も良く、朝食も美味しく、スイートルームも快適でした」</a:t>
+              <a:t>「旅行の手配、清潔さ、立地、そして毎日の朝食まで、すべてが素晴らしかったです」</a:t>
             </a:r>
             <a:endParaRPr lang="en-US" sz="900" dirty="0"/>
           </a:p>
@@ -10733,7 +10733,7 @@
                 <a:ea typeface="Arial" pitchFamily="34" charset="-122"/>
                 <a:cs typeface="Arial" pitchFamily="34" charset="-120"/>
               </a:rPr>
-              <a:t>旅行の手配、清潔さ、立地、そして毎日の朝食まで、すべてが素晴らしかったです</a:t>
+              <a:t>朝食はほぼ毎日同じです</a:t>
             </a:r>
             <a:endParaRPr lang="en-US" sz="900" dirty="0"/>
           </a:p>
@@ -10772,7 +10772,7 @@
                 <a:ea typeface="Arial" pitchFamily="34" charset="-122"/>
                 <a:cs typeface="Arial" pitchFamily="34" charset="-120"/>
               </a:rPr>
-              <a:t>「朝ごはんの種類が多くて美味しい」</a:t>
+              <a:t>「旅行の手配、清潔さ、立地、そして毎日の朝食まで、すべてが素晴らしかったです」</a:t>
             </a:r>
             <a:endParaRPr lang="en-US" sz="900" dirty="0"/>
           </a:p>
@@ -10995,7 +10995,7 @@
                 <a:ea typeface="Arial" pitchFamily="34" charset="-122"/>
                 <a:cs typeface="Arial" pitchFamily="34" charset="-120"/>
               </a:rPr>
-              <a:t>「ランドリー設備、自動販売機、喫煙室、荷物預かり所（重量測定機能付き）、そして親切なスタッフ」</a:t>
+              <a:t>「スタッフみなさん感じが良くて良かった」</a:t>
             </a:r>
             <a:endParaRPr lang="en-US" sz="900" dirty="0"/>
           </a:p>
@@ -11140,6 +11140,229 @@
                 <a:ea typeface="Arial" pitchFamily="34" charset="-122"/>
                 <a:cs typeface="Arial" pitchFamily="34" charset="-120"/>
               </a:rPr>
+              <a:t>快適さ・設備</a:t>
+            </a:r>
+            <a:endParaRPr lang="en-US" sz="1300" dirty="0"/>
+          </a:p>
+        </p:txBody>
+      </p:sp>
+      <p:sp>
+        <p:nvSpPr>
+          <p:cNvPr id="31" name="Text 29"/>
+          <p:cNvSpPr/>
+          <p:nvPr/>
+        </p:nvSpPr>
+        <p:spPr>
+          <a:xfrm>
+            <a:off x="594360" y="3246120"/>
+            <a:ext cx="2377440" cy="365760"/>
+          </a:xfrm>
+          <a:prstGeom prst="rect">
+            <a:avLst/>
+          </a:prstGeom>
+          <a:noFill/>
+          <a:ln/>
+        </p:spPr>
+        <p:txBody>
+          <a:bodyPr wrap="square" lIns="0" tIns="0" rIns="0" bIns="0" rtlCol="0" anchor="ctr"/>
+          <a:lstStyle/>
+          <a:p>
+            <a:pPr indent="0" marL="0">
+              <a:buNone/>
+            </a:pPr>
+            <a:r>
+              <a:rPr lang="en-US" sz="900" dirty="0">
+                <a:solidFill>
+                  <a:srgbClr val="64748B"/>
+                </a:solidFill>
+                <a:latin typeface="Arial" pitchFamily="34" charset="0"/>
+                <a:ea typeface="Arial" pitchFamily="34" charset="-122"/>
+                <a:cs typeface="Arial" pitchFamily="34" charset="-120"/>
+              </a:rPr>
+              <a:t>部屋の中、特にユニットバスが古い造りで、洗面所の蛇口が2口式なのが残念ですが、それ以外は快適でした</a:t>
+            </a:r>
+            <a:endParaRPr lang="en-US" sz="900" dirty="0"/>
+          </a:p>
+        </p:txBody>
+      </p:sp>
+      <p:sp>
+        <p:nvSpPr>
+          <p:cNvPr id="32" name="Text 30"/>
+          <p:cNvSpPr/>
+          <p:nvPr/>
+        </p:nvSpPr>
+        <p:spPr>
+          <a:xfrm>
+            <a:off x="594360" y="3657600"/>
+            <a:ext cx="2377440" cy="640080"/>
+          </a:xfrm>
+          <a:prstGeom prst="rect">
+            <a:avLst/>
+          </a:prstGeom>
+          <a:noFill/>
+          <a:ln/>
+        </p:spPr>
+        <p:txBody>
+          <a:bodyPr wrap="square" lIns="0" tIns="0" rIns="0" bIns="0" rtlCol="0" anchor="ctr"/>
+          <a:lstStyle/>
+          <a:p>
+            <a:pPr indent="0" marL="0">
+              <a:buNone/>
+            </a:pPr>
+            <a:r>
+              <a:rPr lang="en-US" sz="900" i="1" dirty="0">
+                <a:solidFill>
+                  <a:srgbClr val="3B7DD8"/>
+                </a:solidFill>
+                <a:latin typeface="Arial" pitchFamily="34" charset="0"/>
+                <a:ea typeface="Arial" pitchFamily="34" charset="-122"/>
+                <a:cs typeface="Arial" pitchFamily="34" charset="-120"/>
+              </a:rPr>
+              <a:t>「足と臀部のマッサージ機能があり、とても快適です」</a:t>
+            </a:r>
+            <a:endParaRPr lang="en-US" sz="900" dirty="0"/>
+          </a:p>
+        </p:txBody>
+      </p:sp>
+      <p:sp>
+        <p:nvSpPr>
+          <p:cNvPr id="33" name="Shape 31"/>
+          <p:cNvSpPr/>
+          <p:nvPr/>
+        </p:nvSpPr>
+        <p:spPr>
+          <a:xfrm>
+            <a:off x="3291840" y="2880360"/>
+            <a:ext cx="2651760" cy="1600200"/>
+          </a:xfrm>
+          <a:prstGeom prst="rect">
+            <a:avLst/>
+          </a:prstGeom>
+          <a:solidFill>
+            <a:srgbClr val="FFFFFF"/>
+          </a:solidFill>
+          <a:ln/>
+          <a:effectLst>
+            <a:outerShdw sx="100000" sy="100000" kx="0" ky="0" algn="bl" rotWithShape="0" blurRad="50800" dist="25400" dir="8100000">
+              <a:srgbClr val="000000">
+                <a:alpha val="10000"/>
+              </a:srgbClr>
+            </a:outerShdw>
+          </a:effectLst>
+        </p:spPr>
+      </p:sp>
+      <p:sp>
+        <p:nvSpPr>
+          <p:cNvPr id="34" name="Shape 32"/>
+          <p:cNvSpPr/>
+          <p:nvPr/>
+        </p:nvSpPr>
+        <p:spPr>
+          <a:xfrm>
+            <a:off x="3291840" y="2880360"/>
+            <a:ext cx="54864" cy="1600200"/>
+          </a:xfrm>
+          <a:prstGeom prst="rect">
+            <a:avLst/>
+          </a:prstGeom>
+          <a:solidFill>
+            <a:srgbClr val="16A34A"/>
+          </a:solidFill>
+          <a:ln/>
+        </p:spPr>
+      </p:sp>
+      <p:sp>
+        <p:nvSpPr>
+          <p:cNvPr id="35" name="Shape 33"/>
+          <p:cNvSpPr/>
+          <p:nvPr/>
+        </p:nvSpPr>
+        <p:spPr>
+          <a:xfrm>
+            <a:off x="5120640" y="2953512"/>
+            <a:ext cx="658368" cy="228600"/>
+          </a:xfrm>
+          <a:prstGeom prst="rect">
+            <a:avLst/>
+          </a:prstGeom>
+          <a:solidFill>
+            <a:srgbClr val="DCFCE7"/>
+          </a:solidFill>
+          <a:ln/>
+        </p:spPr>
+      </p:sp>
+      <p:sp>
+        <p:nvSpPr>
+          <p:cNvPr id="36" name="Text 34"/>
+          <p:cNvSpPr/>
+          <p:nvPr/>
+        </p:nvSpPr>
+        <p:spPr>
+          <a:xfrm>
+            <a:off x="5120640" y="2953512"/>
+            <a:ext cx="658368" cy="228600"/>
+          </a:xfrm>
+          <a:prstGeom prst="rect">
+            <a:avLst/>
+          </a:prstGeom>
+          <a:noFill/>
+          <a:ln/>
+        </p:spPr>
+        <p:txBody>
+          <a:bodyPr wrap="square" lIns="0" tIns="0" rIns="0" bIns="0" rtlCol="0" anchor="ctr"/>
+          <a:lstStyle/>
+          <a:p>
+            <a:pPr algn="ctr" indent="0" marL="0">
+              <a:buNone/>
+            </a:pPr>
+            <a:r>
+              <a:rPr lang="en-US" sz="900" b="1" dirty="0">
+                <a:solidFill>
+                  <a:srgbClr val="16A34A"/>
+                </a:solidFill>
+                <a:latin typeface="Arial" pitchFamily="34" charset="0"/>
+                <a:ea typeface="Arial" pitchFamily="34" charset="-122"/>
+                <a:cs typeface="Arial" pitchFamily="34" charset="-120"/>
+              </a:rPr>
+              <a:t>20件+</a:t>
+            </a:r>
+            <a:endParaRPr lang="en-US" sz="900" dirty="0"/>
+          </a:p>
+        </p:txBody>
+      </p:sp>
+      <p:sp>
+        <p:nvSpPr>
+          <p:cNvPr id="37" name="Text 35"/>
+          <p:cNvSpPr/>
+          <p:nvPr/>
+        </p:nvSpPr>
+        <p:spPr>
+          <a:xfrm>
+            <a:off x="3429000" y="2953512"/>
+            <a:ext cx="1645920" cy="274320"/>
+          </a:xfrm>
+          <a:prstGeom prst="rect">
+            <a:avLst/>
+          </a:prstGeom>
+          <a:noFill/>
+          <a:ln/>
+        </p:spPr>
+        <p:txBody>
+          <a:bodyPr wrap="square" lIns="0" tIns="0" rIns="0" bIns="0" rtlCol="0" anchor="ctr"/>
+          <a:lstStyle/>
+          <a:p>
+            <a:pPr indent="0" marL="0">
+              <a:buNone/>
+            </a:pPr>
+            <a:r>
+              <a:rPr lang="en-US" sz="1300" b="1" dirty="0">
+                <a:solidFill>
+                  <a:srgbClr val="1A2744"/>
+                </a:solidFill>
+                <a:latin typeface="Arial" pitchFamily="34" charset="0"/>
+                <a:ea typeface="Arial" pitchFamily="34" charset="-122"/>
+                <a:cs typeface="Arial" pitchFamily="34" charset="-120"/>
+              </a:rPr>
               <a:t>清潔さ・清掃</a:t>
             </a:r>
             <a:endParaRPr lang="en-US" sz="1300" dirty="0"/>
@@ -11148,13 +11371,13 @@
       </p:sp>
       <p:sp>
         <p:nvSpPr>
-          <p:cNvPr id="31" name="Text 29"/>
-          <p:cNvSpPr/>
-          <p:nvPr/>
-        </p:nvSpPr>
-        <p:spPr>
-          <a:xfrm>
-            <a:off x="594360" y="3246120"/>
+          <p:cNvPr id="38" name="Text 36"/>
+          <p:cNvSpPr/>
+          <p:nvPr/>
+        </p:nvSpPr>
+        <p:spPr>
+          <a:xfrm>
+            <a:off x="3429000" y="3246120"/>
             <a:ext cx="2377440" cy="365760"/>
           </a:xfrm>
           <a:prstGeom prst="rect">
@@ -11187,13 +11410,13 @@
       </p:sp>
       <p:sp>
         <p:nvSpPr>
-          <p:cNvPr id="32" name="Text 30"/>
-          <p:cNvSpPr/>
-          <p:nvPr/>
-        </p:nvSpPr>
-        <p:spPr>
-          <a:xfrm>
-            <a:off x="594360" y="3657600"/>
+          <p:cNvPr id="39" name="Text 37"/>
+          <p:cNvSpPr/>
+          <p:nvPr/>
+        </p:nvSpPr>
+        <p:spPr>
+          <a:xfrm>
+            <a:off x="3429000" y="3657600"/>
             <a:ext cx="2377440" cy="640080"/>
           </a:xfrm>
           <a:prstGeom prst="rect">
@@ -11219,229 +11442,6 @@
                 <a:cs typeface="Arial" pitchFamily="34" charset="-120"/>
               </a:rPr>
               <a:t>「部屋はとても綺麗」</a:t>
-            </a:r>
-            <a:endParaRPr lang="en-US" sz="900" dirty="0"/>
-          </a:p>
-        </p:txBody>
-      </p:sp>
-      <p:sp>
-        <p:nvSpPr>
-          <p:cNvPr id="33" name="Shape 31"/>
-          <p:cNvSpPr/>
-          <p:nvPr/>
-        </p:nvSpPr>
-        <p:spPr>
-          <a:xfrm>
-            <a:off x="3291840" y="2880360"/>
-            <a:ext cx="2651760" cy="1600200"/>
-          </a:xfrm>
-          <a:prstGeom prst="rect">
-            <a:avLst/>
-          </a:prstGeom>
-          <a:solidFill>
-            <a:srgbClr val="FFFFFF"/>
-          </a:solidFill>
-          <a:ln/>
-          <a:effectLst>
-            <a:outerShdw sx="100000" sy="100000" kx="0" ky="0" algn="bl" rotWithShape="0" blurRad="50800" dist="25400" dir="8100000">
-              <a:srgbClr val="000000">
-                <a:alpha val="10000"/>
-              </a:srgbClr>
-            </a:outerShdw>
-          </a:effectLst>
-        </p:spPr>
-      </p:sp>
-      <p:sp>
-        <p:nvSpPr>
-          <p:cNvPr id="34" name="Shape 32"/>
-          <p:cNvSpPr/>
-          <p:nvPr/>
-        </p:nvSpPr>
-        <p:spPr>
-          <a:xfrm>
-            <a:off x="3291840" y="2880360"/>
-            <a:ext cx="54864" cy="1600200"/>
-          </a:xfrm>
-          <a:prstGeom prst="rect">
-            <a:avLst/>
-          </a:prstGeom>
-          <a:solidFill>
-            <a:srgbClr val="16A34A"/>
-          </a:solidFill>
-          <a:ln/>
-        </p:spPr>
-      </p:sp>
-      <p:sp>
-        <p:nvSpPr>
-          <p:cNvPr id="35" name="Shape 33"/>
-          <p:cNvSpPr/>
-          <p:nvPr/>
-        </p:nvSpPr>
-        <p:spPr>
-          <a:xfrm>
-            <a:off x="5120640" y="2953512"/>
-            <a:ext cx="658368" cy="228600"/>
-          </a:xfrm>
-          <a:prstGeom prst="rect">
-            <a:avLst/>
-          </a:prstGeom>
-          <a:solidFill>
-            <a:srgbClr val="DCFCE7"/>
-          </a:solidFill>
-          <a:ln/>
-        </p:spPr>
-      </p:sp>
-      <p:sp>
-        <p:nvSpPr>
-          <p:cNvPr id="36" name="Text 34"/>
-          <p:cNvSpPr/>
-          <p:nvPr/>
-        </p:nvSpPr>
-        <p:spPr>
-          <a:xfrm>
-            <a:off x="5120640" y="2953512"/>
-            <a:ext cx="658368" cy="228600"/>
-          </a:xfrm>
-          <a:prstGeom prst="rect">
-            <a:avLst/>
-          </a:prstGeom>
-          <a:noFill/>
-          <a:ln/>
-        </p:spPr>
-        <p:txBody>
-          <a:bodyPr wrap="square" lIns="0" tIns="0" rIns="0" bIns="0" rtlCol="0" anchor="ctr"/>
-          <a:lstStyle/>
-          <a:p>
-            <a:pPr algn="ctr" indent="0" marL="0">
-              <a:buNone/>
-            </a:pPr>
-            <a:r>
-              <a:rPr lang="en-US" sz="900" b="1" dirty="0">
-                <a:solidFill>
-                  <a:srgbClr val="16A34A"/>
-                </a:solidFill>
-                <a:latin typeface="Arial" pitchFamily="34" charset="0"/>
-                <a:ea typeface="Arial" pitchFamily="34" charset="-122"/>
-                <a:cs typeface="Arial" pitchFamily="34" charset="-120"/>
-              </a:rPr>
-              <a:t>20件+</a:t>
-            </a:r>
-            <a:endParaRPr lang="en-US" sz="900" dirty="0"/>
-          </a:p>
-        </p:txBody>
-      </p:sp>
-      <p:sp>
-        <p:nvSpPr>
-          <p:cNvPr id="37" name="Text 35"/>
-          <p:cNvSpPr/>
-          <p:nvPr/>
-        </p:nvSpPr>
-        <p:spPr>
-          <a:xfrm>
-            <a:off x="3429000" y="2953512"/>
-            <a:ext cx="1645920" cy="274320"/>
-          </a:xfrm>
-          <a:prstGeom prst="rect">
-            <a:avLst/>
-          </a:prstGeom>
-          <a:noFill/>
-          <a:ln/>
-        </p:spPr>
-        <p:txBody>
-          <a:bodyPr wrap="square" lIns="0" tIns="0" rIns="0" bIns="0" rtlCol="0" anchor="ctr"/>
-          <a:lstStyle/>
-          <a:p>
-            <a:pPr indent="0" marL="0">
-              <a:buNone/>
-            </a:pPr>
-            <a:r>
-              <a:rPr lang="en-US" sz="1300" b="1" dirty="0">
-                <a:solidFill>
-                  <a:srgbClr val="1A2744"/>
-                </a:solidFill>
-                <a:latin typeface="Arial" pitchFamily="34" charset="0"/>
-                <a:ea typeface="Arial" pitchFamily="34" charset="-122"/>
-                <a:cs typeface="Arial" pitchFamily="34" charset="-120"/>
-              </a:rPr>
-              <a:t>快適さ・設備</a:t>
-            </a:r>
-            <a:endParaRPr lang="en-US" sz="1300" dirty="0"/>
-          </a:p>
-        </p:txBody>
-      </p:sp>
-      <p:sp>
-        <p:nvSpPr>
-          <p:cNvPr id="38" name="Text 36"/>
-          <p:cNvSpPr/>
-          <p:nvPr/>
-        </p:nvSpPr>
-        <p:spPr>
-          <a:xfrm>
-            <a:off x="3429000" y="3246120"/>
-            <a:ext cx="2377440" cy="365760"/>
-          </a:xfrm>
-          <a:prstGeom prst="rect">
-            <a:avLst/>
-          </a:prstGeom>
-          <a:noFill/>
-          <a:ln/>
-        </p:spPr>
-        <p:txBody>
-          <a:bodyPr wrap="square" lIns="0" tIns="0" rIns="0" bIns="0" rtlCol="0" anchor="ctr"/>
-          <a:lstStyle/>
-          <a:p>
-            <a:pPr indent="0" marL="0">
-              <a:buNone/>
-            </a:pPr>
-            <a:r>
-              <a:rPr lang="en-US" sz="900" dirty="0">
-                <a:solidFill>
-                  <a:srgbClr val="64748B"/>
-                </a:solidFill>
-                <a:latin typeface="Arial" pitchFamily="34" charset="0"/>
-                <a:ea typeface="Arial" pitchFamily="34" charset="-122"/>
-                <a:cs typeface="Arial" pitchFamily="34" charset="-120"/>
-              </a:rPr>
-              <a:t>足と臀部のマッサージ機能があり、とても快適です</a:t>
-            </a:r>
-            <a:endParaRPr lang="en-US" sz="900" dirty="0"/>
-          </a:p>
-        </p:txBody>
-      </p:sp>
-      <p:sp>
-        <p:nvSpPr>
-          <p:cNvPr id="39" name="Text 37"/>
-          <p:cNvSpPr/>
-          <p:nvPr/>
-        </p:nvSpPr>
-        <p:spPr>
-          <a:xfrm>
-            <a:off x="3429000" y="3657600"/>
-            <a:ext cx="2377440" cy="640080"/>
-          </a:xfrm>
-          <a:prstGeom prst="rect">
-            <a:avLst/>
-          </a:prstGeom>
-          <a:noFill/>
-          <a:ln/>
-        </p:spPr>
-        <p:txBody>
-          <a:bodyPr wrap="square" lIns="0" tIns="0" rIns="0" bIns="0" rtlCol="0" anchor="ctr"/>
-          <a:lstStyle/>
-          <a:p>
-            <a:pPr indent="0" marL="0">
-              <a:buNone/>
-            </a:pPr>
-            <a:r>
-              <a:rPr lang="en-US" sz="900" i="1" dirty="0">
-                <a:solidFill>
-                  <a:srgbClr val="3B7DD8"/>
-                </a:solidFill>
-                <a:latin typeface="Arial" pitchFamily="34" charset="0"/>
-                <a:ea typeface="Arial" pitchFamily="34" charset="-122"/>
-                <a:cs typeface="Arial" pitchFamily="34" charset="-120"/>
-              </a:rPr>
-              <a:t>「立地が良く、交通の便も良く、朝食も美味しく、スイートルームも快適でした」</a:t>
             </a:r>
             <a:endParaRPr lang="en-US" sz="900" dirty="0"/>
           </a:p>
@@ -12354,7 +12354,7 @@
                           <a:ea typeface="Arial" pitchFamily="34" charset="-122"/>
                           <a:cs typeface="Arial" pitchFamily="34" charset="-120"/>
                         </a:rPr>
-                        <a:t>Lobby check-in &amp; check-out machines very convenient for t...</a:t>
+                        <a:t>部屋の中、特にユニットバスが古い造りで、洗面所の蛇口が2口式なのが残念ですが、それ以外は快適でした</a:t>
                       </a:r>
                       <a:endParaRPr lang="en-US" sz="900" dirty="0">
                         <a:latin typeface="Arial" charset="0"/>
@@ -12422,7 +12422,7 @@
                           <a:ea typeface="Arial" pitchFamily="34" charset="-122"/>
                           <a:cs typeface="Arial" pitchFamily="34" charset="-120"/>
                         </a:rPr>
-                        <a:t>18件</a:t>
+                        <a:t>20件</a:t>
                       </a:r>
                       <a:endParaRPr lang="en-US" sz="900" dirty="0">
                         <a:latin typeface="Arial" charset="0"/>
@@ -12628,7 +12628,7 @@
                           <a:ea typeface="Arial" pitchFamily="34" charset="-122"/>
                           <a:cs typeface="Arial" pitchFamily="34" charset="-120"/>
                         </a:rPr>
-                        <a:t>風呂、トイレが少し汚く、生乾きの匂いがするのが残念 又、手元のライトが壊れててつかなかった</a:t>
+                        <a:t>部屋の中、特にユニットバスが古い造りで、洗面所の蛇口が2口式なのが残念ですが、それ以外は快適でした</a:t>
                       </a:r>
                       <a:endParaRPr lang="en-US" sz="900" dirty="0">
                         <a:latin typeface="Arial" charset="0"/>
@@ -12902,7 +12902,7 @@
                           <a:ea typeface="Arial" pitchFamily="34" charset="-122"/>
                           <a:cs typeface="Arial" pitchFamily="34" charset="-120"/>
                         </a:rPr>
-                        <a:t>Lobby check-in &amp; check-out machines very convenient for t...</a:t>
+                        <a:t>Bien qu'en face de la gare, très bonne insonorisation de ...</a:t>
                       </a:r>
                       <a:endParaRPr lang="en-US" sz="900" dirty="0">
                         <a:latin typeface="Arial" charset="0"/>
@@ -12970,7 +12970,7 @@
                           <a:ea typeface="Arial" pitchFamily="34" charset="-122"/>
                           <a:cs typeface="Arial" pitchFamily="34" charset="-120"/>
                         </a:rPr>
-                        <a:t>10件</a:t>
+                        <a:t>11件</a:t>
                       </a:r>
                       <a:endParaRPr lang="en-US" sz="900" dirty="0">
                         <a:latin typeface="Arial" charset="0"/>
@@ -14546,7 +14546,7 @@
                           <a:ea typeface="Arial" pitchFamily="34" charset="-122"/>
                           <a:cs typeface="Arial" pitchFamily="34" charset="-120"/>
                         </a:rPr>
-                        <a:t>風呂、トイレが少し汚く、生乾きの匂いがするのが残念 又、手元のライトが壊れててつかなかった</a:t>
+                        <a:t>部屋の中、特にユニットバスが古い造りで、洗面所の蛇口が2口式なのが残念ですが、それ以外は快適でした</a:t>
                       </a:r>
                       <a:endParaRPr lang="en-US" sz="900" dirty="0">
                         <a:latin typeface="Arial" charset="0"/>
@@ -14614,7 +14614,7 @@
                           <a:ea typeface="Arial" pitchFamily="34" charset="-122"/>
                           <a:cs typeface="Arial" pitchFamily="34" charset="-120"/>
                         </a:rPr>
-                        <a:t>6件</a:t>
+                        <a:t>7件</a:t>
                       </a:r>
                       <a:endParaRPr lang="en-US" sz="900" dirty="0">
                         <a:latin typeface="Arial" charset="0"/>

--- a/納品レポート/ホテル別レポート/comfort_hakata_口コミ分析レポート.pptx
+++ b/納品レポート/ホテル別レポート/comfort_hakata_口コミ分析レポート.pptx
@@ -205,16 +205,16 @@
                 <c:formatCode>General</c:formatCode>
                 <c:ptCount val="5"/>
                 <c:pt idx="0">
-                  <c:v>9.13</c:v>
+                  <c:v>9.1</c:v>
                 </c:pt>
                 <c:pt idx="1">
-                  <c:v>7.27</c:v>
+                  <c:v>7.2</c:v>
                 </c:pt>
                 <c:pt idx="2">
-                  <c:v>7.15</c:v>
+                  <c:v>7.12</c:v>
                 </c:pt>
                 <c:pt idx="3">
-                  <c:v>6.89</c:v>
+                  <c:v>7.08</c:v>
                 </c:pt>
                 <c:pt idx="4">
                   <c:v>6</c:v>
@@ -560,13 +560,13 @@
               <c:numCache>
                 <c:ptCount val="3"/>
                 <c:pt idx="0">
-                  <c:v>94</c:v>
+                  <c:v>93</c:v>
                 </c:pt>
                 <c:pt idx="1">
-                  <c:v>30</c:v>
+                  <c:v>32</c:v>
                 </c:pt>
                 <c:pt idx="2">
-                  <c:v>16</c:v>
+                  <c:v>15</c:v>
                 </c:pt>
               </c:numCache>
             </c:numRef>
@@ -831,10 +831,10 @@
                 <c:formatCode>General</c:formatCode>
                 <c:ptCount val="10"/>
                 <c:pt idx="0">
-                  <c:v>44</c:v>
+                  <c:v>42</c:v>
                 </c:pt>
                 <c:pt idx="1">
-                  <c:v>14</c:v>
+                  <c:v>15</c:v>
                 </c:pt>
                 <c:pt idx="2">
                   <c:v>36</c:v>
@@ -843,7 +843,7 @@
                   <c:v>8</c:v>
                 </c:pt>
                 <c:pt idx="4">
-                  <c:v>21</c:v>
+                  <c:v>23</c:v>
                 </c:pt>
                 <c:pt idx="5">
                   <c:v>1</c:v>
@@ -852,7 +852,7 @@
                   <c:v>8</c:v>
                 </c:pt>
                 <c:pt idx="7">
-                  <c:v>4</c:v>
+                  <c:v>3</c:v>
                 </c:pt>
                 <c:pt idx="8">
                   <c:v>3</c:v>
@@ -2829,7 +2829,7 @@
                 <a:ea typeface="Arial" pitchFamily="34" charset="-122"/>
                 <a:cs typeface="Arial" pitchFamily="34" charset="-120"/>
               </a:rPr>
-              <a:t>作成日：2026年3月20日</a:t>
+              <a:t>作成日：2026年3月21日</a:t>
             </a:r>
             <a:endParaRPr lang="en-US" sz="1000" dirty="0"/>
           </a:p>
@@ -3375,7 +3375,7 @@
                           <a:ea typeface="Arial" pitchFamily="34" charset="-122"/>
                           <a:cs typeface="Arial" pitchFamily="34" charset="-120"/>
                         </a:rPr>
-                        <a:t>7.80点</a:t>
+                        <a:t>7.79点</a:t>
                       </a:r>
                       <a:endParaRPr lang="en-US" sz="1000" dirty="0">
                         <a:latin typeface="Arial" charset="0"/>
@@ -3649,7 +3649,7 @@
                           <a:ea typeface="Arial" pitchFamily="34" charset="-122"/>
                           <a:cs typeface="Arial" pitchFamily="34" charset="-120"/>
                         </a:rPr>
-                        <a:t>67.1%</a:t>
+                        <a:t>66.4%</a:t>
                       </a:r>
                       <a:endParaRPr lang="en-US" sz="1000" dirty="0">
                         <a:latin typeface="Arial" charset="0"/>
@@ -3717,7 +3717,7 @@
                           <a:ea typeface="Arial" pitchFamily="34" charset="-122"/>
                           <a:cs typeface="Arial" pitchFamily="34" charset="-120"/>
                         </a:rPr>
-                        <a:t>77%以上</a:t>
+                        <a:t>76%以上</a:t>
                       </a:r>
                       <a:endParaRPr lang="en-US" sz="1000" dirty="0">
                         <a:latin typeface="Arial" charset="0"/>
@@ -3923,7 +3923,7 @@
                           <a:ea typeface="Arial" pitchFamily="34" charset="-122"/>
                           <a:cs typeface="Arial" pitchFamily="34" charset="-120"/>
                         </a:rPr>
-                        <a:t>11.4%</a:t>
+                        <a:t>10.7%</a:t>
                       </a:r>
                       <a:endParaRPr lang="en-US" sz="1000" dirty="0">
                         <a:latin typeface="Arial" charset="0"/>
@@ -4745,7 +4745,7 @@
                           <a:ea typeface="Arial" pitchFamily="34" charset="-122"/>
                           <a:cs typeface="Arial" pitchFamily="34" charset="-120"/>
                         </a:rPr>
-                        <a:t>約20件/期間</a:t>
+                        <a:t>約19件/期間</a:t>
                       </a:r>
                       <a:endParaRPr lang="en-US" sz="1000" dirty="0">
                         <a:latin typeface="Arial" charset="0"/>
@@ -4813,7 +4813,7 @@
                           <a:ea typeface="Arial" pitchFamily="34" charset="-122"/>
                           <a:cs typeface="Arial" pitchFamily="34" charset="-120"/>
                         </a:rPr>
-                        <a:t>10件以下</a:t>
+                        <a:t>9件以下</a:t>
                       </a:r>
                       <a:endParaRPr lang="en-US" sz="1000" dirty="0">
                         <a:latin typeface="Arial" charset="0"/>
@@ -5384,7 +5384,7 @@
                 <a:ea typeface="Arial" pitchFamily="34" charset="-122"/>
                 <a:cs typeface="Arial" pitchFamily="34" charset="-120"/>
               </a:rPr>
-              <a:t>7.80</a:t>
+              <a:t>7.79</a:t>
             </a:r>
             <a:endParaRPr lang="en-US" sz="3200" dirty="0"/>
           </a:p>
@@ -5509,7 +5509,7 @@
                 <a:ea typeface="Arial" pitchFamily="34" charset="-122"/>
                 <a:cs typeface="Arial" pitchFamily="34" charset="-120"/>
               </a:rPr>
-              <a:t>67.1%</a:t>
+              <a:t>66.4%</a:t>
             </a:r>
             <a:endParaRPr lang="en-US" sz="3200" dirty="0"/>
           </a:p>
@@ -5634,7 +5634,7 @@
                 <a:ea typeface="Arial" pitchFamily="34" charset="-122"/>
                 <a:cs typeface="Arial" pitchFamily="34" charset="-120"/>
               </a:rPr>
-              <a:t>11.4%</a:t>
+              <a:t>10.7%</a:t>
             </a:r>
             <a:endParaRPr lang="en-US" sz="3200" dirty="0"/>
           </a:p>
@@ -5907,7 +5907,7 @@
                 <a:ea typeface="Arial" pitchFamily="34" charset="-122"/>
                 <a:cs typeface="Arial" pitchFamily="34" charset="-120"/>
               </a:rPr>
-              <a:t>  博多駅前の立地が最高で、とても便利です</a:t>
+              <a:t>  駅に近く子連れだったので、とても便利でした</a:t>
             </a:r>
             <a:endParaRPr lang="en-US" sz="1100" dirty="0"/>
           </a:p>
@@ -5987,7 +5987,7 @@
                 <a:ea typeface="Arial" pitchFamily="34" charset="-122"/>
                 <a:cs typeface="Arial" pitchFamily="34" charset="-120"/>
               </a:rPr>
-              <a:t>  早い時間に到着して、デスクスタッフの方が親切にキャリア保管などご案内いただきありがとうございました</a:t>
+              <a:t>  スタッフの対応は親切でした</a:t>
             </a:r>
             <a:endParaRPr lang="en-US" sz="1100" dirty="0"/>
           </a:p>
@@ -6135,7 +6135,7 @@
                 <a:ea typeface="Arial" pitchFamily="34" charset="-122"/>
                 <a:cs typeface="Arial" pitchFamily="34" charset="-120"/>
               </a:rPr>
-              <a:t>  部屋の中、特にユニットバスが古い造りで、洗面所の蛇口が2口式なのが残念ですが、それ以外は快適でした</a:t>
+              <a:t>  古い建物だったが部屋には空気清浄機もおいてありベッドの寝心地も良かったです</a:t>
             </a:r>
             <a:endParaRPr lang="en-US" sz="1100" dirty="0"/>
           </a:p>
@@ -6568,7 +6568,7 @@
                 <a:ea typeface="Arial" pitchFamily="34" charset="-122"/>
                 <a:cs typeface="Arial" pitchFamily="34" charset="-120"/>
               </a:rPr>
-              <a:t>7.80</a:t>
+              <a:t>7.79</a:t>
             </a:r>
             <a:endParaRPr lang="en-US" sz="3200" dirty="0"/>
           </a:p>
@@ -6693,7 +6693,7 @@
                 <a:ea typeface="Arial" pitchFamily="34" charset="-122"/>
                 <a:cs typeface="Arial" pitchFamily="34" charset="-120"/>
               </a:rPr>
-              <a:t>67.1%</a:t>
+              <a:t>66.4%</a:t>
             </a:r>
             <a:endParaRPr lang="en-US" sz="3200" dirty="0"/>
           </a:p>
@@ -6818,7 +6818,7 @@
                 <a:ea typeface="Arial" pitchFamily="34" charset="-122"/>
                 <a:cs typeface="Arial" pitchFamily="34" charset="-120"/>
               </a:rPr>
-              <a:t>11.4%</a:t>
+              <a:t>10.7%</a:t>
             </a:r>
             <a:endParaRPr lang="en-US" sz="3200" dirty="0"/>
           </a:p>
@@ -7364,7 +7364,7 @@
                 <a:ea typeface="Arial" pitchFamily="34" charset="-122"/>
                 <a:cs typeface="Arial" pitchFamily="34" charset="-120"/>
               </a:rPr>
-              <a:t>Trip.com(9.13)が最高スコア。</a:t>
+              <a:t>Trip.com(9.10)が最高スコア。</a:t>
             </a:r>
             <a:endParaRPr lang="en-US" sz="1100" dirty="0"/>
           </a:p>
@@ -7922,7 +7922,7 @@
                           <a:ea typeface="Arial" pitchFamily="34" charset="-122"/>
                           <a:cs typeface="Arial" pitchFamily="34" charset="-120"/>
                         </a:rPr>
-                        <a:t>53</a:t>
+                        <a:t>51</a:t>
                       </a:r>
                       <a:endParaRPr lang="en-US" sz="900" dirty="0">
                         <a:latin typeface="Arial" charset="0"/>
@@ -7990,7 +7990,7 @@
                           <a:ea typeface="Arial" pitchFamily="34" charset="-122"/>
                           <a:cs typeface="Arial" pitchFamily="34" charset="-120"/>
                         </a:rPr>
-                        <a:t>9.13</a:t>
+                        <a:t>9.1</a:t>
                       </a:r>
                       <a:endParaRPr lang="en-US" sz="900" dirty="0">
                         <a:latin typeface="Arial" charset="0"/>
@@ -8126,7 +8126,7 @@
                           <a:ea typeface="Arial" pitchFamily="34" charset="-122"/>
                           <a:cs typeface="Arial" pitchFamily="34" charset="-120"/>
                         </a:rPr>
-                        <a:t>9.13</a:t>
+                        <a:t>9.1</a:t>
                       </a:r>
                       <a:endParaRPr lang="en-US" sz="900" dirty="0">
                         <a:latin typeface="Arial" charset="0"/>
@@ -8264,7 +8264,7 @@
                           <a:ea typeface="Arial" pitchFamily="34" charset="-122"/>
                           <a:cs typeface="Arial" pitchFamily="34" charset="-120"/>
                         </a:rPr>
-                        <a:t>11</a:t>
+                        <a:t>10</a:t>
                       </a:r>
                       <a:endParaRPr lang="en-US" sz="900" dirty="0">
                         <a:latin typeface="Arial" charset="0"/>
@@ -8332,7 +8332,7 @@
                           <a:ea typeface="Arial" pitchFamily="34" charset="-122"/>
                           <a:cs typeface="Arial" pitchFamily="34" charset="-120"/>
                         </a:rPr>
-                        <a:t>3.64</a:t>
+                        <a:t>3.6</a:t>
                       </a:r>
                       <a:endParaRPr lang="en-US" sz="900" dirty="0">
                         <a:latin typeface="Arial" charset="0"/>
@@ -8468,7 +8468,7 @@
                           <a:ea typeface="Arial" pitchFamily="34" charset="-122"/>
                           <a:cs typeface="Arial" pitchFamily="34" charset="-120"/>
                         </a:rPr>
-                        <a:t>7.27</a:t>
+                        <a:t>7.2</a:t>
                       </a:r>
                       <a:endParaRPr lang="en-US" sz="900" dirty="0">
                         <a:latin typeface="Arial" charset="0"/>
@@ -8606,7 +8606,7 @@
                           <a:ea typeface="Arial" pitchFamily="34" charset="-122"/>
                           <a:cs typeface="Arial" pitchFamily="34" charset="-120"/>
                         </a:rPr>
-                        <a:t>33</a:t>
+                        <a:t>34</a:t>
                       </a:r>
                       <a:endParaRPr lang="en-US" sz="900" dirty="0">
                         <a:latin typeface="Arial" charset="0"/>
@@ -8674,7 +8674,7 @@
                           <a:ea typeface="Arial" pitchFamily="34" charset="-122"/>
                           <a:cs typeface="Arial" pitchFamily="34" charset="-120"/>
                         </a:rPr>
-                        <a:t>3.58</a:t>
+                        <a:t>3.56</a:t>
                       </a:r>
                       <a:endParaRPr lang="en-US" sz="900" dirty="0">
                         <a:latin typeface="Arial" charset="0"/>
@@ -8810,7 +8810,7 @@
                           <a:ea typeface="Arial" pitchFamily="34" charset="-122"/>
                           <a:cs typeface="Arial" pitchFamily="34" charset="-120"/>
                         </a:rPr>
-                        <a:t>7.15</a:t>
+                        <a:t>7.12</a:t>
                       </a:r>
                       <a:endParaRPr lang="en-US" sz="900" dirty="0">
                         <a:latin typeface="Arial" charset="0"/>
@@ -8948,7 +8948,7 @@
                           <a:ea typeface="Arial" pitchFamily="34" charset="-122"/>
                           <a:cs typeface="Arial" pitchFamily="34" charset="-120"/>
                         </a:rPr>
-                        <a:t>38</a:t>
+                        <a:t>39</a:t>
                       </a:r>
                       <a:endParaRPr lang="en-US" sz="900" dirty="0">
                         <a:latin typeface="Arial" charset="0"/>
@@ -9016,7 +9016,7 @@
                           <a:ea typeface="Arial" pitchFamily="34" charset="-122"/>
                           <a:cs typeface="Arial" pitchFamily="34" charset="-120"/>
                         </a:rPr>
-                        <a:t>6.89</a:t>
+                        <a:t>7.08</a:t>
                       </a:r>
                       <a:endParaRPr lang="en-US" sz="900" dirty="0">
                         <a:latin typeface="Arial" charset="0"/>
@@ -9152,7 +9152,7 @@
                           <a:ea typeface="Arial" pitchFamily="34" charset="-122"/>
                           <a:cs typeface="Arial" pitchFamily="34" charset="-120"/>
                         </a:rPr>
-                        <a:t>6.89</a:t>
+                        <a:t>7.08</a:t>
                       </a:r>
                       <a:endParaRPr lang="en-US" sz="900" dirty="0">
                         <a:latin typeface="Arial" charset="0"/>
@@ -9290,7 +9290,7 @@
                           <a:ea typeface="Arial" pitchFamily="34" charset="-122"/>
                           <a:cs typeface="Arial" pitchFamily="34" charset="-120"/>
                         </a:rPr>
-                        <a:t>5</a:t>
+                        <a:t>6</a:t>
                       </a:r>
                       <a:endParaRPr lang="en-US" sz="900" dirty="0">
                         <a:latin typeface="Arial" charset="0"/>
@@ -9902,7 +9902,7 @@
                 <a:ea typeface="Arial" pitchFamily="34" charset="-122"/>
                 <a:cs typeface="Arial" pitchFamily="34" charset="-120"/>
               </a:rPr>
-              <a:t>94件（67.1%）</a:t>
+              <a:t>93件（66.4%）</a:t>
             </a:r>
             <a:endParaRPr lang="en-US" sz="1100" dirty="0"/>
           </a:p>
@@ -10000,7 +10000,7 @@
                 <a:ea typeface="Arial" pitchFamily="34" charset="-122"/>
                 <a:cs typeface="Arial" pitchFamily="34" charset="-120"/>
               </a:rPr>
-              <a:t>30件（21.4%）</a:t>
+              <a:t>32件（22.9%）</a:t>
             </a:r>
             <a:endParaRPr lang="en-US" sz="1100" dirty="0"/>
           </a:p>
@@ -10098,7 +10098,7 @@
                 <a:ea typeface="Arial" pitchFamily="34" charset="-122"/>
                 <a:cs typeface="Arial" pitchFamily="34" charset="-120"/>
               </a:rPr>
-              <a:t>16件（11.4%）</a:t>
+              <a:t>15件（10.7%）</a:t>
             </a:r>
             <a:endParaRPr lang="en-US" sz="1100" dirty="0"/>
           </a:p>
@@ -10510,7 +10510,7 @@
                 <a:ea typeface="Arial" pitchFamily="34" charset="-122"/>
                 <a:cs typeface="Arial" pitchFamily="34" charset="-120"/>
               </a:rPr>
-              <a:t>博多駅前の立地が最高で、とても便利です</a:t>
+              <a:t>駅に近く子連れだったので、とても便利でした</a:t>
             </a:r>
             <a:endParaRPr lang="en-US" sz="900" dirty="0"/>
           </a:p>
@@ -10525,6 +10525,229 @@
         <p:spPr>
           <a:xfrm>
             <a:off x="594360" y="1828800"/>
+            <a:ext cx="2377440" cy="640080"/>
+          </a:xfrm>
+          <a:prstGeom prst="rect">
+            <a:avLst/>
+          </a:prstGeom>
+          <a:noFill/>
+          <a:ln/>
+        </p:spPr>
+        <p:txBody>
+          <a:bodyPr wrap="square" lIns="0" tIns="0" rIns="0" bIns="0" rtlCol="0" anchor="ctr"/>
+          <a:lstStyle/>
+          <a:p>
+            <a:pPr indent="0" marL="0">
+              <a:buNone/>
+            </a:pPr>
+            <a:r>
+              <a:rPr lang="en-US" sz="900" i="1" dirty="0">
+                <a:solidFill>
+                  <a:srgbClr val="3B7DD8"/>
+                </a:solidFill>
+                <a:latin typeface="Arial" pitchFamily="34" charset="0"/>
+                <a:ea typeface="Arial" pitchFamily="34" charset="-122"/>
+                <a:cs typeface="Arial" pitchFamily="34" charset="-120"/>
+              </a:rPr>
+              <a:t>「博多駅前の立地が最高で、とても便利です」</a:t>
+            </a:r>
+            <a:endParaRPr lang="en-US" sz="900" dirty="0"/>
+          </a:p>
+        </p:txBody>
+      </p:sp>
+      <p:sp>
+        <p:nvSpPr>
+          <p:cNvPr id="12" name="Shape 10"/>
+          <p:cNvSpPr/>
+          <p:nvPr/>
+        </p:nvSpPr>
+        <p:spPr>
+          <a:xfrm>
+            <a:off x="3291840" y="1051560"/>
+            <a:ext cx="2651760" cy="1600200"/>
+          </a:xfrm>
+          <a:prstGeom prst="rect">
+            <a:avLst/>
+          </a:prstGeom>
+          <a:solidFill>
+            <a:srgbClr val="FFFFFF"/>
+          </a:solidFill>
+          <a:ln/>
+          <a:effectLst>
+            <a:outerShdw sx="100000" sy="100000" kx="0" ky="0" algn="bl" rotWithShape="0" blurRad="50800" dist="25400" dir="8100000">
+              <a:srgbClr val="000000">
+                <a:alpha val="10000"/>
+              </a:srgbClr>
+            </a:outerShdw>
+          </a:effectLst>
+        </p:spPr>
+      </p:sp>
+      <p:sp>
+        <p:nvSpPr>
+          <p:cNvPr id="13" name="Shape 11"/>
+          <p:cNvSpPr/>
+          <p:nvPr/>
+        </p:nvSpPr>
+        <p:spPr>
+          <a:xfrm>
+            <a:off x="3291840" y="1051560"/>
+            <a:ext cx="54864" cy="1600200"/>
+          </a:xfrm>
+          <a:prstGeom prst="rect">
+            <a:avLst/>
+          </a:prstGeom>
+          <a:solidFill>
+            <a:srgbClr val="16A34A"/>
+          </a:solidFill>
+          <a:ln/>
+        </p:spPr>
+      </p:sp>
+      <p:sp>
+        <p:nvSpPr>
+          <p:cNvPr id="14" name="Shape 12"/>
+          <p:cNvSpPr/>
+          <p:nvPr/>
+        </p:nvSpPr>
+        <p:spPr>
+          <a:xfrm>
+            <a:off x="5120640" y="1124712"/>
+            <a:ext cx="658368" cy="228600"/>
+          </a:xfrm>
+          <a:prstGeom prst="rect">
+            <a:avLst/>
+          </a:prstGeom>
+          <a:solidFill>
+            <a:srgbClr val="DCFCE7"/>
+          </a:solidFill>
+          <a:ln/>
+        </p:spPr>
+      </p:sp>
+      <p:sp>
+        <p:nvSpPr>
+          <p:cNvPr id="15" name="Text 13"/>
+          <p:cNvSpPr/>
+          <p:nvPr/>
+        </p:nvSpPr>
+        <p:spPr>
+          <a:xfrm>
+            <a:off x="5120640" y="1124712"/>
+            <a:ext cx="658368" cy="228600"/>
+          </a:xfrm>
+          <a:prstGeom prst="rect">
+            <a:avLst/>
+          </a:prstGeom>
+          <a:noFill/>
+          <a:ln/>
+        </p:spPr>
+        <p:txBody>
+          <a:bodyPr wrap="square" lIns="0" tIns="0" rIns="0" bIns="0" rtlCol="0" anchor="ctr"/>
+          <a:lstStyle/>
+          <a:p>
+            <a:pPr algn="ctr" indent="0" marL="0">
+              <a:buNone/>
+            </a:pPr>
+            <a:r>
+              <a:rPr lang="en-US" sz="900" b="1" dirty="0">
+                <a:solidFill>
+                  <a:srgbClr val="16A34A"/>
+                </a:solidFill>
+                <a:latin typeface="Arial" pitchFamily="34" charset="0"/>
+                <a:ea typeface="Arial" pitchFamily="34" charset="-122"/>
+                <a:cs typeface="Arial" pitchFamily="34" charset="-120"/>
+              </a:rPr>
+              <a:t>50件+</a:t>
+            </a:r>
+            <a:endParaRPr lang="en-US" sz="900" dirty="0"/>
+          </a:p>
+        </p:txBody>
+      </p:sp>
+      <p:sp>
+        <p:nvSpPr>
+          <p:cNvPr id="16" name="Text 14"/>
+          <p:cNvSpPr/>
+          <p:nvPr/>
+        </p:nvSpPr>
+        <p:spPr>
+          <a:xfrm>
+            <a:off x="3429000" y="1124712"/>
+            <a:ext cx="1645920" cy="274320"/>
+          </a:xfrm>
+          <a:prstGeom prst="rect">
+            <a:avLst/>
+          </a:prstGeom>
+          <a:noFill/>
+          <a:ln/>
+        </p:spPr>
+        <p:txBody>
+          <a:bodyPr wrap="square" lIns="0" tIns="0" rIns="0" bIns="0" rtlCol="0" anchor="ctr"/>
+          <a:lstStyle/>
+          <a:p>
+            <a:pPr indent="0" marL="0">
+              <a:buNone/>
+            </a:pPr>
+            <a:r>
+              <a:rPr lang="en-US" sz="1300" b="1" dirty="0">
+                <a:solidFill>
+                  <a:srgbClr val="1A2744"/>
+                </a:solidFill>
+                <a:latin typeface="Arial" pitchFamily="34" charset="0"/>
+                <a:ea typeface="Arial" pitchFamily="34" charset="-122"/>
+                <a:cs typeface="Arial" pitchFamily="34" charset="-120"/>
+              </a:rPr>
+              <a:t>朝食</a:t>
+            </a:r>
+            <a:endParaRPr lang="en-US" sz="1300" dirty="0"/>
+          </a:p>
+        </p:txBody>
+      </p:sp>
+      <p:sp>
+        <p:nvSpPr>
+          <p:cNvPr id="17" name="Text 15"/>
+          <p:cNvSpPr/>
+          <p:nvPr/>
+        </p:nvSpPr>
+        <p:spPr>
+          <a:xfrm>
+            <a:off x="3429000" y="1417320"/>
+            <a:ext cx="2377440" cy="365760"/>
+          </a:xfrm>
+          <a:prstGeom prst="rect">
+            <a:avLst/>
+          </a:prstGeom>
+          <a:noFill/>
+          <a:ln/>
+        </p:spPr>
+        <p:txBody>
+          <a:bodyPr wrap="square" lIns="0" tIns="0" rIns="0" bIns="0" rtlCol="0" anchor="ctr"/>
+          <a:lstStyle/>
+          <a:p>
+            <a:pPr indent="0" marL="0">
+              <a:buNone/>
+            </a:pPr>
+            <a:r>
+              <a:rPr lang="en-US" sz="900" dirty="0">
+                <a:solidFill>
+                  <a:srgbClr val="64748B"/>
+                </a:solidFill>
+                <a:latin typeface="Arial" pitchFamily="34" charset="0"/>
+                <a:ea typeface="Arial" pitchFamily="34" charset="-122"/>
+                <a:cs typeface="Arial" pitchFamily="34" charset="-120"/>
+              </a:rPr>
+              <a:t>朝食はほぼ毎日同じです</a:t>
+            </a:r>
+            <a:endParaRPr lang="en-US" sz="900" dirty="0"/>
+          </a:p>
+        </p:txBody>
+      </p:sp>
+      <p:sp>
+        <p:nvSpPr>
+          <p:cNvPr id="18" name="Text 16"/>
+          <p:cNvSpPr/>
+          <p:nvPr/>
+        </p:nvSpPr>
+        <p:spPr>
+          <a:xfrm>
+            <a:off x="3429000" y="1828800"/>
             <a:ext cx="2377440" cy="640080"/>
           </a:xfrm>
           <a:prstGeom prst="rect">
@@ -10557,13 +10780,13 @@
       </p:sp>
       <p:sp>
         <p:nvSpPr>
-          <p:cNvPr id="12" name="Shape 10"/>
-          <p:cNvSpPr/>
-          <p:nvPr/>
-        </p:nvSpPr>
-        <p:spPr>
-          <a:xfrm>
-            <a:off x="3291840" y="1051560"/>
+          <p:cNvPr id="19" name="Shape 17"/>
+          <p:cNvSpPr/>
+          <p:nvPr/>
+        </p:nvSpPr>
+        <p:spPr>
+          <a:xfrm>
+            <a:off x="6126480" y="1051560"/>
             <a:ext cx="2651760" cy="1600200"/>
           </a:xfrm>
           <a:prstGeom prst="rect">
@@ -10584,13 +10807,13 @@
       </p:sp>
       <p:sp>
         <p:nvSpPr>
-          <p:cNvPr id="13" name="Shape 11"/>
-          <p:cNvSpPr/>
-          <p:nvPr/>
-        </p:nvSpPr>
-        <p:spPr>
-          <a:xfrm>
-            <a:off x="3291840" y="1051560"/>
+          <p:cNvPr id="20" name="Shape 18"/>
+          <p:cNvSpPr/>
+          <p:nvPr/>
+        </p:nvSpPr>
+        <p:spPr>
+          <a:xfrm>
+            <a:off x="6126480" y="1051560"/>
             <a:ext cx="54864" cy="1600200"/>
           </a:xfrm>
           <a:prstGeom prst="rect">
@@ -10604,13 +10827,13 @@
       </p:sp>
       <p:sp>
         <p:nvSpPr>
-          <p:cNvPr id="14" name="Shape 12"/>
-          <p:cNvSpPr/>
-          <p:nvPr/>
-        </p:nvSpPr>
-        <p:spPr>
-          <a:xfrm>
-            <a:off x="5120640" y="1124712"/>
+          <p:cNvPr id="21" name="Shape 19"/>
+          <p:cNvSpPr/>
+          <p:nvPr/>
+        </p:nvSpPr>
+        <p:spPr>
+          <a:xfrm>
+            <a:off x="7955280" y="1124712"/>
             <a:ext cx="658368" cy="228600"/>
           </a:xfrm>
           <a:prstGeom prst="rect">
@@ -10624,13 +10847,13 @@
       </p:sp>
       <p:sp>
         <p:nvSpPr>
-          <p:cNvPr id="15" name="Text 13"/>
-          <p:cNvSpPr/>
-          <p:nvPr/>
-        </p:nvSpPr>
-        <p:spPr>
-          <a:xfrm>
-            <a:off x="5120640" y="1124712"/>
+          <p:cNvPr id="22" name="Text 20"/>
+          <p:cNvSpPr/>
+          <p:nvPr/>
+        </p:nvSpPr>
+        <p:spPr>
+          <a:xfrm>
+            <a:off x="7955280" y="1124712"/>
             <a:ext cx="658368" cy="228600"/>
           </a:xfrm>
           <a:prstGeom prst="rect">
@@ -10655,7 +10878,7 @@
                 <a:ea typeface="Arial" pitchFamily="34" charset="-122"/>
                 <a:cs typeface="Arial" pitchFamily="34" charset="-120"/>
               </a:rPr>
-              <a:t>50件+</a:t>
+              <a:t>20件+</a:t>
             </a:r>
             <a:endParaRPr lang="en-US" sz="900" dirty="0"/>
           </a:p>
@@ -10663,13 +10886,13 @@
       </p:sp>
       <p:sp>
         <p:nvSpPr>
-          <p:cNvPr id="16" name="Text 14"/>
-          <p:cNvSpPr/>
-          <p:nvPr/>
-        </p:nvSpPr>
-        <p:spPr>
-          <a:xfrm>
-            <a:off x="3429000" y="1124712"/>
+          <p:cNvPr id="23" name="Text 21"/>
+          <p:cNvSpPr/>
+          <p:nvPr/>
+        </p:nvSpPr>
+        <p:spPr>
+          <a:xfrm>
+            <a:off x="6263640" y="1124712"/>
             <a:ext cx="1645920" cy="274320"/>
           </a:xfrm>
           <a:prstGeom prst="rect">
@@ -10694,7 +10917,7 @@
                 <a:ea typeface="Arial" pitchFamily="34" charset="-122"/>
                 <a:cs typeface="Arial" pitchFamily="34" charset="-120"/>
               </a:rPr>
-              <a:t>朝食</a:t>
+              <a:t>スタッフの対応</a:t>
             </a:r>
             <a:endParaRPr lang="en-US" sz="1300" dirty="0"/>
           </a:p>
@@ -10702,13 +10925,13 @@
       </p:sp>
       <p:sp>
         <p:nvSpPr>
-          <p:cNvPr id="17" name="Text 15"/>
-          <p:cNvSpPr/>
-          <p:nvPr/>
-        </p:nvSpPr>
-        <p:spPr>
-          <a:xfrm>
-            <a:off x="3429000" y="1417320"/>
+          <p:cNvPr id="24" name="Text 22"/>
+          <p:cNvSpPr/>
+          <p:nvPr/>
+        </p:nvSpPr>
+        <p:spPr>
+          <a:xfrm>
+            <a:off x="6263640" y="1417320"/>
             <a:ext cx="2377440" cy="365760"/>
           </a:xfrm>
           <a:prstGeom prst="rect">
@@ -10733,7 +10956,7 @@
                 <a:ea typeface="Arial" pitchFamily="34" charset="-122"/>
                 <a:cs typeface="Arial" pitchFamily="34" charset="-120"/>
               </a:rPr>
-              <a:t>朝食はほぼ毎日同じです</a:t>
+              <a:t>スタッフの対応は親切でした</a:t>
             </a:r>
             <a:endParaRPr lang="en-US" sz="900" dirty="0"/>
           </a:p>
@@ -10741,13 +10964,236 @@
       </p:sp>
       <p:sp>
         <p:nvSpPr>
-          <p:cNvPr id="18" name="Text 16"/>
-          <p:cNvSpPr/>
-          <p:nvPr/>
-        </p:nvSpPr>
-        <p:spPr>
-          <a:xfrm>
-            <a:off x="3429000" y="1828800"/>
+          <p:cNvPr id="25" name="Text 23"/>
+          <p:cNvSpPr/>
+          <p:nvPr/>
+        </p:nvSpPr>
+        <p:spPr>
+          <a:xfrm>
+            <a:off x="6263640" y="1828800"/>
+            <a:ext cx="2377440" cy="640080"/>
+          </a:xfrm>
+          <a:prstGeom prst="rect">
+            <a:avLst/>
+          </a:prstGeom>
+          <a:noFill/>
+          <a:ln/>
+        </p:spPr>
+        <p:txBody>
+          <a:bodyPr wrap="square" lIns="0" tIns="0" rIns="0" bIns="0" rtlCol="0" anchor="ctr"/>
+          <a:lstStyle/>
+          <a:p>
+            <a:pPr indent="0" marL="0">
+              <a:buNone/>
+            </a:pPr>
+            <a:r>
+              <a:rPr lang="en-US" sz="900" i="1" dirty="0">
+                <a:solidFill>
+                  <a:srgbClr val="3B7DD8"/>
+                </a:solidFill>
+                <a:latin typeface="Arial" pitchFamily="34" charset="0"/>
+                <a:ea typeface="Arial" pitchFamily="34" charset="-122"/>
+                <a:cs typeface="Arial" pitchFamily="34" charset="-120"/>
+              </a:rPr>
+              <a:t>「早い時間に到着して、デスクのスタッフが親切にキャリアの保管などご案内いただきありがとうございます」</a:t>
+            </a:r>
+            <a:endParaRPr lang="en-US" sz="900" dirty="0"/>
+          </a:p>
+        </p:txBody>
+      </p:sp>
+      <p:sp>
+        <p:nvSpPr>
+          <p:cNvPr id="26" name="Shape 24"/>
+          <p:cNvSpPr/>
+          <p:nvPr/>
+        </p:nvSpPr>
+        <p:spPr>
+          <a:xfrm>
+            <a:off x="457200" y="2880360"/>
+            <a:ext cx="2651760" cy="1600200"/>
+          </a:xfrm>
+          <a:prstGeom prst="rect">
+            <a:avLst/>
+          </a:prstGeom>
+          <a:solidFill>
+            <a:srgbClr val="FFFFFF"/>
+          </a:solidFill>
+          <a:ln/>
+          <a:effectLst>
+            <a:outerShdw sx="100000" sy="100000" kx="0" ky="0" algn="bl" rotWithShape="0" blurRad="50800" dist="25400" dir="8100000">
+              <a:srgbClr val="000000">
+                <a:alpha val="10000"/>
+              </a:srgbClr>
+            </a:outerShdw>
+          </a:effectLst>
+        </p:spPr>
+      </p:sp>
+      <p:sp>
+        <p:nvSpPr>
+          <p:cNvPr id="27" name="Shape 25"/>
+          <p:cNvSpPr/>
+          <p:nvPr/>
+        </p:nvSpPr>
+        <p:spPr>
+          <a:xfrm>
+            <a:off x="457200" y="2880360"/>
+            <a:ext cx="54864" cy="1600200"/>
+          </a:xfrm>
+          <a:prstGeom prst="rect">
+            <a:avLst/>
+          </a:prstGeom>
+          <a:solidFill>
+            <a:srgbClr val="16A34A"/>
+          </a:solidFill>
+          <a:ln/>
+        </p:spPr>
+      </p:sp>
+      <p:sp>
+        <p:nvSpPr>
+          <p:cNvPr id="28" name="Shape 26"/>
+          <p:cNvSpPr/>
+          <p:nvPr/>
+        </p:nvSpPr>
+        <p:spPr>
+          <a:xfrm>
+            <a:off x="2286000" y="2953512"/>
+            <a:ext cx="658368" cy="228600"/>
+          </a:xfrm>
+          <a:prstGeom prst="rect">
+            <a:avLst/>
+          </a:prstGeom>
+          <a:solidFill>
+            <a:srgbClr val="DCFCE7"/>
+          </a:solidFill>
+          <a:ln/>
+        </p:spPr>
+      </p:sp>
+      <p:sp>
+        <p:nvSpPr>
+          <p:cNvPr id="29" name="Text 27"/>
+          <p:cNvSpPr/>
+          <p:nvPr/>
+        </p:nvSpPr>
+        <p:spPr>
+          <a:xfrm>
+            <a:off x="2286000" y="2953512"/>
+            <a:ext cx="658368" cy="228600"/>
+          </a:xfrm>
+          <a:prstGeom prst="rect">
+            <a:avLst/>
+          </a:prstGeom>
+          <a:noFill/>
+          <a:ln/>
+        </p:spPr>
+        <p:txBody>
+          <a:bodyPr wrap="square" lIns="0" tIns="0" rIns="0" bIns="0" rtlCol="0" anchor="ctr"/>
+          <a:lstStyle/>
+          <a:p>
+            <a:pPr algn="ctr" indent="0" marL="0">
+              <a:buNone/>
+            </a:pPr>
+            <a:r>
+              <a:rPr lang="en-US" sz="900" b="1" dirty="0">
+                <a:solidFill>
+                  <a:srgbClr val="16A34A"/>
+                </a:solidFill>
+                <a:latin typeface="Arial" pitchFamily="34" charset="0"/>
+                <a:ea typeface="Arial" pitchFamily="34" charset="-122"/>
+                <a:cs typeface="Arial" pitchFamily="34" charset="-120"/>
+              </a:rPr>
+              <a:t>20件+</a:t>
+            </a:r>
+            <a:endParaRPr lang="en-US" sz="900" dirty="0"/>
+          </a:p>
+        </p:txBody>
+      </p:sp>
+      <p:sp>
+        <p:nvSpPr>
+          <p:cNvPr id="30" name="Text 28"/>
+          <p:cNvSpPr/>
+          <p:nvPr/>
+        </p:nvSpPr>
+        <p:spPr>
+          <a:xfrm>
+            <a:off x="594360" y="2953512"/>
+            <a:ext cx="1645920" cy="274320"/>
+          </a:xfrm>
+          <a:prstGeom prst="rect">
+            <a:avLst/>
+          </a:prstGeom>
+          <a:noFill/>
+          <a:ln/>
+        </p:spPr>
+        <p:txBody>
+          <a:bodyPr wrap="square" lIns="0" tIns="0" rIns="0" bIns="0" rtlCol="0" anchor="ctr"/>
+          <a:lstStyle/>
+          <a:p>
+            <a:pPr indent="0" marL="0">
+              <a:buNone/>
+            </a:pPr>
+            <a:r>
+              <a:rPr lang="en-US" sz="1300" b="1" dirty="0">
+                <a:solidFill>
+                  <a:srgbClr val="1A2744"/>
+                </a:solidFill>
+                <a:latin typeface="Arial" pitchFamily="34" charset="0"/>
+                <a:ea typeface="Arial" pitchFamily="34" charset="-122"/>
+                <a:cs typeface="Arial" pitchFamily="34" charset="-120"/>
+              </a:rPr>
+              <a:t>清潔さ・清掃</a:t>
+            </a:r>
+            <a:endParaRPr lang="en-US" sz="1300" dirty="0"/>
+          </a:p>
+        </p:txBody>
+      </p:sp>
+      <p:sp>
+        <p:nvSpPr>
+          <p:cNvPr id="31" name="Text 29"/>
+          <p:cNvSpPr/>
+          <p:nvPr/>
+        </p:nvSpPr>
+        <p:spPr>
+          <a:xfrm>
+            <a:off x="594360" y="3246120"/>
+            <a:ext cx="2377440" cy="365760"/>
+          </a:xfrm>
+          <a:prstGeom prst="rect">
+            <a:avLst/>
+          </a:prstGeom>
+          <a:noFill/>
+          <a:ln/>
+        </p:spPr>
+        <p:txBody>
+          <a:bodyPr wrap="square" lIns="0" tIns="0" rIns="0" bIns="0" rtlCol="0" anchor="ctr"/>
+          <a:lstStyle/>
+          <a:p>
+            <a:pPr indent="0" marL="0">
+              <a:buNone/>
+            </a:pPr>
+            <a:r>
+              <a:rPr lang="en-US" sz="900" dirty="0">
+                <a:solidFill>
+                  <a:srgbClr val="64748B"/>
+                </a:solidFill>
+                <a:latin typeface="Arial" pitchFamily="34" charset="0"/>
+                <a:ea typeface="Arial" pitchFamily="34" charset="-122"/>
+                <a:cs typeface="Arial" pitchFamily="34" charset="-120"/>
+              </a:rPr>
+              <a:t>清潔さは十分にきれいだと思います</a:t>
+            </a:r>
+            <a:endParaRPr lang="en-US" sz="900" dirty="0"/>
+          </a:p>
+        </p:txBody>
+      </p:sp>
+      <p:sp>
+        <p:nvSpPr>
+          <p:cNvPr id="32" name="Text 30"/>
+          <p:cNvSpPr/>
+          <p:nvPr/>
+        </p:nvSpPr>
+        <p:spPr>
+          <a:xfrm>
+            <a:off x="594360" y="3657600"/>
             <a:ext cx="2377440" cy="640080"/>
           </a:xfrm>
           <a:prstGeom prst="rect">
@@ -10780,13 +11226,13 @@
       </p:sp>
       <p:sp>
         <p:nvSpPr>
-          <p:cNvPr id="19" name="Shape 17"/>
-          <p:cNvSpPr/>
-          <p:nvPr/>
-        </p:nvSpPr>
-        <p:spPr>
-          <a:xfrm>
-            <a:off x="6126480" y="1051560"/>
+          <p:cNvPr id="33" name="Shape 31"/>
+          <p:cNvSpPr/>
+          <p:nvPr/>
+        </p:nvSpPr>
+        <p:spPr>
+          <a:xfrm>
+            <a:off x="3291840" y="2880360"/>
             <a:ext cx="2651760" cy="1600200"/>
           </a:xfrm>
           <a:prstGeom prst="rect">
@@ -10807,13 +11253,13 @@
       </p:sp>
       <p:sp>
         <p:nvSpPr>
-          <p:cNvPr id="20" name="Shape 18"/>
-          <p:cNvSpPr/>
-          <p:nvPr/>
-        </p:nvSpPr>
-        <p:spPr>
-          <a:xfrm>
-            <a:off x="6126480" y="1051560"/>
+          <p:cNvPr id="34" name="Shape 32"/>
+          <p:cNvSpPr/>
+          <p:nvPr/>
+        </p:nvSpPr>
+        <p:spPr>
+          <a:xfrm>
+            <a:off x="3291840" y="2880360"/>
             <a:ext cx="54864" cy="1600200"/>
           </a:xfrm>
           <a:prstGeom prst="rect">
@@ -10827,13 +11273,13 @@
       </p:sp>
       <p:sp>
         <p:nvSpPr>
-          <p:cNvPr id="21" name="Shape 19"/>
-          <p:cNvSpPr/>
-          <p:nvPr/>
-        </p:nvSpPr>
-        <p:spPr>
-          <a:xfrm>
-            <a:off x="7955280" y="1124712"/>
+          <p:cNvPr id="35" name="Shape 33"/>
+          <p:cNvSpPr/>
+          <p:nvPr/>
+        </p:nvSpPr>
+        <p:spPr>
+          <a:xfrm>
+            <a:off x="5120640" y="2953512"/>
             <a:ext cx="658368" cy="228600"/>
           </a:xfrm>
           <a:prstGeom prst="rect">
@@ -10847,13 +11293,13 @@
       </p:sp>
       <p:sp>
         <p:nvSpPr>
-          <p:cNvPr id="22" name="Text 20"/>
-          <p:cNvSpPr/>
-          <p:nvPr/>
-        </p:nvSpPr>
-        <p:spPr>
-          <a:xfrm>
-            <a:off x="7955280" y="1124712"/>
+          <p:cNvPr id="36" name="Text 34"/>
+          <p:cNvSpPr/>
+          <p:nvPr/>
+        </p:nvSpPr>
+        <p:spPr>
+          <a:xfrm>
+            <a:off x="5120640" y="2953512"/>
             <a:ext cx="658368" cy="228600"/>
           </a:xfrm>
           <a:prstGeom prst="rect">
@@ -10886,236 +11332,13 @@
       </p:sp>
       <p:sp>
         <p:nvSpPr>
-          <p:cNvPr id="23" name="Text 21"/>
-          <p:cNvSpPr/>
-          <p:nvPr/>
-        </p:nvSpPr>
-        <p:spPr>
-          <a:xfrm>
-            <a:off x="6263640" y="1124712"/>
-            <a:ext cx="1645920" cy="274320"/>
-          </a:xfrm>
-          <a:prstGeom prst="rect">
-            <a:avLst/>
-          </a:prstGeom>
-          <a:noFill/>
-          <a:ln/>
-        </p:spPr>
-        <p:txBody>
-          <a:bodyPr wrap="square" lIns="0" tIns="0" rIns="0" bIns="0" rtlCol="0" anchor="ctr"/>
-          <a:lstStyle/>
-          <a:p>
-            <a:pPr indent="0" marL="0">
-              <a:buNone/>
-            </a:pPr>
-            <a:r>
-              <a:rPr lang="en-US" sz="1300" b="1" dirty="0">
-                <a:solidFill>
-                  <a:srgbClr val="1A2744"/>
-                </a:solidFill>
-                <a:latin typeface="Arial" pitchFamily="34" charset="0"/>
-                <a:ea typeface="Arial" pitchFamily="34" charset="-122"/>
-                <a:cs typeface="Arial" pitchFamily="34" charset="-120"/>
-              </a:rPr>
-              <a:t>スタッフの対応</a:t>
-            </a:r>
-            <a:endParaRPr lang="en-US" sz="1300" dirty="0"/>
-          </a:p>
-        </p:txBody>
-      </p:sp>
-      <p:sp>
-        <p:nvSpPr>
-          <p:cNvPr id="24" name="Text 22"/>
-          <p:cNvSpPr/>
-          <p:nvPr/>
-        </p:nvSpPr>
-        <p:spPr>
-          <a:xfrm>
-            <a:off x="6263640" y="1417320"/>
-            <a:ext cx="2377440" cy="365760"/>
-          </a:xfrm>
-          <a:prstGeom prst="rect">
-            <a:avLst/>
-          </a:prstGeom>
-          <a:noFill/>
-          <a:ln/>
-        </p:spPr>
-        <p:txBody>
-          <a:bodyPr wrap="square" lIns="0" tIns="0" rIns="0" bIns="0" rtlCol="0" anchor="ctr"/>
-          <a:lstStyle/>
-          <a:p>
-            <a:pPr indent="0" marL="0">
-              <a:buNone/>
-            </a:pPr>
-            <a:r>
-              <a:rPr lang="en-US" sz="900" dirty="0">
-                <a:solidFill>
-                  <a:srgbClr val="64748B"/>
-                </a:solidFill>
-                <a:latin typeface="Arial" pitchFamily="34" charset="0"/>
-                <a:ea typeface="Arial" pitchFamily="34" charset="-122"/>
-                <a:cs typeface="Arial" pitchFamily="34" charset="-120"/>
-              </a:rPr>
-              <a:t>早い時間に到着して、デスクスタッフの方が親切にキャリア保管などご案内いただきありがとうございました</a:t>
-            </a:r>
-            <a:endParaRPr lang="en-US" sz="900" dirty="0"/>
-          </a:p>
-        </p:txBody>
-      </p:sp>
-      <p:sp>
-        <p:nvSpPr>
-          <p:cNvPr id="25" name="Text 23"/>
-          <p:cNvSpPr/>
-          <p:nvPr/>
-        </p:nvSpPr>
-        <p:spPr>
-          <a:xfrm>
-            <a:off x="6263640" y="1828800"/>
-            <a:ext cx="2377440" cy="640080"/>
-          </a:xfrm>
-          <a:prstGeom prst="rect">
-            <a:avLst/>
-          </a:prstGeom>
-          <a:noFill/>
-          <a:ln/>
-        </p:spPr>
-        <p:txBody>
-          <a:bodyPr wrap="square" lIns="0" tIns="0" rIns="0" bIns="0" rtlCol="0" anchor="ctr"/>
-          <a:lstStyle/>
-          <a:p>
-            <a:pPr indent="0" marL="0">
-              <a:buNone/>
-            </a:pPr>
-            <a:r>
-              <a:rPr lang="en-US" sz="900" i="1" dirty="0">
-                <a:solidFill>
-                  <a:srgbClr val="3B7DD8"/>
-                </a:solidFill>
-                <a:latin typeface="Arial" pitchFamily="34" charset="0"/>
-                <a:ea typeface="Arial" pitchFamily="34" charset="-122"/>
-                <a:cs typeface="Arial" pitchFamily="34" charset="-120"/>
-              </a:rPr>
-              <a:t>「スタッフみなさん感じが良くて良かった」</a:t>
-            </a:r>
-            <a:endParaRPr lang="en-US" sz="900" dirty="0"/>
-          </a:p>
-        </p:txBody>
-      </p:sp>
-      <p:sp>
-        <p:nvSpPr>
-          <p:cNvPr id="26" name="Shape 24"/>
-          <p:cNvSpPr/>
-          <p:nvPr/>
-        </p:nvSpPr>
-        <p:spPr>
-          <a:xfrm>
-            <a:off x="457200" y="2880360"/>
-            <a:ext cx="2651760" cy="1600200"/>
-          </a:xfrm>
-          <a:prstGeom prst="rect">
-            <a:avLst/>
-          </a:prstGeom>
-          <a:solidFill>
-            <a:srgbClr val="FFFFFF"/>
-          </a:solidFill>
-          <a:ln/>
-          <a:effectLst>
-            <a:outerShdw sx="100000" sy="100000" kx="0" ky="0" algn="bl" rotWithShape="0" blurRad="50800" dist="25400" dir="8100000">
-              <a:srgbClr val="000000">
-                <a:alpha val="10000"/>
-              </a:srgbClr>
-            </a:outerShdw>
-          </a:effectLst>
-        </p:spPr>
-      </p:sp>
-      <p:sp>
-        <p:nvSpPr>
-          <p:cNvPr id="27" name="Shape 25"/>
-          <p:cNvSpPr/>
-          <p:nvPr/>
-        </p:nvSpPr>
-        <p:spPr>
-          <a:xfrm>
-            <a:off x="457200" y="2880360"/>
-            <a:ext cx="54864" cy="1600200"/>
-          </a:xfrm>
-          <a:prstGeom prst="rect">
-            <a:avLst/>
-          </a:prstGeom>
-          <a:solidFill>
-            <a:srgbClr val="16A34A"/>
-          </a:solidFill>
-          <a:ln/>
-        </p:spPr>
-      </p:sp>
-      <p:sp>
-        <p:nvSpPr>
-          <p:cNvPr id="28" name="Shape 26"/>
-          <p:cNvSpPr/>
-          <p:nvPr/>
-        </p:nvSpPr>
-        <p:spPr>
-          <a:xfrm>
-            <a:off x="2286000" y="2953512"/>
-            <a:ext cx="658368" cy="228600"/>
-          </a:xfrm>
-          <a:prstGeom prst="rect">
-            <a:avLst/>
-          </a:prstGeom>
-          <a:solidFill>
-            <a:srgbClr val="DCFCE7"/>
-          </a:solidFill>
-          <a:ln/>
-        </p:spPr>
-      </p:sp>
-      <p:sp>
-        <p:nvSpPr>
-          <p:cNvPr id="29" name="Text 27"/>
-          <p:cNvSpPr/>
-          <p:nvPr/>
-        </p:nvSpPr>
-        <p:spPr>
-          <a:xfrm>
-            <a:off x="2286000" y="2953512"/>
-            <a:ext cx="658368" cy="228600"/>
-          </a:xfrm>
-          <a:prstGeom prst="rect">
-            <a:avLst/>
-          </a:prstGeom>
-          <a:noFill/>
-          <a:ln/>
-        </p:spPr>
-        <p:txBody>
-          <a:bodyPr wrap="square" lIns="0" tIns="0" rIns="0" bIns="0" rtlCol="0" anchor="ctr"/>
-          <a:lstStyle/>
-          <a:p>
-            <a:pPr algn="ctr" indent="0" marL="0">
-              <a:buNone/>
-            </a:pPr>
-            <a:r>
-              <a:rPr lang="en-US" sz="900" b="1" dirty="0">
-                <a:solidFill>
-                  <a:srgbClr val="16A34A"/>
-                </a:solidFill>
-                <a:latin typeface="Arial" pitchFamily="34" charset="0"/>
-                <a:ea typeface="Arial" pitchFamily="34" charset="-122"/>
-                <a:cs typeface="Arial" pitchFamily="34" charset="-120"/>
-              </a:rPr>
-              <a:t>20件+</a:t>
-            </a:r>
-            <a:endParaRPr lang="en-US" sz="900" dirty="0"/>
-          </a:p>
-        </p:txBody>
-      </p:sp>
-      <p:sp>
-        <p:nvSpPr>
-          <p:cNvPr id="30" name="Text 28"/>
-          <p:cNvSpPr/>
-          <p:nvPr/>
-        </p:nvSpPr>
-        <p:spPr>
-          <a:xfrm>
-            <a:off x="594360" y="2953512"/>
+          <p:cNvPr id="37" name="Text 35"/>
+          <p:cNvSpPr/>
+          <p:nvPr/>
+        </p:nvSpPr>
+        <p:spPr>
+          <a:xfrm>
+            <a:off x="3429000" y="2953512"/>
             <a:ext cx="1645920" cy="274320"/>
           </a:xfrm>
           <a:prstGeom prst="rect">
@@ -11148,13 +11371,13 @@
       </p:sp>
       <p:sp>
         <p:nvSpPr>
-          <p:cNvPr id="31" name="Text 29"/>
-          <p:cNvSpPr/>
-          <p:nvPr/>
-        </p:nvSpPr>
-        <p:spPr>
-          <a:xfrm>
-            <a:off x="594360" y="3246120"/>
+          <p:cNvPr id="38" name="Text 36"/>
+          <p:cNvSpPr/>
+          <p:nvPr/>
+        </p:nvSpPr>
+        <p:spPr>
+          <a:xfrm>
+            <a:off x="3429000" y="3246120"/>
             <a:ext cx="2377440" cy="365760"/>
           </a:xfrm>
           <a:prstGeom prst="rect">
@@ -11179,7 +11402,7 @@
                 <a:ea typeface="Arial" pitchFamily="34" charset="-122"/>
                 <a:cs typeface="Arial" pitchFamily="34" charset="-120"/>
               </a:rPr>
-              <a:t>部屋の中、特にユニットバスが古い造りで、洗面所の蛇口が2口式なのが残念ですが、それ以外は快適でした</a:t>
+              <a:t>古い建物だったが部屋には空気清浄機もおいてありベッドの寝心地も良かったです</a:t>
             </a:r>
             <a:endParaRPr lang="en-US" sz="900" dirty="0"/>
           </a:p>
@@ -11187,13 +11410,13 @@
       </p:sp>
       <p:sp>
         <p:nvSpPr>
-          <p:cNvPr id="32" name="Text 30"/>
-          <p:cNvSpPr/>
-          <p:nvPr/>
-        </p:nvSpPr>
-        <p:spPr>
-          <a:xfrm>
-            <a:off x="594360" y="3657600"/>
+          <p:cNvPr id="39" name="Text 37"/>
+          <p:cNvSpPr/>
+          <p:nvPr/>
+        </p:nvSpPr>
+        <p:spPr>
+          <a:xfrm>
+            <a:off x="3429000" y="3657600"/>
             <a:ext cx="2377440" cy="640080"/>
           </a:xfrm>
           <a:prstGeom prst="rect">
@@ -11218,230 +11441,7 @@
                 <a:ea typeface="Arial" pitchFamily="34" charset="-122"/>
                 <a:cs typeface="Arial" pitchFamily="34" charset="-120"/>
               </a:rPr>
-              <a:t>「足と臀部のマッサージ機能があり、とても快適です」</a:t>
-            </a:r>
-            <a:endParaRPr lang="en-US" sz="900" dirty="0"/>
-          </a:p>
-        </p:txBody>
-      </p:sp>
-      <p:sp>
-        <p:nvSpPr>
-          <p:cNvPr id="33" name="Shape 31"/>
-          <p:cNvSpPr/>
-          <p:nvPr/>
-        </p:nvSpPr>
-        <p:spPr>
-          <a:xfrm>
-            <a:off x="3291840" y="2880360"/>
-            <a:ext cx="2651760" cy="1600200"/>
-          </a:xfrm>
-          <a:prstGeom prst="rect">
-            <a:avLst/>
-          </a:prstGeom>
-          <a:solidFill>
-            <a:srgbClr val="FFFFFF"/>
-          </a:solidFill>
-          <a:ln/>
-          <a:effectLst>
-            <a:outerShdw sx="100000" sy="100000" kx="0" ky="0" algn="bl" rotWithShape="0" blurRad="50800" dist="25400" dir="8100000">
-              <a:srgbClr val="000000">
-                <a:alpha val="10000"/>
-              </a:srgbClr>
-            </a:outerShdw>
-          </a:effectLst>
-        </p:spPr>
-      </p:sp>
-      <p:sp>
-        <p:nvSpPr>
-          <p:cNvPr id="34" name="Shape 32"/>
-          <p:cNvSpPr/>
-          <p:nvPr/>
-        </p:nvSpPr>
-        <p:spPr>
-          <a:xfrm>
-            <a:off x="3291840" y="2880360"/>
-            <a:ext cx="54864" cy="1600200"/>
-          </a:xfrm>
-          <a:prstGeom prst="rect">
-            <a:avLst/>
-          </a:prstGeom>
-          <a:solidFill>
-            <a:srgbClr val="16A34A"/>
-          </a:solidFill>
-          <a:ln/>
-        </p:spPr>
-      </p:sp>
-      <p:sp>
-        <p:nvSpPr>
-          <p:cNvPr id="35" name="Shape 33"/>
-          <p:cNvSpPr/>
-          <p:nvPr/>
-        </p:nvSpPr>
-        <p:spPr>
-          <a:xfrm>
-            <a:off x="5120640" y="2953512"/>
-            <a:ext cx="658368" cy="228600"/>
-          </a:xfrm>
-          <a:prstGeom prst="rect">
-            <a:avLst/>
-          </a:prstGeom>
-          <a:solidFill>
-            <a:srgbClr val="DCFCE7"/>
-          </a:solidFill>
-          <a:ln/>
-        </p:spPr>
-      </p:sp>
-      <p:sp>
-        <p:nvSpPr>
-          <p:cNvPr id="36" name="Text 34"/>
-          <p:cNvSpPr/>
-          <p:nvPr/>
-        </p:nvSpPr>
-        <p:spPr>
-          <a:xfrm>
-            <a:off x="5120640" y="2953512"/>
-            <a:ext cx="658368" cy="228600"/>
-          </a:xfrm>
-          <a:prstGeom prst="rect">
-            <a:avLst/>
-          </a:prstGeom>
-          <a:noFill/>
-          <a:ln/>
-        </p:spPr>
-        <p:txBody>
-          <a:bodyPr wrap="square" lIns="0" tIns="0" rIns="0" bIns="0" rtlCol="0" anchor="ctr"/>
-          <a:lstStyle/>
-          <a:p>
-            <a:pPr algn="ctr" indent="0" marL="0">
-              <a:buNone/>
-            </a:pPr>
-            <a:r>
-              <a:rPr lang="en-US" sz="900" b="1" dirty="0">
-                <a:solidFill>
-                  <a:srgbClr val="16A34A"/>
-                </a:solidFill>
-                <a:latin typeface="Arial" pitchFamily="34" charset="0"/>
-                <a:ea typeface="Arial" pitchFamily="34" charset="-122"/>
-                <a:cs typeface="Arial" pitchFamily="34" charset="-120"/>
-              </a:rPr>
-              <a:t>20件+</a:t>
-            </a:r>
-            <a:endParaRPr lang="en-US" sz="900" dirty="0"/>
-          </a:p>
-        </p:txBody>
-      </p:sp>
-      <p:sp>
-        <p:nvSpPr>
-          <p:cNvPr id="37" name="Text 35"/>
-          <p:cNvSpPr/>
-          <p:nvPr/>
-        </p:nvSpPr>
-        <p:spPr>
-          <a:xfrm>
-            <a:off x="3429000" y="2953512"/>
-            <a:ext cx="1645920" cy="274320"/>
-          </a:xfrm>
-          <a:prstGeom prst="rect">
-            <a:avLst/>
-          </a:prstGeom>
-          <a:noFill/>
-          <a:ln/>
-        </p:spPr>
-        <p:txBody>
-          <a:bodyPr wrap="square" lIns="0" tIns="0" rIns="0" bIns="0" rtlCol="0" anchor="ctr"/>
-          <a:lstStyle/>
-          <a:p>
-            <a:pPr indent="0" marL="0">
-              <a:buNone/>
-            </a:pPr>
-            <a:r>
-              <a:rPr lang="en-US" sz="1300" b="1" dirty="0">
-                <a:solidFill>
-                  <a:srgbClr val="1A2744"/>
-                </a:solidFill>
-                <a:latin typeface="Arial" pitchFamily="34" charset="0"/>
-                <a:ea typeface="Arial" pitchFamily="34" charset="-122"/>
-                <a:cs typeface="Arial" pitchFamily="34" charset="-120"/>
-              </a:rPr>
-              <a:t>清潔さ・清掃</a:t>
-            </a:r>
-            <a:endParaRPr lang="en-US" sz="1300" dirty="0"/>
-          </a:p>
-        </p:txBody>
-      </p:sp>
-      <p:sp>
-        <p:nvSpPr>
-          <p:cNvPr id="38" name="Text 36"/>
-          <p:cNvSpPr/>
-          <p:nvPr/>
-        </p:nvSpPr>
-        <p:spPr>
-          <a:xfrm>
-            <a:off x="3429000" y="3246120"/>
-            <a:ext cx="2377440" cy="365760"/>
-          </a:xfrm>
-          <a:prstGeom prst="rect">
-            <a:avLst/>
-          </a:prstGeom>
-          <a:noFill/>
-          <a:ln/>
-        </p:spPr>
-        <p:txBody>
-          <a:bodyPr wrap="square" lIns="0" tIns="0" rIns="0" bIns="0" rtlCol="0" anchor="ctr"/>
-          <a:lstStyle/>
-          <a:p>
-            <a:pPr indent="0" marL="0">
-              <a:buNone/>
-            </a:pPr>
-            <a:r>
-              <a:rPr lang="en-US" sz="900" dirty="0">
-                <a:solidFill>
-                  <a:srgbClr val="64748B"/>
-                </a:solidFill>
-                <a:latin typeface="Arial" pitchFamily="34" charset="0"/>
-                <a:ea typeface="Arial" pitchFamily="34" charset="-122"/>
-                <a:cs typeface="Arial" pitchFamily="34" charset="-120"/>
-              </a:rPr>
-              <a:t>旅行の手配、清潔さ、立地、そして毎日の朝食まで、すべてが素晴らしかったです</a:t>
-            </a:r>
-            <a:endParaRPr lang="en-US" sz="900" dirty="0"/>
-          </a:p>
-        </p:txBody>
-      </p:sp>
-      <p:sp>
-        <p:nvSpPr>
-          <p:cNvPr id="39" name="Text 37"/>
-          <p:cNvSpPr/>
-          <p:nvPr/>
-        </p:nvSpPr>
-        <p:spPr>
-          <a:xfrm>
-            <a:off x="3429000" y="3657600"/>
-            <a:ext cx="2377440" cy="640080"/>
-          </a:xfrm>
-          <a:prstGeom prst="rect">
-            <a:avLst/>
-          </a:prstGeom>
-          <a:noFill/>
-          <a:ln/>
-        </p:spPr>
-        <p:txBody>
-          <a:bodyPr wrap="square" lIns="0" tIns="0" rIns="0" bIns="0" rtlCol="0" anchor="ctr"/>
-          <a:lstStyle/>
-          <a:p>
-            <a:pPr indent="0" marL="0">
-              <a:buNone/>
-            </a:pPr>
-            <a:r>
-              <a:rPr lang="en-US" sz="900" i="1" dirty="0">
-                <a:solidFill>
-                  <a:srgbClr val="3B7DD8"/>
-                </a:solidFill>
-                <a:latin typeface="Arial" pitchFamily="34" charset="0"/>
-                <a:ea typeface="Arial" pitchFamily="34" charset="-122"/>
-                <a:cs typeface="Arial" pitchFamily="34" charset="-120"/>
-              </a:rPr>
-              <a:t>「部屋はとても綺麗」</a:t>
+              <a:t>「部屋の中、特にユニットバスが古い造りで、洗面所の蛇口が2口式なのが残念ですが、それ以外は快適でした」</a:t>
             </a:r>
             <a:endParaRPr lang="en-US" sz="900" dirty="0"/>
           </a:p>
@@ -12354,7 +12354,7 @@
                           <a:ea typeface="Arial" pitchFamily="34" charset="-122"/>
                           <a:cs typeface="Arial" pitchFamily="34" charset="-120"/>
                         </a:rPr>
-                        <a:t>部屋の中、特にユニットバスが古い造りで、洗面所の蛇口が2口式なのが残念ですが、それ以外は快適でした</a:t>
+                        <a:t>古い建物だったが部屋には空気清浄機もおいてありベッドの寝心地も良かったです</a:t>
                       </a:r>
                       <a:endParaRPr lang="en-US" sz="900" dirty="0">
                         <a:latin typeface="Arial" charset="0"/>
@@ -12422,7 +12422,7 @@
                           <a:ea typeface="Arial" pitchFamily="34" charset="-122"/>
                           <a:cs typeface="Arial" pitchFamily="34" charset="-120"/>
                         </a:rPr>
-                        <a:t>20件</a:t>
+                        <a:t>19件</a:t>
                       </a:r>
                       <a:endParaRPr lang="en-US" sz="900" dirty="0">
                         <a:latin typeface="Arial" charset="0"/>
@@ -13244,7 +13244,7 @@
                           <a:ea typeface="Arial" pitchFamily="34" charset="-122"/>
                           <a:cs typeface="Arial" pitchFamily="34" charset="-120"/>
                         </a:rPr>
-                        <a:t>10件</a:t>
+                        <a:t>9件</a:t>
                       </a:r>
                       <a:endParaRPr lang="en-US" sz="900" dirty="0">
                         <a:latin typeface="Arial" charset="0"/>
@@ -14478,7 +14478,7 @@
                           <a:ea typeface="Arial" pitchFamily="34" charset="-122"/>
                           <a:cs typeface="Arial" pitchFamily="34" charset="-120"/>
                         </a:rPr>
-                        <a:t>対応・サービスの不満</a:t>
+                        <a:t>朝食の改善要望</a:t>
                       </a:r>
                       <a:endParaRPr lang="en-US" sz="900" dirty="0">
                         <a:latin typeface="Arial" charset="0"/>
@@ -14546,7 +14546,7 @@
                           <a:ea typeface="Arial" pitchFamily="34" charset="-122"/>
                           <a:cs typeface="Arial" pitchFamily="34" charset="-120"/>
                         </a:rPr>
-                        <a:t>部屋の中、特にユニットバスが古い造りで、洗面所の蛇口が2口式なのが残念ですが、それ以外は快適でした</a:t>
+                        <a:t>朝食はほぼ毎日同じです</a:t>
                       </a:r>
                       <a:endParaRPr lang="en-US" sz="900" dirty="0">
                         <a:latin typeface="Arial" charset="0"/>
@@ -14614,7 +14614,7 @@
                           <a:ea typeface="Arial" pitchFamily="34" charset="-122"/>
                           <a:cs typeface="Arial" pitchFamily="34" charset="-120"/>
                         </a:rPr>
-                        <a:t>7件</a:t>
+                        <a:t>6件</a:t>
                       </a:r>
                       <a:endParaRPr lang="en-US" sz="900" dirty="0">
                         <a:latin typeface="Arial" charset="0"/>

--- a/納品レポート/ホテル別レポート/comfort_hakata_口コミ分析レポート.pptx
+++ b/納品レポート/ホテル別レポート/comfort_hakata_口コミ分析レポート.pptx
@@ -183,13 +183,13 @@
                     <c:v>Trip.com</c:v>
                   </c:pt>
                   <c:pt idx="1">
-                    <c:v>じゃらん</c:v>
+                    <c:v>Booking.com</c:v>
                   </c:pt>
                   <c:pt idx="2">
                     <c:v>Google</c:v>
                   </c:pt>
                   <c:pt idx="3">
-                    <c:v>Booking.com</c:v>
+                    <c:v>じゃらん</c:v>
                   </c:pt>
                   <c:pt idx="4">
                     <c:v>楽天トラベル</c:v>
@@ -205,19 +205,19 @@
                 <c:formatCode>General</c:formatCode>
                 <c:ptCount val="5"/>
                 <c:pt idx="0">
-                  <c:v>9.1</c:v>
+                  <c:v>9</c:v>
                 </c:pt>
                 <c:pt idx="1">
-                  <c:v>7.2</c:v>
+                  <c:v>7.05</c:v>
                 </c:pt>
                 <c:pt idx="2">
-                  <c:v>7.12</c:v>
+                  <c:v>7.03</c:v>
                 </c:pt>
                 <c:pt idx="3">
-                  <c:v>7.08</c:v>
+                  <c:v>6.89</c:v>
                 </c:pt>
                 <c:pt idx="4">
-                  <c:v>6</c:v>
+                  <c:v>6.29</c:v>
                 </c:pt>
               </c:numCache>
             </c:numRef>
@@ -560,13 +560,13 @@
               <c:numCache>
                 <c:ptCount val="3"/>
                 <c:pt idx="0">
-                  <c:v>93</c:v>
+                  <c:v>92</c:v>
                 </c:pt>
                 <c:pt idx="1">
-                  <c:v>32</c:v>
+                  <c:v>31</c:v>
                 </c:pt>
                 <c:pt idx="2">
-                  <c:v>15</c:v>
+                  <c:v>17</c:v>
                 </c:pt>
               </c:numCache>
             </c:numRef>
@@ -831,25 +831,25 @@
                 <c:formatCode>General</c:formatCode>
                 <c:ptCount val="10"/>
                 <c:pt idx="0">
-                  <c:v>42</c:v>
+                  <c:v>41</c:v>
                 </c:pt>
                 <c:pt idx="1">
-                  <c:v>15</c:v>
+                  <c:v>14</c:v>
                 </c:pt>
                 <c:pt idx="2">
-                  <c:v>36</c:v>
+                  <c:v>37</c:v>
                 </c:pt>
                 <c:pt idx="3">
                   <c:v>8</c:v>
                 </c:pt>
                 <c:pt idx="4">
-                  <c:v>23</c:v>
+                  <c:v>22</c:v>
                 </c:pt>
                 <c:pt idx="5">
                   <c:v>1</c:v>
                 </c:pt>
                 <c:pt idx="6">
-                  <c:v>8</c:v>
+                  <c:v>10</c:v>
                 </c:pt>
                 <c:pt idx="7">
                   <c:v>3</c:v>
@@ -2829,7 +2829,7 @@
                 <a:ea typeface="Arial" pitchFamily="34" charset="-122"/>
                 <a:cs typeface="Arial" pitchFamily="34" charset="-120"/>
               </a:rPr>
-              <a:t>作成日：2026年3月21日</a:t>
+              <a:t>作成日：2026年3月23日</a:t>
             </a:r>
             <a:endParaRPr lang="en-US" sz="1000" dirty="0"/>
           </a:p>
@@ -3375,7 +3375,7 @@
                           <a:ea typeface="Arial" pitchFamily="34" charset="-122"/>
                           <a:cs typeface="Arial" pitchFamily="34" charset="-120"/>
                         </a:rPr>
-                        <a:t>7.79点</a:t>
+                        <a:t>7.72点</a:t>
                       </a:r>
                       <a:endParaRPr lang="en-US" sz="1000" dirty="0">
                         <a:latin typeface="Arial" charset="0"/>
@@ -3443,7 +3443,7 @@
                           <a:ea typeface="Arial" pitchFamily="34" charset="-122"/>
                           <a:cs typeface="Arial" pitchFamily="34" charset="-120"/>
                         </a:rPr>
-                        <a:t>8.3点以上</a:t>
+                        <a:t>8.2点以上</a:t>
                       </a:r>
                       <a:endParaRPr lang="en-US" sz="1000" dirty="0">
                         <a:latin typeface="Arial" charset="0"/>
@@ -3649,7 +3649,7 @@
                           <a:ea typeface="Arial" pitchFamily="34" charset="-122"/>
                           <a:cs typeface="Arial" pitchFamily="34" charset="-120"/>
                         </a:rPr>
-                        <a:t>66.4%</a:t>
+                        <a:t>65.7%</a:t>
                       </a:r>
                       <a:endParaRPr lang="en-US" sz="1000" dirty="0">
                         <a:latin typeface="Arial" charset="0"/>
@@ -3923,7 +3923,7 @@
                           <a:ea typeface="Arial" pitchFamily="34" charset="-122"/>
                           <a:cs typeface="Arial" pitchFamily="34" charset="-120"/>
                         </a:rPr>
-                        <a:t>10.7%</a:t>
+                        <a:t>12.1%</a:t>
                       </a:r>
                       <a:endParaRPr lang="en-US" sz="1000" dirty="0">
                         <a:latin typeface="Arial" charset="0"/>
@@ -3991,7 +3991,7 @@
                           <a:ea typeface="Arial" pitchFamily="34" charset="-122"/>
                           <a:cs typeface="Arial" pitchFamily="34" charset="-120"/>
                         </a:rPr>
-                        <a:t>6%以下</a:t>
+                        <a:t>7%以下</a:t>
                       </a:r>
                       <a:endParaRPr lang="en-US" sz="1000" dirty="0">
                         <a:latin typeface="Arial" charset="0"/>
@@ -4197,7 +4197,7 @@
                           <a:ea typeface="Arial" pitchFamily="34" charset="-122"/>
                           <a:cs typeface="Arial" pitchFamily="34" charset="-120"/>
                         </a:rPr>
-                        <a:t>6.0点</a:t>
+                        <a:t>6.3点</a:t>
                       </a:r>
                       <a:endParaRPr lang="en-US" sz="1000" dirty="0">
                         <a:latin typeface="Arial" charset="0"/>
@@ -4265,7 +4265,7 @@
                           <a:ea typeface="Arial" pitchFamily="34" charset="-122"/>
                           <a:cs typeface="Arial" pitchFamily="34" charset="-120"/>
                         </a:rPr>
-                        <a:t>7.0点以上</a:t>
+                        <a:t>7.3点以上</a:t>
                       </a:r>
                       <a:endParaRPr lang="en-US" sz="1000" dirty="0">
                         <a:latin typeface="Arial" charset="0"/>
@@ -4745,7 +4745,7 @@
                           <a:ea typeface="Arial" pitchFamily="34" charset="-122"/>
                           <a:cs typeface="Arial" pitchFamily="34" charset="-120"/>
                         </a:rPr>
-                        <a:t>約19件/期間</a:t>
+                        <a:t>約21件/期間</a:t>
                       </a:r>
                       <a:endParaRPr lang="en-US" sz="1000" dirty="0">
                         <a:latin typeface="Arial" charset="0"/>
@@ -4813,7 +4813,7 @@
                           <a:ea typeface="Arial" pitchFamily="34" charset="-122"/>
                           <a:cs typeface="Arial" pitchFamily="34" charset="-120"/>
                         </a:rPr>
-                        <a:t>9件以下</a:t>
+                        <a:t>10件以下</a:t>
                       </a:r>
                       <a:endParaRPr lang="en-US" sz="1000" dirty="0">
                         <a:latin typeface="Arial" charset="0"/>
@@ -5384,7 +5384,7 @@
                 <a:ea typeface="Arial" pitchFamily="34" charset="-122"/>
                 <a:cs typeface="Arial" pitchFamily="34" charset="-120"/>
               </a:rPr>
-              <a:t>7.79</a:t>
+              <a:t>7.72</a:t>
             </a:r>
             <a:endParaRPr lang="en-US" sz="3200" dirty="0"/>
           </a:p>
@@ -5509,7 +5509,7 @@
                 <a:ea typeface="Arial" pitchFamily="34" charset="-122"/>
                 <a:cs typeface="Arial" pitchFamily="34" charset="-120"/>
               </a:rPr>
-              <a:t>66.4%</a:t>
+              <a:t>65.7%</a:t>
             </a:r>
             <a:endParaRPr lang="en-US" sz="3200" dirty="0"/>
           </a:p>
@@ -5634,7 +5634,7 @@
                 <a:ea typeface="Arial" pitchFamily="34" charset="-122"/>
                 <a:cs typeface="Arial" pitchFamily="34" charset="-120"/>
               </a:rPr>
-              <a:t>10.7%</a:t>
+              <a:t>12.1%</a:t>
             </a:r>
             <a:endParaRPr lang="en-US" sz="3200" dirty="0"/>
           </a:p>
@@ -5947,7 +5947,7 @@
                 <a:ea typeface="Arial" pitchFamily="34" charset="-122"/>
                 <a:cs typeface="Arial" pitchFamily="34" charset="-120"/>
               </a:rPr>
-              <a:t>  朝食はほぼ毎日同じです</a:t>
+              <a:t>  너무 낡고 조식이 맛엊ㅅ음 古すぎて朝食が味がする</a:t>
             </a:r>
             <a:endParaRPr lang="en-US" sz="1100" dirty="0"/>
           </a:p>
@@ -5987,7 +5987,7 @@
                 <a:ea typeface="Arial" pitchFamily="34" charset="-122"/>
                 <a:cs typeface="Arial" pitchFamily="34" charset="-120"/>
               </a:rPr>
-              <a:t>  スタッフの対応は親切でした</a:t>
+              <a:t>  フロント対応はしっかり、丁寧</a:t>
             </a:r>
             <a:endParaRPr lang="en-US" sz="1100" dirty="0"/>
           </a:p>
@@ -6135,7 +6135,7 @@
                 <a:ea typeface="Arial" pitchFamily="34" charset="-122"/>
                 <a:cs typeface="Arial" pitchFamily="34" charset="-120"/>
               </a:rPr>
-              <a:t>  古い建物だったが部屋には空気清浄機もおいてありベッドの寝心地も良かったです</a:t>
+              <a:t>  設備は古いが清潔であった</a:t>
             </a:r>
             <a:endParaRPr lang="en-US" sz="1100" dirty="0"/>
           </a:p>
@@ -6195,7 +6195,7 @@
                 <a:ea typeface="Arial" pitchFamily="34" charset="-122"/>
                 <a:cs typeface="Arial" pitchFamily="34" charset="-120"/>
               </a:rPr>
-              <a:t>エアコン・空調 </a:t>
+              <a:t>清掃不備 </a:t>
             </a:r>
             <a:endParaRPr lang="en-US" sz="1100" dirty="0"/>
           </a:p>
@@ -6215,7 +6215,7 @@
                 <a:ea typeface="Arial" pitchFamily="34" charset="-122"/>
                 <a:cs typeface="Arial" pitchFamily="34" charset="-120"/>
               </a:rPr>
-              <a:t>  Bien qu'en face de la gare, très bonne insonorisation de ...</a:t>
+              <a:t>  그래서 청결부분에서 좀안좋았던거같아요 서비스는좋앗습니다 日本は狭いですが、キャリアを広げると座る場所がなく、...</a:t>
             </a:r>
             <a:endParaRPr lang="en-US" sz="1100" dirty="0"/>
           </a:p>
@@ -6568,7 +6568,7 @@
                 <a:ea typeface="Arial" pitchFamily="34" charset="-122"/>
                 <a:cs typeface="Arial" pitchFamily="34" charset="-120"/>
               </a:rPr>
-              <a:t>7.79</a:t>
+              <a:t>7.72</a:t>
             </a:r>
             <a:endParaRPr lang="en-US" sz="3200" dirty="0"/>
           </a:p>
@@ -6693,7 +6693,7 @@
                 <a:ea typeface="Arial" pitchFamily="34" charset="-122"/>
                 <a:cs typeface="Arial" pitchFamily="34" charset="-120"/>
               </a:rPr>
-              <a:t>66.4%</a:t>
+              <a:t>65.7%</a:t>
             </a:r>
             <a:endParaRPr lang="en-US" sz="3200" dirty="0"/>
           </a:p>
@@ -6818,7 +6818,7 @@
                 <a:ea typeface="Arial" pitchFamily="34" charset="-122"/>
                 <a:cs typeface="Arial" pitchFamily="34" charset="-120"/>
               </a:rPr>
-              <a:t>10.7%</a:t>
+              <a:t>12.1%</a:t>
             </a:r>
             <a:endParaRPr lang="en-US" sz="3200" dirty="0"/>
           </a:p>
@@ -7364,7 +7364,7 @@
                 <a:ea typeface="Arial" pitchFamily="34" charset="-122"/>
                 <a:cs typeface="Arial" pitchFamily="34" charset="-120"/>
               </a:rPr>
-              <a:t>Trip.com(9.10)が最高スコア。</a:t>
+              <a:t>Trip.com(9.00)が最高スコア。</a:t>
             </a:r>
             <a:endParaRPr lang="en-US" sz="1100" dirty="0"/>
           </a:p>
@@ -7413,7 +7413,7 @@
                 <a:ea typeface="Arial" pitchFamily="34" charset="-122"/>
                 <a:cs typeface="Arial" pitchFamily="34" charset="-120"/>
               </a:rPr>
-              <a:t>楽天トラベル(6.0)が相対的に低い。口コミ返信の強化が急務</a:t>
+              <a:t>楽天トラベル(6.3)が相対的に低い。口コミ返信の強化が急務</a:t>
             </a:r>
             <a:endParaRPr lang="en-US" sz="1100" dirty="0"/>
           </a:p>
@@ -7922,7 +7922,7 @@
                           <a:ea typeface="Arial" pitchFamily="34" charset="-122"/>
                           <a:cs typeface="Arial" pitchFamily="34" charset="-120"/>
                         </a:rPr>
-                        <a:t>51</a:t>
+                        <a:t>52</a:t>
                       </a:r>
                       <a:endParaRPr lang="en-US" sz="900" dirty="0">
                         <a:latin typeface="Arial" charset="0"/>
@@ -7990,7 +7990,7 @@
                           <a:ea typeface="Arial" pitchFamily="34" charset="-122"/>
                           <a:cs typeface="Arial" pitchFamily="34" charset="-120"/>
                         </a:rPr>
-                        <a:t>9.1</a:t>
+                        <a:t>9</a:t>
                       </a:r>
                       <a:endParaRPr lang="en-US" sz="900" dirty="0">
                         <a:latin typeface="Arial" charset="0"/>
@@ -8126,7 +8126,691 @@
                           <a:ea typeface="Arial" pitchFamily="34" charset="-122"/>
                           <a:cs typeface="Arial" pitchFamily="34" charset="-120"/>
                         </a:rPr>
-                        <a:t>9.1</a:t>
+                        <a:t>9</a:t>
+                      </a:r>
+                      <a:endParaRPr lang="en-US" sz="900" dirty="0">
+                        <a:latin typeface="Arial" charset="0"/>
+                        <a:ea typeface="Arial" charset="0"/>
+                        <a:cs typeface="Arial" charset="0"/>
+                      </a:endParaRPr>
+                    </a:p>
+                  </a:txBody>
+                  <a:tcPr marL="91440" marR="91440" marT="45720" marB="45720">
+                    <a:lnL w="6350" cap="flat" cmpd="sng" algn="ctr">
+                      <a:solidFill>
+                        <a:srgbClr val="CBD5E1"/>
+                      </a:solidFill>
+                      <a:prstDash val="solid"/>
+                      <a:round/>
+                      <a:headEnd type="none" w="med" len="med"/>
+                      <a:tailEnd type="none" w="med" len="med"/>
+                    </a:lnL>
+                    <a:lnR w="6350" cap="flat" cmpd="sng" algn="ctr">
+                      <a:solidFill>
+                        <a:srgbClr val="CBD5E1"/>
+                      </a:solidFill>
+                      <a:prstDash val="solid"/>
+                      <a:round/>
+                      <a:headEnd type="none" w="med" len="med"/>
+                      <a:tailEnd type="none" w="med" len="med"/>
+                    </a:lnR>
+                    <a:lnT w="6350" cap="flat" cmpd="sng" algn="ctr">
+                      <a:solidFill>
+                        <a:srgbClr val="CBD5E1"/>
+                      </a:solidFill>
+                      <a:prstDash val="solid"/>
+                      <a:round/>
+                      <a:headEnd type="none" w="med" len="med"/>
+                      <a:tailEnd type="none" w="med" len="med"/>
+                    </a:lnT>
+                    <a:lnB w="6350" cap="flat" cmpd="sng" algn="ctr">
+                      <a:solidFill>
+                        <a:srgbClr val="CBD5E1"/>
+                      </a:solidFill>
+                      <a:prstDash val="solid"/>
+                      <a:round/>
+                      <a:headEnd type="none" w="med" len="med"/>
+                      <a:tailEnd type="none" w="med" len="med"/>
+                    </a:lnB>
+                    <a:solidFill>
+                      <a:srgbClr val="E8EFF8"/>
+                    </a:solidFill>
+                  </a:tcPr>
+                </a:tc>
+              </a:tr>
+              <a:tr h="201168">
+                <a:tc>
+                  <a:txBody>
+                    <a:bodyPr/>
+                    <a:lstStyle/>
+                    <a:p>
+                      <a:pPr algn="ctr" indent="0" marL="0">
+                        <a:buNone/>
+                      </a:pPr>
+                      <a:r>
+                        <a:rPr lang="en-US" sz="900" dirty="0">
+                          <a:solidFill>
+                            <a:srgbClr val="000000"/>
+                          </a:solidFill>
+                          <a:latin typeface="Arial" pitchFamily="34" charset="0"/>
+                          <a:ea typeface="Arial" pitchFamily="34" charset="-122"/>
+                          <a:cs typeface="Arial" pitchFamily="34" charset="-120"/>
+                        </a:rPr>
+                        <a:t>Booking.com</a:t>
+                      </a:r>
+                      <a:endParaRPr lang="en-US" sz="900" dirty="0">
+                        <a:latin typeface="Arial" charset="0"/>
+                        <a:ea typeface="Arial" charset="0"/>
+                        <a:cs typeface="Arial" charset="0"/>
+                      </a:endParaRPr>
+                    </a:p>
+                  </a:txBody>
+                  <a:tcPr marL="91440" marR="91440" marT="45720" marB="45720">
+                    <a:lnL w="6350" cap="flat" cmpd="sng" algn="ctr">
+                      <a:solidFill>
+                        <a:srgbClr val="CBD5E1"/>
+                      </a:solidFill>
+                      <a:prstDash val="solid"/>
+                      <a:round/>
+                      <a:headEnd type="none" w="med" len="med"/>
+                      <a:tailEnd type="none" w="med" len="med"/>
+                    </a:lnL>
+                    <a:lnR w="6350" cap="flat" cmpd="sng" algn="ctr">
+                      <a:solidFill>
+                        <a:srgbClr val="CBD5E1"/>
+                      </a:solidFill>
+                      <a:prstDash val="solid"/>
+                      <a:round/>
+                      <a:headEnd type="none" w="med" len="med"/>
+                      <a:tailEnd type="none" w="med" len="med"/>
+                    </a:lnR>
+                    <a:lnT w="6350" cap="flat" cmpd="sng" algn="ctr">
+                      <a:solidFill>
+                        <a:srgbClr val="CBD5E1"/>
+                      </a:solidFill>
+                      <a:prstDash val="solid"/>
+                      <a:round/>
+                      <a:headEnd type="none" w="med" len="med"/>
+                      <a:tailEnd type="none" w="med" len="med"/>
+                    </a:lnT>
+                    <a:lnB w="6350" cap="flat" cmpd="sng" algn="ctr">
+                      <a:solidFill>
+                        <a:srgbClr val="CBD5E1"/>
+                      </a:solidFill>
+                      <a:prstDash val="solid"/>
+                      <a:round/>
+                      <a:headEnd type="none" w="med" len="med"/>
+                      <a:tailEnd type="none" w="med" len="med"/>
+                    </a:lnB>
+                    <a:solidFill>
+                      <a:srgbClr val="FFFFFF"/>
+                    </a:solidFill>
+                  </a:tcPr>
+                </a:tc>
+                <a:tc>
+                  <a:txBody>
+                    <a:bodyPr/>
+                    <a:lstStyle/>
+                    <a:p>
+                      <a:pPr algn="ctr" indent="0" marL="0">
+                        <a:buNone/>
+                      </a:pPr>
+                      <a:r>
+                        <a:rPr lang="en-US" sz="900" dirty="0">
+                          <a:solidFill>
+                            <a:srgbClr val="000000"/>
+                          </a:solidFill>
+                          <a:latin typeface="Arial" pitchFamily="34" charset="0"/>
+                          <a:ea typeface="Arial" pitchFamily="34" charset="-122"/>
+                          <a:cs typeface="Arial" pitchFamily="34" charset="-120"/>
+                        </a:rPr>
+                        <a:t>39</a:t>
+                      </a:r>
+                      <a:endParaRPr lang="en-US" sz="900" dirty="0">
+                        <a:latin typeface="Arial" charset="0"/>
+                        <a:ea typeface="Arial" charset="0"/>
+                        <a:cs typeface="Arial" charset="0"/>
+                      </a:endParaRPr>
+                    </a:p>
+                  </a:txBody>
+                  <a:tcPr marL="91440" marR="91440" marT="45720" marB="45720">
+                    <a:lnL w="6350" cap="flat" cmpd="sng" algn="ctr">
+                      <a:solidFill>
+                        <a:srgbClr val="CBD5E1"/>
+                      </a:solidFill>
+                      <a:prstDash val="solid"/>
+                      <a:round/>
+                      <a:headEnd type="none" w="med" len="med"/>
+                      <a:tailEnd type="none" w="med" len="med"/>
+                    </a:lnL>
+                    <a:lnR w="6350" cap="flat" cmpd="sng" algn="ctr">
+                      <a:solidFill>
+                        <a:srgbClr val="CBD5E1"/>
+                      </a:solidFill>
+                      <a:prstDash val="solid"/>
+                      <a:round/>
+                      <a:headEnd type="none" w="med" len="med"/>
+                      <a:tailEnd type="none" w="med" len="med"/>
+                    </a:lnR>
+                    <a:lnT w="6350" cap="flat" cmpd="sng" algn="ctr">
+                      <a:solidFill>
+                        <a:srgbClr val="CBD5E1"/>
+                      </a:solidFill>
+                      <a:prstDash val="solid"/>
+                      <a:round/>
+                      <a:headEnd type="none" w="med" len="med"/>
+                      <a:tailEnd type="none" w="med" len="med"/>
+                    </a:lnT>
+                    <a:lnB w="6350" cap="flat" cmpd="sng" algn="ctr">
+                      <a:solidFill>
+                        <a:srgbClr val="CBD5E1"/>
+                      </a:solidFill>
+                      <a:prstDash val="solid"/>
+                      <a:round/>
+                      <a:headEnd type="none" w="med" len="med"/>
+                      <a:tailEnd type="none" w="med" len="med"/>
+                    </a:lnB>
+                    <a:solidFill>
+                      <a:srgbClr val="FFFFFF"/>
+                    </a:solidFill>
+                  </a:tcPr>
+                </a:tc>
+                <a:tc>
+                  <a:txBody>
+                    <a:bodyPr/>
+                    <a:lstStyle/>
+                    <a:p>
+                      <a:pPr algn="ctr" indent="0" marL="0">
+                        <a:buNone/>
+                      </a:pPr>
+                      <a:r>
+                        <a:rPr lang="en-US" sz="900" dirty="0">
+                          <a:solidFill>
+                            <a:srgbClr val="000000"/>
+                          </a:solidFill>
+                          <a:latin typeface="Arial" pitchFamily="34" charset="0"/>
+                          <a:ea typeface="Arial" pitchFamily="34" charset="-122"/>
+                          <a:cs typeface="Arial" pitchFamily="34" charset="-120"/>
+                        </a:rPr>
+                        <a:t>7.05</a:t>
+                      </a:r>
+                      <a:endParaRPr lang="en-US" sz="900" dirty="0">
+                        <a:latin typeface="Arial" charset="0"/>
+                        <a:ea typeface="Arial" charset="0"/>
+                        <a:cs typeface="Arial" charset="0"/>
+                      </a:endParaRPr>
+                    </a:p>
+                  </a:txBody>
+                  <a:tcPr marL="91440" marR="91440" marT="45720" marB="45720">
+                    <a:lnL w="6350" cap="flat" cmpd="sng" algn="ctr">
+                      <a:solidFill>
+                        <a:srgbClr val="CBD5E1"/>
+                      </a:solidFill>
+                      <a:prstDash val="solid"/>
+                      <a:round/>
+                      <a:headEnd type="none" w="med" len="med"/>
+                      <a:tailEnd type="none" w="med" len="med"/>
+                    </a:lnL>
+                    <a:lnR w="6350" cap="flat" cmpd="sng" algn="ctr">
+                      <a:solidFill>
+                        <a:srgbClr val="CBD5E1"/>
+                      </a:solidFill>
+                      <a:prstDash val="solid"/>
+                      <a:round/>
+                      <a:headEnd type="none" w="med" len="med"/>
+                      <a:tailEnd type="none" w="med" len="med"/>
+                    </a:lnR>
+                    <a:lnT w="6350" cap="flat" cmpd="sng" algn="ctr">
+                      <a:solidFill>
+                        <a:srgbClr val="CBD5E1"/>
+                      </a:solidFill>
+                      <a:prstDash val="solid"/>
+                      <a:round/>
+                      <a:headEnd type="none" w="med" len="med"/>
+                      <a:tailEnd type="none" w="med" len="med"/>
+                    </a:lnT>
+                    <a:lnB w="6350" cap="flat" cmpd="sng" algn="ctr">
+                      <a:solidFill>
+                        <a:srgbClr val="CBD5E1"/>
+                      </a:solidFill>
+                      <a:prstDash val="solid"/>
+                      <a:round/>
+                      <a:headEnd type="none" w="med" len="med"/>
+                      <a:tailEnd type="none" w="med" len="med"/>
+                    </a:lnB>
+                    <a:solidFill>
+                      <a:srgbClr val="FFFFFF"/>
+                    </a:solidFill>
+                  </a:tcPr>
+                </a:tc>
+                <a:tc>
+                  <a:txBody>
+                    <a:bodyPr/>
+                    <a:lstStyle/>
+                    <a:p>
+                      <a:pPr algn="ctr" indent="0" marL="0">
+                        <a:buNone/>
+                      </a:pPr>
+                      <a:r>
+                        <a:rPr lang="en-US" sz="900" dirty="0">
+                          <a:solidFill>
+                            <a:srgbClr val="000000"/>
+                          </a:solidFill>
+                          <a:latin typeface="Arial" pitchFamily="34" charset="0"/>
+                          <a:ea typeface="Arial" pitchFamily="34" charset="-122"/>
+                          <a:cs typeface="Arial" pitchFamily="34" charset="-120"/>
+                        </a:rPr>
+                        <a:t>/10</a:t>
+                      </a:r>
+                      <a:endParaRPr lang="en-US" sz="900" dirty="0">
+                        <a:latin typeface="Arial" charset="0"/>
+                        <a:ea typeface="Arial" charset="0"/>
+                        <a:cs typeface="Arial" charset="0"/>
+                      </a:endParaRPr>
+                    </a:p>
+                  </a:txBody>
+                  <a:tcPr marL="91440" marR="91440" marT="45720" marB="45720">
+                    <a:lnL w="6350" cap="flat" cmpd="sng" algn="ctr">
+                      <a:solidFill>
+                        <a:srgbClr val="CBD5E1"/>
+                      </a:solidFill>
+                      <a:prstDash val="solid"/>
+                      <a:round/>
+                      <a:headEnd type="none" w="med" len="med"/>
+                      <a:tailEnd type="none" w="med" len="med"/>
+                    </a:lnL>
+                    <a:lnR w="6350" cap="flat" cmpd="sng" algn="ctr">
+                      <a:solidFill>
+                        <a:srgbClr val="CBD5E1"/>
+                      </a:solidFill>
+                      <a:prstDash val="solid"/>
+                      <a:round/>
+                      <a:headEnd type="none" w="med" len="med"/>
+                      <a:tailEnd type="none" w="med" len="med"/>
+                    </a:lnR>
+                    <a:lnT w="6350" cap="flat" cmpd="sng" algn="ctr">
+                      <a:solidFill>
+                        <a:srgbClr val="CBD5E1"/>
+                      </a:solidFill>
+                      <a:prstDash val="solid"/>
+                      <a:round/>
+                      <a:headEnd type="none" w="med" len="med"/>
+                      <a:tailEnd type="none" w="med" len="med"/>
+                    </a:lnT>
+                    <a:lnB w="6350" cap="flat" cmpd="sng" algn="ctr">
+                      <a:solidFill>
+                        <a:srgbClr val="CBD5E1"/>
+                      </a:solidFill>
+                      <a:prstDash val="solid"/>
+                      <a:round/>
+                      <a:headEnd type="none" w="med" len="med"/>
+                      <a:tailEnd type="none" w="med" len="med"/>
+                    </a:lnB>
+                    <a:solidFill>
+                      <a:srgbClr val="FFFFFF"/>
+                    </a:solidFill>
+                  </a:tcPr>
+                </a:tc>
+                <a:tc>
+                  <a:txBody>
+                    <a:bodyPr/>
+                    <a:lstStyle/>
+                    <a:p>
+                      <a:pPr algn="ctr" indent="0" marL="0">
+                        <a:buNone/>
+                      </a:pPr>
+                      <a:r>
+                        <a:rPr lang="en-US" sz="900" dirty="0">
+                          <a:solidFill>
+                            <a:srgbClr val="000000"/>
+                          </a:solidFill>
+                          <a:latin typeface="Arial" pitchFamily="34" charset="0"/>
+                          <a:ea typeface="Arial" pitchFamily="34" charset="-122"/>
+                          <a:cs typeface="Arial" pitchFamily="34" charset="-120"/>
+                        </a:rPr>
+                        <a:t>7.05</a:t>
+                      </a:r>
+                      <a:endParaRPr lang="en-US" sz="900" dirty="0">
+                        <a:latin typeface="Arial" charset="0"/>
+                        <a:ea typeface="Arial" charset="0"/>
+                        <a:cs typeface="Arial" charset="0"/>
+                      </a:endParaRPr>
+                    </a:p>
+                  </a:txBody>
+                  <a:tcPr marL="91440" marR="91440" marT="45720" marB="45720">
+                    <a:lnL w="6350" cap="flat" cmpd="sng" algn="ctr">
+                      <a:solidFill>
+                        <a:srgbClr val="CBD5E1"/>
+                      </a:solidFill>
+                      <a:prstDash val="solid"/>
+                      <a:round/>
+                      <a:headEnd type="none" w="med" len="med"/>
+                      <a:tailEnd type="none" w="med" len="med"/>
+                    </a:lnL>
+                    <a:lnR w="6350" cap="flat" cmpd="sng" algn="ctr">
+                      <a:solidFill>
+                        <a:srgbClr val="CBD5E1"/>
+                      </a:solidFill>
+                      <a:prstDash val="solid"/>
+                      <a:round/>
+                      <a:headEnd type="none" w="med" len="med"/>
+                      <a:tailEnd type="none" w="med" len="med"/>
+                    </a:lnR>
+                    <a:lnT w="6350" cap="flat" cmpd="sng" algn="ctr">
+                      <a:solidFill>
+                        <a:srgbClr val="CBD5E1"/>
+                      </a:solidFill>
+                      <a:prstDash val="solid"/>
+                      <a:round/>
+                      <a:headEnd type="none" w="med" len="med"/>
+                      <a:tailEnd type="none" w="med" len="med"/>
+                    </a:lnT>
+                    <a:lnB w="6350" cap="flat" cmpd="sng" algn="ctr">
+                      <a:solidFill>
+                        <a:srgbClr val="CBD5E1"/>
+                      </a:solidFill>
+                      <a:prstDash val="solid"/>
+                      <a:round/>
+                      <a:headEnd type="none" w="med" len="med"/>
+                      <a:tailEnd type="none" w="med" len="med"/>
+                    </a:lnB>
+                    <a:solidFill>
+                      <a:srgbClr val="FFFFFF"/>
+                    </a:solidFill>
+                  </a:tcPr>
+                </a:tc>
+              </a:tr>
+              <a:tr h="201168">
+                <a:tc>
+                  <a:txBody>
+                    <a:bodyPr/>
+                    <a:lstStyle/>
+                    <a:p>
+                      <a:pPr algn="ctr" indent="0" marL="0">
+                        <a:buNone/>
+                      </a:pPr>
+                      <a:r>
+                        <a:rPr lang="en-US" sz="900" dirty="0">
+                          <a:solidFill>
+                            <a:srgbClr val="000000"/>
+                          </a:solidFill>
+                          <a:latin typeface="Arial" pitchFamily="34" charset="0"/>
+                          <a:ea typeface="Arial" pitchFamily="34" charset="-122"/>
+                          <a:cs typeface="Arial" pitchFamily="34" charset="-120"/>
+                        </a:rPr>
+                        <a:t>Google</a:t>
+                      </a:r>
+                      <a:endParaRPr lang="en-US" sz="900" dirty="0">
+                        <a:latin typeface="Arial" charset="0"/>
+                        <a:ea typeface="Arial" charset="0"/>
+                        <a:cs typeface="Arial" charset="0"/>
+                      </a:endParaRPr>
+                    </a:p>
+                  </a:txBody>
+                  <a:tcPr marL="91440" marR="91440" marT="45720" marB="45720">
+                    <a:lnL w="6350" cap="flat" cmpd="sng" algn="ctr">
+                      <a:solidFill>
+                        <a:srgbClr val="CBD5E1"/>
+                      </a:solidFill>
+                      <a:prstDash val="solid"/>
+                      <a:round/>
+                      <a:headEnd type="none" w="med" len="med"/>
+                      <a:tailEnd type="none" w="med" len="med"/>
+                    </a:lnL>
+                    <a:lnR w="6350" cap="flat" cmpd="sng" algn="ctr">
+                      <a:solidFill>
+                        <a:srgbClr val="CBD5E1"/>
+                      </a:solidFill>
+                      <a:prstDash val="solid"/>
+                      <a:round/>
+                      <a:headEnd type="none" w="med" len="med"/>
+                      <a:tailEnd type="none" w="med" len="med"/>
+                    </a:lnR>
+                    <a:lnT w="6350" cap="flat" cmpd="sng" algn="ctr">
+                      <a:solidFill>
+                        <a:srgbClr val="CBD5E1"/>
+                      </a:solidFill>
+                      <a:prstDash val="solid"/>
+                      <a:round/>
+                      <a:headEnd type="none" w="med" len="med"/>
+                      <a:tailEnd type="none" w="med" len="med"/>
+                    </a:lnT>
+                    <a:lnB w="6350" cap="flat" cmpd="sng" algn="ctr">
+                      <a:solidFill>
+                        <a:srgbClr val="CBD5E1"/>
+                      </a:solidFill>
+                      <a:prstDash val="solid"/>
+                      <a:round/>
+                      <a:headEnd type="none" w="med" len="med"/>
+                      <a:tailEnd type="none" w="med" len="med"/>
+                    </a:lnB>
+                    <a:solidFill>
+                      <a:srgbClr val="E8EFF8"/>
+                    </a:solidFill>
+                  </a:tcPr>
+                </a:tc>
+                <a:tc>
+                  <a:txBody>
+                    <a:bodyPr/>
+                    <a:lstStyle/>
+                    <a:p>
+                      <a:pPr algn="ctr" indent="0" marL="0">
+                        <a:buNone/>
+                      </a:pPr>
+                      <a:r>
+                        <a:rPr lang="en-US" sz="900" dirty="0">
+                          <a:solidFill>
+                            <a:srgbClr val="000000"/>
+                          </a:solidFill>
+                          <a:latin typeface="Arial" pitchFamily="34" charset="0"/>
+                          <a:ea typeface="Arial" pitchFamily="34" charset="-122"/>
+                          <a:cs typeface="Arial" pitchFamily="34" charset="-120"/>
+                        </a:rPr>
+                        <a:t>33</a:t>
+                      </a:r>
+                      <a:endParaRPr lang="en-US" sz="900" dirty="0">
+                        <a:latin typeface="Arial" charset="0"/>
+                        <a:ea typeface="Arial" charset="0"/>
+                        <a:cs typeface="Arial" charset="0"/>
+                      </a:endParaRPr>
+                    </a:p>
+                  </a:txBody>
+                  <a:tcPr marL="91440" marR="91440" marT="45720" marB="45720">
+                    <a:lnL w="6350" cap="flat" cmpd="sng" algn="ctr">
+                      <a:solidFill>
+                        <a:srgbClr val="CBD5E1"/>
+                      </a:solidFill>
+                      <a:prstDash val="solid"/>
+                      <a:round/>
+                      <a:headEnd type="none" w="med" len="med"/>
+                      <a:tailEnd type="none" w="med" len="med"/>
+                    </a:lnL>
+                    <a:lnR w="6350" cap="flat" cmpd="sng" algn="ctr">
+                      <a:solidFill>
+                        <a:srgbClr val="CBD5E1"/>
+                      </a:solidFill>
+                      <a:prstDash val="solid"/>
+                      <a:round/>
+                      <a:headEnd type="none" w="med" len="med"/>
+                      <a:tailEnd type="none" w="med" len="med"/>
+                    </a:lnR>
+                    <a:lnT w="6350" cap="flat" cmpd="sng" algn="ctr">
+                      <a:solidFill>
+                        <a:srgbClr val="CBD5E1"/>
+                      </a:solidFill>
+                      <a:prstDash val="solid"/>
+                      <a:round/>
+                      <a:headEnd type="none" w="med" len="med"/>
+                      <a:tailEnd type="none" w="med" len="med"/>
+                    </a:lnT>
+                    <a:lnB w="6350" cap="flat" cmpd="sng" algn="ctr">
+                      <a:solidFill>
+                        <a:srgbClr val="CBD5E1"/>
+                      </a:solidFill>
+                      <a:prstDash val="solid"/>
+                      <a:round/>
+                      <a:headEnd type="none" w="med" len="med"/>
+                      <a:tailEnd type="none" w="med" len="med"/>
+                    </a:lnB>
+                    <a:solidFill>
+                      <a:srgbClr val="E8EFF8"/>
+                    </a:solidFill>
+                  </a:tcPr>
+                </a:tc>
+                <a:tc>
+                  <a:txBody>
+                    <a:bodyPr/>
+                    <a:lstStyle/>
+                    <a:p>
+                      <a:pPr algn="ctr" indent="0" marL="0">
+                        <a:buNone/>
+                      </a:pPr>
+                      <a:r>
+                        <a:rPr lang="en-US" sz="900" dirty="0">
+                          <a:solidFill>
+                            <a:srgbClr val="000000"/>
+                          </a:solidFill>
+                          <a:latin typeface="Arial" pitchFamily="34" charset="0"/>
+                          <a:ea typeface="Arial" pitchFamily="34" charset="-122"/>
+                          <a:cs typeface="Arial" pitchFamily="34" charset="-120"/>
+                        </a:rPr>
+                        <a:t>3.52</a:t>
+                      </a:r>
+                      <a:endParaRPr lang="en-US" sz="900" dirty="0">
+                        <a:latin typeface="Arial" charset="0"/>
+                        <a:ea typeface="Arial" charset="0"/>
+                        <a:cs typeface="Arial" charset="0"/>
+                      </a:endParaRPr>
+                    </a:p>
+                  </a:txBody>
+                  <a:tcPr marL="91440" marR="91440" marT="45720" marB="45720">
+                    <a:lnL w="6350" cap="flat" cmpd="sng" algn="ctr">
+                      <a:solidFill>
+                        <a:srgbClr val="CBD5E1"/>
+                      </a:solidFill>
+                      <a:prstDash val="solid"/>
+                      <a:round/>
+                      <a:headEnd type="none" w="med" len="med"/>
+                      <a:tailEnd type="none" w="med" len="med"/>
+                    </a:lnL>
+                    <a:lnR w="6350" cap="flat" cmpd="sng" algn="ctr">
+                      <a:solidFill>
+                        <a:srgbClr val="CBD5E1"/>
+                      </a:solidFill>
+                      <a:prstDash val="solid"/>
+                      <a:round/>
+                      <a:headEnd type="none" w="med" len="med"/>
+                      <a:tailEnd type="none" w="med" len="med"/>
+                    </a:lnR>
+                    <a:lnT w="6350" cap="flat" cmpd="sng" algn="ctr">
+                      <a:solidFill>
+                        <a:srgbClr val="CBD5E1"/>
+                      </a:solidFill>
+                      <a:prstDash val="solid"/>
+                      <a:round/>
+                      <a:headEnd type="none" w="med" len="med"/>
+                      <a:tailEnd type="none" w="med" len="med"/>
+                    </a:lnT>
+                    <a:lnB w="6350" cap="flat" cmpd="sng" algn="ctr">
+                      <a:solidFill>
+                        <a:srgbClr val="CBD5E1"/>
+                      </a:solidFill>
+                      <a:prstDash val="solid"/>
+                      <a:round/>
+                      <a:headEnd type="none" w="med" len="med"/>
+                      <a:tailEnd type="none" w="med" len="med"/>
+                    </a:lnB>
+                    <a:solidFill>
+                      <a:srgbClr val="E8EFF8"/>
+                    </a:solidFill>
+                  </a:tcPr>
+                </a:tc>
+                <a:tc>
+                  <a:txBody>
+                    <a:bodyPr/>
+                    <a:lstStyle/>
+                    <a:p>
+                      <a:pPr algn="ctr" indent="0" marL="0">
+                        <a:buNone/>
+                      </a:pPr>
+                      <a:r>
+                        <a:rPr lang="en-US" sz="900" dirty="0">
+                          <a:solidFill>
+                            <a:srgbClr val="000000"/>
+                          </a:solidFill>
+                          <a:latin typeface="Arial" pitchFamily="34" charset="0"/>
+                          <a:ea typeface="Arial" pitchFamily="34" charset="-122"/>
+                          <a:cs typeface="Arial" pitchFamily="34" charset="-120"/>
+                        </a:rPr>
+                        <a:t>/5 (×2)</a:t>
+                      </a:r>
+                      <a:endParaRPr lang="en-US" sz="900" dirty="0">
+                        <a:latin typeface="Arial" charset="0"/>
+                        <a:ea typeface="Arial" charset="0"/>
+                        <a:cs typeface="Arial" charset="0"/>
+                      </a:endParaRPr>
+                    </a:p>
+                  </a:txBody>
+                  <a:tcPr marL="91440" marR="91440" marT="45720" marB="45720">
+                    <a:lnL w="6350" cap="flat" cmpd="sng" algn="ctr">
+                      <a:solidFill>
+                        <a:srgbClr val="CBD5E1"/>
+                      </a:solidFill>
+                      <a:prstDash val="solid"/>
+                      <a:round/>
+                      <a:headEnd type="none" w="med" len="med"/>
+                      <a:tailEnd type="none" w="med" len="med"/>
+                    </a:lnL>
+                    <a:lnR w="6350" cap="flat" cmpd="sng" algn="ctr">
+                      <a:solidFill>
+                        <a:srgbClr val="CBD5E1"/>
+                      </a:solidFill>
+                      <a:prstDash val="solid"/>
+                      <a:round/>
+                      <a:headEnd type="none" w="med" len="med"/>
+                      <a:tailEnd type="none" w="med" len="med"/>
+                    </a:lnR>
+                    <a:lnT w="6350" cap="flat" cmpd="sng" algn="ctr">
+                      <a:solidFill>
+                        <a:srgbClr val="CBD5E1"/>
+                      </a:solidFill>
+                      <a:prstDash val="solid"/>
+                      <a:round/>
+                      <a:headEnd type="none" w="med" len="med"/>
+                      <a:tailEnd type="none" w="med" len="med"/>
+                    </a:lnT>
+                    <a:lnB w="6350" cap="flat" cmpd="sng" algn="ctr">
+                      <a:solidFill>
+                        <a:srgbClr val="CBD5E1"/>
+                      </a:solidFill>
+                      <a:prstDash val="solid"/>
+                      <a:round/>
+                      <a:headEnd type="none" w="med" len="med"/>
+                      <a:tailEnd type="none" w="med" len="med"/>
+                    </a:lnB>
+                    <a:solidFill>
+                      <a:srgbClr val="E8EFF8"/>
+                    </a:solidFill>
+                  </a:tcPr>
+                </a:tc>
+                <a:tc>
+                  <a:txBody>
+                    <a:bodyPr/>
+                    <a:lstStyle/>
+                    <a:p>
+                      <a:pPr algn="ctr" indent="0" marL="0">
+                        <a:buNone/>
+                      </a:pPr>
+                      <a:r>
+                        <a:rPr lang="en-US" sz="900" dirty="0">
+                          <a:solidFill>
+                            <a:srgbClr val="000000"/>
+                          </a:solidFill>
+                          <a:latin typeface="Arial" pitchFamily="34" charset="0"/>
+                          <a:ea typeface="Arial" pitchFamily="34" charset="-122"/>
+                          <a:cs typeface="Arial" pitchFamily="34" charset="-120"/>
+                        </a:rPr>
+                        <a:t>7.03</a:t>
                       </a:r>
                       <a:endParaRPr lang="en-US" sz="900" dirty="0">
                         <a:latin typeface="Arial" charset="0"/>
@@ -8264,7 +8948,7 @@
                           <a:ea typeface="Arial" pitchFamily="34" charset="-122"/>
                           <a:cs typeface="Arial" pitchFamily="34" charset="-120"/>
                         </a:rPr>
-                        <a:t>10</a:t>
+                        <a:t>9</a:t>
                       </a:r>
                       <a:endParaRPr lang="en-US" sz="900" dirty="0">
                         <a:latin typeface="Arial" charset="0"/>
@@ -8332,7 +9016,7 @@
                           <a:ea typeface="Arial" pitchFamily="34" charset="-122"/>
                           <a:cs typeface="Arial" pitchFamily="34" charset="-120"/>
                         </a:rPr>
-                        <a:t>3.6</a:t>
+                        <a:t>3.44</a:t>
                       </a:r>
                       <a:endParaRPr lang="en-US" sz="900" dirty="0">
                         <a:latin typeface="Arial" charset="0"/>
@@ -8468,691 +9152,7 @@
                           <a:ea typeface="Arial" pitchFamily="34" charset="-122"/>
                           <a:cs typeface="Arial" pitchFamily="34" charset="-120"/>
                         </a:rPr>
-                        <a:t>7.2</a:t>
-                      </a:r>
-                      <a:endParaRPr lang="en-US" sz="900" dirty="0">
-                        <a:latin typeface="Arial" charset="0"/>
-                        <a:ea typeface="Arial" charset="0"/>
-                        <a:cs typeface="Arial" charset="0"/>
-                      </a:endParaRPr>
-                    </a:p>
-                  </a:txBody>
-                  <a:tcPr marL="91440" marR="91440" marT="45720" marB="45720">
-                    <a:lnL w="6350" cap="flat" cmpd="sng" algn="ctr">
-                      <a:solidFill>
-                        <a:srgbClr val="CBD5E1"/>
-                      </a:solidFill>
-                      <a:prstDash val="solid"/>
-                      <a:round/>
-                      <a:headEnd type="none" w="med" len="med"/>
-                      <a:tailEnd type="none" w="med" len="med"/>
-                    </a:lnL>
-                    <a:lnR w="6350" cap="flat" cmpd="sng" algn="ctr">
-                      <a:solidFill>
-                        <a:srgbClr val="CBD5E1"/>
-                      </a:solidFill>
-                      <a:prstDash val="solid"/>
-                      <a:round/>
-                      <a:headEnd type="none" w="med" len="med"/>
-                      <a:tailEnd type="none" w="med" len="med"/>
-                    </a:lnR>
-                    <a:lnT w="6350" cap="flat" cmpd="sng" algn="ctr">
-                      <a:solidFill>
-                        <a:srgbClr val="CBD5E1"/>
-                      </a:solidFill>
-                      <a:prstDash val="solid"/>
-                      <a:round/>
-                      <a:headEnd type="none" w="med" len="med"/>
-                      <a:tailEnd type="none" w="med" len="med"/>
-                    </a:lnT>
-                    <a:lnB w="6350" cap="flat" cmpd="sng" algn="ctr">
-                      <a:solidFill>
-                        <a:srgbClr val="CBD5E1"/>
-                      </a:solidFill>
-                      <a:prstDash val="solid"/>
-                      <a:round/>
-                      <a:headEnd type="none" w="med" len="med"/>
-                      <a:tailEnd type="none" w="med" len="med"/>
-                    </a:lnB>
-                    <a:solidFill>
-                      <a:srgbClr val="FFFFFF"/>
-                    </a:solidFill>
-                  </a:tcPr>
-                </a:tc>
-              </a:tr>
-              <a:tr h="201168">
-                <a:tc>
-                  <a:txBody>
-                    <a:bodyPr/>
-                    <a:lstStyle/>
-                    <a:p>
-                      <a:pPr algn="ctr" indent="0" marL="0">
-                        <a:buNone/>
-                      </a:pPr>
-                      <a:r>
-                        <a:rPr lang="en-US" sz="900" dirty="0">
-                          <a:solidFill>
-                            <a:srgbClr val="000000"/>
-                          </a:solidFill>
-                          <a:latin typeface="Arial" pitchFamily="34" charset="0"/>
-                          <a:ea typeface="Arial" pitchFamily="34" charset="-122"/>
-                          <a:cs typeface="Arial" pitchFamily="34" charset="-120"/>
-                        </a:rPr>
-                        <a:t>Google</a:t>
-                      </a:r>
-                      <a:endParaRPr lang="en-US" sz="900" dirty="0">
-                        <a:latin typeface="Arial" charset="0"/>
-                        <a:ea typeface="Arial" charset="0"/>
-                        <a:cs typeface="Arial" charset="0"/>
-                      </a:endParaRPr>
-                    </a:p>
-                  </a:txBody>
-                  <a:tcPr marL="91440" marR="91440" marT="45720" marB="45720">
-                    <a:lnL w="6350" cap="flat" cmpd="sng" algn="ctr">
-                      <a:solidFill>
-                        <a:srgbClr val="CBD5E1"/>
-                      </a:solidFill>
-                      <a:prstDash val="solid"/>
-                      <a:round/>
-                      <a:headEnd type="none" w="med" len="med"/>
-                      <a:tailEnd type="none" w="med" len="med"/>
-                    </a:lnL>
-                    <a:lnR w="6350" cap="flat" cmpd="sng" algn="ctr">
-                      <a:solidFill>
-                        <a:srgbClr val="CBD5E1"/>
-                      </a:solidFill>
-                      <a:prstDash val="solid"/>
-                      <a:round/>
-                      <a:headEnd type="none" w="med" len="med"/>
-                      <a:tailEnd type="none" w="med" len="med"/>
-                    </a:lnR>
-                    <a:lnT w="6350" cap="flat" cmpd="sng" algn="ctr">
-                      <a:solidFill>
-                        <a:srgbClr val="CBD5E1"/>
-                      </a:solidFill>
-                      <a:prstDash val="solid"/>
-                      <a:round/>
-                      <a:headEnd type="none" w="med" len="med"/>
-                      <a:tailEnd type="none" w="med" len="med"/>
-                    </a:lnT>
-                    <a:lnB w="6350" cap="flat" cmpd="sng" algn="ctr">
-                      <a:solidFill>
-                        <a:srgbClr val="CBD5E1"/>
-                      </a:solidFill>
-                      <a:prstDash val="solid"/>
-                      <a:round/>
-                      <a:headEnd type="none" w="med" len="med"/>
-                      <a:tailEnd type="none" w="med" len="med"/>
-                    </a:lnB>
-                    <a:solidFill>
-                      <a:srgbClr val="E8EFF8"/>
-                    </a:solidFill>
-                  </a:tcPr>
-                </a:tc>
-                <a:tc>
-                  <a:txBody>
-                    <a:bodyPr/>
-                    <a:lstStyle/>
-                    <a:p>
-                      <a:pPr algn="ctr" indent="0" marL="0">
-                        <a:buNone/>
-                      </a:pPr>
-                      <a:r>
-                        <a:rPr lang="en-US" sz="900" dirty="0">
-                          <a:solidFill>
-                            <a:srgbClr val="000000"/>
-                          </a:solidFill>
-                          <a:latin typeface="Arial" pitchFamily="34" charset="0"/>
-                          <a:ea typeface="Arial" pitchFamily="34" charset="-122"/>
-                          <a:cs typeface="Arial" pitchFamily="34" charset="-120"/>
-                        </a:rPr>
-                        <a:t>34</a:t>
-                      </a:r>
-                      <a:endParaRPr lang="en-US" sz="900" dirty="0">
-                        <a:latin typeface="Arial" charset="0"/>
-                        <a:ea typeface="Arial" charset="0"/>
-                        <a:cs typeface="Arial" charset="0"/>
-                      </a:endParaRPr>
-                    </a:p>
-                  </a:txBody>
-                  <a:tcPr marL="91440" marR="91440" marT="45720" marB="45720">
-                    <a:lnL w="6350" cap="flat" cmpd="sng" algn="ctr">
-                      <a:solidFill>
-                        <a:srgbClr val="CBD5E1"/>
-                      </a:solidFill>
-                      <a:prstDash val="solid"/>
-                      <a:round/>
-                      <a:headEnd type="none" w="med" len="med"/>
-                      <a:tailEnd type="none" w="med" len="med"/>
-                    </a:lnL>
-                    <a:lnR w="6350" cap="flat" cmpd="sng" algn="ctr">
-                      <a:solidFill>
-                        <a:srgbClr val="CBD5E1"/>
-                      </a:solidFill>
-                      <a:prstDash val="solid"/>
-                      <a:round/>
-                      <a:headEnd type="none" w="med" len="med"/>
-                      <a:tailEnd type="none" w="med" len="med"/>
-                    </a:lnR>
-                    <a:lnT w="6350" cap="flat" cmpd="sng" algn="ctr">
-                      <a:solidFill>
-                        <a:srgbClr val="CBD5E1"/>
-                      </a:solidFill>
-                      <a:prstDash val="solid"/>
-                      <a:round/>
-                      <a:headEnd type="none" w="med" len="med"/>
-                      <a:tailEnd type="none" w="med" len="med"/>
-                    </a:lnT>
-                    <a:lnB w="6350" cap="flat" cmpd="sng" algn="ctr">
-                      <a:solidFill>
-                        <a:srgbClr val="CBD5E1"/>
-                      </a:solidFill>
-                      <a:prstDash val="solid"/>
-                      <a:round/>
-                      <a:headEnd type="none" w="med" len="med"/>
-                      <a:tailEnd type="none" w="med" len="med"/>
-                    </a:lnB>
-                    <a:solidFill>
-                      <a:srgbClr val="E8EFF8"/>
-                    </a:solidFill>
-                  </a:tcPr>
-                </a:tc>
-                <a:tc>
-                  <a:txBody>
-                    <a:bodyPr/>
-                    <a:lstStyle/>
-                    <a:p>
-                      <a:pPr algn="ctr" indent="0" marL="0">
-                        <a:buNone/>
-                      </a:pPr>
-                      <a:r>
-                        <a:rPr lang="en-US" sz="900" dirty="0">
-                          <a:solidFill>
-                            <a:srgbClr val="000000"/>
-                          </a:solidFill>
-                          <a:latin typeface="Arial" pitchFamily="34" charset="0"/>
-                          <a:ea typeface="Arial" pitchFamily="34" charset="-122"/>
-                          <a:cs typeface="Arial" pitchFamily="34" charset="-120"/>
-                        </a:rPr>
-                        <a:t>3.56</a:t>
-                      </a:r>
-                      <a:endParaRPr lang="en-US" sz="900" dirty="0">
-                        <a:latin typeface="Arial" charset="0"/>
-                        <a:ea typeface="Arial" charset="0"/>
-                        <a:cs typeface="Arial" charset="0"/>
-                      </a:endParaRPr>
-                    </a:p>
-                  </a:txBody>
-                  <a:tcPr marL="91440" marR="91440" marT="45720" marB="45720">
-                    <a:lnL w="6350" cap="flat" cmpd="sng" algn="ctr">
-                      <a:solidFill>
-                        <a:srgbClr val="CBD5E1"/>
-                      </a:solidFill>
-                      <a:prstDash val="solid"/>
-                      <a:round/>
-                      <a:headEnd type="none" w="med" len="med"/>
-                      <a:tailEnd type="none" w="med" len="med"/>
-                    </a:lnL>
-                    <a:lnR w="6350" cap="flat" cmpd="sng" algn="ctr">
-                      <a:solidFill>
-                        <a:srgbClr val="CBD5E1"/>
-                      </a:solidFill>
-                      <a:prstDash val="solid"/>
-                      <a:round/>
-                      <a:headEnd type="none" w="med" len="med"/>
-                      <a:tailEnd type="none" w="med" len="med"/>
-                    </a:lnR>
-                    <a:lnT w="6350" cap="flat" cmpd="sng" algn="ctr">
-                      <a:solidFill>
-                        <a:srgbClr val="CBD5E1"/>
-                      </a:solidFill>
-                      <a:prstDash val="solid"/>
-                      <a:round/>
-                      <a:headEnd type="none" w="med" len="med"/>
-                      <a:tailEnd type="none" w="med" len="med"/>
-                    </a:lnT>
-                    <a:lnB w="6350" cap="flat" cmpd="sng" algn="ctr">
-                      <a:solidFill>
-                        <a:srgbClr val="CBD5E1"/>
-                      </a:solidFill>
-                      <a:prstDash val="solid"/>
-                      <a:round/>
-                      <a:headEnd type="none" w="med" len="med"/>
-                      <a:tailEnd type="none" w="med" len="med"/>
-                    </a:lnB>
-                    <a:solidFill>
-                      <a:srgbClr val="E8EFF8"/>
-                    </a:solidFill>
-                  </a:tcPr>
-                </a:tc>
-                <a:tc>
-                  <a:txBody>
-                    <a:bodyPr/>
-                    <a:lstStyle/>
-                    <a:p>
-                      <a:pPr algn="ctr" indent="0" marL="0">
-                        <a:buNone/>
-                      </a:pPr>
-                      <a:r>
-                        <a:rPr lang="en-US" sz="900" dirty="0">
-                          <a:solidFill>
-                            <a:srgbClr val="000000"/>
-                          </a:solidFill>
-                          <a:latin typeface="Arial" pitchFamily="34" charset="0"/>
-                          <a:ea typeface="Arial" pitchFamily="34" charset="-122"/>
-                          <a:cs typeface="Arial" pitchFamily="34" charset="-120"/>
-                        </a:rPr>
-                        <a:t>/5 (×2)</a:t>
-                      </a:r>
-                      <a:endParaRPr lang="en-US" sz="900" dirty="0">
-                        <a:latin typeface="Arial" charset="0"/>
-                        <a:ea typeface="Arial" charset="0"/>
-                        <a:cs typeface="Arial" charset="0"/>
-                      </a:endParaRPr>
-                    </a:p>
-                  </a:txBody>
-                  <a:tcPr marL="91440" marR="91440" marT="45720" marB="45720">
-                    <a:lnL w="6350" cap="flat" cmpd="sng" algn="ctr">
-                      <a:solidFill>
-                        <a:srgbClr val="CBD5E1"/>
-                      </a:solidFill>
-                      <a:prstDash val="solid"/>
-                      <a:round/>
-                      <a:headEnd type="none" w="med" len="med"/>
-                      <a:tailEnd type="none" w="med" len="med"/>
-                    </a:lnL>
-                    <a:lnR w="6350" cap="flat" cmpd="sng" algn="ctr">
-                      <a:solidFill>
-                        <a:srgbClr val="CBD5E1"/>
-                      </a:solidFill>
-                      <a:prstDash val="solid"/>
-                      <a:round/>
-                      <a:headEnd type="none" w="med" len="med"/>
-                      <a:tailEnd type="none" w="med" len="med"/>
-                    </a:lnR>
-                    <a:lnT w="6350" cap="flat" cmpd="sng" algn="ctr">
-                      <a:solidFill>
-                        <a:srgbClr val="CBD5E1"/>
-                      </a:solidFill>
-                      <a:prstDash val="solid"/>
-                      <a:round/>
-                      <a:headEnd type="none" w="med" len="med"/>
-                      <a:tailEnd type="none" w="med" len="med"/>
-                    </a:lnT>
-                    <a:lnB w="6350" cap="flat" cmpd="sng" algn="ctr">
-                      <a:solidFill>
-                        <a:srgbClr val="CBD5E1"/>
-                      </a:solidFill>
-                      <a:prstDash val="solid"/>
-                      <a:round/>
-                      <a:headEnd type="none" w="med" len="med"/>
-                      <a:tailEnd type="none" w="med" len="med"/>
-                    </a:lnB>
-                    <a:solidFill>
-                      <a:srgbClr val="E8EFF8"/>
-                    </a:solidFill>
-                  </a:tcPr>
-                </a:tc>
-                <a:tc>
-                  <a:txBody>
-                    <a:bodyPr/>
-                    <a:lstStyle/>
-                    <a:p>
-                      <a:pPr algn="ctr" indent="0" marL="0">
-                        <a:buNone/>
-                      </a:pPr>
-                      <a:r>
-                        <a:rPr lang="en-US" sz="900" dirty="0">
-                          <a:solidFill>
-                            <a:srgbClr val="000000"/>
-                          </a:solidFill>
-                          <a:latin typeface="Arial" pitchFamily="34" charset="0"/>
-                          <a:ea typeface="Arial" pitchFamily="34" charset="-122"/>
-                          <a:cs typeface="Arial" pitchFamily="34" charset="-120"/>
-                        </a:rPr>
-                        <a:t>7.12</a:t>
-                      </a:r>
-                      <a:endParaRPr lang="en-US" sz="900" dirty="0">
-                        <a:latin typeface="Arial" charset="0"/>
-                        <a:ea typeface="Arial" charset="0"/>
-                        <a:cs typeface="Arial" charset="0"/>
-                      </a:endParaRPr>
-                    </a:p>
-                  </a:txBody>
-                  <a:tcPr marL="91440" marR="91440" marT="45720" marB="45720">
-                    <a:lnL w="6350" cap="flat" cmpd="sng" algn="ctr">
-                      <a:solidFill>
-                        <a:srgbClr val="CBD5E1"/>
-                      </a:solidFill>
-                      <a:prstDash val="solid"/>
-                      <a:round/>
-                      <a:headEnd type="none" w="med" len="med"/>
-                      <a:tailEnd type="none" w="med" len="med"/>
-                    </a:lnL>
-                    <a:lnR w="6350" cap="flat" cmpd="sng" algn="ctr">
-                      <a:solidFill>
-                        <a:srgbClr val="CBD5E1"/>
-                      </a:solidFill>
-                      <a:prstDash val="solid"/>
-                      <a:round/>
-                      <a:headEnd type="none" w="med" len="med"/>
-                      <a:tailEnd type="none" w="med" len="med"/>
-                    </a:lnR>
-                    <a:lnT w="6350" cap="flat" cmpd="sng" algn="ctr">
-                      <a:solidFill>
-                        <a:srgbClr val="CBD5E1"/>
-                      </a:solidFill>
-                      <a:prstDash val="solid"/>
-                      <a:round/>
-                      <a:headEnd type="none" w="med" len="med"/>
-                      <a:tailEnd type="none" w="med" len="med"/>
-                    </a:lnT>
-                    <a:lnB w="6350" cap="flat" cmpd="sng" algn="ctr">
-                      <a:solidFill>
-                        <a:srgbClr val="CBD5E1"/>
-                      </a:solidFill>
-                      <a:prstDash val="solid"/>
-                      <a:round/>
-                      <a:headEnd type="none" w="med" len="med"/>
-                      <a:tailEnd type="none" w="med" len="med"/>
-                    </a:lnB>
-                    <a:solidFill>
-                      <a:srgbClr val="E8EFF8"/>
-                    </a:solidFill>
-                  </a:tcPr>
-                </a:tc>
-              </a:tr>
-              <a:tr h="201168">
-                <a:tc>
-                  <a:txBody>
-                    <a:bodyPr/>
-                    <a:lstStyle/>
-                    <a:p>
-                      <a:pPr algn="ctr" indent="0" marL="0">
-                        <a:buNone/>
-                      </a:pPr>
-                      <a:r>
-                        <a:rPr lang="en-US" sz="900" dirty="0">
-                          <a:solidFill>
-                            <a:srgbClr val="000000"/>
-                          </a:solidFill>
-                          <a:latin typeface="Arial" pitchFamily="34" charset="0"/>
-                          <a:ea typeface="Arial" pitchFamily="34" charset="-122"/>
-                          <a:cs typeface="Arial" pitchFamily="34" charset="-120"/>
-                        </a:rPr>
-                        <a:t>Booking.com</a:t>
-                      </a:r>
-                      <a:endParaRPr lang="en-US" sz="900" dirty="0">
-                        <a:latin typeface="Arial" charset="0"/>
-                        <a:ea typeface="Arial" charset="0"/>
-                        <a:cs typeface="Arial" charset="0"/>
-                      </a:endParaRPr>
-                    </a:p>
-                  </a:txBody>
-                  <a:tcPr marL="91440" marR="91440" marT="45720" marB="45720">
-                    <a:lnL w="6350" cap="flat" cmpd="sng" algn="ctr">
-                      <a:solidFill>
-                        <a:srgbClr val="CBD5E1"/>
-                      </a:solidFill>
-                      <a:prstDash val="solid"/>
-                      <a:round/>
-                      <a:headEnd type="none" w="med" len="med"/>
-                      <a:tailEnd type="none" w="med" len="med"/>
-                    </a:lnL>
-                    <a:lnR w="6350" cap="flat" cmpd="sng" algn="ctr">
-                      <a:solidFill>
-                        <a:srgbClr val="CBD5E1"/>
-                      </a:solidFill>
-                      <a:prstDash val="solid"/>
-                      <a:round/>
-                      <a:headEnd type="none" w="med" len="med"/>
-                      <a:tailEnd type="none" w="med" len="med"/>
-                    </a:lnR>
-                    <a:lnT w="6350" cap="flat" cmpd="sng" algn="ctr">
-                      <a:solidFill>
-                        <a:srgbClr val="CBD5E1"/>
-                      </a:solidFill>
-                      <a:prstDash val="solid"/>
-                      <a:round/>
-                      <a:headEnd type="none" w="med" len="med"/>
-                      <a:tailEnd type="none" w="med" len="med"/>
-                    </a:lnT>
-                    <a:lnB w="6350" cap="flat" cmpd="sng" algn="ctr">
-                      <a:solidFill>
-                        <a:srgbClr val="CBD5E1"/>
-                      </a:solidFill>
-                      <a:prstDash val="solid"/>
-                      <a:round/>
-                      <a:headEnd type="none" w="med" len="med"/>
-                      <a:tailEnd type="none" w="med" len="med"/>
-                    </a:lnB>
-                    <a:solidFill>
-                      <a:srgbClr val="FFFFFF"/>
-                    </a:solidFill>
-                  </a:tcPr>
-                </a:tc>
-                <a:tc>
-                  <a:txBody>
-                    <a:bodyPr/>
-                    <a:lstStyle/>
-                    <a:p>
-                      <a:pPr algn="ctr" indent="0" marL="0">
-                        <a:buNone/>
-                      </a:pPr>
-                      <a:r>
-                        <a:rPr lang="en-US" sz="900" dirty="0">
-                          <a:solidFill>
-                            <a:srgbClr val="000000"/>
-                          </a:solidFill>
-                          <a:latin typeface="Arial" pitchFamily="34" charset="0"/>
-                          <a:ea typeface="Arial" pitchFamily="34" charset="-122"/>
-                          <a:cs typeface="Arial" pitchFamily="34" charset="-120"/>
-                        </a:rPr>
-                        <a:t>39</a:t>
-                      </a:r>
-                      <a:endParaRPr lang="en-US" sz="900" dirty="0">
-                        <a:latin typeface="Arial" charset="0"/>
-                        <a:ea typeface="Arial" charset="0"/>
-                        <a:cs typeface="Arial" charset="0"/>
-                      </a:endParaRPr>
-                    </a:p>
-                  </a:txBody>
-                  <a:tcPr marL="91440" marR="91440" marT="45720" marB="45720">
-                    <a:lnL w="6350" cap="flat" cmpd="sng" algn="ctr">
-                      <a:solidFill>
-                        <a:srgbClr val="CBD5E1"/>
-                      </a:solidFill>
-                      <a:prstDash val="solid"/>
-                      <a:round/>
-                      <a:headEnd type="none" w="med" len="med"/>
-                      <a:tailEnd type="none" w="med" len="med"/>
-                    </a:lnL>
-                    <a:lnR w="6350" cap="flat" cmpd="sng" algn="ctr">
-                      <a:solidFill>
-                        <a:srgbClr val="CBD5E1"/>
-                      </a:solidFill>
-                      <a:prstDash val="solid"/>
-                      <a:round/>
-                      <a:headEnd type="none" w="med" len="med"/>
-                      <a:tailEnd type="none" w="med" len="med"/>
-                    </a:lnR>
-                    <a:lnT w="6350" cap="flat" cmpd="sng" algn="ctr">
-                      <a:solidFill>
-                        <a:srgbClr val="CBD5E1"/>
-                      </a:solidFill>
-                      <a:prstDash val="solid"/>
-                      <a:round/>
-                      <a:headEnd type="none" w="med" len="med"/>
-                      <a:tailEnd type="none" w="med" len="med"/>
-                    </a:lnT>
-                    <a:lnB w="6350" cap="flat" cmpd="sng" algn="ctr">
-                      <a:solidFill>
-                        <a:srgbClr val="CBD5E1"/>
-                      </a:solidFill>
-                      <a:prstDash val="solid"/>
-                      <a:round/>
-                      <a:headEnd type="none" w="med" len="med"/>
-                      <a:tailEnd type="none" w="med" len="med"/>
-                    </a:lnB>
-                    <a:solidFill>
-                      <a:srgbClr val="FFFFFF"/>
-                    </a:solidFill>
-                  </a:tcPr>
-                </a:tc>
-                <a:tc>
-                  <a:txBody>
-                    <a:bodyPr/>
-                    <a:lstStyle/>
-                    <a:p>
-                      <a:pPr algn="ctr" indent="0" marL="0">
-                        <a:buNone/>
-                      </a:pPr>
-                      <a:r>
-                        <a:rPr lang="en-US" sz="900" dirty="0">
-                          <a:solidFill>
-                            <a:srgbClr val="000000"/>
-                          </a:solidFill>
-                          <a:latin typeface="Arial" pitchFamily="34" charset="0"/>
-                          <a:ea typeface="Arial" pitchFamily="34" charset="-122"/>
-                          <a:cs typeface="Arial" pitchFamily="34" charset="-120"/>
-                        </a:rPr>
-                        <a:t>7.08</a:t>
-                      </a:r>
-                      <a:endParaRPr lang="en-US" sz="900" dirty="0">
-                        <a:latin typeface="Arial" charset="0"/>
-                        <a:ea typeface="Arial" charset="0"/>
-                        <a:cs typeface="Arial" charset="0"/>
-                      </a:endParaRPr>
-                    </a:p>
-                  </a:txBody>
-                  <a:tcPr marL="91440" marR="91440" marT="45720" marB="45720">
-                    <a:lnL w="6350" cap="flat" cmpd="sng" algn="ctr">
-                      <a:solidFill>
-                        <a:srgbClr val="CBD5E1"/>
-                      </a:solidFill>
-                      <a:prstDash val="solid"/>
-                      <a:round/>
-                      <a:headEnd type="none" w="med" len="med"/>
-                      <a:tailEnd type="none" w="med" len="med"/>
-                    </a:lnL>
-                    <a:lnR w="6350" cap="flat" cmpd="sng" algn="ctr">
-                      <a:solidFill>
-                        <a:srgbClr val="CBD5E1"/>
-                      </a:solidFill>
-                      <a:prstDash val="solid"/>
-                      <a:round/>
-                      <a:headEnd type="none" w="med" len="med"/>
-                      <a:tailEnd type="none" w="med" len="med"/>
-                    </a:lnR>
-                    <a:lnT w="6350" cap="flat" cmpd="sng" algn="ctr">
-                      <a:solidFill>
-                        <a:srgbClr val="CBD5E1"/>
-                      </a:solidFill>
-                      <a:prstDash val="solid"/>
-                      <a:round/>
-                      <a:headEnd type="none" w="med" len="med"/>
-                      <a:tailEnd type="none" w="med" len="med"/>
-                    </a:lnT>
-                    <a:lnB w="6350" cap="flat" cmpd="sng" algn="ctr">
-                      <a:solidFill>
-                        <a:srgbClr val="CBD5E1"/>
-                      </a:solidFill>
-                      <a:prstDash val="solid"/>
-                      <a:round/>
-                      <a:headEnd type="none" w="med" len="med"/>
-                      <a:tailEnd type="none" w="med" len="med"/>
-                    </a:lnB>
-                    <a:solidFill>
-                      <a:srgbClr val="FFFFFF"/>
-                    </a:solidFill>
-                  </a:tcPr>
-                </a:tc>
-                <a:tc>
-                  <a:txBody>
-                    <a:bodyPr/>
-                    <a:lstStyle/>
-                    <a:p>
-                      <a:pPr algn="ctr" indent="0" marL="0">
-                        <a:buNone/>
-                      </a:pPr>
-                      <a:r>
-                        <a:rPr lang="en-US" sz="900" dirty="0">
-                          <a:solidFill>
-                            <a:srgbClr val="000000"/>
-                          </a:solidFill>
-                          <a:latin typeface="Arial" pitchFamily="34" charset="0"/>
-                          <a:ea typeface="Arial" pitchFamily="34" charset="-122"/>
-                          <a:cs typeface="Arial" pitchFamily="34" charset="-120"/>
-                        </a:rPr>
-                        <a:t>/10</a:t>
-                      </a:r>
-                      <a:endParaRPr lang="en-US" sz="900" dirty="0">
-                        <a:latin typeface="Arial" charset="0"/>
-                        <a:ea typeface="Arial" charset="0"/>
-                        <a:cs typeface="Arial" charset="0"/>
-                      </a:endParaRPr>
-                    </a:p>
-                  </a:txBody>
-                  <a:tcPr marL="91440" marR="91440" marT="45720" marB="45720">
-                    <a:lnL w="6350" cap="flat" cmpd="sng" algn="ctr">
-                      <a:solidFill>
-                        <a:srgbClr val="CBD5E1"/>
-                      </a:solidFill>
-                      <a:prstDash val="solid"/>
-                      <a:round/>
-                      <a:headEnd type="none" w="med" len="med"/>
-                      <a:tailEnd type="none" w="med" len="med"/>
-                    </a:lnL>
-                    <a:lnR w="6350" cap="flat" cmpd="sng" algn="ctr">
-                      <a:solidFill>
-                        <a:srgbClr val="CBD5E1"/>
-                      </a:solidFill>
-                      <a:prstDash val="solid"/>
-                      <a:round/>
-                      <a:headEnd type="none" w="med" len="med"/>
-                      <a:tailEnd type="none" w="med" len="med"/>
-                    </a:lnR>
-                    <a:lnT w="6350" cap="flat" cmpd="sng" algn="ctr">
-                      <a:solidFill>
-                        <a:srgbClr val="CBD5E1"/>
-                      </a:solidFill>
-                      <a:prstDash val="solid"/>
-                      <a:round/>
-                      <a:headEnd type="none" w="med" len="med"/>
-                      <a:tailEnd type="none" w="med" len="med"/>
-                    </a:lnT>
-                    <a:lnB w="6350" cap="flat" cmpd="sng" algn="ctr">
-                      <a:solidFill>
-                        <a:srgbClr val="CBD5E1"/>
-                      </a:solidFill>
-                      <a:prstDash val="solid"/>
-                      <a:round/>
-                      <a:headEnd type="none" w="med" len="med"/>
-                      <a:tailEnd type="none" w="med" len="med"/>
-                    </a:lnB>
-                    <a:solidFill>
-                      <a:srgbClr val="FFFFFF"/>
-                    </a:solidFill>
-                  </a:tcPr>
-                </a:tc>
-                <a:tc>
-                  <a:txBody>
-                    <a:bodyPr/>
-                    <a:lstStyle/>
-                    <a:p>
-                      <a:pPr algn="ctr" indent="0" marL="0">
-                        <a:buNone/>
-                      </a:pPr>
-                      <a:r>
-                        <a:rPr lang="en-US" sz="900" dirty="0">
-                          <a:solidFill>
-                            <a:srgbClr val="000000"/>
-                          </a:solidFill>
-                          <a:latin typeface="Arial" pitchFamily="34" charset="0"/>
-                          <a:ea typeface="Arial" pitchFamily="34" charset="-122"/>
-                          <a:cs typeface="Arial" pitchFamily="34" charset="-120"/>
-                        </a:rPr>
-                        <a:t>7.08</a:t>
+                        <a:t>6.89</a:t>
                       </a:r>
                       <a:endParaRPr lang="en-US" sz="900" dirty="0">
                         <a:latin typeface="Arial" charset="0"/>
@@ -9290,7 +9290,7 @@
                           <a:ea typeface="Arial" pitchFamily="34" charset="-122"/>
                           <a:cs typeface="Arial" pitchFamily="34" charset="-120"/>
                         </a:rPr>
-                        <a:t>6</a:t>
+                        <a:t>7</a:t>
                       </a:r>
                       <a:endParaRPr lang="en-US" sz="900" dirty="0">
                         <a:latin typeface="Arial" charset="0"/>
@@ -9358,7 +9358,7 @@
                           <a:ea typeface="Arial" pitchFamily="34" charset="-122"/>
                           <a:cs typeface="Arial" pitchFamily="34" charset="-120"/>
                         </a:rPr>
-                        <a:t>3</a:t>
+                        <a:t>3.14</a:t>
                       </a:r>
                       <a:endParaRPr lang="en-US" sz="900" dirty="0">
                         <a:latin typeface="Arial" charset="0"/>
@@ -9494,7 +9494,7 @@
                           <a:ea typeface="Arial" pitchFamily="34" charset="-122"/>
                           <a:cs typeface="Arial" pitchFamily="34" charset="-120"/>
                         </a:rPr>
-                        <a:t>6</a:t>
+                        <a:t>6.29</a:t>
                       </a:r>
                       <a:endParaRPr lang="en-US" sz="900" dirty="0">
                         <a:latin typeface="Arial" charset="0"/>
@@ -9902,7 +9902,7 @@
                 <a:ea typeface="Arial" pitchFamily="34" charset="-122"/>
                 <a:cs typeface="Arial" pitchFamily="34" charset="-120"/>
               </a:rPr>
-              <a:t>93件（66.4%）</a:t>
+              <a:t>92件（65.7%）</a:t>
             </a:r>
             <a:endParaRPr lang="en-US" sz="1100" dirty="0"/>
           </a:p>
@@ -10000,7 +10000,7 @@
                 <a:ea typeface="Arial" pitchFamily="34" charset="-122"/>
                 <a:cs typeface="Arial" pitchFamily="34" charset="-120"/>
               </a:rPr>
-              <a:t>32件（22.9%）</a:t>
+              <a:t>31件（22.1%）</a:t>
             </a:r>
             <a:endParaRPr lang="en-US" sz="1100" dirty="0"/>
           </a:p>
@@ -10098,7 +10098,7 @@
                 <a:ea typeface="Arial" pitchFamily="34" charset="-122"/>
                 <a:cs typeface="Arial" pitchFamily="34" charset="-120"/>
               </a:rPr>
-              <a:t>15件（10.7%）</a:t>
+              <a:t>17件（12.1%）</a:t>
             </a:r>
             <a:endParaRPr lang="en-US" sz="1100" dirty="0"/>
           </a:p>
@@ -10733,7 +10733,7 @@
                 <a:ea typeface="Arial" pitchFamily="34" charset="-122"/>
                 <a:cs typeface="Arial" pitchFamily="34" charset="-120"/>
               </a:rPr>
-              <a:t>朝食はほぼ毎日同じです</a:t>
+              <a:t>너무 낡고 조식이 맛엊ㅅ음 古すぎて朝食が味がする</a:t>
             </a:r>
             <a:endParaRPr lang="en-US" sz="900" dirty="0"/>
           </a:p>
@@ -10772,7 +10772,7 @@
                 <a:ea typeface="Arial" pitchFamily="34" charset="-122"/>
                 <a:cs typeface="Arial" pitchFamily="34" charset="-120"/>
               </a:rPr>
-              <a:t>「旅行の手配、清潔さ、立地、そして毎日の朝食まで、すべてが素晴らしかったです」</a:t>
+              <a:t>「가까움 조식 朝食」</a:t>
             </a:r>
             <a:endParaRPr lang="en-US" sz="900" dirty="0"/>
           </a:p>
@@ -10956,7 +10956,7 @@
                 <a:ea typeface="Arial" pitchFamily="34" charset="-122"/>
                 <a:cs typeface="Arial" pitchFamily="34" charset="-120"/>
               </a:rPr>
-              <a:t>スタッフの対応は親切でした</a:t>
+              <a:t>フロント対応はしっかり、丁寧</a:t>
             </a:r>
             <a:endParaRPr lang="en-US" sz="900" dirty="0"/>
           </a:p>
@@ -10995,7 +10995,7 @@
                 <a:ea typeface="Arial" pitchFamily="34" charset="-122"/>
                 <a:cs typeface="Arial" pitchFamily="34" charset="-120"/>
               </a:rPr>
-              <a:t>「早い時間に到着して、デスクのスタッフが親切にキャリアの保管などご案内いただきありがとうございます」</a:t>
+              <a:t>「スタッフの対応は親切でした」</a:t>
             </a:r>
             <a:endParaRPr lang="en-US" sz="900" dirty="0"/>
           </a:p>
@@ -11140,6 +11140,229 @@
                 <a:ea typeface="Arial" pitchFamily="34" charset="-122"/>
                 <a:cs typeface="Arial" pitchFamily="34" charset="-120"/>
               </a:rPr>
+              <a:t>快適さ・設備</a:t>
+            </a:r>
+            <a:endParaRPr lang="en-US" sz="1300" dirty="0"/>
+          </a:p>
+        </p:txBody>
+      </p:sp>
+      <p:sp>
+        <p:nvSpPr>
+          <p:cNvPr id="31" name="Text 29"/>
+          <p:cNvSpPr/>
+          <p:nvPr/>
+        </p:nvSpPr>
+        <p:spPr>
+          <a:xfrm>
+            <a:off x="594360" y="3246120"/>
+            <a:ext cx="2377440" cy="365760"/>
+          </a:xfrm>
+          <a:prstGeom prst="rect">
+            <a:avLst/>
+          </a:prstGeom>
+          <a:noFill/>
+          <a:ln/>
+        </p:spPr>
+        <p:txBody>
+          <a:bodyPr wrap="square" lIns="0" tIns="0" rIns="0" bIns="0" rtlCol="0" anchor="ctr"/>
+          <a:lstStyle/>
+          <a:p>
+            <a:pPr indent="0" marL="0">
+              <a:buNone/>
+            </a:pPr>
+            <a:r>
+              <a:rPr lang="en-US" sz="900" dirty="0">
+                <a:solidFill>
+                  <a:srgbClr val="64748B"/>
+                </a:solidFill>
+                <a:latin typeface="Arial" pitchFamily="34" charset="0"/>
+                <a:ea typeface="Arial" pitchFamily="34" charset="-122"/>
+                <a:cs typeface="Arial" pitchFamily="34" charset="-120"/>
+              </a:rPr>
+              <a:t>設備は古いが清潔であった</a:t>
+            </a:r>
+            <a:endParaRPr lang="en-US" sz="900" dirty="0"/>
+          </a:p>
+        </p:txBody>
+      </p:sp>
+      <p:sp>
+        <p:nvSpPr>
+          <p:cNvPr id="32" name="Text 30"/>
+          <p:cNvSpPr/>
+          <p:nvPr/>
+        </p:nvSpPr>
+        <p:spPr>
+          <a:xfrm>
+            <a:off x="594360" y="3657600"/>
+            <a:ext cx="2377440" cy="640080"/>
+          </a:xfrm>
+          <a:prstGeom prst="rect">
+            <a:avLst/>
+          </a:prstGeom>
+          <a:noFill/>
+          <a:ln/>
+        </p:spPr>
+        <p:txBody>
+          <a:bodyPr wrap="square" lIns="0" tIns="0" rIns="0" bIns="0" rtlCol="0" anchor="ctr"/>
+          <a:lstStyle/>
+          <a:p>
+            <a:pPr indent="0" marL="0">
+              <a:buNone/>
+            </a:pPr>
+            <a:r>
+              <a:rPr lang="en-US" sz="900" i="1" dirty="0">
+                <a:solidFill>
+                  <a:srgbClr val="3B7DD8"/>
+                </a:solidFill>
+                <a:latin typeface="Arial" pitchFamily="34" charset="0"/>
+                <a:ea typeface="Arial" pitchFamily="34" charset="-122"/>
+                <a:cs typeface="Arial" pitchFamily="34" charset="-120"/>
+              </a:rPr>
+              <a:t>「古い建物だったが部屋には空気清浄機もおいてありベッドの寝心地も良かったです」</a:t>
+            </a:r>
+            <a:endParaRPr lang="en-US" sz="900" dirty="0"/>
+          </a:p>
+        </p:txBody>
+      </p:sp>
+      <p:sp>
+        <p:nvSpPr>
+          <p:cNvPr id="33" name="Shape 31"/>
+          <p:cNvSpPr/>
+          <p:nvPr/>
+        </p:nvSpPr>
+        <p:spPr>
+          <a:xfrm>
+            <a:off x="3291840" y="2880360"/>
+            <a:ext cx="2651760" cy="1600200"/>
+          </a:xfrm>
+          <a:prstGeom prst="rect">
+            <a:avLst/>
+          </a:prstGeom>
+          <a:solidFill>
+            <a:srgbClr val="FFFFFF"/>
+          </a:solidFill>
+          <a:ln/>
+          <a:effectLst>
+            <a:outerShdw sx="100000" sy="100000" kx="0" ky="0" algn="bl" rotWithShape="0" blurRad="50800" dist="25400" dir="8100000">
+              <a:srgbClr val="000000">
+                <a:alpha val="10000"/>
+              </a:srgbClr>
+            </a:outerShdw>
+          </a:effectLst>
+        </p:spPr>
+      </p:sp>
+      <p:sp>
+        <p:nvSpPr>
+          <p:cNvPr id="34" name="Shape 32"/>
+          <p:cNvSpPr/>
+          <p:nvPr/>
+        </p:nvSpPr>
+        <p:spPr>
+          <a:xfrm>
+            <a:off x="3291840" y="2880360"/>
+            <a:ext cx="54864" cy="1600200"/>
+          </a:xfrm>
+          <a:prstGeom prst="rect">
+            <a:avLst/>
+          </a:prstGeom>
+          <a:solidFill>
+            <a:srgbClr val="16A34A"/>
+          </a:solidFill>
+          <a:ln/>
+        </p:spPr>
+      </p:sp>
+      <p:sp>
+        <p:nvSpPr>
+          <p:cNvPr id="35" name="Shape 33"/>
+          <p:cNvSpPr/>
+          <p:nvPr/>
+        </p:nvSpPr>
+        <p:spPr>
+          <a:xfrm>
+            <a:off x="5120640" y="2953512"/>
+            <a:ext cx="658368" cy="228600"/>
+          </a:xfrm>
+          <a:prstGeom prst="rect">
+            <a:avLst/>
+          </a:prstGeom>
+          <a:solidFill>
+            <a:srgbClr val="DCFCE7"/>
+          </a:solidFill>
+          <a:ln/>
+        </p:spPr>
+      </p:sp>
+      <p:sp>
+        <p:nvSpPr>
+          <p:cNvPr id="36" name="Text 34"/>
+          <p:cNvSpPr/>
+          <p:nvPr/>
+        </p:nvSpPr>
+        <p:spPr>
+          <a:xfrm>
+            <a:off x="5120640" y="2953512"/>
+            <a:ext cx="658368" cy="228600"/>
+          </a:xfrm>
+          <a:prstGeom prst="rect">
+            <a:avLst/>
+          </a:prstGeom>
+          <a:noFill/>
+          <a:ln/>
+        </p:spPr>
+        <p:txBody>
+          <a:bodyPr wrap="square" lIns="0" tIns="0" rIns="0" bIns="0" rtlCol="0" anchor="ctr"/>
+          <a:lstStyle/>
+          <a:p>
+            <a:pPr algn="ctr" indent="0" marL="0">
+              <a:buNone/>
+            </a:pPr>
+            <a:r>
+              <a:rPr lang="en-US" sz="900" b="1" dirty="0">
+                <a:solidFill>
+                  <a:srgbClr val="16A34A"/>
+                </a:solidFill>
+                <a:latin typeface="Arial" pitchFamily="34" charset="0"/>
+                <a:ea typeface="Arial" pitchFamily="34" charset="-122"/>
+                <a:cs typeface="Arial" pitchFamily="34" charset="-120"/>
+              </a:rPr>
+              <a:t>20件+</a:t>
+            </a:r>
+            <a:endParaRPr lang="en-US" sz="900" dirty="0"/>
+          </a:p>
+        </p:txBody>
+      </p:sp>
+      <p:sp>
+        <p:nvSpPr>
+          <p:cNvPr id="37" name="Text 35"/>
+          <p:cNvSpPr/>
+          <p:nvPr/>
+        </p:nvSpPr>
+        <p:spPr>
+          <a:xfrm>
+            <a:off x="3429000" y="2953512"/>
+            <a:ext cx="1645920" cy="274320"/>
+          </a:xfrm>
+          <a:prstGeom prst="rect">
+            <a:avLst/>
+          </a:prstGeom>
+          <a:noFill/>
+          <a:ln/>
+        </p:spPr>
+        <p:txBody>
+          <a:bodyPr wrap="square" lIns="0" tIns="0" rIns="0" bIns="0" rtlCol="0" anchor="ctr"/>
+          <a:lstStyle/>
+          <a:p>
+            <a:pPr indent="0" marL="0">
+              <a:buNone/>
+            </a:pPr>
+            <a:r>
+              <a:rPr lang="en-US" sz="1300" b="1" dirty="0">
+                <a:solidFill>
+                  <a:srgbClr val="1A2744"/>
+                </a:solidFill>
+                <a:latin typeface="Arial" pitchFamily="34" charset="0"/>
+                <a:ea typeface="Arial" pitchFamily="34" charset="-122"/>
+                <a:cs typeface="Arial" pitchFamily="34" charset="-120"/>
+              </a:rPr>
               <a:t>清潔さ・清掃</a:t>
             </a:r>
             <a:endParaRPr lang="en-US" sz="1300" dirty="0"/>
@@ -11148,13 +11371,13 @@
       </p:sp>
       <p:sp>
         <p:nvSpPr>
-          <p:cNvPr id="31" name="Text 29"/>
-          <p:cNvSpPr/>
-          <p:nvPr/>
-        </p:nvSpPr>
-        <p:spPr>
-          <a:xfrm>
-            <a:off x="594360" y="3246120"/>
+          <p:cNvPr id="38" name="Text 36"/>
+          <p:cNvSpPr/>
+          <p:nvPr/>
+        </p:nvSpPr>
+        <p:spPr>
+          <a:xfrm>
+            <a:off x="3429000" y="3246120"/>
             <a:ext cx="2377440" cy="365760"/>
           </a:xfrm>
           <a:prstGeom prst="rect">
@@ -11187,13 +11410,13 @@
       </p:sp>
       <p:sp>
         <p:nvSpPr>
-          <p:cNvPr id="32" name="Text 30"/>
-          <p:cNvSpPr/>
-          <p:nvPr/>
-        </p:nvSpPr>
-        <p:spPr>
-          <a:xfrm>
-            <a:off x="594360" y="3657600"/>
+          <p:cNvPr id="39" name="Text 37"/>
+          <p:cNvSpPr/>
+          <p:nvPr/>
+        </p:nvSpPr>
+        <p:spPr>
+          <a:xfrm>
+            <a:off x="3429000" y="3657600"/>
             <a:ext cx="2377440" cy="640080"/>
           </a:xfrm>
           <a:prstGeom prst="rect">
@@ -11218,230 +11441,7 @@
                 <a:ea typeface="Arial" pitchFamily="34" charset="-122"/>
                 <a:cs typeface="Arial" pitchFamily="34" charset="-120"/>
               </a:rPr>
-              <a:t>「旅行の手配、清潔さ、立地、そして毎日の朝食まで、すべてが素晴らしかったです」</a:t>
-            </a:r>
-            <a:endParaRPr lang="en-US" sz="900" dirty="0"/>
-          </a:p>
-        </p:txBody>
-      </p:sp>
-      <p:sp>
-        <p:nvSpPr>
-          <p:cNvPr id="33" name="Shape 31"/>
-          <p:cNvSpPr/>
-          <p:nvPr/>
-        </p:nvSpPr>
-        <p:spPr>
-          <a:xfrm>
-            <a:off x="3291840" y="2880360"/>
-            <a:ext cx="2651760" cy="1600200"/>
-          </a:xfrm>
-          <a:prstGeom prst="rect">
-            <a:avLst/>
-          </a:prstGeom>
-          <a:solidFill>
-            <a:srgbClr val="FFFFFF"/>
-          </a:solidFill>
-          <a:ln/>
-          <a:effectLst>
-            <a:outerShdw sx="100000" sy="100000" kx="0" ky="0" algn="bl" rotWithShape="0" blurRad="50800" dist="25400" dir="8100000">
-              <a:srgbClr val="000000">
-                <a:alpha val="10000"/>
-              </a:srgbClr>
-            </a:outerShdw>
-          </a:effectLst>
-        </p:spPr>
-      </p:sp>
-      <p:sp>
-        <p:nvSpPr>
-          <p:cNvPr id="34" name="Shape 32"/>
-          <p:cNvSpPr/>
-          <p:nvPr/>
-        </p:nvSpPr>
-        <p:spPr>
-          <a:xfrm>
-            <a:off x="3291840" y="2880360"/>
-            <a:ext cx="54864" cy="1600200"/>
-          </a:xfrm>
-          <a:prstGeom prst="rect">
-            <a:avLst/>
-          </a:prstGeom>
-          <a:solidFill>
-            <a:srgbClr val="16A34A"/>
-          </a:solidFill>
-          <a:ln/>
-        </p:spPr>
-      </p:sp>
-      <p:sp>
-        <p:nvSpPr>
-          <p:cNvPr id="35" name="Shape 33"/>
-          <p:cNvSpPr/>
-          <p:nvPr/>
-        </p:nvSpPr>
-        <p:spPr>
-          <a:xfrm>
-            <a:off x="5120640" y="2953512"/>
-            <a:ext cx="658368" cy="228600"/>
-          </a:xfrm>
-          <a:prstGeom prst="rect">
-            <a:avLst/>
-          </a:prstGeom>
-          <a:solidFill>
-            <a:srgbClr val="DCFCE7"/>
-          </a:solidFill>
-          <a:ln/>
-        </p:spPr>
-      </p:sp>
-      <p:sp>
-        <p:nvSpPr>
-          <p:cNvPr id="36" name="Text 34"/>
-          <p:cNvSpPr/>
-          <p:nvPr/>
-        </p:nvSpPr>
-        <p:spPr>
-          <a:xfrm>
-            <a:off x="5120640" y="2953512"/>
-            <a:ext cx="658368" cy="228600"/>
-          </a:xfrm>
-          <a:prstGeom prst="rect">
-            <a:avLst/>
-          </a:prstGeom>
-          <a:noFill/>
-          <a:ln/>
-        </p:spPr>
-        <p:txBody>
-          <a:bodyPr wrap="square" lIns="0" tIns="0" rIns="0" bIns="0" rtlCol="0" anchor="ctr"/>
-          <a:lstStyle/>
-          <a:p>
-            <a:pPr algn="ctr" indent="0" marL="0">
-              <a:buNone/>
-            </a:pPr>
-            <a:r>
-              <a:rPr lang="en-US" sz="900" b="1" dirty="0">
-                <a:solidFill>
-                  <a:srgbClr val="16A34A"/>
-                </a:solidFill>
-                <a:latin typeface="Arial" pitchFamily="34" charset="0"/>
-                <a:ea typeface="Arial" pitchFamily="34" charset="-122"/>
-                <a:cs typeface="Arial" pitchFamily="34" charset="-120"/>
-              </a:rPr>
-              <a:t>20件+</a:t>
-            </a:r>
-            <a:endParaRPr lang="en-US" sz="900" dirty="0"/>
-          </a:p>
-        </p:txBody>
-      </p:sp>
-      <p:sp>
-        <p:nvSpPr>
-          <p:cNvPr id="37" name="Text 35"/>
-          <p:cNvSpPr/>
-          <p:nvPr/>
-        </p:nvSpPr>
-        <p:spPr>
-          <a:xfrm>
-            <a:off x="3429000" y="2953512"/>
-            <a:ext cx="1645920" cy="274320"/>
-          </a:xfrm>
-          <a:prstGeom prst="rect">
-            <a:avLst/>
-          </a:prstGeom>
-          <a:noFill/>
-          <a:ln/>
-        </p:spPr>
-        <p:txBody>
-          <a:bodyPr wrap="square" lIns="0" tIns="0" rIns="0" bIns="0" rtlCol="0" anchor="ctr"/>
-          <a:lstStyle/>
-          <a:p>
-            <a:pPr indent="0" marL="0">
-              <a:buNone/>
-            </a:pPr>
-            <a:r>
-              <a:rPr lang="en-US" sz="1300" b="1" dirty="0">
-                <a:solidFill>
-                  <a:srgbClr val="1A2744"/>
-                </a:solidFill>
-                <a:latin typeface="Arial" pitchFamily="34" charset="0"/>
-                <a:ea typeface="Arial" pitchFamily="34" charset="-122"/>
-                <a:cs typeface="Arial" pitchFamily="34" charset="-120"/>
-              </a:rPr>
-              <a:t>快適さ・設備</a:t>
-            </a:r>
-            <a:endParaRPr lang="en-US" sz="1300" dirty="0"/>
-          </a:p>
-        </p:txBody>
-      </p:sp>
-      <p:sp>
-        <p:nvSpPr>
-          <p:cNvPr id="38" name="Text 36"/>
-          <p:cNvSpPr/>
-          <p:nvPr/>
-        </p:nvSpPr>
-        <p:spPr>
-          <a:xfrm>
-            <a:off x="3429000" y="3246120"/>
-            <a:ext cx="2377440" cy="365760"/>
-          </a:xfrm>
-          <a:prstGeom prst="rect">
-            <a:avLst/>
-          </a:prstGeom>
-          <a:noFill/>
-          <a:ln/>
-        </p:spPr>
-        <p:txBody>
-          <a:bodyPr wrap="square" lIns="0" tIns="0" rIns="0" bIns="0" rtlCol="0" anchor="ctr"/>
-          <a:lstStyle/>
-          <a:p>
-            <a:pPr indent="0" marL="0">
-              <a:buNone/>
-            </a:pPr>
-            <a:r>
-              <a:rPr lang="en-US" sz="900" dirty="0">
-                <a:solidFill>
-                  <a:srgbClr val="64748B"/>
-                </a:solidFill>
-                <a:latin typeface="Arial" pitchFamily="34" charset="0"/>
-                <a:ea typeface="Arial" pitchFamily="34" charset="-122"/>
-                <a:cs typeface="Arial" pitchFamily="34" charset="-120"/>
-              </a:rPr>
-              <a:t>古い建物だったが部屋には空気清浄機もおいてありベッドの寝心地も良かったです</a:t>
-            </a:r>
-            <a:endParaRPr lang="en-US" sz="900" dirty="0"/>
-          </a:p>
-        </p:txBody>
-      </p:sp>
-      <p:sp>
-        <p:nvSpPr>
-          <p:cNvPr id="39" name="Text 37"/>
-          <p:cNvSpPr/>
-          <p:nvPr/>
-        </p:nvSpPr>
-        <p:spPr>
-          <a:xfrm>
-            <a:off x="3429000" y="3657600"/>
-            <a:ext cx="2377440" cy="640080"/>
-          </a:xfrm>
-          <a:prstGeom prst="rect">
-            <a:avLst/>
-          </a:prstGeom>
-          <a:noFill/>
-          <a:ln/>
-        </p:spPr>
-        <p:txBody>
-          <a:bodyPr wrap="square" lIns="0" tIns="0" rIns="0" bIns="0" rtlCol="0" anchor="ctr"/>
-          <a:lstStyle/>
-          <a:p>
-            <a:pPr indent="0" marL="0">
-              <a:buNone/>
-            </a:pPr>
-            <a:r>
-              <a:rPr lang="en-US" sz="900" i="1" dirty="0">
-                <a:solidFill>
-                  <a:srgbClr val="3B7DD8"/>
-                </a:solidFill>
-                <a:latin typeface="Arial" pitchFamily="34" charset="0"/>
-                <a:ea typeface="Arial" pitchFamily="34" charset="-122"/>
-                <a:cs typeface="Arial" pitchFamily="34" charset="-120"/>
-              </a:rPr>
-              <a:t>「部屋の中、特にユニットバスが古い造りで、洗面所の蛇口が2口式なのが残念ですが、それ以外は快適でした」</a:t>
+              <a:t>「設備は古いが清潔であった」</a:t>
             </a:r>
             <a:endParaRPr lang="en-US" sz="900" dirty="0"/>
           </a:p>
@@ -12354,7 +12354,7 @@
                           <a:ea typeface="Arial" pitchFamily="34" charset="-122"/>
                           <a:cs typeface="Arial" pitchFamily="34" charset="-120"/>
                         </a:rPr>
-                        <a:t>古い建物だったが部屋には空気清浄機もおいてありベッドの寝心地も良かったです</a:t>
+                        <a:t>設備は古いが清潔であった</a:t>
                       </a:r>
                       <a:endParaRPr lang="en-US" sz="900" dirty="0">
                         <a:latin typeface="Arial" charset="0"/>
@@ -12422,7 +12422,7 @@
                           <a:ea typeface="Arial" pitchFamily="34" charset="-122"/>
                           <a:cs typeface="Arial" pitchFamily="34" charset="-120"/>
                         </a:rPr>
-                        <a:t>19件</a:t>
+                        <a:t>21件</a:t>
                       </a:r>
                       <a:endParaRPr lang="en-US" sz="900" dirty="0">
                         <a:latin typeface="Arial" charset="0"/>
@@ -12696,7 +12696,7 @@
                           <a:ea typeface="Arial" pitchFamily="34" charset="-122"/>
                           <a:cs typeface="Arial" pitchFamily="34" charset="-120"/>
                         </a:rPr>
-                        <a:t>18件</a:t>
+                        <a:t>17件</a:t>
                       </a:r>
                       <a:endParaRPr lang="en-US" sz="900" dirty="0">
                         <a:latin typeface="Arial" charset="0"/>
@@ -12834,7 +12834,7 @@
                           <a:ea typeface="Arial" pitchFamily="34" charset="-122"/>
                           <a:cs typeface="Arial" pitchFamily="34" charset="-120"/>
                         </a:rPr>
-                        <a:t>エアコン・空調</a:t>
+                        <a:t>清掃不備</a:t>
                       </a:r>
                       <a:endParaRPr lang="en-US" sz="900" dirty="0">
                         <a:latin typeface="Arial" charset="0"/>
@@ -12902,7 +12902,7 @@
                           <a:ea typeface="Arial" pitchFamily="34" charset="-122"/>
                           <a:cs typeface="Arial" pitchFamily="34" charset="-120"/>
                         </a:rPr>
-                        <a:t>Bien qu'en face de la gare, très bonne insonorisation de ...</a:t>
+                        <a:t>그래서 청결부분에서 좀안좋았던거같아요 서비스는좋앗습니다 日本は狭いですが、キャリアを広げると座る場所がなく、...</a:t>
                       </a:r>
                       <a:endParaRPr lang="en-US" sz="900" dirty="0">
                         <a:latin typeface="Arial" charset="0"/>
@@ -12970,7 +12970,7 @@
                           <a:ea typeface="Arial" pitchFamily="34" charset="-122"/>
                           <a:cs typeface="Arial" pitchFamily="34" charset="-120"/>
                         </a:rPr>
-                        <a:t>11件</a:t>
+                        <a:t>10件</a:t>
                       </a:r>
                       <a:endParaRPr lang="en-US" sz="900" dirty="0">
                         <a:latin typeface="Arial" charset="0"/>
@@ -13108,7 +13108,7 @@
                           <a:ea typeface="Arial" pitchFamily="34" charset="-122"/>
                           <a:cs typeface="Arial" pitchFamily="34" charset="-120"/>
                         </a:rPr>
-                        <a:t>清掃不備</a:t>
+                        <a:t>部屋の狭さ</a:t>
                       </a:r>
                       <a:endParaRPr lang="en-US" sz="900" dirty="0">
                         <a:latin typeface="Arial" charset="0"/>
@@ -13176,7 +13176,7 @@
                           <a:ea typeface="Arial" pitchFamily="34" charset="-122"/>
                           <a:cs typeface="Arial" pitchFamily="34" charset="-120"/>
                         </a:rPr>
-                        <a:t>風呂、トイレが少し汚く、生乾きの匂いがするのが残念 又、手元のライトが壊れててつかなかった</a:t>
+                        <a:t>그래서 청결부분에서 좀안좋았던거같아요 서비스는좋앗습니다 日本は狭いですが、キャリアを広げると座る場所がなく、...</a:t>
                       </a:r>
                       <a:endParaRPr lang="en-US" sz="900" dirty="0">
                         <a:latin typeface="Arial" charset="0"/>
@@ -13382,7 +13382,7 @@
                           <a:ea typeface="Arial" pitchFamily="34" charset="-122"/>
                           <a:cs typeface="Arial" pitchFamily="34" charset="-120"/>
                         </a:rPr>
-                        <a:t>部屋の狭さ</a:t>
+                        <a:t>エアコン・空調</a:t>
                       </a:r>
                       <a:endParaRPr lang="en-US" sz="900" dirty="0">
                         <a:latin typeface="Arial" charset="0"/>
@@ -13450,7 +13450,7 @@
                           <a:ea typeface="Arial" pitchFamily="34" charset="-122"/>
                           <a:cs typeface="Arial" pitchFamily="34" charset="-120"/>
                         </a:rPr>
-                        <a:t>部屋は少し狭い方なのに不便なほどではない</a:t>
+                        <a:t>Bien qu'en face de la gare, très bonne insonorisation de ...</a:t>
                       </a:r>
                       <a:endParaRPr lang="en-US" sz="900" dirty="0">
                         <a:latin typeface="Arial" charset="0"/>
@@ -13518,7 +13518,7 @@
                           <a:ea typeface="Arial" pitchFamily="34" charset="-122"/>
                           <a:cs typeface="Arial" pitchFamily="34" charset="-120"/>
                         </a:rPr>
-                        <a:t>8件</a:t>
+                        <a:t>9件</a:t>
                       </a:r>
                       <a:endParaRPr lang="en-US" sz="900" dirty="0">
                         <a:latin typeface="Arial" charset="0"/>
@@ -13724,7 +13724,7 @@
                           <a:ea typeface="Arial" pitchFamily="34" charset="-122"/>
                           <a:cs typeface="Arial" pitchFamily="34" charset="-120"/>
                         </a:rPr>
-                        <a:t>ヒーターの音は無知でした^^;洗面台の冷水絞りで水がずっと流れ落ちたのですがカウンターに届けませんでしたㅜ博多駅の...</a:t>
+                        <a:t>ヒーターの音は無知でした^^;洗面台の冷水絞りで水がずっと流れ落ちたのにカウンターに届けられませんでしたㅜ博多駅の...</a:t>
                       </a:r>
                       <a:endParaRPr lang="en-US" sz="900" dirty="0">
                         <a:latin typeface="Arial" charset="0"/>

--- a/納品レポート/ホテル別レポート/comfort_hakata_口コミ分析レポート.pptx
+++ b/納品レポート/ホテル別レポート/comfort_hakata_口コミ分析レポート.pptx
@@ -205,19 +205,19 @@
                 <c:formatCode>General</c:formatCode>
                 <c:ptCount val="5"/>
                 <c:pt idx="0">
-                  <c:v>9</c:v>
+                  <c:v>9.02</c:v>
                 </c:pt>
                 <c:pt idx="1">
-                  <c:v>7.05</c:v>
+                  <c:v>7.08</c:v>
                 </c:pt>
                 <c:pt idx="2">
-                  <c:v>7.03</c:v>
+                  <c:v>7.06</c:v>
                 </c:pt>
                 <c:pt idx="3">
-                  <c:v>6.89</c:v>
+                  <c:v>7</c:v>
                 </c:pt>
                 <c:pt idx="4">
-                  <c:v>6.29</c:v>
+                  <c:v>6.25</c:v>
                 </c:pt>
               </c:numCache>
             </c:numRef>
@@ -563,7 +563,7 @@
                   <c:v>92</c:v>
                 </c:pt>
                 <c:pt idx="1">
-                  <c:v>31</c:v>
+                  <c:v>30</c:v>
                 </c:pt>
                 <c:pt idx="2">
                   <c:v>17</c:v>
@@ -843,7 +843,7 @@
                   <c:v>8</c:v>
                 </c:pt>
                 <c:pt idx="4">
-                  <c:v>22</c:v>
+                  <c:v>21</c:v>
                 </c:pt>
                 <c:pt idx="5">
                   <c:v>1</c:v>
@@ -2809,7 +2809,7 @@
                 <a:ea typeface="Arial" pitchFamily="34" charset="-122"/>
                 <a:cs typeface="Arial" pitchFamily="34" charset="-120"/>
               </a:rPr>
-              <a:t>レビュー総数：140件（5サイト）</a:t>
+              <a:t>レビュー総数：139件（5サイト）</a:t>
             </a:r>
             <a:endParaRPr lang="en-US" sz="1000" dirty="0"/>
           </a:p>
@@ -2829,7 +2829,7 @@
                 <a:ea typeface="Arial" pitchFamily="34" charset="-122"/>
                 <a:cs typeface="Arial" pitchFamily="34" charset="-120"/>
               </a:rPr>
-              <a:t>作成日：2026年3月23日</a:t>
+              <a:t>作成日：2026年3月24日</a:t>
             </a:r>
             <a:endParaRPr lang="en-US" sz="1000" dirty="0"/>
           </a:p>
@@ -3375,7 +3375,7 @@
                           <a:ea typeface="Arial" pitchFamily="34" charset="-122"/>
                           <a:cs typeface="Arial" pitchFamily="34" charset="-120"/>
                         </a:rPr>
-                        <a:t>7.72点</a:t>
+                        <a:t>7.73点</a:t>
                       </a:r>
                       <a:endParaRPr lang="en-US" sz="1000" dirty="0">
                         <a:latin typeface="Arial" charset="0"/>
@@ -3649,7 +3649,7 @@
                           <a:ea typeface="Arial" pitchFamily="34" charset="-122"/>
                           <a:cs typeface="Arial" pitchFamily="34" charset="-120"/>
                         </a:rPr>
-                        <a:t>65.7%</a:t>
+                        <a:t>66.2%</a:t>
                       </a:r>
                       <a:endParaRPr lang="en-US" sz="1000" dirty="0">
                         <a:latin typeface="Arial" charset="0"/>
@@ -3923,7 +3923,7 @@
                           <a:ea typeface="Arial" pitchFamily="34" charset="-122"/>
                           <a:cs typeface="Arial" pitchFamily="34" charset="-120"/>
                         </a:rPr>
-                        <a:t>12.1%</a:t>
+                        <a:t>12.2%</a:t>
                       </a:r>
                       <a:endParaRPr lang="en-US" sz="1000" dirty="0">
                         <a:latin typeface="Arial" charset="0"/>
@@ -4745,7 +4745,7 @@
                           <a:ea typeface="Arial" pitchFamily="34" charset="-122"/>
                           <a:cs typeface="Arial" pitchFamily="34" charset="-120"/>
                         </a:rPr>
-                        <a:t>約21件/期間</a:t>
+                        <a:t>約20件/期間</a:t>
                       </a:r>
                       <a:endParaRPr lang="en-US" sz="1000" dirty="0">
                         <a:latin typeface="Arial" charset="0"/>
@@ -5384,7 +5384,7 @@
                 <a:ea typeface="Arial" pitchFamily="34" charset="-122"/>
                 <a:cs typeface="Arial" pitchFamily="34" charset="-120"/>
               </a:rPr>
-              <a:t>7.72</a:t>
+              <a:t>7.73</a:t>
             </a:r>
             <a:endParaRPr lang="en-US" sz="3200" dirty="0"/>
           </a:p>
@@ -5509,7 +5509,7 @@
                 <a:ea typeface="Arial" pitchFamily="34" charset="-122"/>
                 <a:cs typeface="Arial" pitchFamily="34" charset="-120"/>
               </a:rPr>
-              <a:t>65.7%</a:t>
+              <a:t>66.2%</a:t>
             </a:r>
             <a:endParaRPr lang="en-US" sz="3200" dirty="0"/>
           </a:p>
@@ -5634,7 +5634,7 @@
                 <a:ea typeface="Arial" pitchFamily="34" charset="-122"/>
                 <a:cs typeface="Arial" pitchFamily="34" charset="-120"/>
               </a:rPr>
-              <a:t>12.1%</a:t>
+              <a:t>12.2%</a:t>
             </a:r>
             <a:endParaRPr lang="en-US" sz="3200" dirty="0"/>
           </a:p>
@@ -5759,7 +5759,7 @@
                 <a:ea typeface="Arial" pitchFamily="34" charset="-122"/>
                 <a:cs typeface="Arial" pitchFamily="34" charset="-120"/>
               </a:rPr>
-              <a:t>140件</a:t>
+              <a:t>139件</a:t>
             </a:r>
             <a:endParaRPr lang="en-US" sz="3200" dirty="0"/>
           </a:p>
@@ -5907,7 +5907,7 @@
                 <a:ea typeface="Arial" pitchFamily="34" charset="-122"/>
                 <a:cs typeface="Arial" pitchFamily="34" charset="-120"/>
               </a:rPr>
-              <a:t>  駅に近く子連れだったので、とても便利でした</a:t>
+              <a:t>  立地：福岡空港から30分、博多駅、地下鉄、バスターミナルからすぐ、セブンイレブンとスターバックスの隣という最高の拠点</a:t>
             </a:r>
             <a:endParaRPr lang="en-US" sz="1100" dirty="0"/>
           </a:p>
@@ -5947,7 +5947,7 @@
                 <a:ea typeface="Arial" pitchFamily="34" charset="-122"/>
                 <a:cs typeface="Arial" pitchFamily="34" charset="-120"/>
               </a:rPr>
-              <a:t>  너무 낡고 조식이 맛엊ㅅ음 古すぎて朝食が味がする</a:t>
+              <a:t>  ボリュームたっぷりのおいしい朝食が含まれています</a:t>
             </a:r>
             <a:endParaRPr lang="en-US" sz="1100" dirty="0"/>
           </a:p>
@@ -5987,7 +5987,7 @@
                 <a:ea typeface="Arial" pitchFamily="34" charset="-122"/>
                 <a:cs typeface="Arial" pitchFamily="34" charset="-120"/>
               </a:rPr>
-              <a:t>  フロント対応はしっかり、丁寧</a:t>
+              <a:t>  スタッフ：親切で対応が良い</a:t>
             </a:r>
             <a:endParaRPr lang="en-US" sz="1100" dirty="0"/>
           </a:p>
@@ -6135,7 +6135,7 @@
                 <a:ea typeface="Arial" pitchFamily="34" charset="-122"/>
                 <a:cs typeface="Arial" pitchFamily="34" charset="-120"/>
               </a:rPr>
-              <a:t>  設備は古いが清潔であった</a:t>
+              <a:t>  名古屋のホテルより古いですが、手入れが行き届いていて、清潔です</a:t>
             </a:r>
             <a:endParaRPr lang="en-US" sz="1100" dirty="0"/>
           </a:p>
@@ -6175,7 +6175,7 @@
                 <a:ea typeface="Arial" pitchFamily="34" charset="-122"/>
                 <a:cs typeface="Arial" pitchFamily="34" charset="-120"/>
               </a:rPr>
-              <a:t>  部屋の中、特にユニットバスが古い造りで、洗面所の蛇口が2口式なのが残念ですが、それ以外は快適でした</a:t>
+              <a:t>  （午前6時30分～午前9時30分） 利便性: セルフサービスのランドリー（14階）、各階に自動販売機、ロビーには必...</a:t>
             </a:r>
             <a:endParaRPr lang="en-US" sz="1100" dirty="0"/>
           </a:p>
@@ -6195,7 +6195,7 @@
                 <a:ea typeface="Arial" pitchFamily="34" charset="-122"/>
                 <a:cs typeface="Arial" pitchFamily="34" charset="-120"/>
               </a:rPr>
-              <a:t>清掃不備 </a:t>
+              <a:t>エアコン・空調 </a:t>
             </a:r>
             <a:endParaRPr lang="en-US" sz="1100" dirty="0"/>
           </a:p>
@@ -6215,7 +6215,7 @@
                 <a:ea typeface="Arial" pitchFamily="34" charset="-122"/>
                 <a:cs typeface="Arial" pitchFamily="34" charset="-120"/>
               </a:rPr>
-              <a:t>  그래서 청결부분에서 좀안좋았던거같아요 서비스는좋앗습니다 日本は狭いですが、キャリアを広げると座る場所がなく、...</a:t>
+              <a:t>  (6:30am - 9:30am)  Convenience:  Self-service laundry (14...</a:t>
             </a:r>
             <a:endParaRPr lang="en-US" sz="1100" dirty="0"/>
           </a:p>
@@ -6568,7 +6568,7 @@
                 <a:ea typeface="Arial" pitchFamily="34" charset="-122"/>
                 <a:cs typeface="Arial" pitchFamily="34" charset="-120"/>
               </a:rPr>
-              <a:t>7.72</a:t>
+              <a:t>7.73</a:t>
             </a:r>
             <a:endParaRPr lang="en-US" sz="3200" dirty="0"/>
           </a:p>
@@ -6693,7 +6693,7 @@
                 <a:ea typeface="Arial" pitchFamily="34" charset="-122"/>
                 <a:cs typeface="Arial" pitchFamily="34" charset="-120"/>
               </a:rPr>
-              <a:t>65.7%</a:t>
+              <a:t>66.2%</a:t>
             </a:r>
             <a:endParaRPr lang="en-US" sz="3200" dirty="0"/>
           </a:p>
@@ -6818,7 +6818,7 @@
                 <a:ea typeface="Arial" pitchFamily="34" charset="-122"/>
                 <a:cs typeface="Arial" pitchFamily="34" charset="-120"/>
               </a:rPr>
-              <a:t>12.1%</a:t>
+              <a:t>12.2%</a:t>
             </a:r>
             <a:endParaRPr lang="en-US" sz="3200" dirty="0"/>
           </a:p>
@@ -6943,7 +6943,7 @@
                 <a:ea typeface="Arial" pitchFamily="34" charset="-122"/>
                 <a:cs typeface="Arial" pitchFamily="34" charset="-120"/>
               </a:rPr>
-              <a:t>140件</a:t>
+              <a:t>139件</a:t>
             </a:r>
             <a:endParaRPr lang="en-US" sz="3200" dirty="0"/>
           </a:p>
@@ -7364,7 +7364,7 @@
                 <a:ea typeface="Arial" pitchFamily="34" charset="-122"/>
                 <a:cs typeface="Arial" pitchFamily="34" charset="-120"/>
               </a:rPr>
-              <a:t>Trip.com(9.00)が最高スコア。</a:t>
+              <a:t>Trip.com(9.02)が最高スコア。</a:t>
             </a:r>
             <a:endParaRPr lang="en-US" sz="1100" dirty="0"/>
           </a:p>
@@ -7922,7 +7922,7 @@
                           <a:ea typeface="Arial" pitchFamily="34" charset="-122"/>
                           <a:cs typeface="Arial" pitchFamily="34" charset="-120"/>
                         </a:rPr>
-                        <a:t>52</a:t>
+                        <a:t>51</a:t>
                       </a:r>
                       <a:endParaRPr lang="en-US" sz="900" dirty="0">
                         <a:latin typeface="Arial" charset="0"/>
@@ -7990,7 +7990,7 @@
                           <a:ea typeface="Arial" pitchFamily="34" charset="-122"/>
                           <a:cs typeface="Arial" pitchFamily="34" charset="-120"/>
                         </a:rPr>
-                        <a:t>9</a:t>
+                        <a:t>9.02</a:t>
                       </a:r>
                       <a:endParaRPr lang="en-US" sz="900" dirty="0">
                         <a:latin typeface="Arial" charset="0"/>
@@ -8126,7 +8126,7 @@
                           <a:ea typeface="Arial" pitchFamily="34" charset="-122"/>
                           <a:cs typeface="Arial" pitchFamily="34" charset="-120"/>
                         </a:rPr>
-                        <a:t>9</a:t>
+                        <a:t>9.02</a:t>
                       </a:r>
                       <a:endParaRPr lang="en-US" sz="900" dirty="0">
                         <a:latin typeface="Arial" charset="0"/>
@@ -8264,7 +8264,7 @@
                           <a:ea typeface="Arial" pitchFamily="34" charset="-122"/>
                           <a:cs typeface="Arial" pitchFamily="34" charset="-120"/>
                         </a:rPr>
-                        <a:t>39</a:t>
+                        <a:t>38</a:t>
                       </a:r>
                       <a:endParaRPr lang="en-US" sz="900" dirty="0">
                         <a:latin typeface="Arial" charset="0"/>
@@ -8332,7 +8332,7 @@
                           <a:ea typeface="Arial" pitchFamily="34" charset="-122"/>
                           <a:cs typeface="Arial" pitchFamily="34" charset="-120"/>
                         </a:rPr>
-                        <a:t>7.05</a:t>
+                        <a:t>7.08</a:t>
                       </a:r>
                       <a:endParaRPr lang="en-US" sz="900" dirty="0">
                         <a:latin typeface="Arial" charset="0"/>
@@ -8468,7 +8468,7 @@
                           <a:ea typeface="Arial" pitchFamily="34" charset="-122"/>
                           <a:cs typeface="Arial" pitchFamily="34" charset="-120"/>
                         </a:rPr>
-                        <a:t>7.05</a:t>
+                        <a:t>7.08</a:t>
                       </a:r>
                       <a:endParaRPr lang="en-US" sz="900" dirty="0">
                         <a:latin typeface="Arial" charset="0"/>
@@ -8606,7 +8606,7 @@
                           <a:ea typeface="Arial" pitchFamily="34" charset="-122"/>
                           <a:cs typeface="Arial" pitchFamily="34" charset="-120"/>
                         </a:rPr>
-                        <a:t>33</a:t>
+                        <a:t>32</a:t>
                       </a:r>
                       <a:endParaRPr lang="en-US" sz="900" dirty="0">
                         <a:latin typeface="Arial" charset="0"/>
@@ -8674,7 +8674,7 @@
                           <a:ea typeface="Arial" pitchFamily="34" charset="-122"/>
                           <a:cs typeface="Arial" pitchFamily="34" charset="-120"/>
                         </a:rPr>
-                        <a:t>3.52</a:t>
+                        <a:t>3.53</a:t>
                       </a:r>
                       <a:endParaRPr lang="en-US" sz="900" dirty="0">
                         <a:latin typeface="Arial" charset="0"/>
@@ -8810,7 +8810,7 @@
                           <a:ea typeface="Arial" pitchFamily="34" charset="-122"/>
                           <a:cs typeface="Arial" pitchFamily="34" charset="-120"/>
                         </a:rPr>
-                        <a:t>7.03</a:t>
+                        <a:t>7.06</a:t>
                       </a:r>
                       <a:endParaRPr lang="en-US" sz="900" dirty="0">
                         <a:latin typeface="Arial" charset="0"/>
@@ -8948,7 +8948,7 @@
                           <a:ea typeface="Arial" pitchFamily="34" charset="-122"/>
                           <a:cs typeface="Arial" pitchFamily="34" charset="-120"/>
                         </a:rPr>
-                        <a:t>9</a:t>
+                        <a:t>10</a:t>
                       </a:r>
                       <a:endParaRPr lang="en-US" sz="900" dirty="0">
                         <a:latin typeface="Arial" charset="0"/>
@@ -9016,7 +9016,7 @@
                           <a:ea typeface="Arial" pitchFamily="34" charset="-122"/>
                           <a:cs typeface="Arial" pitchFamily="34" charset="-120"/>
                         </a:rPr>
-                        <a:t>3.44</a:t>
+                        <a:t>3.5</a:t>
                       </a:r>
                       <a:endParaRPr lang="en-US" sz="900" dirty="0">
                         <a:latin typeface="Arial" charset="0"/>
@@ -9152,7 +9152,7 @@
                           <a:ea typeface="Arial" pitchFamily="34" charset="-122"/>
                           <a:cs typeface="Arial" pitchFamily="34" charset="-120"/>
                         </a:rPr>
-                        <a:t>6.89</a:t>
+                        <a:t>7</a:t>
                       </a:r>
                       <a:endParaRPr lang="en-US" sz="900" dirty="0">
                         <a:latin typeface="Arial" charset="0"/>
@@ -9290,7 +9290,7 @@
                           <a:ea typeface="Arial" pitchFamily="34" charset="-122"/>
                           <a:cs typeface="Arial" pitchFamily="34" charset="-120"/>
                         </a:rPr>
-                        <a:t>7</a:t>
+                        <a:t>8</a:t>
                       </a:r>
                       <a:endParaRPr lang="en-US" sz="900" dirty="0">
                         <a:latin typeface="Arial" charset="0"/>
@@ -9358,7 +9358,7 @@
                           <a:ea typeface="Arial" pitchFamily="34" charset="-122"/>
                           <a:cs typeface="Arial" pitchFamily="34" charset="-120"/>
                         </a:rPr>
-                        <a:t>3.14</a:t>
+                        <a:t>3.12</a:t>
                       </a:r>
                       <a:endParaRPr lang="en-US" sz="900" dirty="0">
                         <a:latin typeface="Arial" charset="0"/>
@@ -9494,7 +9494,7 @@
                           <a:ea typeface="Arial" pitchFamily="34" charset="-122"/>
                           <a:cs typeface="Arial" pitchFamily="34" charset="-120"/>
                         </a:rPr>
-                        <a:t>6.29</a:t>
+                        <a:t>6.25</a:t>
                       </a:r>
                       <a:endParaRPr lang="en-US" sz="900" dirty="0">
                         <a:latin typeface="Arial" charset="0"/>
@@ -9902,7 +9902,7 @@
                 <a:ea typeface="Arial" pitchFamily="34" charset="-122"/>
                 <a:cs typeface="Arial" pitchFamily="34" charset="-120"/>
               </a:rPr>
-              <a:t>92件（65.7%）</a:t>
+              <a:t>92件（66.2%）</a:t>
             </a:r>
             <a:endParaRPr lang="en-US" sz="1100" dirty="0"/>
           </a:p>
@@ -10000,7 +10000,7 @@
                 <a:ea typeface="Arial" pitchFamily="34" charset="-122"/>
                 <a:cs typeface="Arial" pitchFamily="34" charset="-120"/>
               </a:rPr>
-              <a:t>31件（22.1%）</a:t>
+              <a:t>30件（21.6%）</a:t>
             </a:r>
             <a:endParaRPr lang="en-US" sz="1100" dirty="0"/>
           </a:p>
@@ -10098,7 +10098,7 @@
                 <a:ea typeface="Arial" pitchFamily="34" charset="-122"/>
                 <a:cs typeface="Arial" pitchFamily="34" charset="-120"/>
               </a:rPr>
-              <a:t>17件（12.1%）</a:t>
+              <a:t>17件（12.2%）</a:t>
             </a:r>
             <a:endParaRPr lang="en-US" sz="1100" dirty="0"/>
           </a:p>
@@ -10510,7 +10510,7 @@
                 <a:ea typeface="Arial" pitchFamily="34" charset="-122"/>
                 <a:cs typeface="Arial" pitchFamily="34" charset="-120"/>
               </a:rPr>
-              <a:t>駅に近く子連れだったので、とても便利でした</a:t>
+              <a:t>立地：福岡空港から30分、博多駅、地下鉄、バスターミナルからすぐ、セブンイレブンとスターバックスの隣という最高の拠点</a:t>
             </a:r>
             <a:endParaRPr lang="en-US" sz="900" dirty="0"/>
           </a:p>
@@ -10549,7 +10549,7 @@
                 <a:ea typeface="Arial" pitchFamily="34" charset="-122"/>
                 <a:cs typeface="Arial" pitchFamily="34" charset="-120"/>
               </a:rPr>
-              <a:t>「博多駅前の立地が最高で、とても便利です」</a:t>
+              <a:t>「駅に近くて、ホテルの隣の建物からエレベーターで降りると一蘭にことができ便利だった」</a:t>
             </a:r>
             <a:endParaRPr lang="en-US" sz="900" dirty="0"/>
           </a:p>
@@ -10733,7 +10733,7 @@
                 <a:ea typeface="Arial" pitchFamily="34" charset="-122"/>
                 <a:cs typeface="Arial" pitchFamily="34" charset="-120"/>
               </a:rPr>
-              <a:t>너무 낡고 조식이 맛엊ㅅ음 古すぎて朝食が味がする</a:t>
+              <a:t>ボリュームたっぷりのおいしい朝食が含まれています</a:t>
             </a:r>
             <a:endParaRPr lang="en-US" sz="900" dirty="0"/>
           </a:p>
@@ -10772,7 +10772,7 @@
                 <a:ea typeface="Arial" pitchFamily="34" charset="-122"/>
                 <a:cs typeface="Arial" pitchFamily="34" charset="-120"/>
               </a:rPr>
-              <a:t>「가까움 조식 朝食」</a:t>
+              <a:t>「朝食がとてもおいしかった」</a:t>
             </a:r>
             <a:endParaRPr lang="en-US" sz="900" dirty="0"/>
           </a:p>
@@ -10956,7 +10956,7 @@
                 <a:ea typeface="Arial" pitchFamily="34" charset="-122"/>
                 <a:cs typeface="Arial" pitchFamily="34" charset="-120"/>
               </a:rPr>
-              <a:t>フロント対応はしっかり、丁寧</a:t>
+              <a:t>スタッフ：親切で対応が良い</a:t>
             </a:r>
             <a:endParaRPr lang="en-US" sz="900" dirty="0"/>
           </a:p>
@@ -10995,7 +10995,7 @@
                 <a:ea typeface="Arial" pitchFamily="34" charset="-122"/>
                 <a:cs typeface="Arial" pitchFamily="34" charset="-120"/>
               </a:rPr>
-              <a:t>「スタッフの対応は親切でした」</a:t>
+              <a:t>「フロント対応はしっかり、丁寧」</a:t>
             </a:r>
             <a:endParaRPr lang="en-US" sz="900" dirty="0"/>
           </a:p>
@@ -11179,7 +11179,7 @@
                 <a:ea typeface="Arial" pitchFamily="34" charset="-122"/>
                 <a:cs typeface="Arial" pitchFamily="34" charset="-120"/>
               </a:rPr>
-              <a:t>設備は古いが清潔であった</a:t>
+              <a:t>評価は低いですが、名古屋にあるこのチェーンのホテルでの快適な滞在と同じような体験ができました</a:t>
             </a:r>
             <a:endParaRPr lang="en-US" sz="900" dirty="0"/>
           </a:p>
@@ -11218,7 +11218,7 @@
                 <a:ea typeface="Arial" pitchFamily="34" charset="-122"/>
                 <a:cs typeface="Arial" pitchFamily="34" charset="-120"/>
               </a:rPr>
-              <a:t>「古い建物だったが部屋には空気清浄機もおいてありベッドの寝心地も良かったです」</a:t>
+              <a:t>「設備は古いが清潔であった」</a:t>
             </a:r>
             <a:endParaRPr lang="en-US" sz="900" dirty="0"/>
           </a:p>
@@ -11402,7 +11402,7 @@
                 <a:ea typeface="Arial" pitchFamily="34" charset="-122"/>
                 <a:cs typeface="Arial" pitchFamily="34" charset="-120"/>
               </a:rPr>
-              <a:t>清潔さは十分にきれいだと思います</a:t>
+              <a:t>名古屋のホテルより古いですが、手入れが行き届いていて、清潔です</a:t>
             </a:r>
             <a:endParaRPr lang="en-US" sz="900" dirty="0"/>
           </a:p>
@@ -11441,7 +11441,7 @@
                 <a:ea typeface="Arial" pitchFamily="34" charset="-122"/>
                 <a:cs typeface="Arial" pitchFamily="34" charset="-120"/>
               </a:rPr>
-              <a:t>「設備は古いが清潔であった」</a:t>
+              <a:t>「清潔さは十分にきれいだと思います」</a:t>
             </a:r>
             <a:endParaRPr lang="en-US" sz="900" dirty="0"/>
           </a:p>
@@ -11625,7 +11625,7 @@
                 <a:ea typeface="Arial" pitchFamily="34" charset="-122"/>
                 <a:cs typeface="Arial" pitchFamily="34" charset="-120"/>
               </a:rPr>
-              <a:t>地點吸引，係正博多站對面，購物同食野都方便 立地は魅力的で、正広駅の真向かいに位置しているため、買い物や食事に便利です</a:t>
+              <a:t>立地：福岡空港から30分、博多駅、地下鉄、バスターミナルからすぐ、セブンイレブンとスターバックスの隣という最高の拠点</a:t>
             </a:r>
             <a:endParaRPr lang="en-US" sz="900" dirty="0"/>
           </a:p>
@@ -11664,7 +11664,7 @@
                 <a:ea typeface="Arial" pitchFamily="34" charset="-122"/>
                 <a:cs typeface="Arial" pitchFamily="34" charset="-120"/>
               </a:rPr>
-              <a:t>「周辺で買い物してしばらく立ち寄っておくのも良く、周辺のグルメも多いです」</a:t>
+              <a:t>「地點吸引，係正博多站對面，購物同食野都方便 立地は魅力的で、正広駅の真向かいに位置しているため、買い物や食事に便利です」</a:t>
             </a:r>
             <a:endParaRPr lang="en-US" sz="900" dirty="0"/>
           </a:p>
@@ -12354,7 +12354,7 @@
                           <a:ea typeface="Arial" pitchFamily="34" charset="-122"/>
                           <a:cs typeface="Arial" pitchFamily="34" charset="-120"/>
                         </a:rPr>
-                        <a:t>設備は古いが清潔であった</a:t>
+                        <a:t>名古屋のホテルより古いですが、手入れが行き届いていて、清潔です</a:t>
                       </a:r>
                       <a:endParaRPr lang="en-US" sz="900" dirty="0">
                         <a:latin typeface="Arial" charset="0"/>
@@ -12422,7 +12422,7 @@
                           <a:ea typeface="Arial" pitchFamily="34" charset="-122"/>
                           <a:cs typeface="Arial" pitchFamily="34" charset="-120"/>
                         </a:rPr>
-                        <a:t>21件</a:t>
+                        <a:t>20件</a:t>
                       </a:r>
                       <a:endParaRPr lang="en-US" sz="900" dirty="0">
                         <a:latin typeface="Arial" charset="0"/>
@@ -12628,7 +12628,7 @@
                           <a:ea typeface="Arial" pitchFamily="34" charset="-122"/>
                           <a:cs typeface="Arial" pitchFamily="34" charset="-120"/>
                         </a:rPr>
-                        <a:t>部屋の中、特にユニットバスが古い造りで、洗面所の蛇口が2口式なのが残念ですが、それ以外は快適でした</a:t>
+                        <a:t>（午前6時30分～午前9時30分） 利便性: セルフサービスのランドリー（14階）、各階に自動販売機、ロビーには必...</a:t>
                       </a:r>
                       <a:endParaRPr lang="en-US" sz="900" dirty="0">
                         <a:latin typeface="Arial" charset="0"/>
@@ -12696,7 +12696,7 @@
                           <a:ea typeface="Arial" pitchFamily="34" charset="-122"/>
                           <a:cs typeface="Arial" pitchFamily="34" charset="-120"/>
                         </a:rPr>
-                        <a:t>17件</a:t>
+                        <a:t>19件</a:t>
                       </a:r>
                       <a:endParaRPr lang="en-US" sz="900" dirty="0">
                         <a:latin typeface="Arial" charset="0"/>
@@ -12834,7 +12834,7 @@
                           <a:ea typeface="Arial" pitchFamily="34" charset="-122"/>
                           <a:cs typeface="Arial" pitchFamily="34" charset="-120"/>
                         </a:rPr>
-                        <a:t>清掃不備</a:t>
+                        <a:t>エアコン・空調</a:t>
                       </a:r>
                       <a:endParaRPr lang="en-US" sz="900" dirty="0">
                         <a:latin typeface="Arial" charset="0"/>
@@ -12902,7 +12902,7 @@
                           <a:ea typeface="Arial" pitchFamily="34" charset="-122"/>
                           <a:cs typeface="Arial" pitchFamily="34" charset="-120"/>
                         </a:rPr>
-                        <a:t>그래서 청결부분에서 좀안좋았던거같아요 서비스는좋앗습니다 日本は狭いですが、キャリアを広げると座る場所がなく、...</a:t>
+                        <a:t>(6:30am - 9:30am)  Convenience:  Self-service laundry (14...</a:t>
                       </a:r>
                       <a:endParaRPr lang="en-US" sz="900" dirty="0">
                         <a:latin typeface="Arial" charset="0"/>
@@ -13108,7 +13108,7 @@
                           <a:ea typeface="Arial" pitchFamily="34" charset="-122"/>
                           <a:cs typeface="Arial" pitchFamily="34" charset="-120"/>
                         </a:rPr>
-                        <a:t>部屋の狭さ</a:t>
+                        <a:t>清掃不備</a:t>
                       </a:r>
                       <a:endParaRPr lang="en-US" sz="900" dirty="0">
                         <a:latin typeface="Arial" charset="0"/>
@@ -13244,7 +13244,7 @@
                           <a:ea typeface="Arial" pitchFamily="34" charset="-122"/>
                           <a:cs typeface="Arial" pitchFamily="34" charset="-120"/>
                         </a:rPr>
-                        <a:t>9件</a:t>
+                        <a:t>10件</a:t>
                       </a:r>
                       <a:endParaRPr lang="en-US" sz="900" dirty="0">
                         <a:latin typeface="Arial" charset="0"/>
@@ -13382,7 +13382,7 @@
                           <a:ea typeface="Arial" pitchFamily="34" charset="-122"/>
                           <a:cs typeface="Arial" pitchFamily="34" charset="-120"/>
                         </a:rPr>
-                        <a:t>エアコン・空調</a:t>
+                        <a:t>部屋の狭さ</a:t>
                       </a:r>
                       <a:endParaRPr lang="en-US" sz="900" dirty="0">
                         <a:latin typeface="Arial" charset="0"/>
@@ -13450,7 +13450,7 @@
                           <a:ea typeface="Arial" pitchFamily="34" charset="-122"/>
                           <a:cs typeface="Arial" pitchFamily="34" charset="-120"/>
                         </a:rPr>
-                        <a:t>Bien qu'en face de la gare, très bonne insonorisation de ...</a:t>
+                        <a:t>그래서 청결부분에서 좀안좋았던거같아요 서비스는좋앗습니다 日本は狭いですが、キャリアを広げると座る場所がなく、...</a:t>
                       </a:r>
                       <a:endParaRPr lang="en-US" sz="900" dirty="0">
                         <a:latin typeface="Arial" charset="0"/>
@@ -13724,7 +13724,7 @@
                           <a:ea typeface="Arial" pitchFamily="34" charset="-122"/>
                           <a:cs typeface="Arial" pitchFamily="34" charset="-120"/>
                         </a:rPr>
-                        <a:t>ヒーターの音は無知でした^^;洗面台の冷水絞りで水がずっと流れ落ちたのにカウンターに届けられませんでしたㅜ博多駅の...</a:t>
+                        <a:t>客室品質: 11階 1128号室 清潔な客室で、防音性が高く、シャワーとビデの両方に信頼できるヒーターが付いています</a:t>
                       </a:r>
                       <a:endParaRPr lang="en-US" sz="900" dirty="0">
                         <a:latin typeface="Arial" charset="0"/>
@@ -13792,7 +13792,7 @@
                           <a:ea typeface="Arial" pitchFamily="34" charset="-122"/>
                           <a:cs typeface="Arial" pitchFamily="34" charset="-120"/>
                         </a:rPr>
-                        <a:t>7件</a:t>
+                        <a:t>8件</a:t>
                       </a:r>
                       <a:endParaRPr lang="en-US" sz="900" dirty="0">
                         <a:latin typeface="Arial" charset="0"/>

--- a/納品レポート/ホテル別レポート/comfort_hakata_口コミ分析レポート.pptx
+++ b/納品レポート/ホテル別レポート/comfort_hakata_口コミ分析レポート.pptx
@@ -183,10 +183,10 @@
                     <c:v>Trip.com</c:v>
                   </c:pt>
                   <c:pt idx="1">
-                    <c:v>Booking.com</c:v>
+                    <c:v>Google</c:v>
                   </c:pt>
                   <c:pt idx="2">
-                    <c:v>Google</c:v>
+                    <c:v>Booking.com</c:v>
                   </c:pt>
                   <c:pt idx="3">
                     <c:v>じゃらん</c:v>
@@ -208,16 +208,16 @@
                   <c:v>9.02</c:v>
                 </c:pt>
                 <c:pt idx="1">
-                  <c:v>7.08</c:v>
+                  <c:v>7.31</c:v>
                 </c:pt>
                 <c:pt idx="2">
-                  <c:v>7.06</c:v>
+                  <c:v>7.08</c:v>
                 </c:pt>
                 <c:pt idx="3">
                   <c:v>7</c:v>
                 </c:pt>
                 <c:pt idx="4">
-                  <c:v>6.25</c:v>
+                  <c:v>6.57</c:v>
                 </c:pt>
               </c:numCache>
             </c:numRef>
@@ -560,13 +560,13 @@
               <c:numCache>
                 <c:ptCount val="3"/>
                 <c:pt idx="0">
-                  <c:v>92</c:v>
+                  <c:v>94</c:v>
                 </c:pt>
                 <c:pt idx="1">
                   <c:v>30</c:v>
                 </c:pt>
                 <c:pt idx="2">
-                  <c:v>17</c:v>
+                  <c:v>15</c:v>
                 </c:pt>
               </c:numCache>
             </c:numRef>
@@ -831,10 +831,10 @@
                 <c:formatCode>General</c:formatCode>
                 <c:ptCount val="10"/>
                 <c:pt idx="0">
-                  <c:v>41</c:v>
+                  <c:v>42</c:v>
                 </c:pt>
                 <c:pt idx="1">
-                  <c:v>14</c:v>
+                  <c:v>15</c:v>
                 </c:pt>
                 <c:pt idx="2">
                   <c:v>37</c:v>
@@ -849,13 +849,13 @@
                   <c:v>1</c:v>
                 </c:pt>
                 <c:pt idx="6">
-                  <c:v>10</c:v>
+                  <c:v>9</c:v>
                 </c:pt>
                 <c:pt idx="7">
                   <c:v>3</c:v>
                 </c:pt>
                 <c:pt idx="8">
-                  <c:v>3</c:v>
+                  <c:v>2</c:v>
                 </c:pt>
                 <c:pt idx="9">
                   <c:v>1</c:v>
@@ -2829,7 +2829,7 @@
                 <a:ea typeface="Arial" pitchFamily="34" charset="-122"/>
                 <a:cs typeface="Arial" pitchFamily="34" charset="-120"/>
               </a:rPr>
-              <a:t>作成日：2026年3月24日</a:t>
+              <a:t>作成日：2026年3月25日</a:t>
             </a:r>
             <a:endParaRPr lang="en-US" sz="1000" dirty="0"/>
           </a:p>
@@ -3375,7 +3375,7 @@
                           <a:ea typeface="Arial" pitchFamily="34" charset="-122"/>
                           <a:cs typeface="Arial" pitchFamily="34" charset="-120"/>
                         </a:rPr>
-                        <a:t>7.73点</a:t>
+                        <a:t>7.83点</a:t>
                       </a:r>
                       <a:endParaRPr lang="en-US" sz="1000" dirty="0">
                         <a:latin typeface="Arial" charset="0"/>
@@ -3443,7 +3443,7 @@
                           <a:ea typeface="Arial" pitchFamily="34" charset="-122"/>
                           <a:cs typeface="Arial" pitchFamily="34" charset="-120"/>
                         </a:rPr>
-                        <a:t>8.2点以上</a:t>
+                        <a:t>8.3点以上</a:t>
                       </a:r>
                       <a:endParaRPr lang="en-US" sz="1000" dirty="0">
                         <a:latin typeface="Arial" charset="0"/>
@@ -3649,7 +3649,7 @@
                           <a:ea typeface="Arial" pitchFamily="34" charset="-122"/>
                           <a:cs typeface="Arial" pitchFamily="34" charset="-120"/>
                         </a:rPr>
-                        <a:t>66.2%</a:t>
+                        <a:t>67.6%</a:t>
                       </a:r>
                       <a:endParaRPr lang="en-US" sz="1000" dirty="0">
                         <a:latin typeface="Arial" charset="0"/>
@@ -3717,7 +3717,7 @@
                           <a:ea typeface="Arial" pitchFamily="34" charset="-122"/>
                           <a:cs typeface="Arial" pitchFamily="34" charset="-120"/>
                         </a:rPr>
-                        <a:t>76%以上</a:t>
+                        <a:t>78%以上</a:t>
                       </a:r>
                       <a:endParaRPr lang="en-US" sz="1000" dirty="0">
                         <a:latin typeface="Arial" charset="0"/>
@@ -3923,7 +3923,7 @@
                           <a:ea typeface="Arial" pitchFamily="34" charset="-122"/>
                           <a:cs typeface="Arial" pitchFamily="34" charset="-120"/>
                         </a:rPr>
-                        <a:t>12.2%</a:t>
+                        <a:t>10.8%</a:t>
                       </a:r>
                       <a:endParaRPr lang="en-US" sz="1000" dirty="0">
                         <a:latin typeface="Arial" charset="0"/>
@@ -3991,7 +3991,7 @@
                           <a:ea typeface="Arial" pitchFamily="34" charset="-122"/>
                           <a:cs typeface="Arial" pitchFamily="34" charset="-120"/>
                         </a:rPr>
-                        <a:t>7%以下</a:t>
+                        <a:t>6%以下</a:t>
                       </a:r>
                       <a:endParaRPr lang="en-US" sz="1000" dirty="0">
                         <a:latin typeface="Arial" charset="0"/>
@@ -4197,7 +4197,7 @@
                           <a:ea typeface="Arial" pitchFamily="34" charset="-122"/>
                           <a:cs typeface="Arial" pitchFamily="34" charset="-120"/>
                         </a:rPr>
-                        <a:t>6.3点</a:t>
+                        <a:t>6.6点</a:t>
                       </a:r>
                       <a:endParaRPr lang="en-US" sz="1000" dirty="0">
                         <a:latin typeface="Arial" charset="0"/>
@@ -4265,7 +4265,7 @@
                           <a:ea typeface="Arial" pitchFamily="34" charset="-122"/>
                           <a:cs typeface="Arial" pitchFamily="34" charset="-120"/>
                         </a:rPr>
-                        <a:t>7.3点以上</a:t>
+                        <a:t>7.6点以上</a:t>
                       </a:r>
                       <a:endParaRPr lang="en-US" sz="1000" dirty="0">
                         <a:latin typeface="Arial" charset="0"/>
@@ -4745,7 +4745,7 @@
                           <a:ea typeface="Arial" pitchFamily="34" charset="-122"/>
                           <a:cs typeface="Arial" pitchFamily="34" charset="-120"/>
                         </a:rPr>
-                        <a:t>約20件/期間</a:t>
+                        <a:t>約21件/期間</a:t>
                       </a:r>
                       <a:endParaRPr lang="en-US" sz="1000" dirty="0">
                         <a:latin typeface="Arial" charset="0"/>
@@ -5384,7 +5384,7 @@
                 <a:ea typeface="Arial" pitchFamily="34" charset="-122"/>
                 <a:cs typeface="Arial" pitchFamily="34" charset="-120"/>
               </a:rPr>
-              <a:t>7.73</a:t>
+              <a:t>7.83</a:t>
             </a:r>
             <a:endParaRPr lang="en-US" sz="3200" dirty="0"/>
           </a:p>
@@ -5509,7 +5509,7 @@
                 <a:ea typeface="Arial" pitchFamily="34" charset="-122"/>
                 <a:cs typeface="Arial" pitchFamily="34" charset="-120"/>
               </a:rPr>
-              <a:t>66.2%</a:t>
+              <a:t>67.6%</a:t>
             </a:r>
             <a:endParaRPr lang="en-US" sz="3200" dirty="0"/>
           </a:p>
@@ -5634,7 +5634,7 @@
                 <a:ea typeface="Arial" pitchFamily="34" charset="-122"/>
                 <a:cs typeface="Arial" pitchFamily="34" charset="-120"/>
               </a:rPr>
-              <a:t>12.2%</a:t>
+              <a:t>10.8%</a:t>
             </a:r>
             <a:endParaRPr lang="en-US" sz="3200" dirty="0"/>
           </a:p>
@@ -5907,7 +5907,7 @@
                 <a:ea typeface="Arial" pitchFamily="34" charset="-122"/>
                 <a:cs typeface="Arial" pitchFamily="34" charset="-120"/>
               </a:rPr>
-              <a:t>  立地：福岡空港から30分、博多駅、地下鉄、バスターミナルからすぐ、セブンイレブンとスターバックスの隣という最高の拠点</a:t>
+              <a:t>  バス、地下鉄、電車のアクセシビリティに優れ、場所は本当に良いです</a:t>
             </a:r>
             <a:endParaRPr lang="en-US" sz="1100" dirty="0"/>
           </a:p>
@@ -5947,7 +5947,7 @@
                 <a:ea typeface="Arial" pitchFamily="34" charset="-122"/>
                 <a:cs typeface="Arial" pitchFamily="34" charset="-120"/>
               </a:rPr>
-              <a:t>  ボリュームたっぷりのおいしい朝食が含まれています</a:t>
+              <a:t>  特に無料の朝食のおかげで、朝から移動するのに最適です</a:t>
             </a:r>
             <a:endParaRPr lang="en-US" sz="1100" dirty="0"/>
           </a:p>
@@ -6175,7 +6175,7 @@
                 <a:ea typeface="Arial" pitchFamily="34" charset="-122"/>
                 <a:cs typeface="Arial" pitchFamily="34" charset="-120"/>
               </a:rPr>
-              <a:t>  （午前6時30分～午前9時30分） 利便性: セルフサービスのランドリー（14階）、各階に自動販売機、ロビーには必...</a:t>
+              <a:t>  バス、地下鉄、電車のアクセシビリティに優れ、場所は本当に良いです</a:t>
             </a:r>
             <a:endParaRPr lang="en-US" sz="1100" dirty="0"/>
           </a:p>
@@ -6568,7 +6568,7 @@
                 <a:ea typeface="Arial" pitchFamily="34" charset="-122"/>
                 <a:cs typeface="Arial" pitchFamily="34" charset="-120"/>
               </a:rPr>
-              <a:t>7.73</a:t>
+              <a:t>7.83</a:t>
             </a:r>
             <a:endParaRPr lang="en-US" sz="3200" dirty="0"/>
           </a:p>
@@ -6693,7 +6693,7 @@
                 <a:ea typeface="Arial" pitchFamily="34" charset="-122"/>
                 <a:cs typeface="Arial" pitchFamily="34" charset="-120"/>
               </a:rPr>
-              <a:t>66.2%</a:t>
+              <a:t>67.6%</a:t>
             </a:r>
             <a:endParaRPr lang="en-US" sz="3200" dirty="0"/>
           </a:p>
@@ -6818,7 +6818,7 @@
                 <a:ea typeface="Arial" pitchFamily="34" charset="-122"/>
                 <a:cs typeface="Arial" pitchFamily="34" charset="-120"/>
               </a:rPr>
-              <a:t>12.2%</a:t>
+              <a:t>10.8%</a:t>
             </a:r>
             <a:endParaRPr lang="en-US" sz="3200" dirty="0"/>
           </a:p>
@@ -7413,7 +7413,7 @@
                 <a:ea typeface="Arial" pitchFamily="34" charset="-122"/>
                 <a:cs typeface="Arial" pitchFamily="34" charset="-120"/>
               </a:rPr>
-              <a:t>楽天トラベル(6.3)が相対的に低い。口コミ返信の強化が急務</a:t>
+              <a:t>楽天トラベル(6.6)が相対的に低い。口コミ返信の強化が急務</a:t>
             </a:r>
             <a:endParaRPr lang="en-US" sz="1100" dirty="0"/>
           </a:p>
@@ -7922,7 +7922,7 @@
                           <a:ea typeface="Arial" pitchFamily="34" charset="-122"/>
                           <a:cs typeface="Arial" pitchFamily="34" charset="-120"/>
                         </a:rPr>
-                        <a:t>51</a:t>
+                        <a:t>52</a:t>
                       </a:r>
                       <a:endParaRPr lang="en-US" sz="900" dirty="0">
                         <a:latin typeface="Arial" charset="0"/>
@@ -8196,6 +8196,348 @@
                           <a:ea typeface="Arial" pitchFamily="34" charset="-122"/>
                           <a:cs typeface="Arial" pitchFamily="34" charset="-120"/>
                         </a:rPr>
+                        <a:t>Google</a:t>
+                      </a:r>
+                      <a:endParaRPr lang="en-US" sz="900" dirty="0">
+                        <a:latin typeface="Arial" charset="0"/>
+                        <a:ea typeface="Arial" charset="0"/>
+                        <a:cs typeface="Arial" charset="0"/>
+                      </a:endParaRPr>
+                    </a:p>
+                  </a:txBody>
+                  <a:tcPr marL="91440" marR="91440" marT="45720" marB="45720">
+                    <a:lnL w="6350" cap="flat" cmpd="sng" algn="ctr">
+                      <a:solidFill>
+                        <a:srgbClr val="CBD5E1"/>
+                      </a:solidFill>
+                      <a:prstDash val="solid"/>
+                      <a:round/>
+                      <a:headEnd type="none" w="med" len="med"/>
+                      <a:tailEnd type="none" w="med" len="med"/>
+                    </a:lnL>
+                    <a:lnR w="6350" cap="flat" cmpd="sng" algn="ctr">
+                      <a:solidFill>
+                        <a:srgbClr val="CBD5E1"/>
+                      </a:solidFill>
+                      <a:prstDash val="solid"/>
+                      <a:round/>
+                      <a:headEnd type="none" w="med" len="med"/>
+                      <a:tailEnd type="none" w="med" len="med"/>
+                    </a:lnR>
+                    <a:lnT w="6350" cap="flat" cmpd="sng" algn="ctr">
+                      <a:solidFill>
+                        <a:srgbClr val="CBD5E1"/>
+                      </a:solidFill>
+                      <a:prstDash val="solid"/>
+                      <a:round/>
+                      <a:headEnd type="none" w="med" len="med"/>
+                      <a:tailEnd type="none" w="med" len="med"/>
+                    </a:lnT>
+                    <a:lnB w="6350" cap="flat" cmpd="sng" algn="ctr">
+                      <a:solidFill>
+                        <a:srgbClr val="CBD5E1"/>
+                      </a:solidFill>
+                      <a:prstDash val="solid"/>
+                      <a:round/>
+                      <a:headEnd type="none" w="med" len="med"/>
+                      <a:tailEnd type="none" w="med" len="med"/>
+                    </a:lnB>
+                    <a:solidFill>
+                      <a:srgbClr val="FFFFFF"/>
+                    </a:solidFill>
+                  </a:tcPr>
+                </a:tc>
+                <a:tc>
+                  <a:txBody>
+                    <a:bodyPr/>
+                    <a:lstStyle/>
+                    <a:p>
+                      <a:pPr algn="ctr" indent="0" marL="0">
+                        <a:buNone/>
+                      </a:pPr>
+                      <a:r>
+                        <a:rPr lang="en-US" sz="900" dirty="0">
+                          <a:solidFill>
+                            <a:srgbClr val="000000"/>
+                          </a:solidFill>
+                          <a:latin typeface="Arial" pitchFamily="34" charset="0"/>
+                          <a:ea typeface="Arial" pitchFamily="34" charset="-122"/>
+                          <a:cs typeface="Arial" pitchFamily="34" charset="-120"/>
+                        </a:rPr>
+                        <a:t>32</a:t>
+                      </a:r>
+                      <a:endParaRPr lang="en-US" sz="900" dirty="0">
+                        <a:latin typeface="Arial" charset="0"/>
+                        <a:ea typeface="Arial" charset="0"/>
+                        <a:cs typeface="Arial" charset="0"/>
+                      </a:endParaRPr>
+                    </a:p>
+                  </a:txBody>
+                  <a:tcPr marL="91440" marR="91440" marT="45720" marB="45720">
+                    <a:lnL w="6350" cap="flat" cmpd="sng" algn="ctr">
+                      <a:solidFill>
+                        <a:srgbClr val="CBD5E1"/>
+                      </a:solidFill>
+                      <a:prstDash val="solid"/>
+                      <a:round/>
+                      <a:headEnd type="none" w="med" len="med"/>
+                      <a:tailEnd type="none" w="med" len="med"/>
+                    </a:lnL>
+                    <a:lnR w="6350" cap="flat" cmpd="sng" algn="ctr">
+                      <a:solidFill>
+                        <a:srgbClr val="CBD5E1"/>
+                      </a:solidFill>
+                      <a:prstDash val="solid"/>
+                      <a:round/>
+                      <a:headEnd type="none" w="med" len="med"/>
+                      <a:tailEnd type="none" w="med" len="med"/>
+                    </a:lnR>
+                    <a:lnT w="6350" cap="flat" cmpd="sng" algn="ctr">
+                      <a:solidFill>
+                        <a:srgbClr val="CBD5E1"/>
+                      </a:solidFill>
+                      <a:prstDash val="solid"/>
+                      <a:round/>
+                      <a:headEnd type="none" w="med" len="med"/>
+                      <a:tailEnd type="none" w="med" len="med"/>
+                    </a:lnT>
+                    <a:lnB w="6350" cap="flat" cmpd="sng" algn="ctr">
+                      <a:solidFill>
+                        <a:srgbClr val="CBD5E1"/>
+                      </a:solidFill>
+                      <a:prstDash val="solid"/>
+                      <a:round/>
+                      <a:headEnd type="none" w="med" len="med"/>
+                      <a:tailEnd type="none" w="med" len="med"/>
+                    </a:lnB>
+                    <a:solidFill>
+                      <a:srgbClr val="FFFFFF"/>
+                    </a:solidFill>
+                  </a:tcPr>
+                </a:tc>
+                <a:tc>
+                  <a:txBody>
+                    <a:bodyPr/>
+                    <a:lstStyle/>
+                    <a:p>
+                      <a:pPr algn="ctr" indent="0" marL="0">
+                        <a:buNone/>
+                      </a:pPr>
+                      <a:r>
+                        <a:rPr lang="en-US" sz="900" dirty="0">
+                          <a:solidFill>
+                            <a:srgbClr val="000000"/>
+                          </a:solidFill>
+                          <a:latin typeface="Arial" pitchFamily="34" charset="0"/>
+                          <a:ea typeface="Arial" pitchFamily="34" charset="-122"/>
+                          <a:cs typeface="Arial" pitchFamily="34" charset="-120"/>
+                        </a:rPr>
+                        <a:t>3.66</a:t>
+                      </a:r>
+                      <a:endParaRPr lang="en-US" sz="900" dirty="0">
+                        <a:latin typeface="Arial" charset="0"/>
+                        <a:ea typeface="Arial" charset="0"/>
+                        <a:cs typeface="Arial" charset="0"/>
+                      </a:endParaRPr>
+                    </a:p>
+                  </a:txBody>
+                  <a:tcPr marL="91440" marR="91440" marT="45720" marB="45720">
+                    <a:lnL w="6350" cap="flat" cmpd="sng" algn="ctr">
+                      <a:solidFill>
+                        <a:srgbClr val="CBD5E1"/>
+                      </a:solidFill>
+                      <a:prstDash val="solid"/>
+                      <a:round/>
+                      <a:headEnd type="none" w="med" len="med"/>
+                      <a:tailEnd type="none" w="med" len="med"/>
+                    </a:lnL>
+                    <a:lnR w="6350" cap="flat" cmpd="sng" algn="ctr">
+                      <a:solidFill>
+                        <a:srgbClr val="CBD5E1"/>
+                      </a:solidFill>
+                      <a:prstDash val="solid"/>
+                      <a:round/>
+                      <a:headEnd type="none" w="med" len="med"/>
+                      <a:tailEnd type="none" w="med" len="med"/>
+                    </a:lnR>
+                    <a:lnT w="6350" cap="flat" cmpd="sng" algn="ctr">
+                      <a:solidFill>
+                        <a:srgbClr val="CBD5E1"/>
+                      </a:solidFill>
+                      <a:prstDash val="solid"/>
+                      <a:round/>
+                      <a:headEnd type="none" w="med" len="med"/>
+                      <a:tailEnd type="none" w="med" len="med"/>
+                    </a:lnT>
+                    <a:lnB w="6350" cap="flat" cmpd="sng" algn="ctr">
+                      <a:solidFill>
+                        <a:srgbClr val="CBD5E1"/>
+                      </a:solidFill>
+                      <a:prstDash val="solid"/>
+                      <a:round/>
+                      <a:headEnd type="none" w="med" len="med"/>
+                      <a:tailEnd type="none" w="med" len="med"/>
+                    </a:lnB>
+                    <a:solidFill>
+                      <a:srgbClr val="FFFFFF"/>
+                    </a:solidFill>
+                  </a:tcPr>
+                </a:tc>
+                <a:tc>
+                  <a:txBody>
+                    <a:bodyPr/>
+                    <a:lstStyle/>
+                    <a:p>
+                      <a:pPr algn="ctr" indent="0" marL="0">
+                        <a:buNone/>
+                      </a:pPr>
+                      <a:r>
+                        <a:rPr lang="en-US" sz="900" dirty="0">
+                          <a:solidFill>
+                            <a:srgbClr val="000000"/>
+                          </a:solidFill>
+                          <a:latin typeface="Arial" pitchFamily="34" charset="0"/>
+                          <a:ea typeface="Arial" pitchFamily="34" charset="-122"/>
+                          <a:cs typeface="Arial" pitchFamily="34" charset="-120"/>
+                        </a:rPr>
+                        <a:t>/5 (×2)</a:t>
+                      </a:r>
+                      <a:endParaRPr lang="en-US" sz="900" dirty="0">
+                        <a:latin typeface="Arial" charset="0"/>
+                        <a:ea typeface="Arial" charset="0"/>
+                        <a:cs typeface="Arial" charset="0"/>
+                      </a:endParaRPr>
+                    </a:p>
+                  </a:txBody>
+                  <a:tcPr marL="91440" marR="91440" marT="45720" marB="45720">
+                    <a:lnL w="6350" cap="flat" cmpd="sng" algn="ctr">
+                      <a:solidFill>
+                        <a:srgbClr val="CBD5E1"/>
+                      </a:solidFill>
+                      <a:prstDash val="solid"/>
+                      <a:round/>
+                      <a:headEnd type="none" w="med" len="med"/>
+                      <a:tailEnd type="none" w="med" len="med"/>
+                    </a:lnL>
+                    <a:lnR w="6350" cap="flat" cmpd="sng" algn="ctr">
+                      <a:solidFill>
+                        <a:srgbClr val="CBD5E1"/>
+                      </a:solidFill>
+                      <a:prstDash val="solid"/>
+                      <a:round/>
+                      <a:headEnd type="none" w="med" len="med"/>
+                      <a:tailEnd type="none" w="med" len="med"/>
+                    </a:lnR>
+                    <a:lnT w="6350" cap="flat" cmpd="sng" algn="ctr">
+                      <a:solidFill>
+                        <a:srgbClr val="CBD5E1"/>
+                      </a:solidFill>
+                      <a:prstDash val="solid"/>
+                      <a:round/>
+                      <a:headEnd type="none" w="med" len="med"/>
+                      <a:tailEnd type="none" w="med" len="med"/>
+                    </a:lnT>
+                    <a:lnB w="6350" cap="flat" cmpd="sng" algn="ctr">
+                      <a:solidFill>
+                        <a:srgbClr val="CBD5E1"/>
+                      </a:solidFill>
+                      <a:prstDash val="solid"/>
+                      <a:round/>
+                      <a:headEnd type="none" w="med" len="med"/>
+                      <a:tailEnd type="none" w="med" len="med"/>
+                    </a:lnB>
+                    <a:solidFill>
+                      <a:srgbClr val="FFFFFF"/>
+                    </a:solidFill>
+                  </a:tcPr>
+                </a:tc>
+                <a:tc>
+                  <a:txBody>
+                    <a:bodyPr/>
+                    <a:lstStyle/>
+                    <a:p>
+                      <a:pPr algn="ctr" indent="0" marL="0">
+                        <a:buNone/>
+                      </a:pPr>
+                      <a:r>
+                        <a:rPr lang="en-US" sz="900" dirty="0">
+                          <a:solidFill>
+                            <a:srgbClr val="000000"/>
+                          </a:solidFill>
+                          <a:latin typeface="Arial" pitchFamily="34" charset="0"/>
+                          <a:ea typeface="Arial" pitchFamily="34" charset="-122"/>
+                          <a:cs typeface="Arial" pitchFamily="34" charset="-120"/>
+                        </a:rPr>
+                        <a:t>7.31</a:t>
+                      </a:r>
+                      <a:endParaRPr lang="en-US" sz="900" dirty="0">
+                        <a:latin typeface="Arial" charset="0"/>
+                        <a:ea typeface="Arial" charset="0"/>
+                        <a:cs typeface="Arial" charset="0"/>
+                      </a:endParaRPr>
+                    </a:p>
+                  </a:txBody>
+                  <a:tcPr marL="91440" marR="91440" marT="45720" marB="45720">
+                    <a:lnL w="6350" cap="flat" cmpd="sng" algn="ctr">
+                      <a:solidFill>
+                        <a:srgbClr val="CBD5E1"/>
+                      </a:solidFill>
+                      <a:prstDash val="solid"/>
+                      <a:round/>
+                      <a:headEnd type="none" w="med" len="med"/>
+                      <a:tailEnd type="none" w="med" len="med"/>
+                    </a:lnL>
+                    <a:lnR w="6350" cap="flat" cmpd="sng" algn="ctr">
+                      <a:solidFill>
+                        <a:srgbClr val="CBD5E1"/>
+                      </a:solidFill>
+                      <a:prstDash val="solid"/>
+                      <a:round/>
+                      <a:headEnd type="none" w="med" len="med"/>
+                      <a:tailEnd type="none" w="med" len="med"/>
+                    </a:lnR>
+                    <a:lnT w="6350" cap="flat" cmpd="sng" algn="ctr">
+                      <a:solidFill>
+                        <a:srgbClr val="CBD5E1"/>
+                      </a:solidFill>
+                      <a:prstDash val="solid"/>
+                      <a:round/>
+                      <a:headEnd type="none" w="med" len="med"/>
+                      <a:tailEnd type="none" w="med" len="med"/>
+                    </a:lnT>
+                    <a:lnB w="6350" cap="flat" cmpd="sng" algn="ctr">
+                      <a:solidFill>
+                        <a:srgbClr val="CBD5E1"/>
+                      </a:solidFill>
+                      <a:prstDash val="solid"/>
+                      <a:round/>
+                      <a:headEnd type="none" w="med" len="med"/>
+                      <a:tailEnd type="none" w="med" len="med"/>
+                    </a:lnB>
+                    <a:solidFill>
+                      <a:srgbClr val="FFFFFF"/>
+                    </a:solidFill>
+                  </a:tcPr>
+                </a:tc>
+              </a:tr>
+              <a:tr h="201168">
+                <a:tc>
+                  <a:txBody>
+                    <a:bodyPr/>
+                    <a:lstStyle/>
+                    <a:p>
+                      <a:pPr algn="ctr" indent="0" marL="0">
+                        <a:buNone/>
+                      </a:pPr>
+                      <a:r>
+                        <a:rPr lang="en-US" sz="900" dirty="0">
+                          <a:solidFill>
+                            <a:srgbClr val="000000"/>
+                          </a:solidFill>
+                          <a:latin typeface="Arial" pitchFamily="34" charset="0"/>
+                          <a:ea typeface="Arial" pitchFamily="34" charset="-122"/>
+                          <a:cs typeface="Arial" pitchFamily="34" charset="-120"/>
+                        </a:rPr>
                         <a:t>Booking.com</a:t>
                       </a:r>
                       <a:endParaRPr lang="en-US" sz="900" dirty="0">
@@ -8243,7 +8585,7 @@
                       <a:tailEnd type="none" w="med" len="med"/>
                     </a:lnB>
                     <a:solidFill>
-                      <a:srgbClr val="FFFFFF"/>
+                      <a:srgbClr val="E8EFF8"/>
                     </a:solidFill>
                   </a:tcPr>
                 </a:tc>
@@ -8311,7 +8653,7 @@
                       <a:tailEnd type="none" w="med" len="med"/>
                     </a:lnB>
                     <a:solidFill>
-                      <a:srgbClr val="FFFFFF"/>
+                      <a:srgbClr val="E8EFF8"/>
                     </a:solidFill>
                   </a:tcPr>
                 </a:tc>
@@ -8379,7 +8721,7 @@
                       <a:tailEnd type="none" w="med" len="med"/>
                     </a:lnB>
                     <a:solidFill>
-                      <a:srgbClr val="FFFFFF"/>
+                      <a:srgbClr val="E8EFF8"/>
                     </a:solidFill>
                   </a:tcPr>
                 </a:tc>
@@ -8447,7 +8789,7 @@
                       <a:tailEnd type="none" w="med" len="med"/>
                     </a:lnB>
                     <a:solidFill>
-                      <a:srgbClr val="FFFFFF"/>
+                      <a:srgbClr val="E8EFF8"/>
                     </a:solidFill>
                   </a:tcPr>
                 </a:tc>
@@ -8469,348 +8811,6 @@
                           <a:cs typeface="Arial" pitchFamily="34" charset="-120"/>
                         </a:rPr>
                         <a:t>7.08</a:t>
-                      </a:r>
-                      <a:endParaRPr lang="en-US" sz="900" dirty="0">
-                        <a:latin typeface="Arial" charset="0"/>
-                        <a:ea typeface="Arial" charset="0"/>
-                        <a:cs typeface="Arial" charset="0"/>
-                      </a:endParaRPr>
-                    </a:p>
-                  </a:txBody>
-                  <a:tcPr marL="91440" marR="91440" marT="45720" marB="45720">
-                    <a:lnL w="6350" cap="flat" cmpd="sng" algn="ctr">
-                      <a:solidFill>
-                        <a:srgbClr val="CBD5E1"/>
-                      </a:solidFill>
-                      <a:prstDash val="solid"/>
-                      <a:round/>
-                      <a:headEnd type="none" w="med" len="med"/>
-                      <a:tailEnd type="none" w="med" len="med"/>
-                    </a:lnL>
-                    <a:lnR w="6350" cap="flat" cmpd="sng" algn="ctr">
-                      <a:solidFill>
-                        <a:srgbClr val="CBD5E1"/>
-                      </a:solidFill>
-                      <a:prstDash val="solid"/>
-                      <a:round/>
-                      <a:headEnd type="none" w="med" len="med"/>
-                      <a:tailEnd type="none" w="med" len="med"/>
-                    </a:lnR>
-                    <a:lnT w="6350" cap="flat" cmpd="sng" algn="ctr">
-                      <a:solidFill>
-                        <a:srgbClr val="CBD5E1"/>
-                      </a:solidFill>
-                      <a:prstDash val="solid"/>
-                      <a:round/>
-                      <a:headEnd type="none" w="med" len="med"/>
-                      <a:tailEnd type="none" w="med" len="med"/>
-                    </a:lnT>
-                    <a:lnB w="6350" cap="flat" cmpd="sng" algn="ctr">
-                      <a:solidFill>
-                        <a:srgbClr val="CBD5E1"/>
-                      </a:solidFill>
-                      <a:prstDash val="solid"/>
-                      <a:round/>
-                      <a:headEnd type="none" w="med" len="med"/>
-                      <a:tailEnd type="none" w="med" len="med"/>
-                    </a:lnB>
-                    <a:solidFill>
-                      <a:srgbClr val="FFFFFF"/>
-                    </a:solidFill>
-                  </a:tcPr>
-                </a:tc>
-              </a:tr>
-              <a:tr h="201168">
-                <a:tc>
-                  <a:txBody>
-                    <a:bodyPr/>
-                    <a:lstStyle/>
-                    <a:p>
-                      <a:pPr algn="ctr" indent="0" marL="0">
-                        <a:buNone/>
-                      </a:pPr>
-                      <a:r>
-                        <a:rPr lang="en-US" sz="900" dirty="0">
-                          <a:solidFill>
-                            <a:srgbClr val="000000"/>
-                          </a:solidFill>
-                          <a:latin typeface="Arial" pitchFamily="34" charset="0"/>
-                          <a:ea typeface="Arial" pitchFamily="34" charset="-122"/>
-                          <a:cs typeface="Arial" pitchFamily="34" charset="-120"/>
-                        </a:rPr>
-                        <a:t>Google</a:t>
-                      </a:r>
-                      <a:endParaRPr lang="en-US" sz="900" dirty="0">
-                        <a:latin typeface="Arial" charset="0"/>
-                        <a:ea typeface="Arial" charset="0"/>
-                        <a:cs typeface="Arial" charset="0"/>
-                      </a:endParaRPr>
-                    </a:p>
-                  </a:txBody>
-                  <a:tcPr marL="91440" marR="91440" marT="45720" marB="45720">
-                    <a:lnL w="6350" cap="flat" cmpd="sng" algn="ctr">
-                      <a:solidFill>
-                        <a:srgbClr val="CBD5E1"/>
-                      </a:solidFill>
-                      <a:prstDash val="solid"/>
-                      <a:round/>
-                      <a:headEnd type="none" w="med" len="med"/>
-                      <a:tailEnd type="none" w="med" len="med"/>
-                    </a:lnL>
-                    <a:lnR w="6350" cap="flat" cmpd="sng" algn="ctr">
-                      <a:solidFill>
-                        <a:srgbClr val="CBD5E1"/>
-                      </a:solidFill>
-                      <a:prstDash val="solid"/>
-                      <a:round/>
-                      <a:headEnd type="none" w="med" len="med"/>
-                      <a:tailEnd type="none" w="med" len="med"/>
-                    </a:lnR>
-                    <a:lnT w="6350" cap="flat" cmpd="sng" algn="ctr">
-                      <a:solidFill>
-                        <a:srgbClr val="CBD5E1"/>
-                      </a:solidFill>
-                      <a:prstDash val="solid"/>
-                      <a:round/>
-                      <a:headEnd type="none" w="med" len="med"/>
-                      <a:tailEnd type="none" w="med" len="med"/>
-                    </a:lnT>
-                    <a:lnB w="6350" cap="flat" cmpd="sng" algn="ctr">
-                      <a:solidFill>
-                        <a:srgbClr val="CBD5E1"/>
-                      </a:solidFill>
-                      <a:prstDash val="solid"/>
-                      <a:round/>
-                      <a:headEnd type="none" w="med" len="med"/>
-                      <a:tailEnd type="none" w="med" len="med"/>
-                    </a:lnB>
-                    <a:solidFill>
-                      <a:srgbClr val="E8EFF8"/>
-                    </a:solidFill>
-                  </a:tcPr>
-                </a:tc>
-                <a:tc>
-                  <a:txBody>
-                    <a:bodyPr/>
-                    <a:lstStyle/>
-                    <a:p>
-                      <a:pPr algn="ctr" indent="0" marL="0">
-                        <a:buNone/>
-                      </a:pPr>
-                      <a:r>
-                        <a:rPr lang="en-US" sz="900" dirty="0">
-                          <a:solidFill>
-                            <a:srgbClr val="000000"/>
-                          </a:solidFill>
-                          <a:latin typeface="Arial" pitchFamily="34" charset="0"/>
-                          <a:ea typeface="Arial" pitchFamily="34" charset="-122"/>
-                          <a:cs typeface="Arial" pitchFamily="34" charset="-120"/>
-                        </a:rPr>
-                        <a:t>32</a:t>
-                      </a:r>
-                      <a:endParaRPr lang="en-US" sz="900" dirty="0">
-                        <a:latin typeface="Arial" charset="0"/>
-                        <a:ea typeface="Arial" charset="0"/>
-                        <a:cs typeface="Arial" charset="0"/>
-                      </a:endParaRPr>
-                    </a:p>
-                  </a:txBody>
-                  <a:tcPr marL="91440" marR="91440" marT="45720" marB="45720">
-                    <a:lnL w="6350" cap="flat" cmpd="sng" algn="ctr">
-                      <a:solidFill>
-                        <a:srgbClr val="CBD5E1"/>
-                      </a:solidFill>
-                      <a:prstDash val="solid"/>
-                      <a:round/>
-                      <a:headEnd type="none" w="med" len="med"/>
-                      <a:tailEnd type="none" w="med" len="med"/>
-                    </a:lnL>
-                    <a:lnR w="6350" cap="flat" cmpd="sng" algn="ctr">
-                      <a:solidFill>
-                        <a:srgbClr val="CBD5E1"/>
-                      </a:solidFill>
-                      <a:prstDash val="solid"/>
-                      <a:round/>
-                      <a:headEnd type="none" w="med" len="med"/>
-                      <a:tailEnd type="none" w="med" len="med"/>
-                    </a:lnR>
-                    <a:lnT w="6350" cap="flat" cmpd="sng" algn="ctr">
-                      <a:solidFill>
-                        <a:srgbClr val="CBD5E1"/>
-                      </a:solidFill>
-                      <a:prstDash val="solid"/>
-                      <a:round/>
-                      <a:headEnd type="none" w="med" len="med"/>
-                      <a:tailEnd type="none" w="med" len="med"/>
-                    </a:lnT>
-                    <a:lnB w="6350" cap="flat" cmpd="sng" algn="ctr">
-                      <a:solidFill>
-                        <a:srgbClr val="CBD5E1"/>
-                      </a:solidFill>
-                      <a:prstDash val="solid"/>
-                      <a:round/>
-                      <a:headEnd type="none" w="med" len="med"/>
-                      <a:tailEnd type="none" w="med" len="med"/>
-                    </a:lnB>
-                    <a:solidFill>
-                      <a:srgbClr val="E8EFF8"/>
-                    </a:solidFill>
-                  </a:tcPr>
-                </a:tc>
-                <a:tc>
-                  <a:txBody>
-                    <a:bodyPr/>
-                    <a:lstStyle/>
-                    <a:p>
-                      <a:pPr algn="ctr" indent="0" marL="0">
-                        <a:buNone/>
-                      </a:pPr>
-                      <a:r>
-                        <a:rPr lang="en-US" sz="900" dirty="0">
-                          <a:solidFill>
-                            <a:srgbClr val="000000"/>
-                          </a:solidFill>
-                          <a:latin typeface="Arial" pitchFamily="34" charset="0"/>
-                          <a:ea typeface="Arial" pitchFamily="34" charset="-122"/>
-                          <a:cs typeface="Arial" pitchFamily="34" charset="-120"/>
-                        </a:rPr>
-                        <a:t>3.53</a:t>
-                      </a:r>
-                      <a:endParaRPr lang="en-US" sz="900" dirty="0">
-                        <a:latin typeface="Arial" charset="0"/>
-                        <a:ea typeface="Arial" charset="0"/>
-                        <a:cs typeface="Arial" charset="0"/>
-                      </a:endParaRPr>
-                    </a:p>
-                  </a:txBody>
-                  <a:tcPr marL="91440" marR="91440" marT="45720" marB="45720">
-                    <a:lnL w="6350" cap="flat" cmpd="sng" algn="ctr">
-                      <a:solidFill>
-                        <a:srgbClr val="CBD5E1"/>
-                      </a:solidFill>
-                      <a:prstDash val="solid"/>
-                      <a:round/>
-                      <a:headEnd type="none" w="med" len="med"/>
-                      <a:tailEnd type="none" w="med" len="med"/>
-                    </a:lnL>
-                    <a:lnR w="6350" cap="flat" cmpd="sng" algn="ctr">
-                      <a:solidFill>
-                        <a:srgbClr val="CBD5E1"/>
-                      </a:solidFill>
-                      <a:prstDash val="solid"/>
-                      <a:round/>
-                      <a:headEnd type="none" w="med" len="med"/>
-                      <a:tailEnd type="none" w="med" len="med"/>
-                    </a:lnR>
-                    <a:lnT w="6350" cap="flat" cmpd="sng" algn="ctr">
-                      <a:solidFill>
-                        <a:srgbClr val="CBD5E1"/>
-                      </a:solidFill>
-                      <a:prstDash val="solid"/>
-                      <a:round/>
-                      <a:headEnd type="none" w="med" len="med"/>
-                      <a:tailEnd type="none" w="med" len="med"/>
-                    </a:lnT>
-                    <a:lnB w="6350" cap="flat" cmpd="sng" algn="ctr">
-                      <a:solidFill>
-                        <a:srgbClr val="CBD5E1"/>
-                      </a:solidFill>
-                      <a:prstDash val="solid"/>
-                      <a:round/>
-                      <a:headEnd type="none" w="med" len="med"/>
-                      <a:tailEnd type="none" w="med" len="med"/>
-                    </a:lnB>
-                    <a:solidFill>
-                      <a:srgbClr val="E8EFF8"/>
-                    </a:solidFill>
-                  </a:tcPr>
-                </a:tc>
-                <a:tc>
-                  <a:txBody>
-                    <a:bodyPr/>
-                    <a:lstStyle/>
-                    <a:p>
-                      <a:pPr algn="ctr" indent="0" marL="0">
-                        <a:buNone/>
-                      </a:pPr>
-                      <a:r>
-                        <a:rPr lang="en-US" sz="900" dirty="0">
-                          <a:solidFill>
-                            <a:srgbClr val="000000"/>
-                          </a:solidFill>
-                          <a:latin typeface="Arial" pitchFamily="34" charset="0"/>
-                          <a:ea typeface="Arial" pitchFamily="34" charset="-122"/>
-                          <a:cs typeface="Arial" pitchFamily="34" charset="-120"/>
-                        </a:rPr>
-                        <a:t>/5 (×2)</a:t>
-                      </a:r>
-                      <a:endParaRPr lang="en-US" sz="900" dirty="0">
-                        <a:latin typeface="Arial" charset="0"/>
-                        <a:ea typeface="Arial" charset="0"/>
-                        <a:cs typeface="Arial" charset="0"/>
-                      </a:endParaRPr>
-                    </a:p>
-                  </a:txBody>
-                  <a:tcPr marL="91440" marR="91440" marT="45720" marB="45720">
-                    <a:lnL w="6350" cap="flat" cmpd="sng" algn="ctr">
-                      <a:solidFill>
-                        <a:srgbClr val="CBD5E1"/>
-                      </a:solidFill>
-                      <a:prstDash val="solid"/>
-                      <a:round/>
-                      <a:headEnd type="none" w="med" len="med"/>
-                      <a:tailEnd type="none" w="med" len="med"/>
-                    </a:lnL>
-                    <a:lnR w="6350" cap="flat" cmpd="sng" algn="ctr">
-                      <a:solidFill>
-                        <a:srgbClr val="CBD5E1"/>
-                      </a:solidFill>
-                      <a:prstDash val="solid"/>
-                      <a:round/>
-                      <a:headEnd type="none" w="med" len="med"/>
-                      <a:tailEnd type="none" w="med" len="med"/>
-                    </a:lnR>
-                    <a:lnT w="6350" cap="flat" cmpd="sng" algn="ctr">
-                      <a:solidFill>
-                        <a:srgbClr val="CBD5E1"/>
-                      </a:solidFill>
-                      <a:prstDash val="solid"/>
-                      <a:round/>
-                      <a:headEnd type="none" w="med" len="med"/>
-                      <a:tailEnd type="none" w="med" len="med"/>
-                    </a:lnT>
-                    <a:lnB w="6350" cap="flat" cmpd="sng" algn="ctr">
-                      <a:solidFill>
-                        <a:srgbClr val="CBD5E1"/>
-                      </a:solidFill>
-                      <a:prstDash val="solid"/>
-                      <a:round/>
-                      <a:headEnd type="none" w="med" len="med"/>
-                      <a:tailEnd type="none" w="med" len="med"/>
-                    </a:lnB>
-                    <a:solidFill>
-                      <a:srgbClr val="E8EFF8"/>
-                    </a:solidFill>
-                  </a:tcPr>
-                </a:tc>
-                <a:tc>
-                  <a:txBody>
-                    <a:bodyPr/>
-                    <a:lstStyle/>
-                    <a:p>
-                      <a:pPr algn="ctr" indent="0" marL="0">
-                        <a:buNone/>
-                      </a:pPr>
-                      <a:r>
-                        <a:rPr lang="en-US" sz="900" dirty="0">
-                          <a:solidFill>
-                            <a:srgbClr val="000000"/>
-                          </a:solidFill>
-                          <a:latin typeface="Arial" pitchFamily="34" charset="0"/>
-                          <a:ea typeface="Arial" pitchFamily="34" charset="-122"/>
-                          <a:cs typeface="Arial" pitchFamily="34" charset="-120"/>
-                        </a:rPr>
-                        <a:t>7.06</a:t>
                       </a:r>
                       <a:endParaRPr lang="en-US" sz="900" dirty="0">
                         <a:latin typeface="Arial" charset="0"/>
@@ -9290,7 +9290,7 @@
                           <a:ea typeface="Arial" pitchFamily="34" charset="-122"/>
                           <a:cs typeface="Arial" pitchFamily="34" charset="-120"/>
                         </a:rPr>
-                        <a:t>8</a:t>
+                        <a:t>7</a:t>
                       </a:r>
                       <a:endParaRPr lang="en-US" sz="900" dirty="0">
                         <a:latin typeface="Arial" charset="0"/>
@@ -9358,7 +9358,7 @@
                           <a:ea typeface="Arial" pitchFamily="34" charset="-122"/>
                           <a:cs typeface="Arial" pitchFamily="34" charset="-120"/>
                         </a:rPr>
-                        <a:t>3.12</a:t>
+                        <a:t>3.29</a:t>
                       </a:r>
                       <a:endParaRPr lang="en-US" sz="900" dirty="0">
                         <a:latin typeface="Arial" charset="0"/>
@@ -9494,7 +9494,7 @@
                           <a:ea typeface="Arial" pitchFamily="34" charset="-122"/>
                           <a:cs typeface="Arial" pitchFamily="34" charset="-120"/>
                         </a:rPr>
-                        <a:t>6.25</a:t>
+                        <a:t>6.57</a:t>
                       </a:r>
                       <a:endParaRPr lang="en-US" sz="900" dirty="0">
                         <a:latin typeface="Arial" charset="0"/>
@@ -9902,7 +9902,7 @@
                 <a:ea typeface="Arial" pitchFamily="34" charset="-122"/>
                 <a:cs typeface="Arial" pitchFamily="34" charset="-120"/>
               </a:rPr>
-              <a:t>92件（66.2%）</a:t>
+              <a:t>94件（67.6%）</a:t>
             </a:r>
             <a:endParaRPr lang="en-US" sz="1100" dirty="0"/>
           </a:p>
@@ -10098,7 +10098,7 @@
                 <a:ea typeface="Arial" pitchFamily="34" charset="-122"/>
                 <a:cs typeface="Arial" pitchFamily="34" charset="-120"/>
               </a:rPr>
-              <a:t>17件（12.2%）</a:t>
+              <a:t>15件（10.8%）</a:t>
             </a:r>
             <a:endParaRPr lang="en-US" sz="1100" dirty="0"/>
           </a:p>
@@ -10510,7 +10510,7 @@
                 <a:ea typeface="Arial" pitchFamily="34" charset="-122"/>
                 <a:cs typeface="Arial" pitchFamily="34" charset="-120"/>
               </a:rPr>
-              <a:t>立地：福岡空港から30分、博多駅、地下鉄、バスターミナルからすぐ、セブンイレブンとスターバックスの隣という最高の拠点</a:t>
+              <a:t>バス、地下鉄、電車のアクセシビリティに優れ、場所は本当に良いです</a:t>
             </a:r>
             <a:endParaRPr lang="en-US" sz="900" dirty="0"/>
           </a:p>
@@ -10549,7 +10549,7 @@
                 <a:ea typeface="Arial" pitchFamily="34" charset="-122"/>
                 <a:cs typeface="Arial" pitchFamily="34" charset="-120"/>
               </a:rPr>
-              <a:t>「駅に近くて、ホテルの隣の建物からエレベーターで降りると一蘭にことができ便利だった」</a:t>
+              <a:t>「立地：福岡空港から30分、博多駅、地下鉄、バスターミナルからすぐ、セブンイレブンとスターバックスの隣という最高の拠点」</a:t>
             </a:r>
             <a:endParaRPr lang="en-US" sz="900" dirty="0"/>
           </a:p>
@@ -10733,7 +10733,7 @@
                 <a:ea typeface="Arial" pitchFamily="34" charset="-122"/>
                 <a:cs typeface="Arial" pitchFamily="34" charset="-120"/>
               </a:rPr>
-              <a:t>ボリュームたっぷりのおいしい朝食が含まれています</a:t>
+              <a:t>特に無料の朝食のおかげで、朝から移動するのに最適です</a:t>
             </a:r>
             <a:endParaRPr lang="en-US" sz="900" dirty="0"/>
           </a:p>
@@ -10772,7 +10772,7 @@
                 <a:ea typeface="Arial" pitchFamily="34" charset="-122"/>
                 <a:cs typeface="Arial" pitchFamily="34" charset="-120"/>
               </a:rPr>
-              <a:t>「朝食がとてもおいしかった」</a:t>
+              <a:t>「ボリュームたっぷりのおいしい朝食が含まれています」</a:t>
             </a:r>
             <a:endParaRPr lang="en-US" sz="900" dirty="0"/>
           </a:p>
@@ -10995,7 +10995,7 @@
                 <a:ea typeface="Arial" pitchFamily="34" charset="-122"/>
                 <a:cs typeface="Arial" pitchFamily="34" charset="-120"/>
               </a:rPr>
-              <a:t>「フロント対応はしっかり、丁寧」</a:t>
+              <a:t>「何よりもスタッフの方が本当にとてもフレンドリーで宿泊している間、気持ちがとても良かったです」</a:t>
             </a:r>
             <a:endParaRPr lang="en-US" sz="900" dirty="0"/>
           </a:p>
@@ -11179,7 +11179,7 @@
                 <a:ea typeface="Arial" pitchFamily="34" charset="-122"/>
                 <a:cs typeface="Arial" pitchFamily="34" charset="-120"/>
               </a:rPr>
-              <a:t>評価は低いですが、名古屋にあるこのチェーンのホテルでの快適な滞在と同じような体験ができました</a:t>
+              <a:t>評価は低いですが、名古屋にあるこのチェーンのホテルでの快適な滞在と同じような体験でした</a:t>
             </a:r>
             <a:endParaRPr lang="en-US" sz="900" dirty="0"/>
           </a:p>
@@ -12422,7 +12422,7 @@
                           <a:ea typeface="Arial" pitchFamily="34" charset="-122"/>
                           <a:cs typeface="Arial" pitchFamily="34" charset="-120"/>
                         </a:rPr>
-                        <a:t>20件</a:t>
+                        <a:t>21件</a:t>
                       </a:r>
                       <a:endParaRPr lang="en-US" sz="900" dirty="0">
                         <a:latin typeface="Arial" charset="0"/>
@@ -12628,7 +12628,7 @@
                           <a:ea typeface="Arial" pitchFamily="34" charset="-122"/>
                           <a:cs typeface="Arial" pitchFamily="34" charset="-120"/>
                         </a:rPr>
-                        <a:t>（午前6時30分～午前9時30分） 利便性: セルフサービスのランドリー（14階）、各階に自動販売機、ロビーには必...</a:t>
+                        <a:t>バス、地下鉄、電車のアクセシビリティに優れ、場所は本当に良いです</a:t>
                       </a:r>
                       <a:endParaRPr lang="en-US" sz="900" dirty="0">
                         <a:latin typeface="Arial" charset="0"/>
@@ -12696,7 +12696,7 @@
                           <a:ea typeface="Arial" pitchFamily="34" charset="-122"/>
                           <a:cs typeface="Arial" pitchFamily="34" charset="-120"/>
                         </a:rPr>
-                        <a:t>19件</a:t>
+                        <a:t>20件</a:t>
                       </a:r>
                       <a:endParaRPr lang="en-US" sz="900" dirty="0">
                         <a:latin typeface="Arial" charset="0"/>
@@ -13382,7 +13382,7 @@
                           <a:ea typeface="Arial" pitchFamily="34" charset="-122"/>
                           <a:cs typeface="Arial" pitchFamily="34" charset="-120"/>
                         </a:rPr>
-                        <a:t>部屋の狭さ</a:t>
+                        <a:t>防音性能</a:t>
                       </a:r>
                       <a:endParaRPr lang="en-US" sz="900" dirty="0">
                         <a:latin typeface="Arial" charset="0"/>
@@ -13450,7 +13450,7 @@
                           <a:ea typeface="Arial" pitchFamily="34" charset="-122"/>
                           <a:cs typeface="Arial" pitchFamily="34" charset="-120"/>
                         </a:rPr>
-                        <a:t>그래서 청결부분에서 좀안좋았던거같아요 서비스는좋앗습니다 日本は狭いですが、キャリアを広げると座る場所がなく、...</a:t>
+                        <a:t>客室品質: 11階 1128号室 清潔な客室で、防音性が高く、シャワーとビデの両方に信頼できるヒーターが付いています</a:t>
                       </a:r>
                       <a:endParaRPr lang="en-US" sz="900" dirty="0">
                         <a:latin typeface="Arial" charset="0"/>
@@ -13656,7 +13656,7 @@
                           <a:ea typeface="Arial" pitchFamily="34" charset="-122"/>
                           <a:cs typeface="Arial" pitchFamily="34" charset="-120"/>
                         </a:rPr>
-                        <a:t>防音性能</a:t>
+                        <a:t>部屋の狭さ</a:t>
                       </a:r>
                       <a:endParaRPr lang="en-US" sz="900" dirty="0">
                         <a:latin typeface="Arial" charset="0"/>
@@ -13724,7 +13724,7 @@
                           <a:ea typeface="Arial" pitchFamily="34" charset="-122"/>
                           <a:cs typeface="Arial" pitchFamily="34" charset="-120"/>
                         </a:rPr>
-                        <a:t>客室品質: 11階 1128号室 清潔な客室で、防音性が高く、シャワーとビデの両方に信頼できるヒーターが付いています</a:t>
+                        <a:t>그래서 청결부분에서 좀안좋았던거같아요 서비스는좋앗습니다 日本は狭いですが、キャリアを広げると座る場所がなく、...</a:t>
                       </a:r>
                       <a:endParaRPr lang="en-US" sz="900" dirty="0">
                         <a:latin typeface="Arial" charset="0"/>
@@ -13792,7 +13792,7 @@
                           <a:ea typeface="Arial" pitchFamily="34" charset="-122"/>
                           <a:cs typeface="Arial" pitchFamily="34" charset="-120"/>
                         </a:rPr>
-                        <a:t>8件</a:t>
+                        <a:t>9件</a:t>
                       </a:r>
                       <a:endParaRPr lang="en-US" sz="900" dirty="0">
                         <a:latin typeface="Arial" charset="0"/>
@@ -13930,7 +13930,7 @@
                           <a:ea typeface="Arial" pitchFamily="34" charset="-122"/>
                           <a:cs typeface="Arial" pitchFamily="34" charset="-120"/>
                         </a:rPr>
-                        <a:t>臭い・匂い</a:t>
+                        <a:t>窓・採光</a:t>
                       </a:r>
                       <a:endParaRPr lang="en-US" sz="900" dirty="0">
                         <a:latin typeface="Arial" charset="0"/>
@@ -13998,7 +13998,7 @@
                           <a:ea typeface="Arial" pitchFamily="34" charset="-122"/>
                           <a:cs typeface="Arial" pitchFamily="34" charset="-120"/>
                         </a:rPr>
-                        <a:t>風呂、トイレが少し汚く、生乾きの匂いがするのが残念 又、手元のライトが壊れててつかなかった</a:t>
+                        <a:t>朝食無料提供でルームコンディション大丈夫だったし、道路の辺りで夜に車音など若干の騒音があったのですが窓からは博多駅...</a:t>
                       </a:r>
                       <a:endParaRPr lang="en-US" sz="900" dirty="0">
                         <a:latin typeface="Arial" charset="0"/>
@@ -14066,7 +14066,7 @@
                           <a:ea typeface="Arial" pitchFamily="34" charset="-122"/>
                           <a:cs typeface="Arial" pitchFamily="34" charset="-120"/>
                         </a:rPr>
-                        <a:t>7件</a:t>
+                        <a:t>8件</a:t>
                       </a:r>
                       <a:endParaRPr lang="en-US" sz="900" dirty="0">
                         <a:latin typeface="Arial" charset="0"/>
@@ -14204,7 +14204,7 @@
                           <a:ea typeface="Arial" pitchFamily="34" charset="-122"/>
                           <a:cs typeface="Arial" pitchFamily="34" charset="-120"/>
                         </a:rPr>
-                        <a:t>窓・採光</a:t>
+                        <a:t>臭い・匂い</a:t>
                       </a:r>
                       <a:endParaRPr lang="en-US" sz="900" dirty="0">
                         <a:latin typeface="Arial" charset="0"/>
@@ -14272,7 +14272,7 @@
                           <a:ea typeface="Arial" pitchFamily="34" charset="-122"/>
                           <a:cs typeface="Arial" pitchFamily="34" charset="-120"/>
                         </a:rPr>
-                        <a:t>このホテルは、窓から博多駅の景色が望める便利な立地を誇っています</a:t>
+                        <a:t>風呂、トイレが少し汚く、生乾きの匂いがするのが残念 又、手元のライトが壊れててつかなかった</a:t>
                       </a:r>
                       <a:endParaRPr lang="en-US" sz="900" dirty="0">
                         <a:latin typeface="Arial" charset="0"/>

--- a/納品レポート/ホテル別レポート/comfort_hakata_口コミ分析レポート.pptx
+++ b/納品レポート/ホテル別レポート/comfort_hakata_口コミ分析レポート.pptx
@@ -2829,7 +2829,7 @@
                 <a:ea typeface="Arial" pitchFamily="34" charset="-122"/>
                 <a:cs typeface="Arial" pitchFamily="34" charset="-120"/>
               </a:rPr>
-              <a:t>作成日：2026年3月25日</a:t>
+              <a:t>作成日：2026年3月26日</a:t>
             </a:r>
             <a:endParaRPr lang="en-US" sz="1000" dirty="0"/>
           </a:p>
@@ -4745,7 +4745,7 @@
                           <a:ea typeface="Arial" pitchFamily="34" charset="-122"/>
                           <a:cs typeface="Arial" pitchFamily="34" charset="-120"/>
                         </a:rPr>
-                        <a:t>約21件/期間</a:t>
+                        <a:t>約22件/期間</a:t>
                       </a:r>
                       <a:endParaRPr lang="en-US" sz="1000" dirty="0">
                         <a:latin typeface="Arial" charset="0"/>
@@ -4813,7 +4813,7 @@
                           <a:ea typeface="Arial" pitchFamily="34" charset="-122"/>
                           <a:cs typeface="Arial" pitchFamily="34" charset="-120"/>
                         </a:rPr>
-                        <a:t>10件以下</a:t>
+                        <a:t>11件以下</a:t>
                       </a:r>
                       <a:endParaRPr lang="en-US" sz="1000" dirty="0">
                         <a:latin typeface="Arial" charset="0"/>
@@ -11179,7 +11179,7 @@
                 <a:ea typeface="Arial" pitchFamily="34" charset="-122"/>
                 <a:cs typeface="Arial" pitchFamily="34" charset="-120"/>
               </a:rPr>
-              <a:t>評価は低いですが、名古屋にあるこのチェーンのホテルでの快適な滞在と同じような体験でした</a:t>
+              <a:t>評価は低いですが、名古屋にあるこのチェーンのホテルでの快適な滞在と同じような体験ができました</a:t>
             </a:r>
             <a:endParaRPr lang="en-US" sz="900" dirty="0"/>
           </a:p>
@@ -12422,7 +12422,7 @@
                           <a:ea typeface="Arial" pitchFamily="34" charset="-122"/>
                           <a:cs typeface="Arial" pitchFamily="34" charset="-120"/>
                         </a:rPr>
-                        <a:t>21件</a:t>
+                        <a:t>22件</a:t>
                       </a:r>
                       <a:endParaRPr lang="en-US" sz="900" dirty="0">
                         <a:latin typeface="Arial" charset="0"/>

--- a/納品レポート/ホテル別レポート/comfort_hakata_口コミ分析レポート.pptx
+++ b/納品レポート/ホテル別レポート/comfort_hakata_口コミ分析レポート.pptx
@@ -205,10 +205,10 @@
                 <c:formatCode>General</c:formatCode>
                 <c:ptCount val="5"/>
                 <c:pt idx="0">
-                  <c:v>9.02</c:v>
+                  <c:v>9.04</c:v>
                 </c:pt>
                 <c:pt idx="1">
-                  <c:v>7.31</c:v>
+                  <c:v>7.48</c:v>
                 </c:pt>
                 <c:pt idx="2">
                   <c:v>7.08</c:v>
@@ -560,13 +560,13 @@
               <c:numCache>
                 <c:ptCount val="3"/>
                 <c:pt idx="0">
-                  <c:v>94</c:v>
+                  <c:v>95</c:v>
                 </c:pt>
                 <c:pt idx="1">
                   <c:v>30</c:v>
                 </c:pt>
                 <c:pt idx="2">
-                  <c:v>15</c:v>
+                  <c:v>14</c:v>
                 </c:pt>
               </c:numCache>
             </c:numRef>
@@ -831,7 +831,7 @@
                 <c:formatCode>General</c:formatCode>
                 <c:ptCount val="10"/>
                 <c:pt idx="0">
-                  <c:v>42</c:v>
+                  <c:v>43</c:v>
                 </c:pt>
                 <c:pt idx="1">
                   <c:v>15</c:v>
@@ -855,7 +855,7 @@
                   <c:v>3</c:v>
                 </c:pt>
                 <c:pt idx="8">
-                  <c:v>2</c:v>
+                  <c:v>1</c:v>
                 </c:pt>
                 <c:pt idx="9">
                   <c:v>1</c:v>
@@ -2829,7 +2829,7 @@
                 <a:ea typeface="Arial" pitchFamily="34" charset="-122"/>
                 <a:cs typeface="Arial" pitchFamily="34" charset="-120"/>
               </a:rPr>
-              <a:t>作成日：2026年3月26日</a:t>
+              <a:t>作成日：2026年3月27日</a:t>
             </a:r>
             <a:endParaRPr lang="en-US" sz="1000" dirty="0"/>
           </a:p>
@@ -3375,7 +3375,7 @@
                           <a:ea typeface="Arial" pitchFamily="34" charset="-122"/>
                           <a:cs typeface="Arial" pitchFamily="34" charset="-120"/>
                         </a:rPr>
-                        <a:t>7.83点</a:t>
+                        <a:t>7.88点</a:t>
                       </a:r>
                       <a:endParaRPr lang="en-US" sz="1000" dirty="0">
                         <a:latin typeface="Arial" charset="0"/>
@@ -3443,7 +3443,7 @@
                           <a:ea typeface="Arial" pitchFamily="34" charset="-122"/>
                           <a:cs typeface="Arial" pitchFamily="34" charset="-120"/>
                         </a:rPr>
-                        <a:t>8.3点以上</a:t>
+                        <a:t>8.4点以上</a:t>
                       </a:r>
                       <a:endParaRPr lang="en-US" sz="1000" dirty="0">
                         <a:latin typeface="Arial" charset="0"/>
@@ -3649,7 +3649,7 @@
                           <a:ea typeface="Arial" pitchFamily="34" charset="-122"/>
                           <a:cs typeface="Arial" pitchFamily="34" charset="-120"/>
                         </a:rPr>
-                        <a:t>67.6%</a:t>
+                        <a:t>68.3%</a:t>
                       </a:r>
                       <a:endParaRPr lang="en-US" sz="1000" dirty="0">
                         <a:latin typeface="Arial" charset="0"/>
@@ -3923,7 +3923,7 @@
                           <a:ea typeface="Arial" pitchFamily="34" charset="-122"/>
                           <a:cs typeface="Arial" pitchFamily="34" charset="-120"/>
                         </a:rPr>
-                        <a:t>10.8%</a:t>
+                        <a:t>10.1%</a:t>
                       </a:r>
                       <a:endParaRPr lang="en-US" sz="1000" dirty="0">
                         <a:latin typeface="Arial" charset="0"/>
@@ -3991,7 +3991,7 @@
                           <a:ea typeface="Arial" pitchFamily="34" charset="-122"/>
                           <a:cs typeface="Arial" pitchFamily="34" charset="-120"/>
                         </a:rPr>
-                        <a:t>6%以下</a:t>
+                        <a:t>5%以下</a:t>
                       </a:r>
                       <a:endParaRPr lang="en-US" sz="1000" dirty="0">
                         <a:latin typeface="Arial" charset="0"/>
@@ -5384,7 +5384,7 @@
                 <a:ea typeface="Arial" pitchFamily="34" charset="-122"/>
                 <a:cs typeface="Arial" pitchFamily="34" charset="-120"/>
               </a:rPr>
-              <a:t>7.83</a:t>
+              <a:t>7.88</a:t>
             </a:r>
             <a:endParaRPr lang="en-US" sz="3200" dirty="0"/>
           </a:p>
@@ -5509,7 +5509,7 @@
                 <a:ea typeface="Arial" pitchFamily="34" charset="-122"/>
                 <a:cs typeface="Arial" pitchFamily="34" charset="-120"/>
               </a:rPr>
-              <a:t>67.6%</a:t>
+              <a:t>68.3%</a:t>
             </a:r>
             <a:endParaRPr lang="en-US" sz="3200" dirty="0"/>
           </a:p>
@@ -5634,7 +5634,7 @@
                 <a:ea typeface="Arial" pitchFamily="34" charset="-122"/>
                 <a:cs typeface="Arial" pitchFamily="34" charset="-120"/>
               </a:rPr>
-              <a:t>10.8%</a:t>
+              <a:t>10.1%</a:t>
             </a:r>
             <a:endParaRPr lang="en-US" sz="3200" dirty="0"/>
           </a:p>
@@ -5907,7 +5907,7 @@
                 <a:ea typeface="Arial" pitchFamily="34" charset="-122"/>
                 <a:cs typeface="Arial" pitchFamily="34" charset="-120"/>
               </a:rPr>
-              <a:t>  バス、地下鉄、電車のアクセシビリティに優れ、場所は本当に良いです</a:t>
+              <a:t>  立地が良く、駅にも近い</a:t>
             </a:r>
             <a:endParaRPr lang="en-US" sz="1100" dirty="0"/>
           </a:p>
@@ -5947,7 +5947,7 @@
                 <a:ea typeface="Arial" pitchFamily="34" charset="-122"/>
                 <a:cs typeface="Arial" pitchFamily="34" charset="-120"/>
               </a:rPr>
-              <a:t>  特に無料の朝食のおかげで、朝から移動するのに最適です</a:t>
+              <a:t>  美味しい朝食も提供される</a:t>
             </a:r>
             <a:endParaRPr lang="en-US" sz="1100" dirty="0"/>
           </a:p>
@@ -5987,7 +5987,7 @@
                 <a:ea typeface="Arial" pitchFamily="34" charset="-122"/>
                 <a:cs typeface="Arial" pitchFamily="34" charset="-120"/>
               </a:rPr>
-              <a:t>  スタッフ：親切で対応が良い</a:t>
+              <a:t>  そして部屋が広くてよかったです😆宿も清潔でした〜ホテルスタッフの方もとてもフレンドリーでした</a:t>
             </a:r>
             <a:endParaRPr lang="en-US" sz="1100" dirty="0"/>
           </a:p>
@@ -6195,7 +6195,7 @@
                 <a:ea typeface="Arial" pitchFamily="34" charset="-122"/>
                 <a:cs typeface="Arial" pitchFamily="34" charset="-120"/>
               </a:rPr>
-              <a:t>エアコン・空調 </a:t>
+              <a:t>防音性能 </a:t>
             </a:r>
             <a:endParaRPr lang="en-US" sz="1100" dirty="0"/>
           </a:p>
@@ -6215,7 +6215,7 @@
                 <a:ea typeface="Arial" pitchFamily="34" charset="-122"/>
                 <a:cs typeface="Arial" pitchFamily="34" charset="-120"/>
               </a:rPr>
-              <a:t>  (6:30am - 9:30am)  Convenience:  Self-service laundry (14...</a:t>
+              <a:t>  ビューがとても綺麗でした〜駅前なのに静かで防音も良かったです</a:t>
             </a:r>
             <a:endParaRPr lang="en-US" sz="1100" dirty="0"/>
           </a:p>
@@ -6568,7 +6568,7 @@
                 <a:ea typeface="Arial" pitchFamily="34" charset="-122"/>
                 <a:cs typeface="Arial" pitchFamily="34" charset="-120"/>
               </a:rPr>
-              <a:t>7.83</a:t>
+              <a:t>7.88</a:t>
             </a:r>
             <a:endParaRPr lang="en-US" sz="3200" dirty="0"/>
           </a:p>
@@ -6693,7 +6693,7 @@
                 <a:ea typeface="Arial" pitchFamily="34" charset="-122"/>
                 <a:cs typeface="Arial" pitchFamily="34" charset="-120"/>
               </a:rPr>
-              <a:t>67.6%</a:t>
+              <a:t>68.3%</a:t>
             </a:r>
             <a:endParaRPr lang="en-US" sz="3200" dirty="0"/>
           </a:p>
@@ -6818,7 +6818,7 @@
                 <a:ea typeface="Arial" pitchFamily="34" charset="-122"/>
                 <a:cs typeface="Arial" pitchFamily="34" charset="-120"/>
               </a:rPr>
-              <a:t>10.8%</a:t>
+              <a:t>10.1%</a:t>
             </a:r>
             <a:endParaRPr lang="en-US" sz="3200" dirty="0"/>
           </a:p>
@@ -7364,7 +7364,7 @@
                 <a:ea typeface="Arial" pitchFamily="34" charset="-122"/>
                 <a:cs typeface="Arial" pitchFamily="34" charset="-120"/>
               </a:rPr>
-              <a:t>Trip.com(9.02)が最高スコア。</a:t>
+              <a:t>Trip.com(9.04)が最高スコア。</a:t>
             </a:r>
             <a:endParaRPr lang="en-US" sz="1100" dirty="0"/>
           </a:p>
@@ -7922,7 +7922,7 @@
                           <a:ea typeface="Arial" pitchFamily="34" charset="-122"/>
                           <a:cs typeface="Arial" pitchFamily="34" charset="-120"/>
                         </a:rPr>
-                        <a:t>52</a:t>
+                        <a:t>53</a:t>
                       </a:r>
                       <a:endParaRPr lang="en-US" sz="900" dirty="0">
                         <a:latin typeface="Arial" charset="0"/>
@@ -7990,7 +7990,7 @@
                           <a:ea typeface="Arial" pitchFamily="34" charset="-122"/>
                           <a:cs typeface="Arial" pitchFamily="34" charset="-120"/>
                         </a:rPr>
-                        <a:t>9.02</a:t>
+                        <a:t>9.04</a:t>
                       </a:r>
                       <a:endParaRPr lang="en-US" sz="900" dirty="0">
                         <a:latin typeface="Arial" charset="0"/>
@@ -8126,7 +8126,7 @@
                           <a:ea typeface="Arial" pitchFamily="34" charset="-122"/>
                           <a:cs typeface="Arial" pitchFamily="34" charset="-120"/>
                         </a:rPr>
-                        <a:t>9.02</a:t>
+                        <a:t>9.04</a:t>
                       </a:r>
                       <a:endParaRPr lang="en-US" sz="900" dirty="0">
                         <a:latin typeface="Arial" charset="0"/>
@@ -8264,7 +8264,7 @@
                           <a:ea typeface="Arial" pitchFamily="34" charset="-122"/>
                           <a:cs typeface="Arial" pitchFamily="34" charset="-120"/>
                         </a:rPr>
-                        <a:t>32</a:t>
+                        <a:t>31</a:t>
                       </a:r>
                       <a:endParaRPr lang="en-US" sz="900" dirty="0">
                         <a:latin typeface="Arial" charset="0"/>
@@ -8332,7 +8332,7 @@
                           <a:ea typeface="Arial" pitchFamily="34" charset="-122"/>
                           <a:cs typeface="Arial" pitchFamily="34" charset="-120"/>
                         </a:rPr>
-                        <a:t>3.66</a:t>
+                        <a:t>3.74</a:t>
                       </a:r>
                       <a:endParaRPr lang="en-US" sz="900" dirty="0">
                         <a:latin typeface="Arial" charset="0"/>
@@ -8468,7 +8468,7 @@
                           <a:ea typeface="Arial" pitchFamily="34" charset="-122"/>
                           <a:cs typeface="Arial" pitchFamily="34" charset="-120"/>
                         </a:rPr>
-                        <a:t>7.31</a:t>
+                        <a:t>7.48</a:t>
                       </a:r>
                       <a:endParaRPr lang="en-US" sz="900" dirty="0">
                         <a:latin typeface="Arial" charset="0"/>
@@ -9902,7 +9902,7 @@
                 <a:ea typeface="Arial" pitchFamily="34" charset="-122"/>
                 <a:cs typeface="Arial" pitchFamily="34" charset="-120"/>
               </a:rPr>
-              <a:t>94件（67.6%）</a:t>
+              <a:t>95件（68.3%）</a:t>
             </a:r>
             <a:endParaRPr lang="en-US" sz="1100" dirty="0"/>
           </a:p>
@@ -10098,7 +10098,7 @@
                 <a:ea typeface="Arial" pitchFamily="34" charset="-122"/>
                 <a:cs typeface="Arial" pitchFamily="34" charset="-120"/>
               </a:rPr>
-              <a:t>15件（10.8%）</a:t>
+              <a:t>14件（10.1%）</a:t>
             </a:r>
             <a:endParaRPr lang="en-US" sz="1100" dirty="0"/>
           </a:p>
@@ -10510,7 +10510,7 @@
                 <a:ea typeface="Arial" pitchFamily="34" charset="-122"/>
                 <a:cs typeface="Arial" pitchFamily="34" charset="-120"/>
               </a:rPr>
-              <a:t>バス、地下鉄、電車のアクセシビリティに優れ、場所は本当に良いです</a:t>
+              <a:t>立地が良く、駅にも近い</a:t>
             </a:r>
             <a:endParaRPr lang="en-US" sz="900" dirty="0"/>
           </a:p>
@@ -10549,7 +10549,7 @@
                 <a:ea typeface="Arial" pitchFamily="34" charset="-122"/>
                 <a:cs typeface="Arial" pitchFamily="34" charset="-120"/>
               </a:rPr>
-              <a:t>「立地：福岡空港から30分、博多駅、地下鉄、バスターミナルからすぐ、セブンイレブンとスターバックスの隣という最高の拠点」</a:t>
+              <a:t>「후쿠오카 올때마다 이용하고 싶어요~ 博多駅ビューでお願いしましたが、お願いしたとおり博多駅前に配っていただきました」</a:t>
             </a:r>
             <a:endParaRPr lang="en-US" sz="900" dirty="0"/>
           </a:p>
@@ -10733,7 +10733,7 @@
                 <a:ea typeface="Arial" pitchFamily="34" charset="-122"/>
                 <a:cs typeface="Arial" pitchFamily="34" charset="-120"/>
               </a:rPr>
-              <a:t>特に無料の朝食のおかげで、朝から移動するのに最適です</a:t>
+              <a:t>美味しい朝食も提供される</a:t>
             </a:r>
             <a:endParaRPr lang="en-US" sz="900" dirty="0"/>
           </a:p>
@@ -10772,7 +10772,7 @@
                 <a:ea typeface="Arial" pitchFamily="34" charset="-122"/>
                 <a:cs typeface="Arial" pitchFamily="34" charset="-120"/>
               </a:rPr>
-              <a:t>「ボリュームたっぷりのおいしい朝食が含まれています」</a:t>
+              <a:t>「特に無料の朝食のおかげで、朝から移動するのに最適です」</a:t>
             </a:r>
             <a:endParaRPr lang="en-US" sz="900" dirty="0"/>
           </a:p>
@@ -10956,7 +10956,7 @@
                 <a:ea typeface="Arial" pitchFamily="34" charset="-122"/>
                 <a:cs typeface="Arial" pitchFamily="34" charset="-120"/>
               </a:rPr>
-              <a:t>スタッフ：親切で対応が良い</a:t>
+              <a:t>そして部屋が広くてよかったです😆宿も清潔でした〜ホテルスタッフの方もとてもフレンドリーでした</a:t>
             </a:r>
             <a:endParaRPr lang="en-US" sz="900" dirty="0"/>
           </a:p>
@@ -10995,7 +10995,7 @@
                 <a:ea typeface="Arial" pitchFamily="34" charset="-122"/>
                 <a:cs typeface="Arial" pitchFamily="34" charset="-120"/>
               </a:rPr>
-              <a:t>「何よりもスタッフの方が本当にとてもフレンドリーで宿泊している間、気持ちがとても良かったです」</a:t>
+              <a:t>「スタッフ：親切で対応が良い」</a:t>
             </a:r>
             <a:endParaRPr lang="en-US" sz="900" dirty="0"/>
           </a:p>
@@ -11402,7 +11402,7 @@
                 <a:ea typeface="Arial" pitchFamily="34" charset="-122"/>
                 <a:cs typeface="Arial" pitchFamily="34" charset="-120"/>
               </a:rPr>
-              <a:t>名古屋のホテルより古いですが、手入れが行き届いていて、清潔です</a:t>
+              <a:t>そして部屋が広くてよかったです😆宿も清潔でした〜ホテルスタッフの方もとてもフレンドリーでした</a:t>
             </a:r>
             <a:endParaRPr lang="en-US" sz="900" dirty="0"/>
           </a:p>
@@ -11441,7 +11441,7 @@
                 <a:ea typeface="Arial" pitchFamily="34" charset="-122"/>
                 <a:cs typeface="Arial" pitchFamily="34" charset="-120"/>
               </a:rPr>
-              <a:t>「清潔さは十分にきれいだと思います」</a:t>
+              <a:t>「名古屋のホテルより古いですが、手入れが行き届いていて、清潔です」</a:t>
             </a:r>
             <a:endParaRPr lang="en-US" sz="900" dirty="0"/>
           </a:p>
@@ -12834,7 +12834,7 @@
                           <a:ea typeface="Arial" pitchFamily="34" charset="-122"/>
                           <a:cs typeface="Arial" pitchFamily="34" charset="-120"/>
                         </a:rPr>
-                        <a:t>エアコン・空調</a:t>
+                        <a:t>防音性能</a:t>
                       </a:r>
                       <a:endParaRPr lang="en-US" sz="900" dirty="0">
                         <a:latin typeface="Arial" charset="0"/>
@@ -12902,7 +12902,7 @@
                           <a:ea typeface="Arial" pitchFamily="34" charset="-122"/>
                           <a:cs typeface="Arial" pitchFamily="34" charset="-120"/>
                         </a:rPr>
-                        <a:t>(6:30am - 9:30am)  Convenience:  Self-service laundry (14...</a:t>
+                        <a:t>ビューがとても綺麗でした〜駅前なのに静かで防音も良かったです</a:t>
                       </a:r>
                       <a:endParaRPr lang="en-US" sz="900" dirty="0">
                         <a:latin typeface="Arial" charset="0"/>
@@ -13382,7 +13382,7 @@
                           <a:ea typeface="Arial" pitchFamily="34" charset="-122"/>
                           <a:cs typeface="Arial" pitchFamily="34" charset="-120"/>
                         </a:rPr>
-                        <a:t>防音性能</a:t>
+                        <a:t>部屋の狭さ</a:t>
                       </a:r>
                       <a:endParaRPr lang="en-US" sz="900" dirty="0">
                         <a:latin typeface="Arial" charset="0"/>
@@ -13450,7 +13450,7 @@
                           <a:ea typeface="Arial" pitchFamily="34" charset="-122"/>
                           <a:cs typeface="Arial" pitchFamily="34" charset="-120"/>
                         </a:rPr>
-                        <a:t>客室品質: 11階 1128号室 清潔な客室で、防音性が高く、シャワーとビデの両方に信頼できるヒーターが付いています</a:t>
+                        <a:t>그래서 청결부분에서 좀안좋았던거같아요 서비스는좋앗습니다 日本は狭いですが、キャリアを広げると座る場所がなく、...</a:t>
                       </a:r>
                       <a:endParaRPr lang="en-US" sz="900" dirty="0">
                         <a:latin typeface="Arial" charset="0"/>
@@ -13656,7 +13656,7 @@
                           <a:ea typeface="Arial" pitchFamily="34" charset="-122"/>
                           <a:cs typeface="Arial" pitchFamily="34" charset="-120"/>
                         </a:rPr>
-                        <a:t>部屋の狭さ</a:t>
+                        <a:t>エアコン・空調</a:t>
                       </a:r>
                       <a:endParaRPr lang="en-US" sz="900" dirty="0">
                         <a:latin typeface="Arial" charset="0"/>
@@ -13724,7 +13724,7 @@
                           <a:ea typeface="Arial" pitchFamily="34" charset="-122"/>
                           <a:cs typeface="Arial" pitchFamily="34" charset="-120"/>
                         </a:rPr>
-                        <a:t>그래서 청결부분에서 좀안좋았던거같아요 서비스는좋앗습니다 日本は狭いですが、キャリアを広げると座る場所がなく、...</a:t>
+                        <a:t>(6:30am - 9:30am)  Convenience:  Self-service laundry (14...</a:t>
                       </a:r>
                       <a:endParaRPr lang="en-US" sz="900" dirty="0">
                         <a:latin typeface="Arial" charset="0"/>

--- a/納品レポート/ホテル別レポート/comfort_hakata_口コミ分析レポート.pptx
+++ b/納品レポート/ホテル別レポート/comfort_hakata_口コミ分析レポート.pptx
@@ -2829,7 +2829,7 @@
                 <a:ea typeface="Arial" pitchFamily="34" charset="-122"/>
                 <a:cs typeface="Arial" pitchFamily="34" charset="-120"/>
               </a:rPr>
-              <a:t>作成日：2026年3月27日</a:t>
+              <a:t>作成日：2026年3月28日</a:t>
             </a:r>
             <a:endParaRPr lang="en-US" sz="1000" dirty="0"/>
           </a:p>
@@ -11179,7 +11179,7 @@
                 <a:ea typeface="Arial" pitchFamily="34" charset="-122"/>
                 <a:cs typeface="Arial" pitchFamily="34" charset="-120"/>
               </a:rPr>
-              <a:t>評価は低いですが、名古屋にあるこのチェーンのホテルでの快適な滞在と同じような体験ができました</a:t>
+              <a:t>評価は低いですが、名古屋にあるこのチェーンのホテルでの快適な滞在と同じような体験でした</a:t>
             </a:r>
             <a:endParaRPr lang="en-US" sz="900" dirty="0"/>
           </a:p>

--- a/納品レポート/ホテル別レポート/comfort_hakata_口コミ分析レポート.pptx
+++ b/納品レポート/ホテル別レポート/comfort_hakata_口コミ分析レポート.pptx
@@ -212,7 +212,7 @@
             <c:bubble3D val="0"/>
             <c:spPr>
               <a:solidFill>
-                <a:srgbClr val="EA580C"/>
+                <a:srgbClr val="DC2626"/>
               </a:solidFill>
               <a:effectLst/>
             </c:spPr>
@@ -260,16 +260,16 @@
                 <c:formatCode>General</c:formatCode>
                 <c:ptCount val="5"/>
                 <c:pt idx="0">
-                  <c:v>9.04</c:v>
+                  <c:v>9.07</c:v>
                 </c:pt>
                 <c:pt idx="1">
                   <c:v>7.48</c:v>
                 </c:pt>
                 <c:pt idx="2">
-                  <c:v>7.08</c:v>
+                  <c:v>7.11</c:v>
                 </c:pt>
                 <c:pt idx="3">
-                  <c:v>7</c:v>
+                  <c:v>6.89</c:v>
                 </c:pt>
                 <c:pt idx="4">
                   <c:v>6.57</c:v>
@@ -639,13 +639,13 @@
                 <c:formatCode>General</c:formatCode>
                 <c:ptCount val="10"/>
                 <c:pt idx="0">
-                  <c:v>43</c:v>
+                  <c:v>45</c:v>
                 </c:pt>
                 <c:pt idx="1">
-                  <c:v>15</c:v>
+                  <c:v>14</c:v>
                 </c:pt>
                 <c:pt idx="2">
-                  <c:v>37</c:v>
+                  <c:v>36</c:v>
                 </c:pt>
                 <c:pt idx="3">
                   <c:v>8</c:v>
@@ -654,10 +654,10 @@
                   <c:v>21</c:v>
                 </c:pt>
                 <c:pt idx="5">
-                  <c:v>1</c:v>
+                  <c:v>2</c:v>
                 </c:pt>
                 <c:pt idx="6">
-                  <c:v>9</c:v>
+                  <c:v>8</c:v>
                 </c:pt>
                 <c:pt idx="7">
                   <c:v>3</c:v>
@@ -2834,7 +2834,7 @@
                 <a:ea typeface="Arial" pitchFamily="34" charset="-122"/>
                 <a:cs typeface="Arial" pitchFamily="34" charset="-120"/>
               </a:rPr>
-              <a:t>コンフォートホテル博多は全体平均7.88点（10pt換算）、高評価率68.3%を達成しています。本レポートで示した改善施策を段階的に実施することで、さらなる顧客満足度向上が期待できます。</a:t>
+              <a:t>コンフォートホテル博多は全体平均7.91点（10pt換算）、高評価率68.3%を達成しています。本レポートで示した改善施策を段階的に実施することで、さらなる顧客満足度向上が期待できます。</a:t>
             </a:r>
             <a:endParaRPr lang="en-US" sz="1200" dirty="0"/>
           </a:p>
@@ -3271,7 +3271,7 @@
                 <a:ea typeface="Arial" pitchFamily="34" charset="-122"/>
                 <a:cs typeface="Arial" pitchFamily="34" charset="-120"/>
               </a:rPr>
-              <a:t>7.88</a:t>
+              <a:t>7.91</a:t>
             </a:r>
             <a:endParaRPr lang="en-US" sz="2800" dirty="0"/>
           </a:p>
@@ -3507,7 +3507,7 @@
                 <a:ea typeface="Arial" pitchFamily="34" charset="-122"/>
                 <a:cs typeface="Arial" pitchFamily="34" charset="-120"/>
               </a:rPr>
-              <a:t>10.1%</a:t>
+              <a:t>9.4%</a:t>
             </a:r>
             <a:endParaRPr lang="en-US" sz="2800" dirty="0"/>
           </a:p>
@@ -4364,7 +4364,7 @@
                           <a:ea typeface="Arial" pitchFamily="34" charset="-122"/>
                           <a:cs typeface="Arial" pitchFamily="34" charset="-120"/>
                         </a:rPr>
-                        <a:t>53</a:t>
+                        <a:t>54</a:t>
                       </a:r>
                       <a:endParaRPr lang="en-US" sz="800" dirty="0">
                         <a:latin typeface="Arial" charset="0"/>
@@ -4432,7 +4432,7 @@
                           <a:ea typeface="Arial" pitchFamily="34" charset="-122"/>
                           <a:cs typeface="Arial" pitchFamily="34" charset="-120"/>
                         </a:rPr>
-                        <a:t>9.04/10</a:t>
+                        <a:t>9.07/10</a:t>
                       </a:r>
                       <a:endParaRPr lang="en-US" sz="800" dirty="0">
                         <a:latin typeface="Arial" charset="0"/>
@@ -4500,7 +4500,7 @@
                           <a:ea typeface="Arial" pitchFamily="34" charset="-122"/>
                           <a:cs typeface="Arial" pitchFamily="34" charset="-120"/>
                         </a:rPr>
-                        <a:t>9.04</a:t>
+                        <a:t>9.07</a:t>
                       </a:r>
                       <a:endParaRPr lang="en-US" sz="800" dirty="0">
                         <a:latin typeface="Arial" charset="0"/>
@@ -5116,7 +5116,7 @@
                           <a:ea typeface="Arial" pitchFamily="34" charset="-122"/>
                           <a:cs typeface="Arial" pitchFamily="34" charset="-120"/>
                         </a:rPr>
-                        <a:t>7.08/10</a:t>
+                        <a:t>7.11/10</a:t>
                       </a:r>
                       <a:endParaRPr lang="en-US" sz="800" dirty="0">
                         <a:latin typeface="Arial" charset="0"/>
@@ -5184,7 +5184,7 @@
                           <a:ea typeface="Arial" pitchFamily="34" charset="-122"/>
                           <a:cs typeface="Arial" pitchFamily="34" charset="-120"/>
                         </a:rPr>
-                        <a:t>7.08</a:t>
+                        <a:t>7.11</a:t>
                       </a:r>
                       <a:endParaRPr lang="en-US" sz="800" dirty="0">
                         <a:latin typeface="Arial" charset="0"/>
@@ -5390,7 +5390,7 @@
                           <a:ea typeface="Arial" pitchFamily="34" charset="-122"/>
                           <a:cs typeface="Arial" pitchFamily="34" charset="-120"/>
                         </a:rPr>
-                        <a:t>10</a:t>
+                        <a:t>9</a:t>
                       </a:r>
                       <a:endParaRPr lang="en-US" sz="800" dirty="0">
                         <a:latin typeface="Arial" charset="0"/>
@@ -5458,7 +5458,7 @@
                           <a:ea typeface="Arial" pitchFamily="34" charset="-122"/>
                           <a:cs typeface="Arial" pitchFamily="34" charset="-120"/>
                         </a:rPr>
-                        <a:t>3.50/5</a:t>
+                        <a:t>3.44/5</a:t>
                       </a:r>
                       <a:endParaRPr lang="en-US" sz="800" dirty="0">
                         <a:latin typeface="Arial" charset="0"/>
@@ -5526,7 +5526,7 @@
                           <a:ea typeface="Arial" pitchFamily="34" charset="-122"/>
                           <a:cs typeface="Arial" pitchFamily="34" charset="-120"/>
                         </a:rPr>
-                        <a:t>7.00</a:t>
+                        <a:t>6.89</a:t>
                       </a:r>
                       <a:endParaRPr lang="en-US" sz="800" dirty="0">
                         <a:latin typeface="Arial" charset="0"/>
@@ -5594,7 +5594,7 @@
                           <a:ea typeface="Arial" pitchFamily="34" charset="-122"/>
                           <a:cs typeface="Arial" pitchFamily="34" charset="-120"/>
                         </a:rPr>
-                        <a:t>概ね良好</a:t>
+                        <a:t>要改善</a:t>
                       </a:r>
                       <a:endParaRPr lang="en-US" sz="800" dirty="0">
                         <a:latin typeface="Arial" charset="0"/>
@@ -6419,7 +6419,7 @@
                 <a:ea typeface="Arial" pitchFamily="34" charset="-122"/>
                 <a:cs typeface="Arial" pitchFamily="34" charset="-120"/>
               </a:rPr>
-              <a:t>30件（21.6%）</a:t>
+              <a:t>31件（22.3%）</a:t>
             </a:r>
             <a:endParaRPr lang="en-US" sz="1600" dirty="0"/>
           </a:p>
@@ -6517,7 +6517,7 @@
                 <a:ea typeface="Arial" pitchFamily="34" charset="-122"/>
                 <a:cs typeface="Arial" pitchFamily="34" charset="-120"/>
               </a:rPr>
-              <a:t>14件（10.1%）</a:t>
+              <a:t>13件（9.4%）</a:t>
             </a:r>
             <a:endParaRPr lang="en-US" sz="1600" dirty="0"/>
           </a:p>
@@ -7719,7 +7719,7 @@
                 <a:ea typeface="Arial" pitchFamily="34" charset="-122"/>
                 <a:cs typeface="Arial" pitchFamily="34" charset="-120"/>
               </a:rPr>
-              <a:t>全体平均 7.88点 → 目標 8.38点</a:t>
+              <a:t>全体平均 7.91点 → 目標 8.41点</a:t>
             </a:r>
             <a:endParaRPr lang="en-US" sz="1200" dirty="0"/>
           </a:p>
@@ -7753,7 +7753,7 @@
                 <a:ea typeface="Arial" pitchFamily="34" charset="-122"/>
                 <a:cs typeface="Arial" pitchFamily="34" charset="-120"/>
               </a:rPr>
-              <a:t>低評価率 10.1% → 目標 8.1%</a:t>
+              <a:t>低評価率 9.4% → 目標 7.4%</a:t>
             </a:r>
             <a:endParaRPr lang="en-US" sz="1200" dirty="0"/>
           </a:p>

--- a/納品レポート/ホテル別レポート/comfort_hakata_口コミ分析レポート.pptx
+++ b/納品レポート/ホテル別レポート/comfort_hakata_口コミ分析レポート.pptx
@@ -260,7 +260,7 @@
                 <c:formatCode>General</c:formatCode>
                 <c:ptCount val="5"/>
                 <c:pt idx="0">
-                  <c:v>9.07</c:v>
+                  <c:v>9.13</c:v>
                 </c:pt>
                 <c:pt idx="1">
                   <c:v>7.48</c:v>
@@ -269,7 +269,7 @@
                   <c:v>7.11</c:v>
                 </c:pt>
                 <c:pt idx="3">
-                  <c:v>6.89</c:v>
+                  <c:v>6.75</c:v>
                 </c:pt>
                 <c:pt idx="4">
                   <c:v>6.57</c:v>
@@ -639,13 +639,13 @@
                 <c:formatCode>General</c:formatCode>
                 <c:ptCount val="10"/>
                 <c:pt idx="0">
-                  <c:v>45</c:v>
+                  <c:v>47</c:v>
                 </c:pt>
                 <c:pt idx="1">
                   <c:v>14</c:v>
                 </c:pt>
                 <c:pt idx="2">
-                  <c:v>36</c:v>
+                  <c:v>34</c:v>
                 </c:pt>
                 <c:pt idx="3">
                   <c:v>8</c:v>
@@ -2834,7 +2834,7 @@
                 <a:ea typeface="Arial" pitchFamily="34" charset="-122"/>
                 <a:cs typeface="Arial" pitchFamily="34" charset="-120"/>
               </a:rPr>
-              <a:t>コンフォートホテル博多は全体平均7.91点（10pt換算）、高評価率68.3%を達成しています。本レポートで示した改善施策を段階的に実施することで、さらなる顧客満足度向上が期待できます。</a:t>
+              <a:t>コンフォートホテル博多は全体平均7.94点（10pt換算）、高評価率68.3%を達成しています。本レポートで示した改善施策を段階的に実施することで、さらなる顧客満足度向上が期待できます。</a:t>
             </a:r>
             <a:endParaRPr lang="en-US" sz="1200" dirty="0"/>
           </a:p>
@@ -3271,7 +3271,7 @@
                 <a:ea typeface="Arial" pitchFamily="34" charset="-122"/>
                 <a:cs typeface="Arial" pitchFamily="34" charset="-120"/>
               </a:rPr>
-              <a:t>7.91</a:t>
+              <a:t>7.94</a:t>
             </a:r>
             <a:endParaRPr lang="en-US" sz="2800" dirty="0"/>
           </a:p>
@@ -4364,7 +4364,7 @@
                           <a:ea typeface="Arial" pitchFamily="34" charset="-122"/>
                           <a:cs typeface="Arial" pitchFamily="34" charset="-120"/>
                         </a:rPr>
-                        <a:t>54</a:t>
+                        <a:t>55</a:t>
                       </a:r>
                       <a:endParaRPr lang="en-US" sz="800" dirty="0">
                         <a:latin typeface="Arial" charset="0"/>
@@ -4432,7 +4432,7 @@
                           <a:ea typeface="Arial" pitchFamily="34" charset="-122"/>
                           <a:cs typeface="Arial" pitchFamily="34" charset="-120"/>
                         </a:rPr>
-                        <a:t>9.07/10</a:t>
+                        <a:t>9.13/10</a:t>
                       </a:r>
                       <a:endParaRPr lang="en-US" sz="800" dirty="0">
                         <a:latin typeface="Arial" charset="0"/>
@@ -4500,7 +4500,7 @@
                           <a:ea typeface="Arial" pitchFamily="34" charset="-122"/>
                           <a:cs typeface="Arial" pitchFamily="34" charset="-120"/>
                         </a:rPr>
-                        <a:t>9.07</a:t>
+                        <a:t>9.13</a:t>
                       </a:r>
                       <a:endParaRPr lang="en-US" sz="800" dirty="0">
                         <a:latin typeface="Arial" charset="0"/>
@@ -5390,7 +5390,7 @@
                           <a:ea typeface="Arial" pitchFamily="34" charset="-122"/>
                           <a:cs typeface="Arial" pitchFamily="34" charset="-120"/>
                         </a:rPr>
-                        <a:t>9</a:t>
+                        <a:t>8</a:t>
                       </a:r>
                       <a:endParaRPr lang="en-US" sz="800" dirty="0">
                         <a:latin typeface="Arial" charset="0"/>
@@ -5458,7 +5458,7 @@
                           <a:ea typeface="Arial" pitchFamily="34" charset="-122"/>
                           <a:cs typeface="Arial" pitchFamily="34" charset="-120"/>
                         </a:rPr>
-                        <a:t>3.44/5</a:t>
+                        <a:t>3.38/5</a:t>
                       </a:r>
                       <a:endParaRPr lang="en-US" sz="800" dirty="0">
                         <a:latin typeface="Arial" charset="0"/>
@@ -5526,7 +5526,7 @@
                           <a:ea typeface="Arial" pitchFamily="34" charset="-122"/>
                           <a:cs typeface="Arial" pitchFamily="34" charset="-120"/>
                         </a:rPr>
-                        <a:t>6.89</a:t>
+                        <a:t>6.75</a:t>
                       </a:r>
                       <a:endParaRPr lang="en-US" sz="800" dirty="0">
                         <a:latin typeface="Arial" charset="0"/>
@@ -7719,7 +7719,7 @@
                 <a:ea typeface="Arial" pitchFamily="34" charset="-122"/>
                 <a:cs typeface="Arial" pitchFamily="34" charset="-120"/>
               </a:rPr>
-              <a:t>全体平均 7.91点 → 目標 8.41点</a:t>
+              <a:t>全体平均 7.94点 → 目標 8.44点</a:t>
             </a:r>
             <a:endParaRPr lang="en-US" sz="1200" dirty="0"/>
           </a:p>

--- a/納品レポート/ホテル別レポート/comfort_hakata_口コミ分析レポート.pptx
+++ b/納品レポート/ホテル別レポート/comfort_hakata_口コミ分析レポート.pptx
@@ -201,7 +201,7 @@
             <c:bubble3D val="0"/>
             <c:spPr>
               <a:solidFill>
-                <a:srgbClr val="EA580C"/>
+                <a:srgbClr val="DC2626"/>
               </a:solidFill>
               <a:effectLst/>
             </c:spPr>
@@ -260,19 +260,19 @@
                 <c:formatCode>General</c:formatCode>
                 <c:ptCount val="5"/>
                 <c:pt idx="0">
-                  <c:v>9.13</c:v>
+                  <c:v>9.04</c:v>
                 </c:pt>
                 <c:pt idx="1">
-                  <c:v>7.48</c:v>
+                  <c:v>7.21</c:v>
                 </c:pt>
                 <c:pt idx="2">
-                  <c:v>7.11</c:v>
+                  <c:v>6.97</c:v>
                 </c:pt>
                 <c:pt idx="3">
-                  <c:v>6.75</c:v>
+                  <c:v>6.89</c:v>
                 </c:pt>
                 <c:pt idx="4">
-                  <c:v>6.57</c:v>
+                  <c:v>6</c:v>
                 </c:pt>
               </c:numCache>
             </c:numRef>
@@ -639,31 +639,31 @@
                 <c:formatCode>General</c:formatCode>
                 <c:ptCount val="10"/>
                 <c:pt idx="0">
-                  <c:v>47</c:v>
+                  <c:v>46</c:v>
                 </c:pt>
                 <c:pt idx="1">
-                  <c:v>14</c:v>
+                  <c:v>13</c:v>
                 </c:pt>
                 <c:pt idx="2">
-                  <c:v>34</c:v>
+                  <c:v>31</c:v>
                 </c:pt>
                 <c:pt idx="3">
-                  <c:v>8</c:v>
+                  <c:v>9</c:v>
                 </c:pt>
                 <c:pt idx="4">
-                  <c:v>21</c:v>
+                  <c:v>22</c:v>
                 </c:pt>
                 <c:pt idx="5">
-                  <c:v>2</c:v>
+                  <c:v>4</c:v>
                 </c:pt>
                 <c:pt idx="6">
-                  <c:v>8</c:v>
+                  <c:v>9</c:v>
                 </c:pt>
                 <c:pt idx="7">
                   <c:v>3</c:v>
                 </c:pt>
                 <c:pt idx="8">
-                  <c:v>1</c:v>
+                  <c:v>2</c:v>
                 </c:pt>
                 <c:pt idx="9">
                   <c:v>1</c:v>
@@ -2554,7 +2554,7 @@
                 <a:ea typeface="Arial" pitchFamily="34" charset="-122"/>
                 <a:cs typeface="Arial" pitchFamily="34" charset="-120"/>
               </a:rPr>
-              <a:t>レビュー総数：139件</a:t>
+              <a:t>レビュー総数：140件</a:t>
             </a:r>
             <a:endParaRPr lang="en-US" sz="1000" dirty="0"/>
           </a:p>
@@ -2834,7 +2834,7 @@
                 <a:ea typeface="Arial" pitchFamily="34" charset="-122"/>
                 <a:cs typeface="Arial" pitchFamily="34" charset="-120"/>
               </a:rPr>
-              <a:t>コンフォートホテル博多は全体平均7.94点（10pt換算）、高評価率68.3%を達成しています。本レポートで示した改善施策を段階的に実施することで、さらなる顧客満足度向上が期待できます。</a:t>
+              <a:t>コンフォートホテル博多は全体平均7.79点（10pt換算）、高評価率64.3%を達成しています。本レポートで示した改善施策を段階的に実施することで、さらなる顧客満足度向上が期待できます。</a:t>
             </a:r>
             <a:endParaRPr lang="en-US" sz="1200" dirty="0"/>
           </a:p>
@@ -3271,7 +3271,7 @@
                 <a:ea typeface="Arial" pitchFamily="34" charset="-122"/>
                 <a:cs typeface="Arial" pitchFamily="34" charset="-120"/>
               </a:rPr>
-              <a:t>7.94</a:t>
+              <a:t>7.79</a:t>
             </a:r>
             <a:endParaRPr lang="en-US" sz="2800" dirty="0"/>
           </a:p>
@@ -3389,7 +3389,7 @@
                 <a:ea typeface="Arial" pitchFamily="34" charset="-122"/>
                 <a:cs typeface="Arial" pitchFamily="34" charset="-120"/>
               </a:rPr>
-              <a:t>68.3%</a:t>
+              <a:t>64.3%</a:t>
             </a:r>
             <a:endParaRPr lang="en-US" sz="2800" dirty="0"/>
           </a:p>
@@ -3507,7 +3507,7 @@
                 <a:ea typeface="Arial" pitchFamily="34" charset="-122"/>
                 <a:cs typeface="Arial" pitchFamily="34" charset="-120"/>
               </a:rPr>
-              <a:t>9.4%</a:t>
+              <a:t>10.7%</a:t>
             </a:r>
             <a:endParaRPr lang="en-US" sz="2800" dirty="0"/>
           </a:p>
@@ -3625,7 +3625,7 @@
                 <a:ea typeface="Arial" pitchFamily="34" charset="-122"/>
                 <a:cs typeface="Arial" pitchFamily="34" charset="-120"/>
               </a:rPr>
-              <a:t>139件</a:t>
+              <a:t>140件</a:t>
             </a:r>
             <a:endParaRPr lang="en-US" sz="2800" dirty="0"/>
           </a:p>
@@ -4364,7 +4364,7 @@
                           <a:ea typeface="Arial" pitchFamily="34" charset="-122"/>
                           <a:cs typeface="Arial" pitchFamily="34" charset="-120"/>
                         </a:rPr>
-                        <a:t>55</a:t>
+                        <a:t>54</a:t>
                       </a:r>
                       <a:endParaRPr lang="en-US" sz="800" dirty="0">
                         <a:latin typeface="Arial" charset="0"/>
@@ -4432,7 +4432,7 @@
                           <a:ea typeface="Arial" pitchFamily="34" charset="-122"/>
                           <a:cs typeface="Arial" pitchFamily="34" charset="-120"/>
                         </a:rPr>
-                        <a:t>9.13/10</a:t>
+                        <a:t>9.04/10</a:t>
                       </a:r>
                       <a:endParaRPr lang="en-US" sz="800" dirty="0">
                         <a:latin typeface="Arial" charset="0"/>
@@ -4500,7 +4500,7 @@
                           <a:ea typeface="Arial" pitchFamily="34" charset="-122"/>
                           <a:cs typeface="Arial" pitchFamily="34" charset="-120"/>
                         </a:rPr>
-                        <a:t>9.13</a:t>
+                        <a:t>9.04</a:t>
                       </a:r>
                       <a:endParaRPr lang="en-US" sz="800" dirty="0">
                         <a:latin typeface="Arial" charset="0"/>
@@ -4706,7 +4706,7 @@
                           <a:ea typeface="Arial" pitchFamily="34" charset="-122"/>
                           <a:cs typeface="Arial" pitchFamily="34" charset="-120"/>
                         </a:rPr>
-                        <a:t>31</a:t>
+                        <a:t>33</a:t>
                       </a:r>
                       <a:endParaRPr lang="en-US" sz="800" dirty="0">
                         <a:latin typeface="Arial" charset="0"/>
@@ -4774,7 +4774,7 @@
                           <a:ea typeface="Arial" pitchFamily="34" charset="-122"/>
                           <a:cs typeface="Arial" pitchFamily="34" charset="-120"/>
                         </a:rPr>
-                        <a:t>3.74/5</a:t>
+                        <a:t>3.61/5</a:t>
                       </a:r>
                       <a:endParaRPr lang="en-US" sz="800" dirty="0">
                         <a:latin typeface="Arial" charset="0"/>
@@ -4842,7 +4842,7 @@
                           <a:ea typeface="Arial" pitchFamily="34" charset="-122"/>
                           <a:cs typeface="Arial" pitchFamily="34" charset="-120"/>
                         </a:rPr>
-                        <a:t>7.48</a:t>
+                        <a:t>7.21</a:t>
                       </a:r>
                       <a:endParaRPr lang="en-US" sz="800" dirty="0">
                         <a:latin typeface="Arial" charset="0"/>
@@ -5048,7 +5048,7 @@
                           <a:ea typeface="Arial" pitchFamily="34" charset="-122"/>
                           <a:cs typeface="Arial" pitchFamily="34" charset="-120"/>
                         </a:rPr>
-                        <a:t>38</a:t>
+                        <a:t>39</a:t>
                       </a:r>
                       <a:endParaRPr lang="en-US" sz="800" dirty="0">
                         <a:latin typeface="Arial" charset="0"/>
@@ -5116,7 +5116,7 @@
                           <a:ea typeface="Arial" pitchFamily="34" charset="-122"/>
                           <a:cs typeface="Arial" pitchFamily="34" charset="-120"/>
                         </a:rPr>
-                        <a:t>7.11/10</a:t>
+                        <a:t>6.97/10</a:t>
                       </a:r>
                       <a:endParaRPr lang="en-US" sz="800" dirty="0">
                         <a:latin typeface="Arial" charset="0"/>
@@ -5184,7 +5184,7 @@
                           <a:ea typeface="Arial" pitchFamily="34" charset="-122"/>
                           <a:cs typeface="Arial" pitchFamily="34" charset="-120"/>
                         </a:rPr>
-                        <a:t>7.11</a:t>
+                        <a:t>6.97</a:t>
                       </a:r>
                       <a:endParaRPr lang="en-US" sz="800" dirty="0">
                         <a:latin typeface="Arial" charset="0"/>
@@ -5252,7 +5252,7 @@
                           <a:ea typeface="Arial" pitchFamily="34" charset="-122"/>
                           <a:cs typeface="Arial" pitchFamily="34" charset="-120"/>
                         </a:rPr>
-                        <a:t>概ね良好</a:t>
+                        <a:t>要改善</a:t>
                       </a:r>
                       <a:endParaRPr lang="en-US" sz="800" dirty="0">
                         <a:latin typeface="Arial" charset="0"/>
@@ -5390,7 +5390,7 @@
                           <a:ea typeface="Arial" pitchFamily="34" charset="-122"/>
                           <a:cs typeface="Arial" pitchFamily="34" charset="-120"/>
                         </a:rPr>
-                        <a:t>8</a:t>
+                        <a:t>9</a:t>
                       </a:r>
                       <a:endParaRPr lang="en-US" sz="800" dirty="0">
                         <a:latin typeface="Arial" charset="0"/>
@@ -5458,7 +5458,7 @@
                           <a:ea typeface="Arial" pitchFamily="34" charset="-122"/>
                           <a:cs typeface="Arial" pitchFamily="34" charset="-120"/>
                         </a:rPr>
-                        <a:t>3.38/5</a:t>
+                        <a:t>3.44/5</a:t>
                       </a:r>
                       <a:endParaRPr lang="en-US" sz="800" dirty="0">
                         <a:latin typeface="Arial" charset="0"/>
@@ -5526,7 +5526,7 @@
                           <a:ea typeface="Arial" pitchFamily="34" charset="-122"/>
                           <a:cs typeface="Arial" pitchFamily="34" charset="-120"/>
                         </a:rPr>
-                        <a:t>6.75</a:t>
+                        <a:t>6.89</a:t>
                       </a:r>
                       <a:endParaRPr lang="en-US" sz="800" dirty="0">
                         <a:latin typeface="Arial" charset="0"/>
@@ -5732,7 +5732,7 @@
                           <a:ea typeface="Arial" pitchFamily="34" charset="-122"/>
                           <a:cs typeface="Arial" pitchFamily="34" charset="-120"/>
                         </a:rPr>
-                        <a:t>7</a:t>
+                        <a:t>5</a:t>
                       </a:r>
                       <a:endParaRPr lang="en-US" sz="800" dirty="0">
                         <a:latin typeface="Arial" charset="0"/>
@@ -5800,7 +5800,7 @@
                           <a:ea typeface="Arial" pitchFamily="34" charset="-122"/>
                           <a:cs typeface="Arial" pitchFamily="34" charset="-120"/>
                         </a:rPr>
-                        <a:t>3.29/5</a:t>
+                        <a:t>3.00/5</a:t>
                       </a:r>
                       <a:endParaRPr lang="en-US" sz="800" dirty="0">
                         <a:latin typeface="Arial" charset="0"/>
@@ -5868,7 +5868,7 @@
                           <a:ea typeface="Arial" pitchFamily="34" charset="-122"/>
                           <a:cs typeface="Arial" pitchFamily="34" charset="-120"/>
                         </a:rPr>
-                        <a:t>6.57</a:t>
+                        <a:t>6.00</a:t>
                       </a:r>
                       <a:endParaRPr lang="en-US" sz="800" dirty="0">
                         <a:latin typeface="Arial" charset="0"/>
@@ -6321,7 +6321,7 @@
                 <a:ea typeface="Arial" pitchFamily="34" charset="-122"/>
                 <a:cs typeface="Arial" pitchFamily="34" charset="-120"/>
               </a:rPr>
-              <a:t>95件（68.3%）</a:t>
+              <a:t>90件（64.3%）</a:t>
             </a:r>
             <a:endParaRPr lang="en-US" sz="1600" dirty="0"/>
           </a:p>
@@ -6419,7 +6419,7 @@
                 <a:ea typeface="Arial" pitchFamily="34" charset="-122"/>
                 <a:cs typeface="Arial" pitchFamily="34" charset="-120"/>
               </a:rPr>
-              <a:t>31件（22.3%）</a:t>
+              <a:t>35件（25.0%）</a:t>
             </a:r>
             <a:endParaRPr lang="en-US" sz="1600" dirty="0"/>
           </a:p>
@@ -6517,7 +6517,7 @@
                 <a:ea typeface="Arial" pitchFamily="34" charset="-122"/>
                 <a:cs typeface="Arial" pitchFamily="34" charset="-120"/>
               </a:rPr>
-              <a:t>13件（9.4%）</a:t>
+              <a:t>15件（10.7%）</a:t>
             </a:r>
             <a:endParaRPr lang="en-US" sz="1600" dirty="0"/>
           </a:p>
@@ -6679,7 +6679,7 @@
                 <a:ea typeface="Arial" pitchFamily="34" charset="-122"/>
                 <a:cs typeface="Arial" pitchFamily="34" charset="-120"/>
               </a:rPr>
-              <a:t>高評価レビュー（8-10点: 95件）の分析から、主要な強みテーマを抽出しています。立地・アクセス、客室清潔感、スタッフ対応が高評価の中心的テーマです。</a:t>
+              <a:t>高評価レビュー（8-10点: 90件）の分析から、主要な強みテーマを抽出しています。立地・アクセス、客室清潔感、スタッフ対応が高評価の中心的テーマです。</a:t>
             </a:r>
             <a:endParaRPr lang="en-US" sz="1200" dirty="0"/>
           </a:p>
@@ -6939,7 +6939,7 @@
                 <a:ea typeface="Arial" pitchFamily="34" charset="-122"/>
                 <a:cs typeface="Arial" pitchFamily="34" charset="-120"/>
               </a:rPr>
-              <a:t>低評価・中評価レビュー（44件）から改善課題を優先度別に整理しています。S/A/B/Cの4段階で優先度を設定し、計画的な改善を推進します。</a:t>
+              <a:t>低評価・中評価レビュー（50件）から改善課題を優先度別に整理しています。S/A/B/Cの4段階で優先度を設定し、計画的な改善を推進します。</a:t>
             </a:r>
             <a:endParaRPr lang="en-US" sz="1200" dirty="0"/>
           </a:p>
@@ -7719,7 +7719,7 @@
                 <a:ea typeface="Arial" pitchFamily="34" charset="-122"/>
                 <a:cs typeface="Arial" pitchFamily="34" charset="-120"/>
               </a:rPr>
-              <a:t>全体平均 7.94点 → 目標 8.44点</a:t>
+              <a:t>全体平均 7.79点 → 目標 8.29点</a:t>
             </a:r>
             <a:endParaRPr lang="en-US" sz="1200" dirty="0"/>
           </a:p>
@@ -7736,7 +7736,7 @@
                 <a:ea typeface="Arial" pitchFamily="34" charset="-122"/>
                 <a:cs typeface="Arial" pitchFamily="34" charset="-120"/>
               </a:rPr>
-              <a:t>高評価率 68.3% → 目標 73.3%</a:t>
+              <a:t>高評価率 64.3% → 目標 69.3%</a:t>
             </a:r>
             <a:endParaRPr lang="en-US" sz="1200" dirty="0"/>
           </a:p>
@@ -7753,7 +7753,7 @@
                 <a:ea typeface="Arial" pitchFamily="34" charset="-122"/>
                 <a:cs typeface="Arial" pitchFamily="34" charset="-120"/>
               </a:rPr>
-              <a:t>低評価率 9.4% → 目標 7.4%</a:t>
+              <a:t>低評価率 10.7% → 目標 8.7%</a:t>
             </a:r>
             <a:endParaRPr lang="en-US" sz="1200" dirty="0"/>
           </a:p>

--- a/納品レポート/ホテル別レポート/comfort_hakata_口コミ分析レポート.pptx
+++ b/納品レポート/ホテル別レポート/comfort_hakata_口コミ分析レポート.pptx
@@ -190,7 +190,7 @@
             <c:bubble3D val="0"/>
             <c:spPr>
               <a:solidFill>
-                <a:srgbClr val="DC2626"/>
+                <a:srgbClr val="16A34A"/>
               </a:solidFill>
               <a:effectLst/>
             </c:spPr>
@@ -201,7 +201,7 @@
             <c:bubble3D val="0"/>
             <c:spPr>
               <a:solidFill>
-                <a:srgbClr val="DC2626"/>
+                <a:srgbClr val="EA580C"/>
               </a:solidFill>
               <a:effectLst/>
             </c:spPr>
@@ -238,16 +238,16 @@
                     <c:v>Trip.com</c:v>
                   </c:pt>
                   <c:pt idx="1">
+                    <c:v>じゃらん</c:v>
+                  </c:pt>
+                  <c:pt idx="2">
                     <c:v>Booking.com</c:v>
                   </c:pt>
-                  <c:pt idx="2">
-                    <c:v>Google</c:v>
-                  </c:pt>
                   <c:pt idx="3">
-                    <c:v>じゃらん</c:v>
+                    <c:v>楽天トラベル</c:v>
                   </c:pt>
                   <c:pt idx="4">
-                    <c:v>楽天トラベル</c:v>
+                    <c:v>Google</c:v>
                   </c:pt>
                 </c:lvl>
               </c:multiLvlStrCache>
@@ -260,19 +260,19 @@
                 <c:formatCode>General</c:formatCode>
                 <c:ptCount val="5"/>
                 <c:pt idx="0">
-                  <c:v>9.04</c:v>
+                  <c:v>9.03</c:v>
                 </c:pt>
                 <c:pt idx="1">
-                  <c:v>6.97</c:v>
+                  <c:v>8</c:v>
                 </c:pt>
                 <c:pt idx="2">
-                  <c:v>6.97</c:v>
+                  <c:v>7</c:v>
                 </c:pt>
                 <c:pt idx="3">
-                  <c:v>6.89</c:v>
+                  <c:v>6.67</c:v>
                 </c:pt>
                 <c:pt idx="4">
-                  <c:v>6</c:v>
+                  <c:v>6.33</c:v>
                 </c:pt>
               </c:numCache>
             </c:numRef>
@@ -581,22 +581,11 @@
               <a:effectLst/>
             </c:spPr>
           </c:dPt>
-          <c:dPt>
-            <c:idx val="9"/>
-            <c:invertIfNegative val="0"/>
-            <c:bubble3D val="0"/>
-            <c:spPr>
-              <a:solidFill>
-                <a:srgbClr val="DC2626"/>
-              </a:solidFill>
-              <a:effectLst/>
-            </c:spPr>
-          </c:dPt>
           <c:cat>
             <c:multiLvlStrRef>
-              <c:f>Sheet1!$A$2:$A$11</c:f>
+              <c:f>Sheet1!$A$2:$A$10</c:f>
               <c:multiLvlStrCache>
-                <c:ptCount val="10"/>
+                <c:ptCount val="9"/>
                 <c:lvl>
                   <c:pt idx="0">
                     <c:v>10点</c:v>
@@ -625,48 +614,42 @@
                   <c:pt idx="8">
                     <c:v>2点</c:v>
                   </c:pt>
-                  <c:pt idx="9">
-                    <c:v>1点</c:v>
-                  </c:pt>
                 </c:lvl>
               </c:multiLvlStrCache>
             </c:multiLvlStrRef>
           </c:cat>
           <c:val>
             <c:numRef>
-              <c:f>Sheet1!$B$2:$B$11</c:f>
+              <c:f>Sheet1!$B$2:$B$10</c:f>
               <c:numCache>
                 <c:formatCode>General</c:formatCode>
-                <c:ptCount val="10"/>
+                <c:ptCount val="9"/>
                 <c:pt idx="0">
-                  <c:v>45</c:v>
+                  <c:v>23</c:v>
                 </c:pt>
                 <c:pt idx="1">
-                  <c:v>13</c:v>
+                  <c:v>7</c:v>
                 </c:pt>
                 <c:pt idx="2">
-                  <c:v>31</c:v>
+                  <c:v>19</c:v>
                 </c:pt>
                 <c:pt idx="3">
-                  <c:v>9</c:v>
+                  <c:v>4</c:v>
                 </c:pt>
                 <c:pt idx="4">
-                  <c:v>22</c:v>
+                  <c:v>6</c:v>
                 </c:pt>
                 <c:pt idx="5">
-                  <c:v>4</c:v>
+                  <c:v>3</c:v>
                 </c:pt>
                 <c:pt idx="6">
-                  <c:v>9</c:v>
+                  <c:v>3</c:v>
                 </c:pt>
                 <c:pt idx="7">
-                  <c:v>3</c:v>
+                  <c:v>2</c:v>
                 </c:pt>
                 <c:pt idx="8">
                   <c:v>3</c:v>
-                </c:pt>
-                <c:pt idx="9">
-                  <c:v>1</c:v>
                 </c:pt>
               </c:numCache>
             </c:numRef>
@@ -2554,7 +2537,7 @@
                 <a:ea typeface="Arial" pitchFamily="34" charset="-122"/>
                 <a:cs typeface="Arial" pitchFamily="34" charset="-120"/>
               </a:rPr>
-              <a:t>レビュー総数：140件</a:t>
+              <a:t>レビュー総数：70件</a:t>
             </a:r>
             <a:endParaRPr lang="en-US" sz="1000" dirty="0"/>
           </a:p>
@@ -2834,7 +2817,7 @@
                 <a:ea typeface="Arial" pitchFamily="34" charset="-122"/>
                 <a:cs typeface="Arial" pitchFamily="34" charset="-120"/>
               </a:rPr>
-              <a:t>コンフォートホテル博多は全体平均7.73点（10pt換算）、高評価率63.6%を達成しています。本レポートで示した改善施策を段階的に実施することで、さらなる顧客満足度向上が期待できます。</a:t>
+              <a:t>コンフォートホテル博多は全体平均7.83点（10pt換算）、高評価率70.0%を達成しています。本レポートで示した改善施策を段階的に実施することで、さらなる顧客満足度向上が期待できます。</a:t>
             </a:r>
             <a:endParaRPr lang="en-US" sz="1200" dirty="0"/>
           </a:p>
@@ -3271,7 +3254,7 @@
                 <a:ea typeface="Arial" pitchFamily="34" charset="-122"/>
                 <a:cs typeface="Arial" pitchFamily="34" charset="-120"/>
               </a:rPr>
-              <a:t>7.73</a:t>
+              <a:t>7.83</a:t>
             </a:r>
             <a:endParaRPr lang="en-US" sz="2800" dirty="0"/>
           </a:p>
@@ -3389,7 +3372,7 @@
                 <a:ea typeface="Arial" pitchFamily="34" charset="-122"/>
                 <a:cs typeface="Arial" pitchFamily="34" charset="-120"/>
               </a:rPr>
-              <a:t>63.6%</a:t>
+              <a:t>70.0%</a:t>
             </a:r>
             <a:endParaRPr lang="en-US" sz="2800" dirty="0"/>
           </a:p>
@@ -3625,7 +3608,7 @@
                 <a:ea typeface="Arial" pitchFamily="34" charset="-122"/>
                 <a:cs typeface="Arial" pitchFamily="34" charset="-120"/>
               </a:rPr>
-              <a:t>140件</a:t>
+              <a:t>70件</a:t>
             </a:r>
             <a:endParaRPr lang="en-US" sz="2800" dirty="0"/>
           </a:p>
@@ -4364,7 +4347,7 @@
                           <a:ea typeface="Arial" pitchFamily="34" charset="-122"/>
                           <a:cs typeface="Arial" pitchFamily="34" charset="-120"/>
                         </a:rPr>
-                        <a:t>54</a:t>
+                        <a:t>31</a:t>
                       </a:r>
                       <a:endParaRPr lang="en-US" sz="800" dirty="0">
                         <a:latin typeface="Arial" charset="0"/>
@@ -4432,7 +4415,7 @@
                           <a:ea typeface="Arial" pitchFamily="34" charset="-122"/>
                           <a:cs typeface="Arial" pitchFamily="34" charset="-120"/>
                         </a:rPr>
-                        <a:t>9.04/10</a:t>
+                        <a:t>9.03/10</a:t>
                       </a:r>
                       <a:endParaRPr lang="en-US" sz="800" dirty="0">
                         <a:latin typeface="Arial" charset="0"/>
@@ -4500,7 +4483,7 @@
                           <a:ea typeface="Arial" pitchFamily="34" charset="-122"/>
                           <a:cs typeface="Arial" pitchFamily="34" charset="-120"/>
                         </a:rPr>
-                        <a:t>9.04</a:t>
+                        <a:t>9.03</a:t>
                       </a:r>
                       <a:endParaRPr lang="en-US" sz="800" dirty="0">
                         <a:latin typeface="Arial" charset="0"/>
@@ -4569,6 +4552,348 @@
                           <a:cs typeface="Arial" pitchFamily="34" charset="-120"/>
                         </a:rPr>
                         <a:t>優秀</a:t>
+                      </a:r>
+                      <a:endParaRPr lang="en-US" sz="800" dirty="0">
+                        <a:latin typeface="Arial" charset="0"/>
+                        <a:ea typeface="Arial" charset="0"/>
+                        <a:cs typeface="Arial" charset="0"/>
+                      </a:endParaRPr>
+                    </a:p>
+                  </a:txBody>
+                  <a:tcPr marL="91440" marR="91440" marT="45720" marB="45720">
+                    <a:lnL w="6350" cap="flat" cmpd="sng" algn="ctr">
+                      <a:solidFill>
+                        <a:srgbClr val="CCCCCC"/>
+                      </a:solidFill>
+                      <a:prstDash val="solid"/>
+                      <a:round/>
+                      <a:headEnd type="none" w="med" len="med"/>
+                      <a:tailEnd type="none" w="med" len="med"/>
+                    </a:lnL>
+                    <a:lnR w="6350" cap="flat" cmpd="sng" algn="ctr">
+                      <a:solidFill>
+                        <a:srgbClr val="CCCCCC"/>
+                      </a:solidFill>
+                      <a:prstDash val="solid"/>
+                      <a:round/>
+                      <a:headEnd type="none" w="med" len="med"/>
+                      <a:tailEnd type="none" w="med" len="med"/>
+                    </a:lnR>
+                    <a:lnT w="6350" cap="flat" cmpd="sng" algn="ctr">
+                      <a:solidFill>
+                        <a:srgbClr val="CCCCCC"/>
+                      </a:solidFill>
+                      <a:prstDash val="solid"/>
+                      <a:round/>
+                      <a:headEnd type="none" w="med" len="med"/>
+                      <a:tailEnd type="none" w="med" len="med"/>
+                    </a:lnT>
+                    <a:lnB w="6350" cap="flat" cmpd="sng" algn="ctr">
+                      <a:solidFill>
+                        <a:srgbClr val="CCCCCC"/>
+                      </a:solidFill>
+                      <a:prstDash val="solid"/>
+                      <a:round/>
+                      <a:headEnd type="none" w="med" len="med"/>
+                      <a:tailEnd type="none" w="med" len="med"/>
+                    </a:lnB>
+                    <a:solidFill>
+                      <a:srgbClr val="FFFFFF"/>
+                    </a:solidFill>
+                  </a:tcPr>
+                </a:tc>
+              </a:tr>
+              <a:tr h="0">
+                <a:tc>
+                  <a:txBody>
+                    <a:bodyPr/>
+                    <a:lstStyle/>
+                    <a:p>
+                      <a:pPr algn="ctr" indent="0" marL="0">
+                        <a:buNone/>
+                      </a:pPr>
+                      <a:r>
+                        <a:rPr lang="en-US" sz="800" dirty="0">
+                          <a:solidFill>
+                            <a:srgbClr val="000000"/>
+                          </a:solidFill>
+                          <a:latin typeface="Arial" pitchFamily="34" charset="0"/>
+                          <a:ea typeface="Arial" pitchFamily="34" charset="-122"/>
+                          <a:cs typeface="Arial" pitchFamily="34" charset="-120"/>
+                        </a:rPr>
+                        <a:t>じゃらん</a:t>
+                      </a:r>
+                      <a:endParaRPr lang="en-US" sz="800" dirty="0">
+                        <a:latin typeface="Arial" charset="0"/>
+                        <a:ea typeface="Arial" charset="0"/>
+                        <a:cs typeface="Arial" charset="0"/>
+                      </a:endParaRPr>
+                    </a:p>
+                  </a:txBody>
+                  <a:tcPr marL="91440" marR="91440" marT="45720" marB="45720">
+                    <a:lnL w="6350" cap="flat" cmpd="sng" algn="ctr">
+                      <a:solidFill>
+                        <a:srgbClr val="CCCCCC"/>
+                      </a:solidFill>
+                      <a:prstDash val="solid"/>
+                      <a:round/>
+                      <a:headEnd type="none" w="med" len="med"/>
+                      <a:tailEnd type="none" w="med" len="med"/>
+                    </a:lnL>
+                    <a:lnR w="6350" cap="flat" cmpd="sng" algn="ctr">
+                      <a:solidFill>
+                        <a:srgbClr val="CCCCCC"/>
+                      </a:solidFill>
+                      <a:prstDash val="solid"/>
+                      <a:round/>
+                      <a:headEnd type="none" w="med" len="med"/>
+                      <a:tailEnd type="none" w="med" len="med"/>
+                    </a:lnR>
+                    <a:lnT w="6350" cap="flat" cmpd="sng" algn="ctr">
+                      <a:solidFill>
+                        <a:srgbClr val="CCCCCC"/>
+                      </a:solidFill>
+                      <a:prstDash val="solid"/>
+                      <a:round/>
+                      <a:headEnd type="none" w="med" len="med"/>
+                      <a:tailEnd type="none" w="med" len="med"/>
+                    </a:lnT>
+                    <a:lnB w="6350" cap="flat" cmpd="sng" algn="ctr">
+                      <a:solidFill>
+                        <a:srgbClr val="CCCCCC"/>
+                      </a:solidFill>
+                      <a:prstDash val="solid"/>
+                      <a:round/>
+                      <a:headEnd type="none" w="med" len="med"/>
+                      <a:tailEnd type="none" w="med" len="med"/>
+                    </a:lnB>
+                    <a:solidFill>
+                      <a:srgbClr val="FFFFFF"/>
+                    </a:solidFill>
+                  </a:tcPr>
+                </a:tc>
+                <a:tc>
+                  <a:txBody>
+                    <a:bodyPr/>
+                    <a:lstStyle/>
+                    <a:p>
+                      <a:pPr algn="ctr" indent="0" marL="0">
+                        <a:buNone/>
+                      </a:pPr>
+                      <a:r>
+                        <a:rPr lang="en-US" sz="800" dirty="0">
+                          <a:solidFill>
+                            <a:srgbClr val="000000"/>
+                          </a:solidFill>
+                          <a:latin typeface="Arial" pitchFamily="34" charset="0"/>
+                          <a:ea typeface="Arial" pitchFamily="34" charset="-122"/>
+                          <a:cs typeface="Arial" pitchFamily="34" charset="-120"/>
+                        </a:rPr>
+                        <a:t>4</a:t>
+                      </a:r>
+                      <a:endParaRPr lang="en-US" sz="800" dirty="0">
+                        <a:latin typeface="Arial" charset="0"/>
+                        <a:ea typeface="Arial" charset="0"/>
+                        <a:cs typeface="Arial" charset="0"/>
+                      </a:endParaRPr>
+                    </a:p>
+                  </a:txBody>
+                  <a:tcPr marL="91440" marR="91440" marT="45720" marB="45720">
+                    <a:lnL w="6350" cap="flat" cmpd="sng" algn="ctr">
+                      <a:solidFill>
+                        <a:srgbClr val="CCCCCC"/>
+                      </a:solidFill>
+                      <a:prstDash val="solid"/>
+                      <a:round/>
+                      <a:headEnd type="none" w="med" len="med"/>
+                      <a:tailEnd type="none" w="med" len="med"/>
+                    </a:lnL>
+                    <a:lnR w="6350" cap="flat" cmpd="sng" algn="ctr">
+                      <a:solidFill>
+                        <a:srgbClr val="CCCCCC"/>
+                      </a:solidFill>
+                      <a:prstDash val="solid"/>
+                      <a:round/>
+                      <a:headEnd type="none" w="med" len="med"/>
+                      <a:tailEnd type="none" w="med" len="med"/>
+                    </a:lnR>
+                    <a:lnT w="6350" cap="flat" cmpd="sng" algn="ctr">
+                      <a:solidFill>
+                        <a:srgbClr val="CCCCCC"/>
+                      </a:solidFill>
+                      <a:prstDash val="solid"/>
+                      <a:round/>
+                      <a:headEnd type="none" w="med" len="med"/>
+                      <a:tailEnd type="none" w="med" len="med"/>
+                    </a:lnT>
+                    <a:lnB w="6350" cap="flat" cmpd="sng" algn="ctr">
+                      <a:solidFill>
+                        <a:srgbClr val="CCCCCC"/>
+                      </a:solidFill>
+                      <a:prstDash val="solid"/>
+                      <a:round/>
+                      <a:headEnd type="none" w="med" len="med"/>
+                      <a:tailEnd type="none" w="med" len="med"/>
+                    </a:lnB>
+                    <a:solidFill>
+                      <a:srgbClr val="FFFFFF"/>
+                    </a:solidFill>
+                  </a:tcPr>
+                </a:tc>
+                <a:tc>
+                  <a:txBody>
+                    <a:bodyPr/>
+                    <a:lstStyle/>
+                    <a:p>
+                      <a:pPr algn="ctr" indent="0" marL="0">
+                        <a:buNone/>
+                      </a:pPr>
+                      <a:r>
+                        <a:rPr lang="en-US" sz="800" dirty="0">
+                          <a:solidFill>
+                            <a:srgbClr val="000000"/>
+                          </a:solidFill>
+                          <a:latin typeface="Arial" pitchFamily="34" charset="0"/>
+                          <a:ea typeface="Arial" pitchFamily="34" charset="-122"/>
+                          <a:cs typeface="Arial" pitchFamily="34" charset="-120"/>
+                        </a:rPr>
+                        <a:t>4.00/5</a:t>
+                      </a:r>
+                      <a:endParaRPr lang="en-US" sz="800" dirty="0">
+                        <a:latin typeface="Arial" charset="0"/>
+                        <a:ea typeface="Arial" charset="0"/>
+                        <a:cs typeface="Arial" charset="0"/>
+                      </a:endParaRPr>
+                    </a:p>
+                  </a:txBody>
+                  <a:tcPr marL="91440" marR="91440" marT="45720" marB="45720">
+                    <a:lnL w="6350" cap="flat" cmpd="sng" algn="ctr">
+                      <a:solidFill>
+                        <a:srgbClr val="CCCCCC"/>
+                      </a:solidFill>
+                      <a:prstDash val="solid"/>
+                      <a:round/>
+                      <a:headEnd type="none" w="med" len="med"/>
+                      <a:tailEnd type="none" w="med" len="med"/>
+                    </a:lnL>
+                    <a:lnR w="6350" cap="flat" cmpd="sng" algn="ctr">
+                      <a:solidFill>
+                        <a:srgbClr val="CCCCCC"/>
+                      </a:solidFill>
+                      <a:prstDash val="solid"/>
+                      <a:round/>
+                      <a:headEnd type="none" w="med" len="med"/>
+                      <a:tailEnd type="none" w="med" len="med"/>
+                    </a:lnR>
+                    <a:lnT w="6350" cap="flat" cmpd="sng" algn="ctr">
+                      <a:solidFill>
+                        <a:srgbClr val="CCCCCC"/>
+                      </a:solidFill>
+                      <a:prstDash val="solid"/>
+                      <a:round/>
+                      <a:headEnd type="none" w="med" len="med"/>
+                      <a:tailEnd type="none" w="med" len="med"/>
+                    </a:lnT>
+                    <a:lnB w="6350" cap="flat" cmpd="sng" algn="ctr">
+                      <a:solidFill>
+                        <a:srgbClr val="CCCCCC"/>
+                      </a:solidFill>
+                      <a:prstDash val="solid"/>
+                      <a:round/>
+                      <a:headEnd type="none" w="med" len="med"/>
+                      <a:tailEnd type="none" w="med" len="med"/>
+                    </a:lnB>
+                    <a:solidFill>
+                      <a:srgbClr val="FFFFFF"/>
+                    </a:solidFill>
+                  </a:tcPr>
+                </a:tc>
+                <a:tc>
+                  <a:txBody>
+                    <a:bodyPr/>
+                    <a:lstStyle/>
+                    <a:p>
+                      <a:pPr algn="ctr" indent="0" marL="0">
+                        <a:buNone/>
+                      </a:pPr>
+                      <a:r>
+                        <a:rPr lang="en-US" sz="800" dirty="0">
+                          <a:solidFill>
+                            <a:srgbClr val="000000"/>
+                          </a:solidFill>
+                          <a:latin typeface="Arial" pitchFamily="34" charset="0"/>
+                          <a:ea typeface="Arial" pitchFamily="34" charset="-122"/>
+                          <a:cs typeface="Arial" pitchFamily="34" charset="-120"/>
+                        </a:rPr>
+                        <a:t>8.00</a:t>
+                      </a:r>
+                      <a:endParaRPr lang="en-US" sz="800" dirty="0">
+                        <a:latin typeface="Arial" charset="0"/>
+                        <a:ea typeface="Arial" charset="0"/>
+                        <a:cs typeface="Arial" charset="0"/>
+                      </a:endParaRPr>
+                    </a:p>
+                  </a:txBody>
+                  <a:tcPr marL="91440" marR="91440" marT="45720" marB="45720">
+                    <a:lnL w="6350" cap="flat" cmpd="sng" algn="ctr">
+                      <a:solidFill>
+                        <a:srgbClr val="CCCCCC"/>
+                      </a:solidFill>
+                      <a:prstDash val="solid"/>
+                      <a:round/>
+                      <a:headEnd type="none" w="med" len="med"/>
+                      <a:tailEnd type="none" w="med" len="med"/>
+                    </a:lnL>
+                    <a:lnR w="6350" cap="flat" cmpd="sng" algn="ctr">
+                      <a:solidFill>
+                        <a:srgbClr val="CCCCCC"/>
+                      </a:solidFill>
+                      <a:prstDash val="solid"/>
+                      <a:round/>
+                      <a:headEnd type="none" w="med" len="med"/>
+                      <a:tailEnd type="none" w="med" len="med"/>
+                    </a:lnR>
+                    <a:lnT w="6350" cap="flat" cmpd="sng" algn="ctr">
+                      <a:solidFill>
+                        <a:srgbClr val="CCCCCC"/>
+                      </a:solidFill>
+                      <a:prstDash val="solid"/>
+                      <a:round/>
+                      <a:headEnd type="none" w="med" len="med"/>
+                      <a:tailEnd type="none" w="med" len="med"/>
+                    </a:lnT>
+                    <a:lnB w="6350" cap="flat" cmpd="sng" algn="ctr">
+                      <a:solidFill>
+                        <a:srgbClr val="CCCCCC"/>
+                      </a:solidFill>
+                      <a:prstDash val="solid"/>
+                      <a:round/>
+                      <a:headEnd type="none" w="med" len="med"/>
+                      <a:tailEnd type="none" w="med" len="med"/>
+                    </a:lnB>
+                    <a:solidFill>
+                      <a:srgbClr val="FFFFFF"/>
+                    </a:solidFill>
+                  </a:tcPr>
+                </a:tc>
+                <a:tc>
+                  <a:txBody>
+                    <a:bodyPr/>
+                    <a:lstStyle/>
+                    <a:p>
+                      <a:pPr algn="ctr" indent="0" marL="0">
+                        <a:buNone/>
+                      </a:pPr>
+                      <a:r>
+                        <a:rPr lang="en-US" sz="800" dirty="0">
+                          <a:solidFill>
+                            <a:srgbClr val="000000"/>
+                          </a:solidFill>
+                          <a:latin typeface="Arial" pitchFamily="34" charset="0"/>
+                          <a:ea typeface="Arial" pitchFamily="34" charset="-122"/>
+                          <a:cs typeface="Arial" pitchFamily="34" charset="-120"/>
+                        </a:rPr>
+                        <a:t>良好</a:t>
                       </a:r>
                       <a:endParaRPr lang="en-US" sz="800" dirty="0">
                         <a:latin typeface="Arial" charset="0"/>
@@ -4706,7 +5031,7 @@
                           <a:ea typeface="Arial" pitchFamily="34" charset="-122"/>
                           <a:cs typeface="Arial" pitchFamily="34" charset="-120"/>
                         </a:rPr>
-                        <a:t>39</a:t>
+                        <a:t>20</a:t>
                       </a:r>
                       <a:endParaRPr lang="en-US" sz="800" dirty="0">
                         <a:latin typeface="Arial" charset="0"/>
@@ -4774,7 +5099,7 @@
                           <a:ea typeface="Arial" pitchFamily="34" charset="-122"/>
                           <a:cs typeface="Arial" pitchFamily="34" charset="-120"/>
                         </a:rPr>
-                        <a:t>6.97/10</a:t>
+                        <a:t>7.00/10</a:t>
                       </a:r>
                       <a:endParaRPr lang="en-US" sz="800" dirty="0">
                         <a:latin typeface="Arial" charset="0"/>
@@ -4842,7 +5167,349 @@
                           <a:ea typeface="Arial" pitchFamily="34" charset="-122"/>
                           <a:cs typeface="Arial" pitchFamily="34" charset="-120"/>
                         </a:rPr>
-                        <a:t>6.97</a:t>
+                        <a:t>7.00</a:t>
+                      </a:r>
+                      <a:endParaRPr lang="en-US" sz="800" dirty="0">
+                        <a:latin typeface="Arial" charset="0"/>
+                        <a:ea typeface="Arial" charset="0"/>
+                        <a:cs typeface="Arial" charset="0"/>
+                      </a:endParaRPr>
+                    </a:p>
+                  </a:txBody>
+                  <a:tcPr marL="91440" marR="91440" marT="45720" marB="45720">
+                    <a:lnL w="6350" cap="flat" cmpd="sng" algn="ctr">
+                      <a:solidFill>
+                        <a:srgbClr val="CCCCCC"/>
+                      </a:solidFill>
+                      <a:prstDash val="solid"/>
+                      <a:round/>
+                      <a:headEnd type="none" w="med" len="med"/>
+                      <a:tailEnd type="none" w="med" len="med"/>
+                    </a:lnL>
+                    <a:lnR w="6350" cap="flat" cmpd="sng" algn="ctr">
+                      <a:solidFill>
+                        <a:srgbClr val="CCCCCC"/>
+                      </a:solidFill>
+                      <a:prstDash val="solid"/>
+                      <a:round/>
+                      <a:headEnd type="none" w="med" len="med"/>
+                      <a:tailEnd type="none" w="med" len="med"/>
+                    </a:lnR>
+                    <a:lnT w="6350" cap="flat" cmpd="sng" algn="ctr">
+                      <a:solidFill>
+                        <a:srgbClr val="CCCCCC"/>
+                      </a:solidFill>
+                      <a:prstDash val="solid"/>
+                      <a:round/>
+                      <a:headEnd type="none" w="med" len="med"/>
+                      <a:tailEnd type="none" w="med" len="med"/>
+                    </a:lnT>
+                    <a:lnB w="6350" cap="flat" cmpd="sng" algn="ctr">
+                      <a:solidFill>
+                        <a:srgbClr val="CCCCCC"/>
+                      </a:solidFill>
+                      <a:prstDash val="solid"/>
+                      <a:round/>
+                      <a:headEnd type="none" w="med" len="med"/>
+                      <a:tailEnd type="none" w="med" len="med"/>
+                    </a:lnB>
+                    <a:solidFill>
+                      <a:srgbClr val="FFFFFF"/>
+                    </a:solidFill>
+                  </a:tcPr>
+                </a:tc>
+                <a:tc>
+                  <a:txBody>
+                    <a:bodyPr/>
+                    <a:lstStyle/>
+                    <a:p>
+                      <a:pPr algn="ctr" indent="0" marL="0">
+                        <a:buNone/>
+                      </a:pPr>
+                      <a:r>
+                        <a:rPr lang="en-US" sz="800" dirty="0">
+                          <a:solidFill>
+                            <a:srgbClr val="000000"/>
+                          </a:solidFill>
+                          <a:latin typeface="Arial" pitchFamily="34" charset="0"/>
+                          <a:ea typeface="Arial" pitchFamily="34" charset="-122"/>
+                          <a:cs typeface="Arial" pitchFamily="34" charset="-120"/>
+                        </a:rPr>
+                        <a:t>概ね良好</a:t>
+                      </a:r>
+                      <a:endParaRPr lang="en-US" sz="800" dirty="0">
+                        <a:latin typeface="Arial" charset="0"/>
+                        <a:ea typeface="Arial" charset="0"/>
+                        <a:cs typeface="Arial" charset="0"/>
+                      </a:endParaRPr>
+                    </a:p>
+                  </a:txBody>
+                  <a:tcPr marL="91440" marR="91440" marT="45720" marB="45720">
+                    <a:lnL w="6350" cap="flat" cmpd="sng" algn="ctr">
+                      <a:solidFill>
+                        <a:srgbClr val="CCCCCC"/>
+                      </a:solidFill>
+                      <a:prstDash val="solid"/>
+                      <a:round/>
+                      <a:headEnd type="none" w="med" len="med"/>
+                      <a:tailEnd type="none" w="med" len="med"/>
+                    </a:lnL>
+                    <a:lnR w="6350" cap="flat" cmpd="sng" algn="ctr">
+                      <a:solidFill>
+                        <a:srgbClr val="CCCCCC"/>
+                      </a:solidFill>
+                      <a:prstDash val="solid"/>
+                      <a:round/>
+                      <a:headEnd type="none" w="med" len="med"/>
+                      <a:tailEnd type="none" w="med" len="med"/>
+                    </a:lnR>
+                    <a:lnT w="6350" cap="flat" cmpd="sng" algn="ctr">
+                      <a:solidFill>
+                        <a:srgbClr val="CCCCCC"/>
+                      </a:solidFill>
+                      <a:prstDash val="solid"/>
+                      <a:round/>
+                      <a:headEnd type="none" w="med" len="med"/>
+                      <a:tailEnd type="none" w="med" len="med"/>
+                    </a:lnT>
+                    <a:lnB w="6350" cap="flat" cmpd="sng" algn="ctr">
+                      <a:solidFill>
+                        <a:srgbClr val="CCCCCC"/>
+                      </a:solidFill>
+                      <a:prstDash val="solid"/>
+                      <a:round/>
+                      <a:headEnd type="none" w="med" len="med"/>
+                      <a:tailEnd type="none" w="med" len="med"/>
+                    </a:lnB>
+                    <a:solidFill>
+                      <a:srgbClr val="FFFFFF"/>
+                    </a:solidFill>
+                  </a:tcPr>
+                </a:tc>
+              </a:tr>
+              <a:tr h="0">
+                <a:tc>
+                  <a:txBody>
+                    <a:bodyPr/>
+                    <a:lstStyle/>
+                    <a:p>
+                      <a:pPr algn="ctr" indent="0" marL="0">
+                        <a:buNone/>
+                      </a:pPr>
+                      <a:r>
+                        <a:rPr lang="en-US" sz="800" dirty="0">
+                          <a:solidFill>
+                            <a:srgbClr val="000000"/>
+                          </a:solidFill>
+                          <a:latin typeface="Arial" pitchFamily="34" charset="0"/>
+                          <a:ea typeface="Arial" pitchFamily="34" charset="-122"/>
+                          <a:cs typeface="Arial" pitchFamily="34" charset="-120"/>
+                        </a:rPr>
+                        <a:t>楽天トラベル</a:t>
+                      </a:r>
+                      <a:endParaRPr lang="en-US" sz="800" dirty="0">
+                        <a:latin typeface="Arial" charset="0"/>
+                        <a:ea typeface="Arial" charset="0"/>
+                        <a:cs typeface="Arial" charset="0"/>
+                      </a:endParaRPr>
+                    </a:p>
+                  </a:txBody>
+                  <a:tcPr marL="91440" marR="91440" marT="45720" marB="45720">
+                    <a:lnL w="6350" cap="flat" cmpd="sng" algn="ctr">
+                      <a:solidFill>
+                        <a:srgbClr val="CCCCCC"/>
+                      </a:solidFill>
+                      <a:prstDash val="solid"/>
+                      <a:round/>
+                      <a:headEnd type="none" w="med" len="med"/>
+                      <a:tailEnd type="none" w="med" len="med"/>
+                    </a:lnL>
+                    <a:lnR w="6350" cap="flat" cmpd="sng" algn="ctr">
+                      <a:solidFill>
+                        <a:srgbClr val="CCCCCC"/>
+                      </a:solidFill>
+                      <a:prstDash val="solid"/>
+                      <a:round/>
+                      <a:headEnd type="none" w="med" len="med"/>
+                      <a:tailEnd type="none" w="med" len="med"/>
+                    </a:lnR>
+                    <a:lnT w="6350" cap="flat" cmpd="sng" algn="ctr">
+                      <a:solidFill>
+                        <a:srgbClr val="CCCCCC"/>
+                      </a:solidFill>
+                      <a:prstDash val="solid"/>
+                      <a:round/>
+                      <a:headEnd type="none" w="med" len="med"/>
+                      <a:tailEnd type="none" w="med" len="med"/>
+                    </a:lnT>
+                    <a:lnB w="6350" cap="flat" cmpd="sng" algn="ctr">
+                      <a:solidFill>
+                        <a:srgbClr val="CCCCCC"/>
+                      </a:solidFill>
+                      <a:prstDash val="solid"/>
+                      <a:round/>
+                      <a:headEnd type="none" w="med" len="med"/>
+                      <a:tailEnd type="none" w="med" len="med"/>
+                    </a:lnB>
+                    <a:solidFill>
+                      <a:srgbClr val="FFFFFF"/>
+                    </a:solidFill>
+                  </a:tcPr>
+                </a:tc>
+                <a:tc>
+                  <a:txBody>
+                    <a:bodyPr/>
+                    <a:lstStyle/>
+                    <a:p>
+                      <a:pPr algn="ctr" indent="0" marL="0">
+                        <a:buNone/>
+                      </a:pPr>
+                      <a:r>
+                        <a:rPr lang="en-US" sz="800" dirty="0">
+                          <a:solidFill>
+                            <a:srgbClr val="000000"/>
+                          </a:solidFill>
+                          <a:latin typeface="Arial" pitchFamily="34" charset="0"/>
+                          <a:ea typeface="Arial" pitchFamily="34" charset="-122"/>
+                          <a:cs typeface="Arial" pitchFamily="34" charset="-120"/>
+                        </a:rPr>
+                        <a:t>3</a:t>
+                      </a:r>
+                      <a:endParaRPr lang="en-US" sz="800" dirty="0">
+                        <a:latin typeface="Arial" charset="0"/>
+                        <a:ea typeface="Arial" charset="0"/>
+                        <a:cs typeface="Arial" charset="0"/>
+                      </a:endParaRPr>
+                    </a:p>
+                  </a:txBody>
+                  <a:tcPr marL="91440" marR="91440" marT="45720" marB="45720">
+                    <a:lnL w="6350" cap="flat" cmpd="sng" algn="ctr">
+                      <a:solidFill>
+                        <a:srgbClr val="CCCCCC"/>
+                      </a:solidFill>
+                      <a:prstDash val="solid"/>
+                      <a:round/>
+                      <a:headEnd type="none" w="med" len="med"/>
+                      <a:tailEnd type="none" w="med" len="med"/>
+                    </a:lnL>
+                    <a:lnR w="6350" cap="flat" cmpd="sng" algn="ctr">
+                      <a:solidFill>
+                        <a:srgbClr val="CCCCCC"/>
+                      </a:solidFill>
+                      <a:prstDash val="solid"/>
+                      <a:round/>
+                      <a:headEnd type="none" w="med" len="med"/>
+                      <a:tailEnd type="none" w="med" len="med"/>
+                    </a:lnR>
+                    <a:lnT w="6350" cap="flat" cmpd="sng" algn="ctr">
+                      <a:solidFill>
+                        <a:srgbClr val="CCCCCC"/>
+                      </a:solidFill>
+                      <a:prstDash val="solid"/>
+                      <a:round/>
+                      <a:headEnd type="none" w="med" len="med"/>
+                      <a:tailEnd type="none" w="med" len="med"/>
+                    </a:lnT>
+                    <a:lnB w="6350" cap="flat" cmpd="sng" algn="ctr">
+                      <a:solidFill>
+                        <a:srgbClr val="CCCCCC"/>
+                      </a:solidFill>
+                      <a:prstDash val="solid"/>
+                      <a:round/>
+                      <a:headEnd type="none" w="med" len="med"/>
+                      <a:tailEnd type="none" w="med" len="med"/>
+                    </a:lnB>
+                    <a:solidFill>
+                      <a:srgbClr val="FFFFFF"/>
+                    </a:solidFill>
+                  </a:tcPr>
+                </a:tc>
+                <a:tc>
+                  <a:txBody>
+                    <a:bodyPr/>
+                    <a:lstStyle/>
+                    <a:p>
+                      <a:pPr algn="ctr" indent="0" marL="0">
+                        <a:buNone/>
+                      </a:pPr>
+                      <a:r>
+                        <a:rPr lang="en-US" sz="800" dirty="0">
+                          <a:solidFill>
+                            <a:srgbClr val="000000"/>
+                          </a:solidFill>
+                          <a:latin typeface="Arial" pitchFamily="34" charset="0"/>
+                          <a:ea typeface="Arial" pitchFamily="34" charset="-122"/>
+                          <a:cs typeface="Arial" pitchFamily="34" charset="-120"/>
+                        </a:rPr>
+                        <a:t>3.33/5</a:t>
+                      </a:r>
+                      <a:endParaRPr lang="en-US" sz="800" dirty="0">
+                        <a:latin typeface="Arial" charset="0"/>
+                        <a:ea typeface="Arial" charset="0"/>
+                        <a:cs typeface="Arial" charset="0"/>
+                      </a:endParaRPr>
+                    </a:p>
+                  </a:txBody>
+                  <a:tcPr marL="91440" marR="91440" marT="45720" marB="45720">
+                    <a:lnL w="6350" cap="flat" cmpd="sng" algn="ctr">
+                      <a:solidFill>
+                        <a:srgbClr val="CCCCCC"/>
+                      </a:solidFill>
+                      <a:prstDash val="solid"/>
+                      <a:round/>
+                      <a:headEnd type="none" w="med" len="med"/>
+                      <a:tailEnd type="none" w="med" len="med"/>
+                    </a:lnL>
+                    <a:lnR w="6350" cap="flat" cmpd="sng" algn="ctr">
+                      <a:solidFill>
+                        <a:srgbClr val="CCCCCC"/>
+                      </a:solidFill>
+                      <a:prstDash val="solid"/>
+                      <a:round/>
+                      <a:headEnd type="none" w="med" len="med"/>
+                      <a:tailEnd type="none" w="med" len="med"/>
+                    </a:lnR>
+                    <a:lnT w="6350" cap="flat" cmpd="sng" algn="ctr">
+                      <a:solidFill>
+                        <a:srgbClr val="CCCCCC"/>
+                      </a:solidFill>
+                      <a:prstDash val="solid"/>
+                      <a:round/>
+                      <a:headEnd type="none" w="med" len="med"/>
+                      <a:tailEnd type="none" w="med" len="med"/>
+                    </a:lnT>
+                    <a:lnB w="6350" cap="flat" cmpd="sng" algn="ctr">
+                      <a:solidFill>
+                        <a:srgbClr val="CCCCCC"/>
+                      </a:solidFill>
+                      <a:prstDash val="solid"/>
+                      <a:round/>
+                      <a:headEnd type="none" w="med" len="med"/>
+                      <a:tailEnd type="none" w="med" len="med"/>
+                    </a:lnB>
+                    <a:solidFill>
+                      <a:srgbClr val="FFFFFF"/>
+                    </a:solidFill>
+                  </a:tcPr>
+                </a:tc>
+                <a:tc>
+                  <a:txBody>
+                    <a:bodyPr/>
+                    <a:lstStyle/>
+                    <a:p>
+                      <a:pPr algn="ctr" indent="0" marL="0">
+                        <a:buNone/>
+                      </a:pPr>
+                      <a:r>
+                        <a:rPr lang="en-US" sz="800" dirty="0">
+                          <a:solidFill>
+                            <a:srgbClr val="000000"/>
+                          </a:solidFill>
+                          <a:latin typeface="Arial" pitchFamily="34" charset="0"/>
+                          <a:ea typeface="Arial" pitchFamily="34" charset="-122"/>
+                          <a:cs typeface="Arial" pitchFamily="34" charset="-120"/>
+                        </a:rPr>
+                        <a:t>6.67</a:t>
                       </a:r>
                       <a:endParaRPr lang="en-US" sz="800" dirty="0">
                         <a:latin typeface="Arial" charset="0"/>
@@ -5048,7 +5715,7 @@
                           <a:ea typeface="Arial" pitchFamily="34" charset="-122"/>
                           <a:cs typeface="Arial" pitchFamily="34" charset="-120"/>
                         </a:rPr>
-                        <a:t>33</a:t>
+                        <a:t>12</a:t>
                       </a:r>
                       <a:endParaRPr lang="en-US" sz="800" dirty="0">
                         <a:latin typeface="Arial" charset="0"/>
@@ -5116,7 +5783,7 @@
                           <a:ea typeface="Arial" pitchFamily="34" charset="-122"/>
                           <a:cs typeface="Arial" pitchFamily="34" charset="-120"/>
                         </a:rPr>
-                        <a:t>3.48/5</a:t>
+                        <a:t>3.17/5</a:t>
                       </a:r>
                       <a:endParaRPr lang="en-US" sz="800" dirty="0">
                         <a:latin typeface="Arial" charset="0"/>
@@ -5184,691 +5851,7 @@
                           <a:ea typeface="Arial" pitchFamily="34" charset="-122"/>
                           <a:cs typeface="Arial" pitchFamily="34" charset="-120"/>
                         </a:rPr>
-                        <a:t>6.97</a:t>
-                      </a:r>
-                      <a:endParaRPr lang="en-US" sz="800" dirty="0">
-                        <a:latin typeface="Arial" charset="0"/>
-                        <a:ea typeface="Arial" charset="0"/>
-                        <a:cs typeface="Arial" charset="0"/>
-                      </a:endParaRPr>
-                    </a:p>
-                  </a:txBody>
-                  <a:tcPr marL="91440" marR="91440" marT="45720" marB="45720">
-                    <a:lnL w="6350" cap="flat" cmpd="sng" algn="ctr">
-                      <a:solidFill>
-                        <a:srgbClr val="CCCCCC"/>
-                      </a:solidFill>
-                      <a:prstDash val="solid"/>
-                      <a:round/>
-                      <a:headEnd type="none" w="med" len="med"/>
-                      <a:tailEnd type="none" w="med" len="med"/>
-                    </a:lnL>
-                    <a:lnR w="6350" cap="flat" cmpd="sng" algn="ctr">
-                      <a:solidFill>
-                        <a:srgbClr val="CCCCCC"/>
-                      </a:solidFill>
-                      <a:prstDash val="solid"/>
-                      <a:round/>
-                      <a:headEnd type="none" w="med" len="med"/>
-                      <a:tailEnd type="none" w="med" len="med"/>
-                    </a:lnR>
-                    <a:lnT w="6350" cap="flat" cmpd="sng" algn="ctr">
-                      <a:solidFill>
-                        <a:srgbClr val="CCCCCC"/>
-                      </a:solidFill>
-                      <a:prstDash val="solid"/>
-                      <a:round/>
-                      <a:headEnd type="none" w="med" len="med"/>
-                      <a:tailEnd type="none" w="med" len="med"/>
-                    </a:lnT>
-                    <a:lnB w="6350" cap="flat" cmpd="sng" algn="ctr">
-                      <a:solidFill>
-                        <a:srgbClr val="CCCCCC"/>
-                      </a:solidFill>
-                      <a:prstDash val="solid"/>
-                      <a:round/>
-                      <a:headEnd type="none" w="med" len="med"/>
-                      <a:tailEnd type="none" w="med" len="med"/>
-                    </a:lnB>
-                    <a:solidFill>
-                      <a:srgbClr val="FFFFFF"/>
-                    </a:solidFill>
-                  </a:tcPr>
-                </a:tc>
-                <a:tc>
-                  <a:txBody>
-                    <a:bodyPr/>
-                    <a:lstStyle/>
-                    <a:p>
-                      <a:pPr algn="ctr" indent="0" marL="0">
-                        <a:buNone/>
-                      </a:pPr>
-                      <a:r>
-                        <a:rPr lang="en-US" sz="800" dirty="0">
-                          <a:solidFill>
-                            <a:srgbClr val="000000"/>
-                          </a:solidFill>
-                          <a:latin typeface="Arial" pitchFamily="34" charset="0"/>
-                          <a:ea typeface="Arial" pitchFamily="34" charset="-122"/>
-                          <a:cs typeface="Arial" pitchFamily="34" charset="-120"/>
-                        </a:rPr>
-                        <a:t>要改善</a:t>
-                      </a:r>
-                      <a:endParaRPr lang="en-US" sz="800" dirty="0">
-                        <a:latin typeface="Arial" charset="0"/>
-                        <a:ea typeface="Arial" charset="0"/>
-                        <a:cs typeface="Arial" charset="0"/>
-                      </a:endParaRPr>
-                    </a:p>
-                  </a:txBody>
-                  <a:tcPr marL="91440" marR="91440" marT="45720" marB="45720">
-                    <a:lnL w="6350" cap="flat" cmpd="sng" algn="ctr">
-                      <a:solidFill>
-                        <a:srgbClr val="CCCCCC"/>
-                      </a:solidFill>
-                      <a:prstDash val="solid"/>
-                      <a:round/>
-                      <a:headEnd type="none" w="med" len="med"/>
-                      <a:tailEnd type="none" w="med" len="med"/>
-                    </a:lnL>
-                    <a:lnR w="6350" cap="flat" cmpd="sng" algn="ctr">
-                      <a:solidFill>
-                        <a:srgbClr val="CCCCCC"/>
-                      </a:solidFill>
-                      <a:prstDash val="solid"/>
-                      <a:round/>
-                      <a:headEnd type="none" w="med" len="med"/>
-                      <a:tailEnd type="none" w="med" len="med"/>
-                    </a:lnR>
-                    <a:lnT w="6350" cap="flat" cmpd="sng" algn="ctr">
-                      <a:solidFill>
-                        <a:srgbClr val="CCCCCC"/>
-                      </a:solidFill>
-                      <a:prstDash val="solid"/>
-                      <a:round/>
-                      <a:headEnd type="none" w="med" len="med"/>
-                      <a:tailEnd type="none" w="med" len="med"/>
-                    </a:lnT>
-                    <a:lnB w="6350" cap="flat" cmpd="sng" algn="ctr">
-                      <a:solidFill>
-                        <a:srgbClr val="CCCCCC"/>
-                      </a:solidFill>
-                      <a:prstDash val="solid"/>
-                      <a:round/>
-                      <a:headEnd type="none" w="med" len="med"/>
-                      <a:tailEnd type="none" w="med" len="med"/>
-                    </a:lnB>
-                    <a:solidFill>
-                      <a:srgbClr val="FFFFFF"/>
-                    </a:solidFill>
-                  </a:tcPr>
-                </a:tc>
-              </a:tr>
-              <a:tr h="0">
-                <a:tc>
-                  <a:txBody>
-                    <a:bodyPr/>
-                    <a:lstStyle/>
-                    <a:p>
-                      <a:pPr algn="ctr" indent="0" marL="0">
-                        <a:buNone/>
-                      </a:pPr>
-                      <a:r>
-                        <a:rPr lang="en-US" sz="800" dirty="0">
-                          <a:solidFill>
-                            <a:srgbClr val="000000"/>
-                          </a:solidFill>
-                          <a:latin typeface="Arial" pitchFamily="34" charset="0"/>
-                          <a:ea typeface="Arial" pitchFamily="34" charset="-122"/>
-                          <a:cs typeface="Arial" pitchFamily="34" charset="-120"/>
-                        </a:rPr>
-                        <a:t>じゃらん</a:t>
-                      </a:r>
-                      <a:endParaRPr lang="en-US" sz="800" dirty="0">
-                        <a:latin typeface="Arial" charset="0"/>
-                        <a:ea typeface="Arial" charset="0"/>
-                        <a:cs typeface="Arial" charset="0"/>
-                      </a:endParaRPr>
-                    </a:p>
-                  </a:txBody>
-                  <a:tcPr marL="91440" marR="91440" marT="45720" marB="45720">
-                    <a:lnL w="6350" cap="flat" cmpd="sng" algn="ctr">
-                      <a:solidFill>
-                        <a:srgbClr val="CCCCCC"/>
-                      </a:solidFill>
-                      <a:prstDash val="solid"/>
-                      <a:round/>
-                      <a:headEnd type="none" w="med" len="med"/>
-                      <a:tailEnd type="none" w="med" len="med"/>
-                    </a:lnL>
-                    <a:lnR w="6350" cap="flat" cmpd="sng" algn="ctr">
-                      <a:solidFill>
-                        <a:srgbClr val="CCCCCC"/>
-                      </a:solidFill>
-                      <a:prstDash val="solid"/>
-                      <a:round/>
-                      <a:headEnd type="none" w="med" len="med"/>
-                      <a:tailEnd type="none" w="med" len="med"/>
-                    </a:lnR>
-                    <a:lnT w="6350" cap="flat" cmpd="sng" algn="ctr">
-                      <a:solidFill>
-                        <a:srgbClr val="CCCCCC"/>
-                      </a:solidFill>
-                      <a:prstDash val="solid"/>
-                      <a:round/>
-                      <a:headEnd type="none" w="med" len="med"/>
-                      <a:tailEnd type="none" w="med" len="med"/>
-                    </a:lnT>
-                    <a:lnB w="6350" cap="flat" cmpd="sng" algn="ctr">
-                      <a:solidFill>
-                        <a:srgbClr val="CCCCCC"/>
-                      </a:solidFill>
-                      <a:prstDash val="solid"/>
-                      <a:round/>
-                      <a:headEnd type="none" w="med" len="med"/>
-                      <a:tailEnd type="none" w="med" len="med"/>
-                    </a:lnB>
-                    <a:solidFill>
-                      <a:srgbClr val="FFFFFF"/>
-                    </a:solidFill>
-                  </a:tcPr>
-                </a:tc>
-                <a:tc>
-                  <a:txBody>
-                    <a:bodyPr/>
-                    <a:lstStyle/>
-                    <a:p>
-                      <a:pPr algn="ctr" indent="0" marL="0">
-                        <a:buNone/>
-                      </a:pPr>
-                      <a:r>
-                        <a:rPr lang="en-US" sz="800" dirty="0">
-                          <a:solidFill>
-                            <a:srgbClr val="000000"/>
-                          </a:solidFill>
-                          <a:latin typeface="Arial" pitchFamily="34" charset="0"/>
-                          <a:ea typeface="Arial" pitchFamily="34" charset="-122"/>
-                          <a:cs typeface="Arial" pitchFamily="34" charset="-120"/>
-                        </a:rPr>
-                        <a:t>9</a:t>
-                      </a:r>
-                      <a:endParaRPr lang="en-US" sz="800" dirty="0">
-                        <a:latin typeface="Arial" charset="0"/>
-                        <a:ea typeface="Arial" charset="0"/>
-                        <a:cs typeface="Arial" charset="0"/>
-                      </a:endParaRPr>
-                    </a:p>
-                  </a:txBody>
-                  <a:tcPr marL="91440" marR="91440" marT="45720" marB="45720">
-                    <a:lnL w="6350" cap="flat" cmpd="sng" algn="ctr">
-                      <a:solidFill>
-                        <a:srgbClr val="CCCCCC"/>
-                      </a:solidFill>
-                      <a:prstDash val="solid"/>
-                      <a:round/>
-                      <a:headEnd type="none" w="med" len="med"/>
-                      <a:tailEnd type="none" w="med" len="med"/>
-                    </a:lnL>
-                    <a:lnR w="6350" cap="flat" cmpd="sng" algn="ctr">
-                      <a:solidFill>
-                        <a:srgbClr val="CCCCCC"/>
-                      </a:solidFill>
-                      <a:prstDash val="solid"/>
-                      <a:round/>
-                      <a:headEnd type="none" w="med" len="med"/>
-                      <a:tailEnd type="none" w="med" len="med"/>
-                    </a:lnR>
-                    <a:lnT w="6350" cap="flat" cmpd="sng" algn="ctr">
-                      <a:solidFill>
-                        <a:srgbClr val="CCCCCC"/>
-                      </a:solidFill>
-                      <a:prstDash val="solid"/>
-                      <a:round/>
-                      <a:headEnd type="none" w="med" len="med"/>
-                      <a:tailEnd type="none" w="med" len="med"/>
-                    </a:lnT>
-                    <a:lnB w="6350" cap="flat" cmpd="sng" algn="ctr">
-                      <a:solidFill>
-                        <a:srgbClr val="CCCCCC"/>
-                      </a:solidFill>
-                      <a:prstDash val="solid"/>
-                      <a:round/>
-                      <a:headEnd type="none" w="med" len="med"/>
-                      <a:tailEnd type="none" w="med" len="med"/>
-                    </a:lnB>
-                    <a:solidFill>
-                      <a:srgbClr val="FFFFFF"/>
-                    </a:solidFill>
-                  </a:tcPr>
-                </a:tc>
-                <a:tc>
-                  <a:txBody>
-                    <a:bodyPr/>
-                    <a:lstStyle/>
-                    <a:p>
-                      <a:pPr algn="ctr" indent="0" marL="0">
-                        <a:buNone/>
-                      </a:pPr>
-                      <a:r>
-                        <a:rPr lang="en-US" sz="800" dirty="0">
-                          <a:solidFill>
-                            <a:srgbClr val="000000"/>
-                          </a:solidFill>
-                          <a:latin typeface="Arial" pitchFamily="34" charset="0"/>
-                          <a:ea typeface="Arial" pitchFamily="34" charset="-122"/>
-                          <a:cs typeface="Arial" pitchFamily="34" charset="-120"/>
-                        </a:rPr>
-                        <a:t>3.44/5</a:t>
-                      </a:r>
-                      <a:endParaRPr lang="en-US" sz="800" dirty="0">
-                        <a:latin typeface="Arial" charset="0"/>
-                        <a:ea typeface="Arial" charset="0"/>
-                        <a:cs typeface="Arial" charset="0"/>
-                      </a:endParaRPr>
-                    </a:p>
-                  </a:txBody>
-                  <a:tcPr marL="91440" marR="91440" marT="45720" marB="45720">
-                    <a:lnL w="6350" cap="flat" cmpd="sng" algn="ctr">
-                      <a:solidFill>
-                        <a:srgbClr val="CCCCCC"/>
-                      </a:solidFill>
-                      <a:prstDash val="solid"/>
-                      <a:round/>
-                      <a:headEnd type="none" w="med" len="med"/>
-                      <a:tailEnd type="none" w="med" len="med"/>
-                    </a:lnL>
-                    <a:lnR w="6350" cap="flat" cmpd="sng" algn="ctr">
-                      <a:solidFill>
-                        <a:srgbClr val="CCCCCC"/>
-                      </a:solidFill>
-                      <a:prstDash val="solid"/>
-                      <a:round/>
-                      <a:headEnd type="none" w="med" len="med"/>
-                      <a:tailEnd type="none" w="med" len="med"/>
-                    </a:lnR>
-                    <a:lnT w="6350" cap="flat" cmpd="sng" algn="ctr">
-                      <a:solidFill>
-                        <a:srgbClr val="CCCCCC"/>
-                      </a:solidFill>
-                      <a:prstDash val="solid"/>
-                      <a:round/>
-                      <a:headEnd type="none" w="med" len="med"/>
-                      <a:tailEnd type="none" w="med" len="med"/>
-                    </a:lnT>
-                    <a:lnB w="6350" cap="flat" cmpd="sng" algn="ctr">
-                      <a:solidFill>
-                        <a:srgbClr val="CCCCCC"/>
-                      </a:solidFill>
-                      <a:prstDash val="solid"/>
-                      <a:round/>
-                      <a:headEnd type="none" w="med" len="med"/>
-                      <a:tailEnd type="none" w="med" len="med"/>
-                    </a:lnB>
-                    <a:solidFill>
-                      <a:srgbClr val="FFFFFF"/>
-                    </a:solidFill>
-                  </a:tcPr>
-                </a:tc>
-                <a:tc>
-                  <a:txBody>
-                    <a:bodyPr/>
-                    <a:lstStyle/>
-                    <a:p>
-                      <a:pPr algn="ctr" indent="0" marL="0">
-                        <a:buNone/>
-                      </a:pPr>
-                      <a:r>
-                        <a:rPr lang="en-US" sz="800" dirty="0">
-                          <a:solidFill>
-                            <a:srgbClr val="000000"/>
-                          </a:solidFill>
-                          <a:latin typeface="Arial" pitchFamily="34" charset="0"/>
-                          <a:ea typeface="Arial" pitchFamily="34" charset="-122"/>
-                          <a:cs typeface="Arial" pitchFamily="34" charset="-120"/>
-                        </a:rPr>
-                        <a:t>6.89</a:t>
-                      </a:r>
-                      <a:endParaRPr lang="en-US" sz="800" dirty="0">
-                        <a:latin typeface="Arial" charset="0"/>
-                        <a:ea typeface="Arial" charset="0"/>
-                        <a:cs typeface="Arial" charset="0"/>
-                      </a:endParaRPr>
-                    </a:p>
-                  </a:txBody>
-                  <a:tcPr marL="91440" marR="91440" marT="45720" marB="45720">
-                    <a:lnL w="6350" cap="flat" cmpd="sng" algn="ctr">
-                      <a:solidFill>
-                        <a:srgbClr val="CCCCCC"/>
-                      </a:solidFill>
-                      <a:prstDash val="solid"/>
-                      <a:round/>
-                      <a:headEnd type="none" w="med" len="med"/>
-                      <a:tailEnd type="none" w="med" len="med"/>
-                    </a:lnL>
-                    <a:lnR w="6350" cap="flat" cmpd="sng" algn="ctr">
-                      <a:solidFill>
-                        <a:srgbClr val="CCCCCC"/>
-                      </a:solidFill>
-                      <a:prstDash val="solid"/>
-                      <a:round/>
-                      <a:headEnd type="none" w="med" len="med"/>
-                      <a:tailEnd type="none" w="med" len="med"/>
-                    </a:lnR>
-                    <a:lnT w="6350" cap="flat" cmpd="sng" algn="ctr">
-                      <a:solidFill>
-                        <a:srgbClr val="CCCCCC"/>
-                      </a:solidFill>
-                      <a:prstDash val="solid"/>
-                      <a:round/>
-                      <a:headEnd type="none" w="med" len="med"/>
-                      <a:tailEnd type="none" w="med" len="med"/>
-                    </a:lnT>
-                    <a:lnB w="6350" cap="flat" cmpd="sng" algn="ctr">
-                      <a:solidFill>
-                        <a:srgbClr val="CCCCCC"/>
-                      </a:solidFill>
-                      <a:prstDash val="solid"/>
-                      <a:round/>
-                      <a:headEnd type="none" w="med" len="med"/>
-                      <a:tailEnd type="none" w="med" len="med"/>
-                    </a:lnB>
-                    <a:solidFill>
-                      <a:srgbClr val="FFFFFF"/>
-                    </a:solidFill>
-                  </a:tcPr>
-                </a:tc>
-                <a:tc>
-                  <a:txBody>
-                    <a:bodyPr/>
-                    <a:lstStyle/>
-                    <a:p>
-                      <a:pPr algn="ctr" indent="0" marL="0">
-                        <a:buNone/>
-                      </a:pPr>
-                      <a:r>
-                        <a:rPr lang="en-US" sz="800" dirty="0">
-                          <a:solidFill>
-                            <a:srgbClr val="000000"/>
-                          </a:solidFill>
-                          <a:latin typeface="Arial" pitchFamily="34" charset="0"/>
-                          <a:ea typeface="Arial" pitchFamily="34" charset="-122"/>
-                          <a:cs typeface="Arial" pitchFamily="34" charset="-120"/>
-                        </a:rPr>
-                        <a:t>要改善</a:t>
-                      </a:r>
-                      <a:endParaRPr lang="en-US" sz="800" dirty="0">
-                        <a:latin typeface="Arial" charset="0"/>
-                        <a:ea typeface="Arial" charset="0"/>
-                        <a:cs typeface="Arial" charset="0"/>
-                      </a:endParaRPr>
-                    </a:p>
-                  </a:txBody>
-                  <a:tcPr marL="91440" marR="91440" marT="45720" marB="45720">
-                    <a:lnL w="6350" cap="flat" cmpd="sng" algn="ctr">
-                      <a:solidFill>
-                        <a:srgbClr val="CCCCCC"/>
-                      </a:solidFill>
-                      <a:prstDash val="solid"/>
-                      <a:round/>
-                      <a:headEnd type="none" w="med" len="med"/>
-                      <a:tailEnd type="none" w="med" len="med"/>
-                    </a:lnL>
-                    <a:lnR w="6350" cap="flat" cmpd="sng" algn="ctr">
-                      <a:solidFill>
-                        <a:srgbClr val="CCCCCC"/>
-                      </a:solidFill>
-                      <a:prstDash val="solid"/>
-                      <a:round/>
-                      <a:headEnd type="none" w="med" len="med"/>
-                      <a:tailEnd type="none" w="med" len="med"/>
-                    </a:lnR>
-                    <a:lnT w="6350" cap="flat" cmpd="sng" algn="ctr">
-                      <a:solidFill>
-                        <a:srgbClr val="CCCCCC"/>
-                      </a:solidFill>
-                      <a:prstDash val="solid"/>
-                      <a:round/>
-                      <a:headEnd type="none" w="med" len="med"/>
-                      <a:tailEnd type="none" w="med" len="med"/>
-                    </a:lnT>
-                    <a:lnB w="6350" cap="flat" cmpd="sng" algn="ctr">
-                      <a:solidFill>
-                        <a:srgbClr val="CCCCCC"/>
-                      </a:solidFill>
-                      <a:prstDash val="solid"/>
-                      <a:round/>
-                      <a:headEnd type="none" w="med" len="med"/>
-                      <a:tailEnd type="none" w="med" len="med"/>
-                    </a:lnB>
-                    <a:solidFill>
-                      <a:srgbClr val="FFFFFF"/>
-                    </a:solidFill>
-                  </a:tcPr>
-                </a:tc>
-              </a:tr>
-              <a:tr h="0">
-                <a:tc>
-                  <a:txBody>
-                    <a:bodyPr/>
-                    <a:lstStyle/>
-                    <a:p>
-                      <a:pPr algn="ctr" indent="0" marL="0">
-                        <a:buNone/>
-                      </a:pPr>
-                      <a:r>
-                        <a:rPr lang="en-US" sz="800" dirty="0">
-                          <a:solidFill>
-                            <a:srgbClr val="000000"/>
-                          </a:solidFill>
-                          <a:latin typeface="Arial" pitchFamily="34" charset="0"/>
-                          <a:ea typeface="Arial" pitchFamily="34" charset="-122"/>
-                          <a:cs typeface="Arial" pitchFamily="34" charset="-120"/>
-                        </a:rPr>
-                        <a:t>楽天トラベル</a:t>
-                      </a:r>
-                      <a:endParaRPr lang="en-US" sz="800" dirty="0">
-                        <a:latin typeface="Arial" charset="0"/>
-                        <a:ea typeface="Arial" charset="0"/>
-                        <a:cs typeface="Arial" charset="0"/>
-                      </a:endParaRPr>
-                    </a:p>
-                  </a:txBody>
-                  <a:tcPr marL="91440" marR="91440" marT="45720" marB="45720">
-                    <a:lnL w="6350" cap="flat" cmpd="sng" algn="ctr">
-                      <a:solidFill>
-                        <a:srgbClr val="CCCCCC"/>
-                      </a:solidFill>
-                      <a:prstDash val="solid"/>
-                      <a:round/>
-                      <a:headEnd type="none" w="med" len="med"/>
-                      <a:tailEnd type="none" w="med" len="med"/>
-                    </a:lnL>
-                    <a:lnR w="6350" cap="flat" cmpd="sng" algn="ctr">
-                      <a:solidFill>
-                        <a:srgbClr val="CCCCCC"/>
-                      </a:solidFill>
-                      <a:prstDash val="solid"/>
-                      <a:round/>
-                      <a:headEnd type="none" w="med" len="med"/>
-                      <a:tailEnd type="none" w="med" len="med"/>
-                    </a:lnR>
-                    <a:lnT w="6350" cap="flat" cmpd="sng" algn="ctr">
-                      <a:solidFill>
-                        <a:srgbClr val="CCCCCC"/>
-                      </a:solidFill>
-                      <a:prstDash val="solid"/>
-                      <a:round/>
-                      <a:headEnd type="none" w="med" len="med"/>
-                      <a:tailEnd type="none" w="med" len="med"/>
-                    </a:lnT>
-                    <a:lnB w="6350" cap="flat" cmpd="sng" algn="ctr">
-                      <a:solidFill>
-                        <a:srgbClr val="CCCCCC"/>
-                      </a:solidFill>
-                      <a:prstDash val="solid"/>
-                      <a:round/>
-                      <a:headEnd type="none" w="med" len="med"/>
-                      <a:tailEnd type="none" w="med" len="med"/>
-                    </a:lnB>
-                    <a:solidFill>
-                      <a:srgbClr val="FFFFFF"/>
-                    </a:solidFill>
-                  </a:tcPr>
-                </a:tc>
-                <a:tc>
-                  <a:txBody>
-                    <a:bodyPr/>
-                    <a:lstStyle/>
-                    <a:p>
-                      <a:pPr algn="ctr" indent="0" marL="0">
-                        <a:buNone/>
-                      </a:pPr>
-                      <a:r>
-                        <a:rPr lang="en-US" sz="800" dirty="0">
-                          <a:solidFill>
-                            <a:srgbClr val="000000"/>
-                          </a:solidFill>
-                          <a:latin typeface="Arial" pitchFamily="34" charset="0"/>
-                          <a:ea typeface="Arial" pitchFamily="34" charset="-122"/>
-                          <a:cs typeface="Arial" pitchFamily="34" charset="-120"/>
-                        </a:rPr>
-                        <a:t>5</a:t>
-                      </a:r>
-                      <a:endParaRPr lang="en-US" sz="800" dirty="0">
-                        <a:latin typeface="Arial" charset="0"/>
-                        <a:ea typeface="Arial" charset="0"/>
-                        <a:cs typeface="Arial" charset="0"/>
-                      </a:endParaRPr>
-                    </a:p>
-                  </a:txBody>
-                  <a:tcPr marL="91440" marR="91440" marT="45720" marB="45720">
-                    <a:lnL w="6350" cap="flat" cmpd="sng" algn="ctr">
-                      <a:solidFill>
-                        <a:srgbClr val="CCCCCC"/>
-                      </a:solidFill>
-                      <a:prstDash val="solid"/>
-                      <a:round/>
-                      <a:headEnd type="none" w="med" len="med"/>
-                      <a:tailEnd type="none" w="med" len="med"/>
-                    </a:lnL>
-                    <a:lnR w="6350" cap="flat" cmpd="sng" algn="ctr">
-                      <a:solidFill>
-                        <a:srgbClr val="CCCCCC"/>
-                      </a:solidFill>
-                      <a:prstDash val="solid"/>
-                      <a:round/>
-                      <a:headEnd type="none" w="med" len="med"/>
-                      <a:tailEnd type="none" w="med" len="med"/>
-                    </a:lnR>
-                    <a:lnT w="6350" cap="flat" cmpd="sng" algn="ctr">
-                      <a:solidFill>
-                        <a:srgbClr val="CCCCCC"/>
-                      </a:solidFill>
-                      <a:prstDash val="solid"/>
-                      <a:round/>
-                      <a:headEnd type="none" w="med" len="med"/>
-                      <a:tailEnd type="none" w="med" len="med"/>
-                    </a:lnT>
-                    <a:lnB w="6350" cap="flat" cmpd="sng" algn="ctr">
-                      <a:solidFill>
-                        <a:srgbClr val="CCCCCC"/>
-                      </a:solidFill>
-                      <a:prstDash val="solid"/>
-                      <a:round/>
-                      <a:headEnd type="none" w="med" len="med"/>
-                      <a:tailEnd type="none" w="med" len="med"/>
-                    </a:lnB>
-                    <a:solidFill>
-                      <a:srgbClr val="FFFFFF"/>
-                    </a:solidFill>
-                  </a:tcPr>
-                </a:tc>
-                <a:tc>
-                  <a:txBody>
-                    <a:bodyPr/>
-                    <a:lstStyle/>
-                    <a:p>
-                      <a:pPr algn="ctr" indent="0" marL="0">
-                        <a:buNone/>
-                      </a:pPr>
-                      <a:r>
-                        <a:rPr lang="en-US" sz="800" dirty="0">
-                          <a:solidFill>
-                            <a:srgbClr val="000000"/>
-                          </a:solidFill>
-                          <a:latin typeface="Arial" pitchFamily="34" charset="0"/>
-                          <a:ea typeface="Arial" pitchFamily="34" charset="-122"/>
-                          <a:cs typeface="Arial" pitchFamily="34" charset="-120"/>
-                        </a:rPr>
-                        <a:t>3.00/5</a:t>
-                      </a:r>
-                      <a:endParaRPr lang="en-US" sz="800" dirty="0">
-                        <a:latin typeface="Arial" charset="0"/>
-                        <a:ea typeface="Arial" charset="0"/>
-                        <a:cs typeface="Arial" charset="0"/>
-                      </a:endParaRPr>
-                    </a:p>
-                  </a:txBody>
-                  <a:tcPr marL="91440" marR="91440" marT="45720" marB="45720">
-                    <a:lnL w="6350" cap="flat" cmpd="sng" algn="ctr">
-                      <a:solidFill>
-                        <a:srgbClr val="CCCCCC"/>
-                      </a:solidFill>
-                      <a:prstDash val="solid"/>
-                      <a:round/>
-                      <a:headEnd type="none" w="med" len="med"/>
-                      <a:tailEnd type="none" w="med" len="med"/>
-                    </a:lnL>
-                    <a:lnR w="6350" cap="flat" cmpd="sng" algn="ctr">
-                      <a:solidFill>
-                        <a:srgbClr val="CCCCCC"/>
-                      </a:solidFill>
-                      <a:prstDash val="solid"/>
-                      <a:round/>
-                      <a:headEnd type="none" w="med" len="med"/>
-                      <a:tailEnd type="none" w="med" len="med"/>
-                    </a:lnR>
-                    <a:lnT w="6350" cap="flat" cmpd="sng" algn="ctr">
-                      <a:solidFill>
-                        <a:srgbClr val="CCCCCC"/>
-                      </a:solidFill>
-                      <a:prstDash val="solid"/>
-                      <a:round/>
-                      <a:headEnd type="none" w="med" len="med"/>
-                      <a:tailEnd type="none" w="med" len="med"/>
-                    </a:lnT>
-                    <a:lnB w="6350" cap="flat" cmpd="sng" algn="ctr">
-                      <a:solidFill>
-                        <a:srgbClr val="CCCCCC"/>
-                      </a:solidFill>
-                      <a:prstDash val="solid"/>
-                      <a:round/>
-                      <a:headEnd type="none" w="med" len="med"/>
-                      <a:tailEnd type="none" w="med" len="med"/>
-                    </a:lnB>
-                    <a:solidFill>
-                      <a:srgbClr val="FFFFFF"/>
-                    </a:solidFill>
-                  </a:tcPr>
-                </a:tc>
-                <a:tc>
-                  <a:txBody>
-                    <a:bodyPr/>
-                    <a:lstStyle/>
-                    <a:p>
-                      <a:pPr algn="ctr" indent="0" marL="0">
-                        <a:buNone/>
-                      </a:pPr>
-                      <a:r>
-                        <a:rPr lang="en-US" sz="800" dirty="0">
-                          <a:solidFill>
-                            <a:srgbClr val="000000"/>
-                          </a:solidFill>
-                          <a:latin typeface="Arial" pitchFamily="34" charset="0"/>
-                          <a:ea typeface="Arial" pitchFamily="34" charset="-122"/>
-                          <a:cs typeface="Arial" pitchFamily="34" charset="-120"/>
-                        </a:rPr>
-                        <a:t>6.00</a:t>
+                        <a:t>6.33</a:t>
                       </a:r>
                       <a:endParaRPr lang="en-US" sz="800" dirty="0">
                         <a:latin typeface="Arial" charset="0"/>
@@ -6321,7 +6304,7 @@
                 <a:ea typeface="Arial" pitchFamily="34" charset="-122"/>
                 <a:cs typeface="Arial" pitchFamily="34" charset="-120"/>
               </a:rPr>
-              <a:t>89件（63.6%）</a:t>
+              <a:t>49件（70.0%）</a:t>
             </a:r>
             <a:endParaRPr lang="en-US" sz="1600" dirty="0"/>
           </a:p>
@@ -6419,7 +6402,7 @@
                 <a:ea typeface="Arial" pitchFamily="34" charset="-122"/>
                 <a:cs typeface="Arial" pitchFamily="34" charset="-120"/>
               </a:rPr>
-              <a:t>35件（25.0%）</a:t>
+              <a:t>13件（18.6%）</a:t>
             </a:r>
             <a:endParaRPr lang="en-US" sz="1600" dirty="0"/>
           </a:p>
@@ -6517,7 +6500,7 @@
                 <a:ea typeface="Arial" pitchFamily="34" charset="-122"/>
                 <a:cs typeface="Arial" pitchFamily="34" charset="-120"/>
               </a:rPr>
-              <a:t>16件（11.4%）</a:t>
+              <a:t>8件（11.4%）</a:t>
             </a:r>
             <a:endParaRPr lang="en-US" sz="1600" dirty="0"/>
           </a:p>
@@ -6679,7 +6662,7 @@
                 <a:ea typeface="Arial" pitchFamily="34" charset="-122"/>
                 <a:cs typeface="Arial" pitchFamily="34" charset="-120"/>
               </a:rPr>
-              <a:t>高評価レビュー（8-10点: 89件）の分析から、主要な強みテーマを抽出しています。立地・アクセス、客室清潔感、スタッフ対応が高評価の中心的テーマです。</a:t>
+              <a:t>高評価レビュー（8-10点: 49件）の分析から、主要な強みテーマを抽出しています。立地・アクセス、客室清潔感、スタッフ対応が高評価の中心的テーマです。</a:t>
             </a:r>
             <a:endParaRPr lang="en-US" sz="1200" dirty="0"/>
           </a:p>
@@ -6939,7 +6922,7 @@
                 <a:ea typeface="Arial" pitchFamily="34" charset="-122"/>
                 <a:cs typeface="Arial" pitchFamily="34" charset="-120"/>
               </a:rPr>
-              <a:t>低評価・中評価レビュー（51件）から改善課題を優先度別に整理しています。S/A/B/Cの4段階で優先度を設定し、計画的な改善を推進します。</a:t>
+              <a:t>低評価・中評価レビュー（21件）から改善課題を優先度別に整理しています。S/A/B/Cの4段階で優先度を設定し、計画的な改善を推進します。</a:t>
             </a:r>
             <a:endParaRPr lang="en-US" sz="1200" dirty="0"/>
           </a:p>
@@ -7719,7 +7702,7 @@
                 <a:ea typeface="Arial" pitchFamily="34" charset="-122"/>
                 <a:cs typeface="Arial" pitchFamily="34" charset="-120"/>
               </a:rPr>
-              <a:t>全体平均 7.73点 → 目標 8.23点</a:t>
+              <a:t>全体平均 7.83点 → 目標 8.33点</a:t>
             </a:r>
             <a:endParaRPr lang="en-US" sz="1200" dirty="0"/>
           </a:p>
@@ -7736,7 +7719,7 @@
                 <a:ea typeface="Arial" pitchFamily="34" charset="-122"/>
                 <a:cs typeface="Arial" pitchFamily="34" charset="-120"/>
               </a:rPr>
-              <a:t>高評価率 63.6% → 目標 68.6%</a:t>
+              <a:t>高評価率 70.0% → 目標 75.0%</a:t>
             </a:r>
             <a:endParaRPr lang="en-US" sz="1200" dirty="0"/>
           </a:p>

--- a/納品レポート/ホテル別レポート/comfort_hakata_口コミ分析レポート.pptx
+++ b/納品レポート/ホテル別レポート/comfort_hakata_口コミ分析レポート.pptx
@@ -183,16 +183,16 @@
                     <c:v>Trip.com</c:v>
                   </c:pt>
                   <c:pt idx="1">
+                    <c:v>じゃらん</c:v>
+                  </c:pt>
+                  <c:pt idx="2">
+                    <c:v>楽天トラベル</c:v>
+                  </c:pt>
+                  <c:pt idx="3">
                     <c:v>Booking.com</c:v>
                   </c:pt>
-                  <c:pt idx="2">
+                  <c:pt idx="4">
                     <c:v>Google</c:v>
-                  </c:pt>
-                  <c:pt idx="3">
-                    <c:v>じゃらん</c:v>
-                  </c:pt>
-                  <c:pt idx="4">
-                    <c:v>楽天トラベル</c:v>
                   </c:pt>
                 </c:lvl>
               </c:multiLvlStrCache>
@@ -205,19 +205,19 @@
                 <c:formatCode>General</c:formatCode>
                 <c:ptCount val="5"/>
                 <c:pt idx="0">
-                  <c:v>9.04</c:v>
+                  <c:v>8.87</c:v>
                 </c:pt>
                 <c:pt idx="1">
-                  <c:v>6.97</c:v>
+                  <c:v>7.6</c:v>
                 </c:pt>
                 <c:pt idx="2">
-                  <c:v>6.97</c:v>
+                  <c:v>7.5</c:v>
                 </c:pt>
                 <c:pt idx="3">
-                  <c:v>6.89</c:v>
+                  <c:v>7.14</c:v>
                 </c:pt>
                 <c:pt idx="4">
-                  <c:v>6</c:v>
+                  <c:v>6.46</c:v>
                 </c:pt>
               </c:numCache>
             </c:numRef>
@@ -560,13 +560,13 @@
               <c:numCache>
                 <c:ptCount val="3"/>
                 <c:pt idx="0">
-                  <c:v>89</c:v>
+                  <c:v>58</c:v>
                 </c:pt>
                 <c:pt idx="1">
-                  <c:v>35</c:v>
+                  <c:v>17</c:v>
                 </c:pt>
                 <c:pt idx="2">
-                  <c:v>16</c:v>
+                  <c:v>8</c:v>
                 </c:pt>
               </c:numCache>
             </c:numRef>
@@ -773,22 +773,11 @@
               <a:effectLst/>
             </c:spPr>
           </c:dPt>
-          <c:dPt>
-            <c:idx val="9"/>
-            <c:invertIfNegative val="0"/>
-            <c:bubble3D val="0"/>
-            <c:spPr>
-              <a:solidFill>
-                <a:srgbClr val="DC2626"/>
-              </a:solidFill>
-              <a:effectLst/>
-            </c:spPr>
-          </c:dPt>
           <c:cat>
             <c:multiLvlStrRef>
-              <c:f>Sheet1!$A$2:$A$11</c:f>
+              <c:f>Sheet1!$A$2:$A$10</c:f>
               <c:multiLvlStrCache>
-                <c:ptCount val="10"/>
+                <c:ptCount val="9"/>
                 <c:lvl>
                   <c:pt idx="0">
                     <c:v>10点</c:v>
@@ -817,48 +806,42 @@
                   <c:pt idx="8">
                     <c:v>2点</c:v>
                   </c:pt>
-                  <c:pt idx="9">
-                    <c:v>1点</c:v>
-                  </c:pt>
                 </c:lvl>
               </c:multiLvlStrCache>
             </c:multiLvlStrRef>
           </c:cat>
           <c:val>
             <c:numRef>
-              <c:f>Sheet1!$B$2:$B$11</c:f>
+              <c:f>Sheet1!$B$2:$B$10</c:f>
               <c:numCache>
                 <c:formatCode>General</c:formatCode>
-                <c:ptCount val="10"/>
+                <c:ptCount val="9"/>
                 <c:pt idx="0">
-                  <c:v>45</c:v>
+                  <c:v>27</c:v>
                 </c:pt>
                 <c:pt idx="1">
-                  <c:v>13</c:v>
+                  <c:v>8</c:v>
                 </c:pt>
                 <c:pt idx="2">
-                  <c:v>31</c:v>
+                  <c:v>23</c:v>
                 </c:pt>
                 <c:pt idx="3">
-                  <c:v>9</c:v>
+                  <c:v>6</c:v>
                 </c:pt>
                 <c:pt idx="4">
-                  <c:v>22</c:v>
+                  <c:v>8</c:v>
                 </c:pt>
                 <c:pt idx="5">
-                  <c:v>4</c:v>
+                  <c:v>3</c:v>
                 </c:pt>
                 <c:pt idx="6">
-                  <c:v>9</c:v>
+                  <c:v>3</c:v>
                 </c:pt>
                 <c:pt idx="7">
-                  <c:v>3</c:v>
+                  <c:v>2</c:v>
                 </c:pt>
                 <c:pt idx="8">
                   <c:v>3</c:v>
-                </c:pt>
-                <c:pt idx="9">
-                  <c:v>1</c:v>
                 </c:pt>
               </c:numCache>
             </c:numRef>
@@ -2789,7 +2772,7 @@
                 <a:ea typeface="Arial" pitchFamily="34" charset="-122"/>
                 <a:cs typeface="Arial" pitchFamily="34" charset="-120"/>
               </a:rPr>
-              <a:t>分析対象期間：2026年2月〜3月</a:t>
+              <a:t>分析対象期間：2026年3月〜4月</a:t>
             </a:r>
             <a:endParaRPr lang="en-US" sz="1000" dirty="0"/>
           </a:p>
@@ -2809,7 +2792,7 @@
                 <a:ea typeface="Arial" pitchFamily="34" charset="-122"/>
                 <a:cs typeface="Arial" pitchFamily="34" charset="-120"/>
               </a:rPr>
-              <a:t>レビュー総数：140件（5サイト）</a:t>
+              <a:t>レビュー総数：83件（5サイト）</a:t>
             </a:r>
             <a:endParaRPr lang="en-US" sz="1000" dirty="0"/>
           </a:p>
@@ -2829,7 +2812,7 @@
                 <a:ea typeface="Arial" pitchFamily="34" charset="-122"/>
                 <a:cs typeface="Arial" pitchFamily="34" charset="-120"/>
               </a:rPr>
-              <a:t>作成日：2026年4月2日</a:t>
+              <a:t>作成日：2026年4月5日</a:t>
             </a:r>
             <a:endParaRPr lang="en-US" sz="1000" dirty="0"/>
           </a:p>
@@ -3375,7 +3358,7 @@
                           <a:ea typeface="Arial" pitchFamily="34" charset="-122"/>
                           <a:cs typeface="Arial" pitchFamily="34" charset="-120"/>
                         </a:rPr>
-                        <a:t>7.73点</a:t>
+                        <a:t>7.89点</a:t>
                       </a:r>
                       <a:endParaRPr lang="en-US" sz="1000" dirty="0">
                         <a:latin typeface="Arial" charset="0"/>
@@ -3443,7 +3426,7 @@
                           <a:ea typeface="Arial" pitchFamily="34" charset="-122"/>
                           <a:cs typeface="Arial" pitchFamily="34" charset="-120"/>
                         </a:rPr>
-                        <a:t>8.2点以上</a:t>
+                        <a:t>8.4点以上</a:t>
                       </a:r>
                       <a:endParaRPr lang="en-US" sz="1000" dirty="0">
                         <a:latin typeface="Arial" charset="0"/>
@@ -3649,7 +3632,7 @@
                           <a:ea typeface="Arial" pitchFamily="34" charset="-122"/>
                           <a:cs typeface="Arial" pitchFamily="34" charset="-120"/>
                         </a:rPr>
-                        <a:t>63.6%</a:t>
+                        <a:t>69.9%</a:t>
                       </a:r>
                       <a:endParaRPr lang="en-US" sz="1000" dirty="0">
                         <a:latin typeface="Arial" charset="0"/>
@@ -3717,7 +3700,7 @@
                           <a:ea typeface="Arial" pitchFamily="34" charset="-122"/>
                           <a:cs typeface="Arial" pitchFamily="34" charset="-120"/>
                         </a:rPr>
-                        <a:t>74%以上</a:t>
+                        <a:t>80%以上</a:t>
                       </a:r>
                       <a:endParaRPr lang="en-US" sz="1000" dirty="0">
                         <a:latin typeface="Arial" charset="0"/>
@@ -3923,7 +3906,7 @@
                           <a:ea typeface="Arial" pitchFamily="34" charset="-122"/>
                           <a:cs typeface="Arial" pitchFamily="34" charset="-120"/>
                         </a:rPr>
-                        <a:t>11.4%</a:t>
+                        <a:t>9.6%</a:t>
                       </a:r>
                       <a:endParaRPr lang="en-US" sz="1000" dirty="0">
                         <a:latin typeface="Arial" charset="0"/>
@@ -3991,7 +3974,7 @@
                           <a:ea typeface="Arial" pitchFamily="34" charset="-122"/>
                           <a:cs typeface="Arial" pitchFamily="34" charset="-120"/>
                         </a:rPr>
-                        <a:t>6%以下</a:t>
+                        <a:t>7%以下</a:t>
                       </a:r>
                       <a:endParaRPr lang="en-US" sz="1000" dirty="0">
                         <a:latin typeface="Arial" charset="0"/>
@@ -4129,7 +4112,7 @@
                           <a:ea typeface="Arial" pitchFamily="34" charset="-122"/>
                           <a:cs typeface="Arial" pitchFamily="34" charset="-120"/>
                         </a:rPr>
-                        <a:t>楽天トラベル平均評価</a:t>
+                        <a:t>Google平均評価</a:t>
                       </a:r>
                       <a:endParaRPr lang="en-US" sz="1000" dirty="0">
                         <a:latin typeface="Arial" charset="0"/>
@@ -4197,7 +4180,7 @@
                           <a:ea typeface="Arial" pitchFamily="34" charset="-122"/>
                           <a:cs typeface="Arial" pitchFamily="34" charset="-120"/>
                         </a:rPr>
-                        <a:t>6.0点</a:t>
+                        <a:t>6.5点</a:t>
                       </a:r>
                       <a:endParaRPr lang="en-US" sz="1000" dirty="0">
                         <a:latin typeface="Arial" charset="0"/>
@@ -4265,7 +4248,7 @@
                           <a:ea typeface="Arial" pitchFamily="34" charset="-122"/>
                           <a:cs typeface="Arial" pitchFamily="34" charset="-120"/>
                         </a:rPr>
-                        <a:t>7.0点以上</a:t>
+                        <a:t>7.5点以上</a:t>
                       </a:r>
                       <a:endParaRPr lang="en-US" sz="1000" dirty="0">
                         <a:latin typeface="Arial" charset="0"/>
@@ -4677,7 +4660,7 @@
                           <a:ea typeface="Arial" pitchFamily="34" charset="-122"/>
                           <a:cs typeface="Arial" pitchFamily="34" charset="-120"/>
                         </a:rPr>
-                        <a:t>浴室・水回りクレーム</a:t>
+                        <a:t>設備の老朽化クレーム</a:t>
                       </a:r>
                       <a:endParaRPr lang="en-US" sz="1000" dirty="0">
                         <a:latin typeface="Arial" charset="0"/>
@@ -4745,7 +4728,7 @@
                           <a:ea typeface="Arial" pitchFamily="34" charset="-122"/>
                           <a:cs typeface="Arial" pitchFamily="34" charset="-120"/>
                         </a:rPr>
-                        <a:t>約23件/期間</a:t>
+                        <a:t>約13件/期間</a:t>
                       </a:r>
                       <a:endParaRPr lang="en-US" sz="1000" dirty="0">
                         <a:latin typeface="Arial" charset="0"/>
@@ -4813,7 +4796,7 @@
                           <a:ea typeface="Arial" pitchFamily="34" charset="-122"/>
                           <a:cs typeface="Arial" pitchFamily="34" charset="-120"/>
                         </a:rPr>
-                        <a:t>11件以下</a:t>
+                        <a:t>6件以下</a:t>
                       </a:r>
                       <a:endParaRPr lang="en-US" sz="1000" dirty="0">
                         <a:latin typeface="Arial" charset="0"/>
@@ -5384,7 +5367,7 @@
                 <a:ea typeface="Arial" pitchFamily="34" charset="-122"/>
                 <a:cs typeface="Arial" pitchFamily="34" charset="-120"/>
               </a:rPr>
-              <a:t>7.73</a:t>
+              <a:t>7.89</a:t>
             </a:r>
             <a:endParaRPr lang="en-US" sz="3200" dirty="0"/>
           </a:p>
@@ -5509,7 +5492,7 @@
                 <a:ea typeface="Arial" pitchFamily="34" charset="-122"/>
                 <a:cs typeface="Arial" pitchFamily="34" charset="-120"/>
               </a:rPr>
-              <a:t>63.6%</a:t>
+              <a:t>69.9%</a:t>
             </a:r>
             <a:endParaRPr lang="en-US" sz="3200" dirty="0"/>
           </a:p>
@@ -5634,7 +5617,7 @@
                 <a:ea typeface="Arial" pitchFamily="34" charset="-122"/>
                 <a:cs typeface="Arial" pitchFamily="34" charset="-120"/>
               </a:rPr>
-              <a:t>11.4%</a:t>
+              <a:t>9.6%</a:t>
             </a:r>
             <a:endParaRPr lang="en-US" sz="3200" dirty="0"/>
           </a:p>
@@ -5759,7 +5742,7 @@
                 <a:ea typeface="Arial" pitchFamily="34" charset="-122"/>
                 <a:cs typeface="Arial" pitchFamily="34" charset="-120"/>
               </a:rPr>
-              <a:t>140件</a:t>
+              <a:t>83件</a:t>
             </a:r>
             <a:endParaRPr lang="en-US" sz="3200" dirty="0"/>
           </a:p>
@@ -5907,7 +5890,7 @@
                 <a:ea typeface="Arial" pitchFamily="34" charset="-122"/>
                 <a:cs typeface="Arial" pitchFamily="34" charset="-120"/>
               </a:rPr>
-              <a:t>  位置很好，房間很舊，早餐有啲難食 立地は最高だが、部屋は古く、朝食は少し残念だった</a:t>
+              <a:t>  立地はとても便利で、博多駅を出てすぐなので迷う心配はありません</a:t>
             </a:r>
             <a:endParaRPr lang="en-US" sz="1100" dirty="0"/>
           </a:p>
@@ -5947,7 +5930,7 @@
                 <a:ea typeface="Arial" pitchFamily="34" charset="-122"/>
                 <a:cs typeface="Arial" pitchFamily="34" charset="-120"/>
               </a:rPr>
-              <a:t>  位置很好，房間很舊，早餐有啲難食 立地は最高だが、部屋は古く、朝食は少し残念だった</a:t>
+              <a:t>  朝食の場所は広くはないですが、スタッフさんがしっかり誘導してくれるのでスムーズ</a:t>
             </a:r>
             <a:endParaRPr lang="en-US" sz="1100" dirty="0"/>
           </a:p>
@@ -5987,7 +5970,7 @@
                 <a:ea typeface="Arial" pitchFamily="34" charset="-122"/>
                 <a:cs typeface="Arial" pitchFamily="34" charset="-120"/>
               </a:rPr>
-              <a:t>  朝食のスタッフの方が案内などの対応がてきぱきされており良かった バスルームが古く、清潔感が低い　カビもみられる バ...</a:t>
+              <a:t>  朝食の場所は広くはないですが、スタッフさんがしっかり誘導してくれるのでスムーズ</a:t>
             </a:r>
             <a:endParaRPr lang="en-US" sz="1100" dirty="0"/>
           </a:p>
@@ -6115,7 +6098,7 @@
                 <a:ea typeface="Arial" pitchFamily="34" charset="-122"/>
                 <a:cs typeface="Arial" pitchFamily="34" charset="-120"/>
               </a:rPr>
-              <a:t>浴室・水回り </a:t>
+              <a:t>設備の老朽化 </a:t>
             </a:r>
             <a:endParaRPr lang="en-US" sz="1100" dirty="0"/>
           </a:p>
@@ -6135,7 +6118,7 @@
                 <a:ea typeface="Arial" pitchFamily="34" charset="-122"/>
                 <a:cs typeface="Arial" pitchFamily="34" charset="-120"/>
               </a:rPr>
-              <a:t>  朝食のスタッフの方が案内などの対応がてきぱきされており良かった バスルームが古く、清潔感が低い　カビもみられる バ...</a:t>
+              <a:t>  部屋の広さはちょうど良いのですが、設備は少し古めです</a:t>
             </a:r>
             <a:endParaRPr lang="en-US" sz="1100" dirty="0"/>
           </a:p>
@@ -6155,7 +6138,7 @@
                 <a:ea typeface="Arial" pitchFamily="34" charset="-122"/>
                 <a:cs typeface="Arial" pitchFamily="34" charset="-120"/>
               </a:rPr>
-              <a:t>設備の老朽化 </a:t>
+              <a:t>浴室・水回り </a:t>
             </a:r>
             <a:endParaRPr lang="en-US" sz="1100" dirty="0"/>
           </a:p>
@@ -6175,7 +6158,7 @@
                 <a:ea typeface="Arial" pitchFamily="34" charset="-122"/>
                 <a:cs typeface="Arial" pitchFamily="34" charset="-120"/>
               </a:rPr>
-              <a:t>  それから設備の古さが目につく</a:t>
+              <a:t>  駅、地下鉄、バスターミナル、コンビニ、地下街、スタバ、飲食店</a:t>
             </a:r>
             <a:endParaRPr lang="en-US" sz="1100" dirty="0"/>
           </a:p>
@@ -6215,7 +6198,7 @@
                 <a:ea typeface="Arial" pitchFamily="34" charset="-122"/>
                 <a:cs typeface="Arial" pitchFamily="34" charset="-120"/>
               </a:rPr>
-              <a:t>  壁紙が剥がれていたり、エアコンの吐き出し口がズレていたり、水まわりも年季が入っています</a:t>
+              <a:t>  The location of the hotel was actually very near to Hakat...</a:t>
             </a:r>
             <a:endParaRPr lang="en-US" sz="1100" dirty="0"/>
           </a:p>
@@ -6568,7 +6551,7 @@
                 <a:ea typeface="Arial" pitchFamily="34" charset="-122"/>
                 <a:cs typeface="Arial" pitchFamily="34" charset="-120"/>
               </a:rPr>
-              <a:t>7.73</a:t>
+              <a:t>7.89</a:t>
             </a:r>
             <a:endParaRPr lang="en-US" sz="3200" dirty="0"/>
           </a:p>
@@ -6693,7 +6676,7 @@
                 <a:ea typeface="Arial" pitchFamily="34" charset="-122"/>
                 <a:cs typeface="Arial" pitchFamily="34" charset="-120"/>
               </a:rPr>
-              <a:t>63.6%</a:t>
+              <a:t>69.9%</a:t>
             </a:r>
             <a:endParaRPr lang="en-US" sz="3200" dirty="0"/>
           </a:p>
@@ -6818,7 +6801,7 @@
                 <a:ea typeface="Arial" pitchFamily="34" charset="-122"/>
                 <a:cs typeface="Arial" pitchFamily="34" charset="-120"/>
               </a:rPr>
-              <a:t>11.4%</a:t>
+              <a:t>9.6%</a:t>
             </a:r>
             <a:endParaRPr lang="en-US" sz="3200" dirty="0"/>
           </a:p>
@@ -6943,7 +6926,7 @@
                 <a:ea typeface="Arial" pitchFamily="34" charset="-122"/>
                 <a:cs typeface="Arial" pitchFamily="34" charset="-120"/>
               </a:rPr>
-              <a:t>140件</a:t>
+              <a:t>83件</a:t>
             </a:r>
             <a:endParaRPr lang="en-US" sz="3200" dirty="0"/>
           </a:p>
@@ -7364,7 +7347,7 @@
                 <a:ea typeface="Arial" pitchFamily="34" charset="-122"/>
                 <a:cs typeface="Arial" pitchFamily="34" charset="-120"/>
               </a:rPr>
-              <a:t>Trip.com(9.04)が最高スコア。</a:t>
+              <a:t>Trip.com(8.87)が最高スコア。</a:t>
             </a:r>
             <a:endParaRPr lang="en-US" sz="1100" dirty="0"/>
           </a:p>
@@ -7413,7 +7396,7 @@
                 <a:ea typeface="Arial" pitchFamily="34" charset="-122"/>
                 <a:cs typeface="Arial" pitchFamily="34" charset="-120"/>
               </a:rPr>
-              <a:t>楽天トラベル(6.0)が相対的に低い。口コミ返信の強化が急務</a:t>
+              <a:t>Google(6.5)が相対的に低い。口コミ返信の強化が急務</a:t>
             </a:r>
             <a:endParaRPr lang="en-US" sz="1100" dirty="0"/>
           </a:p>
@@ -7922,7 +7905,7 @@
                           <a:ea typeface="Arial" pitchFamily="34" charset="-122"/>
                           <a:cs typeface="Arial" pitchFamily="34" charset="-120"/>
                         </a:rPr>
-                        <a:t>54</a:t>
+                        <a:t>39</a:t>
                       </a:r>
                       <a:endParaRPr lang="en-US" sz="900" dirty="0">
                         <a:latin typeface="Arial" charset="0"/>
@@ -7990,7 +7973,7 @@
                           <a:ea typeface="Arial" pitchFamily="34" charset="-122"/>
                           <a:cs typeface="Arial" pitchFamily="34" charset="-120"/>
                         </a:rPr>
-                        <a:t>9.04</a:t>
+                        <a:t>8.87</a:t>
                       </a:r>
                       <a:endParaRPr lang="en-US" sz="900" dirty="0">
                         <a:latin typeface="Arial" charset="0"/>
@@ -8126,7 +8109,691 @@
                           <a:ea typeface="Arial" pitchFamily="34" charset="-122"/>
                           <a:cs typeface="Arial" pitchFamily="34" charset="-120"/>
                         </a:rPr>
-                        <a:t>9.04</a:t>
+                        <a:t>8.87</a:t>
+                      </a:r>
+                      <a:endParaRPr lang="en-US" sz="900" dirty="0">
+                        <a:latin typeface="Arial" charset="0"/>
+                        <a:ea typeface="Arial" charset="0"/>
+                        <a:cs typeface="Arial" charset="0"/>
+                      </a:endParaRPr>
+                    </a:p>
+                  </a:txBody>
+                  <a:tcPr marL="91440" marR="91440" marT="45720" marB="45720">
+                    <a:lnL w="6350" cap="flat" cmpd="sng" algn="ctr">
+                      <a:solidFill>
+                        <a:srgbClr val="CBD5E1"/>
+                      </a:solidFill>
+                      <a:prstDash val="solid"/>
+                      <a:round/>
+                      <a:headEnd type="none" w="med" len="med"/>
+                      <a:tailEnd type="none" w="med" len="med"/>
+                    </a:lnL>
+                    <a:lnR w="6350" cap="flat" cmpd="sng" algn="ctr">
+                      <a:solidFill>
+                        <a:srgbClr val="CBD5E1"/>
+                      </a:solidFill>
+                      <a:prstDash val="solid"/>
+                      <a:round/>
+                      <a:headEnd type="none" w="med" len="med"/>
+                      <a:tailEnd type="none" w="med" len="med"/>
+                    </a:lnR>
+                    <a:lnT w="6350" cap="flat" cmpd="sng" algn="ctr">
+                      <a:solidFill>
+                        <a:srgbClr val="CBD5E1"/>
+                      </a:solidFill>
+                      <a:prstDash val="solid"/>
+                      <a:round/>
+                      <a:headEnd type="none" w="med" len="med"/>
+                      <a:tailEnd type="none" w="med" len="med"/>
+                    </a:lnT>
+                    <a:lnB w="6350" cap="flat" cmpd="sng" algn="ctr">
+                      <a:solidFill>
+                        <a:srgbClr val="CBD5E1"/>
+                      </a:solidFill>
+                      <a:prstDash val="solid"/>
+                      <a:round/>
+                      <a:headEnd type="none" w="med" len="med"/>
+                      <a:tailEnd type="none" w="med" len="med"/>
+                    </a:lnB>
+                    <a:solidFill>
+                      <a:srgbClr val="E8EFF8"/>
+                    </a:solidFill>
+                  </a:tcPr>
+                </a:tc>
+              </a:tr>
+              <a:tr h="201168">
+                <a:tc>
+                  <a:txBody>
+                    <a:bodyPr/>
+                    <a:lstStyle/>
+                    <a:p>
+                      <a:pPr algn="ctr" indent="0" marL="0">
+                        <a:buNone/>
+                      </a:pPr>
+                      <a:r>
+                        <a:rPr lang="en-US" sz="900" dirty="0">
+                          <a:solidFill>
+                            <a:srgbClr val="000000"/>
+                          </a:solidFill>
+                          <a:latin typeface="Arial" pitchFamily="34" charset="0"/>
+                          <a:ea typeface="Arial" pitchFamily="34" charset="-122"/>
+                          <a:cs typeface="Arial" pitchFamily="34" charset="-120"/>
+                        </a:rPr>
+                        <a:t>じゃらん</a:t>
+                      </a:r>
+                      <a:endParaRPr lang="en-US" sz="900" dirty="0">
+                        <a:latin typeface="Arial" charset="0"/>
+                        <a:ea typeface="Arial" charset="0"/>
+                        <a:cs typeface="Arial" charset="0"/>
+                      </a:endParaRPr>
+                    </a:p>
+                  </a:txBody>
+                  <a:tcPr marL="91440" marR="91440" marT="45720" marB="45720">
+                    <a:lnL w="6350" cap="flat" cmpd="sng" algn="ctr">
+                      <a:solidFill>
+                        <a:srgbClr val="CBD5E1"/>
+                      </a:solidFill>
+                      <a:prstDash val="solid"/>
+                      <a:round/>
+                      <a:headEnd type="none" w="med" len="med"/>
+                      <a:tailEnd type="none" w="med" len="med"/>
+                    </a:lnL>
+                    <a:lnR w="6350" cap="flat" cmpd="sng" algn="ctr">
+                      <a:solidFill>
+                        <a:srgbClr val="CBD5E1"/>
+                      </a:solidFill>
+                      <a:prstDash val="solid"/>
+                      <a:round/>
+                      <a:headEnd type="none" w="med" len="med"/>
+                      <a:tailEnd type="none" w="med" len="med"/>
+                    </a:lnR>
+                    <a:lnT w="6350" cap="flat" cmpd="sng" algn="ctr">
+                      <a:solidFill>
+                        <a:srgbClr val="CBD5E1"/>
+                      </a:solidFill>
+                      <a:prstDash val="solid"/>
+                      <a:round/>
+                      <a:headEnd type="none" w="med" len="med"/>
+                      <a:tailEnd type="none" w="med" len="med"/>
+                    </a:lnT>
+                    <a:lnB w="6350" cap="flat" cmpd="sng" algn="ctr">
+                      <a:solidFill>
+                        <a:srgbClr val="CBD5E1"/>
+                      </a:solidFill>
+                      <a:prstDash val="solid"/>
+                      <a:round/>
+                      <a:headEnd type="none" w="med" len="med"/>
+                      <a:tailEnd type="none" w="med" len="med"/>
+                    </a:lnB>
+                    <a:solidFill>
+                      <a:srgbClr val="FFFFFF"/>
+                    </a:solidFill>
+                  </a:tcPr>
+                </a:tc>
+                <a:tc>
+                  <a:txBody>
+                    <a:bodyPr/>
+                    <a:lstStyle/>
+                    <a:p>
+                      <a:pPr algn="ctr" indent="0" marL="0">
+                        <a:buNone/>
+                      </a:pPr>
+                      <a:r>
+                        <a:rPr lang="en-US" sz="900" dirty="0">
+                          <a:solidFill>
+                            <a:srgbClr val="000000"/>
+                          </a:solidFill>
+                          <a:latin typeface="Arial" pitchFamily="34" charset="0"/>
+                          <a:ea typeface="Arial" pitchFamily="34" charset="-122"/>
+                          <a:cs typeface="Arial" pitchFamily="34" charset="-120"/>
+                        </a:rPr>
+                        <a:t>5</a:t>
+                      </a:r>
+                      <a:endParaRPr lang="en-US" sz="900" dirty="0">
+                        <a:latin typeface="Arial" charset="0"/>
+                        <a:ea typeface="Arial" charset="0"/>
+                        <a:cs typeface="Arial" charset="0"/>
+                      </a:endParaRPr>
+                    </a:p>
+                  </a:txBody>
+                  <a:tcPr marL="91440" marR="91440" marT="45720" marB="45720">
+                    <a:lnL w="6350" cap="flat" cmpd="sng" algn="ctr">
+                      <a:solidFill>
+                        <a:srgbClr val="CBD5E1"/>
+                      </a:solidFill>
+                      <a:prstDash val="solid"/>
+                      <a:round/>
+                      <a:headEnd type="none" w="med" len="med"/>
+                      <a:tailEnd type="none" w="med" len="med"/>
+                    </a:lnL>
+                    <a:lnR w="6350" cap="flat" cmpd="sng" algn="ctr">
+                      <a:solidFill>
+                        <a:srgbClr val="CBD5E1"/>
+                      </a:solidFill>
+                      <a:prstDash val="solid"/>
+                      <a:round/>
+                      <a:headEnd type="none" w="med" len="med"/>
+                      <a:tailEnd type="none" w="med" len="med"/>
+                    </a:lnR>
+                    <a:lnT w="6350" cap="flat" cmpd="sng" algn="ctr">
+                      <a:solidFill>
+                        <a:srgbClr val="CBD5E1"/>
+                      </a:solidFill>
+                      <a:prstDash val="solid"/>
+                      <a:round/>
+                      <a:headEnd type="none" w="med" len="med"/>
+                      <a:tailEnd type="none" w="med" len="med"/>
+                    </a:lnT>
+                    <a:lnB w="6350" cap="flat" cmpd="sng" algn="ctr">
+                      <a:solidFill>
+                        <a:srgbClr val="CBD5E1"/>
+                      </a:solidFill>
+                      <a:prstDash val="solid"/>
+                      <a:round/>
+                      <a:headEnd type="none" w="med" len="med"/>
+                      <a:tailEnd type="none" w="med" len="med"/>
+                    </a:lnB>
+                    <a:solidFill>
+                      <a:srgbClr val="FFFFFF"/>
+                    </a:solidFill>
+                  </a:tcPr>
+                </a:tc>
+                <a:tc>
+                  <a:txBody>
+                    <a:bodyPr/>
+                    <a:lstStyle/>
+                    <a:p>
+                      <a:pPr algn="ctr" indent="0" marL="0">
+                        <a:buNone/>
+                      </a:pPr>
+                      <a:r>
+                        <a:rPr lang="en-US" sz="900" dirty="0">
+                          <a:solidFill>
+                            <a:srgbClr val="000000"/>
+                          </a:solidFill>
+                          <a:latin typeface="Arial" pitchFamily="34" charset="0"/>
+                          <a:ea typeface="Arial" pitchFamily="34" charset="-122"/>
+                          <a:cs typeface="Arial" pitchFamily="34" charset="-120"/>
+                        </a:rPr>
+                        <a:t>3.8</a:t>
+                      </a:r>
+                      <a:endParaRPr lang="en-US" sz="900" dirty="0">
+                        <a:latin typeface="Arial" charset="0"/>
+                        <a:ea typeface="Arial" charset="0"/>
+                        <a:cs typeface="Arial" charset="0"/>
+                      </a:endParaRPr>
+                    </a:p>
+                  </a:txBody>
+                  <a:tcPr marL="91440" marR="91440" marT="45720" marB="45720">
+                    <a:lnL w="6350" cap="flat" cmpd="sng" algn="ctr">
+                      <a:solidFill>
+                        <a:srgbClr val="CBD5E1"/>
+                      </a:solidFill>
+                      <a:prstDash val="solid"/>
+                      <a:round/>
+                      <a:headEnd type="none" w="med" len="med"/>
+                      <a:tailEnd type="none" w="med" len="med"/>
+                    </a:lnL>
+                    <a:lnR w="6350" cap="flat" cmpd="sng" algn="ctr">
+                      <a:solidFill>
+                        <a:srgbClr val="CBD5E1"/>
+                      </a:solidFill>
+                      <a:prstDash val="solid"/>
+                      <a:round/>
+                      <a:headEnd type="none" w="med" len="med"/>
+                      <a:tailEnd type="none" w="med" len="med"/>
+                    </a:lnR>
+                    <a:lnT w="6350" cap="flat" cmpd="sng" algn="ctr">
+                      <a:solidFill>
+                        <a:srgbClr val="CBD5E1"/>
+                      </a:solidFill>
+                      <a:prstDash val="solid"/>
+                      <a:round/>
+                      <a:headEnd type="none" w="med" len="med"/>
+                      <a:tailEnd type="none" w="med" len="med"/>
+                    </a:lnT>
+                    <a:lnB w="6350" cap="flat" cmpd="sng" algn="ctr">
+                      <a:solidFill>
+                        <a:srgbClr val="CBD5E1"/>
+                      </a:solidFill>
+                      <a:prstDash val="solid"/>
+                      <a:round/>
+                      <a:headEnd type="none" w="med" len="med"/>
+                      <a:tailEnd type="none" w="med" len="med"/>
+                    </a:lnB>
+                    <a:solidFill>
+                      <a:srgbClr val="FFFFFF"/>
+                    </a:solidFill>
+                  </a:tcPr>
+                </a:tc>
+                <a:tc>
+                  <a:txBody>
+                    <a:bodyPr/>
+                    <a:lstStyle/>
+                    <a:p>
+                      <a:pPr algn="ctr" indent="0" marL="0">
+                        <a:buNone/>
+                      </a:pPr>
+                      <a:r>
+                        <a:rPr lang="en-US" sz="900" dirty="0">
+                          <a:solidFill>
+                            <a:srgbClr val="000000"/>
+                          </a:solidFill>
+                          <a:latin typeface="Arial" pitchFamily="34" charset="0"/>
+                          <a:ea typeface="Arial" pitchFamily="34" charset="-122"/>
+                          <a:cs typeface="Arial" pitchFamily="34" charset="-120"/>
+                        </a:rPr>
+                        <a:t>/5 (×2)</a:t>
+                      </a:r>
+                      <a:endParaRPr lang="en-US" sz="900" dirty="0">
+                        <a:latin typeface="Arial" charset="0"/>
+                        <a:ea typeface="Arial" charset="0"/>
+                        <a:cs typeface="Arial" charset="0"/>
+                      </a:endParaRPr>
+                    </a:p>
+                  </a:txBody>
+                  <a:tcPr marL="91440" marR="91440" marT="45720" marB="45720">
+                    <a:lnL w="6350" cap="flat" cmpd="sng" algn="ctr">
+                      <a:solidFill>
+                        <a:srgbClr val="CBD5E1"/>
+                      </a:solidFill>
+                      <a:prstDash val="solid"/>
+                      <a:round/>
+                      <a:headEnd type="none" w="med" len="med"/>
+                      <a:tailEnd type="none" w="med" len="med"/>
+                    </a:lnL>
+                    <a:lnR w="6350" cap="flat" cmpd="sng" algn="ctr">
+                      <a:solidFill>
+                        <a:srgbClr val="CBD5E1"/>
+                      </a:solidFill>
+                      <a:prstDash val="solid"/>
+                      <a:round/>
+                      <a:headEnd type="none" w="med" len="med"/>
+                      <a:tailEnd type="none" w="med" len="med"/>
+                    </a:lnR>
+                    <a:lnT w="6350" cap="flat" cmpd="sng" algn="ctr">
+                      <a:solidFill>
+                        <a:srgbClr val="CBD5E1"/>
+                      </a:solidFill>
+                      <a:prstDash val="solid"/>
+                      <a:round/>
+                      <a:headEnd type="none" w="med" len="med"/>
+                      <a:tailEnd type="none" w="med" len="med"/>
+                    </a:lnT>
+                    <a:lnB w="6350" cap="flat" cmpd="sng" algn="ctr">
+                      <a:solidFill>
+                        <a:srgbClr val="CBD5E1"/>
+                      </a:solidFill>
+                      <a:prstDash val="solid"/>
+                      <a:round/>
+                      <a:headEnd type="none" w="med" len="med"/>
+                      <a:tailEnd type="none" w="med" len="med"/>
+                    </a:lnB>
+                    <a:solidFill>
+                      <a:srgbClr val="FFFFFF"/>
+                    </a:solidFill>
+                  </a:tcPr>
+                </a:tc>
+                <a:tc>
+                  <a:txBody>
+                    <a:bodyPr/>
+                    <a:lstStyle/>
+                    <a:p>
+                      <a:pPr algn="ctr" indent="0" marL="0">
+                        <a:buNone/>
+                      </a:pPr>
+                      <a:r>
+                        <a:rPr lang="en-US" sz="900" dirty="0">
+                          <a:solidFill>
+                            <a:srgbClr val="000000"/>
+                          </a:solidFill>
+                          <a:latin typeface="Arial" pitchFamily="34" charset="0"/>
+                          <a:ea typeface="Arial" pitchFamily="34" charset="-122"/>
+                          <a:cs typeface="Arial" pitchFamily="34" charset="-120"/>
+                        </a:rPr>
+                        <a:t>7.6</a:t>
+                      </a:r>
+                      <a:endParaRPr lang="en-US" sz="900" dirty="0">
+                        <a:latin typeface="Arial" charset="0"/>
+                        <a:ea typeface="Arial" charset="0"/>
+                        <a:cs typeface="Arial" charset="0"/>
+                      </a:endParaRPr>
+                    </a:p>
+                  </a:txBody>
+                  <a:tcPr marL="91440" marR="91440" marT="45720" marB="45720">
+                    <a:lnL w="6350" cap="flat" cmpd="sng" algn="ctr">
+                      <a:solidFill>
+                        <a:srgbClr val="CBD5E1"/>
+                      </a:solidFill>
+                      <a:prstDash val="solid"/>
+                      <a:round/>
+                      <a:headEnd type="none" w="med" len="med"/>
+                      <a:tailEnd type="none" w="med" len="med"/>
+                    </a:lnL>
+                    <a:lnR w="6350" cap="flat" cmpd="sng" algn="ctr">
+                      <a:solidFill>
+                        <a:srgbClr val="CBD5E1"/>
+                      </a:solidFill>
+                      <a:prstDash val="solid"/>
+                      <a:round/>
+                      <a:headEnd type="none" w="med" len="med"/>
+                      <a:tailEnd type="none" w="med" len="med"/>
+                    </a:lnR>
+                    <a:lnT w="6350" cap="flat" cmpd="sng" algn="ctr">
+                      <a:solidFill>
+                        <a:srgbClr val="CBD5E1"/>
+                      </a:solidFill>
+                      <a:prstDash val="solid"/>
+                      <a:round/>
+                      <a:headEnd type="none" w="med" len="med"/>
+                      <a:tailEnd type="none" w="med" len="med"/>
+                    </a:lnT>
+                    <a:lnB w="6350" cap="flat" cmpd="sng" algn="ctr">
+                      <a:solidFill>
+                        <a:srgbClr val="CBD5E1"/>
+                      </a:solidFill>
+                      <a:prstDash val="solid"/>
+                      <a:round/>
+                      <a:headEnd type="none" w="med" len="med"/>
+                      <a:tailEnd type="none" w="med" len="med"/>
+                    </a:lnB>
+                    <a:solidFill>
+                      <a:srgbClr val="FFFFFF"/>
+                    </a:solidFill>
+                  </a:tcPr>
+                </a:tc>
+              </a:tr>
+              <a:tr h="201168">
+                <a:tc>
+                  <a:txBody>
+                    <a:bodyPr/>
+                    <a:lstStyle/>
+                    <a:p>
+                      <a:pPr algn="ctr" indent="0" marL="0">
+                        <a:buNone/>
+                      </a:pPr>
+                      <a:r>
+                        <a:rPr lang="en-US" sz="900" dirty="0">
+                          <a:solidFill>
+                            <a:srgbClr val="000000"/>
+                          </a:solidFill>
+                          <a:latin typeface="Arial" pitchFamily="34" charset="0"/>
+                          <a:ea typeface="Arial" pitchFamily="34" charset="-122"/>
+                          <a:cs typeface="Arial" pitchFamily="34" charset="-120"/>
+                        </a:rPr>
+                        <a:t>楽天トラベル</a:t>
+                      </a:r>
+                      <a:endParaRPr lang="en-US" sz="900" dirty="0">
+                        <a:latin typeface="Arial" charset="0"/>
+                        <a:ea typeface="Arial" charset="0"/>
+                        <a:cs typeface="Arial" charset="0"/>
+                      </a:endParaRPr>
+                    </a:p>
+                  </a:txBody>
+                  <a:tcPr marL="91440" marR="91440" marT="45720" marB="45720">
+                    <a:lnL w="6350" cap="flat" cmpd="sng" algn="ctr">
+                      <a:solidFill>
+                        <a:srgbClr val="CBD5E1"/>
+                      </a:solidFill>
+                      <a:prstDash val="solid"/>
+                      <a:round/>
+                      <a:headEnd type="none" w="med" len="med"/>
+                      <a:tailEnd type="none" w="med" len="med"/>
+                    </a:lnL>
+                    <a:lnR w="6350" cap="flat" cmpd="sng" algn="ctr">
+                      <a:solidFill>
+                        <a:srgbClr val="CBD5E1"/>
+                      </a:solidFill>
+                      <a:prstDash val="solid"/>
+                      <a:round/>
+                      <a:headEnd type="none" w="med" len="med"/>
+                      <a:tailEnd type="none" w="med" len="med"/>
+                    </a:lnR>
+                    <a:lnT w="6350" cap="flat" cmpd="sng" algn="ctr">
+                      <a:solidFill>
+                        <a:srgbClr val="CBD5E1"/>
+                      </a:solidFill>
+                      <a:prstDash val="solid"/>
+                      <a:round/>
+                      <a:headEnd type="none" w="med" len="med"/>
+                      <a:tailEnd type="none" w="med" len="med"/>
+                    </a:lnT>
+                    <a:lnB w="6350" cap="flat" cmpd="sng" algn="ctr">
+                      <a:solidFill>
+                        <a:srgbClr val="CBD5E1"/>
+                      </a:solidFill>
+                      <a:prstDash val="solid"/>
+                      <a:round/>
+                      <a:headEnd type="none" w="med" len="med"/>
+                      <a:tailEnd type="none" w="med" len="med"/>
+                    </a:lnB>
+                    <a:solidFill>
+                      <a:srgbClr val="E8EFF8"/>
+                    </a:solidFill>
+                  </a:tcPr>
+                </a:tc>
+                <a:tc>
+                  <a:txBody>
+                    <a:bodyPr/>
+                    <a:lstStyle/>
+                    <a:p>
+                      <a:pPr algn="ctr" indent="0" marL="0">
+                        <a:buNone/>
+                      </a:pPr>
+                      <a:r>
+                        <a:rPr lang="en-US" sz="900" dirty="0">
+                          <a:solidFill>
+                            <a:srgbClr val="000000"/>
+                          </a:solidFill>
+                          <a:latin typeface="Arial" pitchFamily="34" charset="0"/>
+                          <a:ea typeface="Arial" pitchFamily="34" charset="-122"/>
+                          <a:cs typeface="Arial" pitchFamily="34" charset="-120"/>
+                        </a:rPr>
+                        <a:t>4</a:t>
+                      </a:r>
+                      <a:endParaRPr lang="en-US" sz="900" dirty="0">
+                        <a:latin typeface="Arial" charset="0"/>
+                        <a:ea typeface="Arial" charset="0"/>
+                        <a:cs typeface="Arial" charset="0"/>
+                      </a:endParaRPr>
+                    </a:p>
+                  </a:txBody>
+                  <a:tcPr marL="91440" marR="91440" marT="45720" marB="45720">
+                    <a:lnL w="6350" cap="flat" cmpd="sng" algn="ctr">
+                      <a:solidFill>
+                        <a:srgbClr val="CBD5E1"/>
+                      </a:solidFill>
+                      <a:prstDash val="solid"/>
+                      <a:round/>
+                      <a:headEnd type="none" w="med" len="med"/>
+                      <a:tailEnd type="none" w="med" len="med"/>
+                    </a:lnL>
+                    <a:lnR w="6350" cap="flat" cmpd="sng" algn="ctr">
+                      <a:solidFill>
+                        <a:srgbClr val="CBD5E1"/>
+                      </a:solidFill>
+                      <a:prstDash val="solid"/>
+                      <a:round/>
+                      <a:headEnd type="none" w="med" len="med"/>
+                      <a:tailEnd type="none" w="med" len="med"/>
+                    </a:lnR>
+                    <a:lnT w="6350" cap="flat" cmpd="sng" algn="ctr">
+                      <a:solidFill>
+                        <a:srgbClr val="CBD5E1"/>
+                      </a:solidFill>
+                      <a:prstDash val="solid"/>
+                      <a:round/>
+                      <a:headEnd type="none" w="med" len="med"/>
+                      <a:tailEnd type="none" w="med" len="med"/>
+                    </a:lnT>
+                    <a:lnB w="6350" cap="flat" cmpd="sng" algn="ctr">
+                      <a:solidFill>
+                        <a:srgbClr val="CBD5E1"/>
+                      </a:solidFill>
+                      <a:prstDash val="solid"/>
+                      <a:round/>
+                      <a:headEnd type="none" w="med" len="med"/>
+                      <a:tailEnd type="none" w="med" len="med"/>
+                    </a:lnB>
+                    <a:solidFill>
+                      <a:srgbClr val="E8EFF8"/>
+                    </a:solidFill>
+                  </a:tcPr>
+                </a:tc>
+                <a:tc>
+                  <a:txBody>
+                    <a:bodyPr/>
+                    <a:lstStyle/>
+                    <a:p>
+                      <a:pPr algn="ctr" indent="0" marL="0">
+                        <a:buNone/>
+                      </a:pPr>
+                      <a:r>
+                        <a:rPr lang="en-US" sz="900" dirty="0">
+                          <a:solidFill>
+                            <a:srgbClr val="000000"/>
+                          </a:solidFill>
+                          <a:latin typeface="Arial" pitchFamily="34" charset="0"/>
+                          <a:ea typeface="Arial" pitchFamily="34" charset="-122"/>
+                          <a:cs typeface="Arial" pitchFamily="34" charset="-120"/>
+                        </a:rPr>
+                        <a:t>3.75</a:t>
+                      </a:r>
+                      <a:endParaRPr lang="en-US" sz="900" dirty="0">
+                        <a:latin typeface="Arial" charset="0"/>
+                        <a:ea typeface="Arial" charset="0"/>
+                        <a:cs typeface="Arial" charset="0"/>
+                      </a:endParaRPr>
+                    </a:p>
+                  </a:txBody>
+                  <a:tcPr marL="91440" marR="91440" marT="45720" marB="45720">
+                    <a:lnL w="6350" cap="flat" cmpd="sng" algn="ctr">
+                      <a:solidFill>
+                        <a:srgbClr val="CBD5E1"/>
+                      </a:solidFill>
+                      <a:prstDash val="solid"/>
+                      <a:round/>
+                      <a:headEnd type="none" w="med" len="med"/>
+                      <a:tailEnd type="none" w="med" len="med"/>
+                    </a:lnL>
+                    <a:lnR w="6350" cap="flat" cmpd="sng" algn="ctr">
+                      <a:solidFill>
+                        <a:srgbClr val="CBD5E1"/>
+                      </a:solidFill>
+                      <a:prstDash val="solid"/>
+                      <a:round/>
+                      <a:headEnd type="none" w="med" len="med"/>
+                      <a:tailEnd type="none" w="med" len="med"/>
+                    </a:lnR>
+                    <a:lnT w="6350" cap="flat" cmpd="sng" algn="ctr">
+                      <a:solidFill>
+                        <a:srgbClr val="CBD5E1"/>
+                      </a:solidFill>
+                      <a:prstDash val="solid"/>
+                      <a:round/>
+                      <a:headEnd type="none" w="med" len="med"/>
+                      <a:tailEnd type="none" w="med" len="med"/>
+                    </a:lnT>
+                    <a:lnB w="6350" cap="flat" cmpd="sng" algn="ctr">
+                      <a:solidFill>
+                        <a:srgbClr val="CBD5E1"/>
+                      </a:solidFill>
+                      <a:prstDash val="solid"/>
+                      <a:round/>
+                      <a:headEnd type="none" w="med" len="med"/>
+                      <a:tailEnd type="none" w="med" len="med"/>
+                    </a:lnB>
+                    <a:solidFill>
+                      <a:srgbClr val="E8EFF8"/>
+                    </a:solidFill>
+                  </a:tcPr>
+                </a:tc>
+                <a:tc>
+                  <a:txBody>
+                    <a:bodyPr/>
+                    <a:lstStyle/>
+                    <a:p>
+                      <a:pPr algn="ctr" indent="0" marL="0">
+                        <a:buNone/>
+                      </a:pPr>
+                      <a:r>
+                        <a:rPr lang="en-US" sz="900" dirty="0">
+                          <a:solidFill>
+                            <a:srgbClr val="000000"/>
+                          </a:solidFill>
+                          <a:latin typeface="Arial" pitchFamily="34" charset="0"/>
+                          <a:ea typeface="Arial" pitchFamily="34" charset="-122"/>
+                          <a:cs typeface="Arial" pitchFamily="34" charset="-120"/>
+                        </a:rPr>
+                        <a:t>/5 (×2)</a:t>
+                      </a:r>
+                      <a:endParaRPr lang="en-US" sz="900" dirty="0">
+                        <a:latin typeface="Arial" charset="0"/>
+                        <a:ea typeface="Arial" charset="0"/>
+                        <a:cs typeface="Arial" charset="0"/>
+                      </a:endParaRPr>
+                    </a:p>
+                  </a:txBody>
+                  <a:tcPr marL="91440" marR="91440" marT="45720" marB="45720">
+                    <a:lnL w="6350" cap="flat" cmpd="sng" algn="ctr">
+                      <a:solidFill>
+                        <a:srgbClr val="CBD5E1"/>
+                      </a:solidFill>
+                      <a:prstDash val="solid"/>
+                      <a:round/>
+                      <a:headEnd type="none" w="med" len="med"/>
+                      <a:tailEnd type="none" w="med" len="med"/>
+                    </a:lnL>
+                    <a:lnR w="6350" cap="flat" cmpd="sng" algn="ctr">
+                      <a:solidFill>
+                        <a:srgbClr val="CBD5E1"/>
+                      </a:solidFill>
+                      <a:prstDash val="solid"/>
+                      <a:round/>
+                      <a:headEnd type="none" w="med" len="med"/>
+                      <a:tailEnd type="none" w="med" len="med"/>
+                    </a:lnR>
+                    <a:lnT w="6350" cap="flat" cmpd="sng" algn="ctr">
+                      <a:solidFill>
+                        <a:srgbClr val="CBD5E1"/>
+                      </a:solidFill>
+                      <a:prstDash val="solid"/>
+                      <a:round/>
+                      <a:headEnd type="none" w="med" len="med"/>
+                      <a:tailEnd type="none" w="med" len="med"/>
+                    </a:lnT>
+                    <a:lnB w="6350" cap="flat" cmpd="sng" algn="ctr">
+                      <a:solidFill>
+                        <a:srgbClr val="CBD5E1"/>
+                      </a:solidFill>
+                      <a:prstDash val="solid"/>
+                      <a:round/>
+                      <a:headEnd type="none" w="med" len="med"/>
+                      <a:tailEnd type="none" w="med" len="med"/>
+                    </a:lnB>
+                    <a:solidFill>
+                      <a:srgbClr val="E8EFF8"/>
+                    </a:solidFill>
+                  </a:tcPr>
+                </a:tc>
+                <a:tc>
+                  <a:txBody>
+                    <a:bodyPr/>
+                    <a:lstStyle/>
+                    <a:p>
+                      <a:pPr algn="ctr" indent="0" marL="0">
+                        <a:buNone/>
+                      </a:pPr>
+                      <a:r>
+                        <a:rPr lang="en-US" sz="900" dirty="0">
+                          <a:solidFill>
+                            <a:srgbClr val="000000"/>
+                          </a:solidFill>
+                          <a:latin typeface="Arial" pitchFamily="34" charset="0"/>
+                          <a:ea typeface="Arial" pitchFamily="34" charset="-122"/>
+                          <a:cs typeface="Arial" pitchFamily="34" charset="-120"/>
+                        </a:rPr>
+                        <a:t>7.5</a:t>
                       </a:r>
                       <a:endParaRPr lang="en-US" sz="900" dirty="0">
                         <a:latin typeface="Arial" charset="0"/>
@@ -8264,7 +8931,7 @@
                           <a:ea typeface="Arial" pitchFamily="34" charset="-122"/>
                           <a:cs typeface="Arial" pitchFamily="34" charset="-120"/>
                         </a:rPr>
-                        <a:t>39</a:t>
+                        <a:t>22</a:t>
                       </a:r>
                       <a:endParaRPr lang="en-US" sz="900" dirty="0">
                         <a:latin typeface="Arial" charset="0"/>
@@ -8332,7 +8999,7 @@
                           <a:ea typeface="Arial" pitchFamily="34" charset="-122"/>
                           <a:cs typeface="Arial" pitchFamily="34" charset="-120"/>
                         </a:rPr>
-                        <a:t>6.97</a:t>
+                        <a:t>7.14</a:t>
                       </a:r>
                       <a:endParaRPr lang="en-US" sz="900" dirty="0">
                         <a:latin typeface="Arial" charset="0"/>
@@ -8468,7 +9135,7 @@
                           <a:ea typeface="Arial" pitchFamily="34" charset="-122"/>
                           <a:cs typeface="Arial" pitchFamily="34" charset="-120"/>
                         </a:rPr>
-                        <a:t>6.97</a:t>
+                        <a:t>7.14</a:t>
                       </a:r>
                       <a:endParaRPr lang="en-US" sz="900" dirty="0">
                         <a:latin typeface="Arial" charset="0"/>
@@ -8606,7 +9273,7 @@
                           <a:ea typeface="Arial" pitchFamily="34" charset="-122"/>
                           <a:cs typeface="Arial" pitchFamily="34" charset="-120"/>
                         </a:rPr>
-                        <a:t>33</a:t>
+                        <a:t>13</a:t>
                       </a:r>
                       <a:endParaRPr lang="en-US" sz="900" dirty="0">
                         <a:latin typeface="Arial" charset="0"/>
@@ -8674,7 +9341,7 @@
                           <a:ea typeface="Arial" pitchFamily="34" charset="-122"/>
                           <a:cs typeface="Arial" pitchFamily="34" charset="-120"/>
                         </a:rPr>
-                        <a:t>3.48</a:t>
+                        <a:t>3.23</a:t>
                       </a:r>
                       <a:endParaRPr lang="en-US" sz="900" dirty="0">
                         <a:latin typeface="Arial" charset="0"/>
@@ -8810,691 +9477,7 @@
                           <a:ea typeface="Arial" pitchFamily="34" charset="-122"/>
                           <a:cs typeface="Arial" pitchFamily="34" charset="-120"/>
                         </a:rPr>
-                        <a:t>6.97</a:t>
-                      </a:r>
-                      <a:endParaRPr lang="en-US" sz="900" dirty="0">
-                        <a:latin typeface="Arial" charset="0"/>
-                        <a:ea typeface="Arial" charset="0"/>
-                        <a:cs typeface="Arial" charset="0"/>
-                      </a:endParaRPr>
-                    </a:p>
-                  </a:txBody>
-                  <a:tcPr marL="91440" marR="91440" marT="45720" marB="45720">
-                    <a:lnL w="6350" cap="flat" cmpd="sng" algn="ctr">
-                      <a:solidFill>
-                        <a:srgbClr val="CBD5E1"/>
-                      </a:solidFill>
-                      <a:prstDash val="solid"/>
-                      <a:round/>
-                      <a:headEnd type="none" w="med" len="med"/>
-                      <a:tailEnd type="none" w="med" len="med"/>
-                    </a:lnL>
-                    <a:lnR w="6350" cap="flat" cmpd="sng" algn="ctr">
-                      <a:solidFill>
-                        <a:srgbClr val="CBD5E1"/>
-                      </a:solidFill>
-                      <a:prstDash val="solid"/>
-                      <a:round/>
-                      <a:headEnd type="none" w="med" len="med"/>
-                      <a:tailEnd type="none" w="med" len="med"/>
-                    </a:lnR>
-                    <a:lnT w="6350" cap="flat" cmpd="sng" algn="ctr">
-                      <a:solidFill>
-                        <a:srgbClr val="CBD5E1"/>
-                      </a:solidFill>
-                      <a:prstDash val="solid"/>
-                      <a:round/>
-                      <a:headEnd type="none" w="med" len="med"/>
-                      <a:tailEnd type="none" w="med" len="med"/>
-                    </a:lnT>
-                    <a:lnB w="6350" cap="flat" cmpd="sng" algn="ctr">
-                      <a:solidFill>
-                        <a:srgbClr val="CBD5E1"/>
-                      </a:solidFill>
-                      <a:prstDash val="solid"/>
-                      <a:round/>
-                      <a:headEnd type="none" w="med" len="med"/>
-                      <a:tailEnd type="none" w="med" len="med"/>
-                    </a:lnB>
-                    <a:solidFill>
-                      <a:srgbClr val="E8EFF8"/>
-                    </a:solidFill>
-                  </a:tcPr>
-                </a:tc>
-              </a:tr>
-              <a:tr h="201168">
-                <a:tc>
-                  <a:txBody>
-                    <a:bodyPr/>
-                    <a:lstStyle/>
-                    <a:p>
-                      <a:pPr algn="ctr" indent="0" marL="0">
-                        <a:buNone/>
-                      </a:pPr>
-                      <a:r>
-                        <a:rPr lang="en-US" sz="900" dirty="0">
-                          <a:solidFill>
-                            <a:srgbClr val="000000"/>
-                          </a:solidFill>
-                          <a:latin typeface="Arial" pitchFamily="34" charset="0"/>
-                          <a:ea typeface="Arial" pitchFamily="34" charset="-122"/>
-                          <a:cs typeface="Arial" pitchFamily="34" charset="-120"/>
-                        </a:rPr>
-                        <a:t>じゃらん</a:t>
-                      </a:r>
-                      <a:endParaRPr lang="en-US" sz="900" dirty="0">
-                        <a:latin typeface="Arial" charset="0"/>
-                        <a:ea typeface="Arial" charset="0"/>
-                        <a:cs typeface="Arial" charset="0"/>
-                      </a:endParaRPr>
-                    </a:p>
-                  </a:txBody>
-                  <a:tcPr marL="91440" marR="91440" marT="45720" marB="45720">
-                    <a:lnL w="6350" cap="flat" cmpd="sng" algn="ctr">
-                      <a:solidFill>
-                        <a:srgbClr val="CBD5E1"/>
-                      </a:solidFill>
-                      <a:prstDash val="solid"/>
-                      <a:round/>
-                      <a:headEnd type="none" w="med" len="med"/>
-                      <a:tailEnd type="none" w="med" len="med"/>
-                    </a:lnL>
-                    <a:lnR w="6350" cap="flat" cmpd="sng" algn="ctr">
-                      <a:solidFill>
-                        <a:srgbClr val="CBD5E1"/>
-                      </a:solidFill>
-                      <a:prstDash val="solid"/>
-                      <a:round/>
-                      <a:headEnd type="none" w="med" len="med"/>
-                      <a:tailEnd type="none" w="med" len="med"/>
-                    </a:lnR>
-                    <a:lnT w="6350" cap="flat" cmpd="sng" algn="ctr">
-                      <a:solidFill>
-                        <a:srgbClr val="CBD5E1"/>
-                      </a:solidFill>
-                      <a:prstDash val="solid"/>
-                      <a:round/>
-                      <a:headEnd type="none" w="med" len="med"/>
-                      <a:tailEnd type="none" w="med" len="med"/>
-                    </a:lnT>
-                    <a:lnB w="6350" cap="flat" cmpd="sng" algn="ctr">
-                      <a:solidFill>
-                        <a:srgbClr val="CBD5E1"/>
-                      </a:solidFill>
-                      <a:prstDash val="solid"/>
-                      <a:round/>
-                      <a:headEnd type="none" w="med" len="med"/>
-                      <a:tailEnd type="none" w="med" len="med"/>
-                    </a:lnB>
-                    <a:solidFill>
-                      <a:srgbClr val="FFFFFF"/>
-                    </a:solidFill>
-                  </a:tcPr>
-                </a:tc>
-                <a:tc>
-                  <a:txBody>
-                    <a:bodyPr/>
-                    <a:lstStyle/>
-                    <a:p>
-                      <a:pPr algn="ctr" indent="0" marL="0">
-                        <a:buNone/>
-                      </a:pPr>
-                      <a:r>
-                        <a:rPr lang="en-US" sz="900" dirty="0">
-                          <a:solidFill>
-                            <a:srgbClr val="000000"/>
-                          </a:solidFill>
-                          <a:latin typeface="Arial" pitchFamily="34" charset="0"/>
-                          <a:ea typeface="Arial" pitchFamily="34" charset="-122"/>
-                          <a:cs typeface="Arial" pitchFamily="34" charset="-120"/>
-                        </a:rPr>
-                        <a:t>9</a:t>
-                      </a:r>
-                      <a:endParaRPr lang="en-US" sz="900" dirty="0">
-                        <a:latin typeface="Arial" charset="0"/>
-                        <a:ea typeface="Arial" charset="0"/>
-                        <a:cs typeface="Arial" charset="0"/>
-                      </a:endParaRPr>
-                    </a:p>
-                  </a:txBody>
-                  <a:tcPr marL="91440" marR="91440" marT="45720" marB="45720">
-                    <a:lnL w="6350" cap="flat" cmpd="sng" algn="ctr">
-                      <a:solidFill>
-                        <a:srgbClr val="CBD5E1"/>
-                      </a:solidFill>
-                      <a:prstDash val="solid"/>
-                      <a:round/>
-                      <a:headEnd type="none" w="med" len="med"/>
-                      <a:tailEnd type="none" w="med" len="med"/>
-                    </a:lnL>
-                    <a:lnR w="6350" cap="flat" cmpd="sng" algn="ctr">
-                      <a:solidFill>
-                        <a:srgbClr val="CBD5E1"/>
-                      </a:solidFill>
-                      <a:prstDash val="solid"/>
-                      <a:round/>
-                      <a:headEnd type="none" w="med" len="med"/>
-                      <a:tailEnd type="none" w="med" len="med"/>
-                    </a:lnR>
-                    <a:lnT w="6350" cap="flat" cmpd="sng" algn="ctr">
-                      <a:solidFill>
-                        <a:srgbClr val="CBD5E1"/>
-                      </a:solidFill>
-                      <a:prstDash val="solid"/>
-                      <a:round/>
-                      <a:headEnd type="none" w="med" len="med"/>
-                      <a:tailEnd type="none" w="med" len="med"/>
-                    </a:lnT>
-                    <a:lnB w="6350" cap="flat" cmpd="sng" algn="ctr">
-                      <a:solidFill>
-                        <a:srgbClr val="CBD5E1"/>
-                      </a:solidFill>
-                      <a:prstDash val="solid"/>
-                      <a:round/>
-                      <a:headEnd type="none" w="med" len="med"/>
-                      <a:tailEnd type="none" w="med" len="med"/>
-                    </a:lnB>
-                    <a:solidFill>
-                      <a:srgbClr val="FFFFFF"/>
-                    </a:solidFill>
-                  </a:tcPr>
-                </a:tc>
-                <a:tc>
-                  <a:txBody>
-                    <a:bodyPr/>
-                    <a:lstStyle/>
-                    <a:p>
-                      <a:pPr algn="ctr" indent="0" marL="0">
-                        <a:buNone/>
-                      </a:pPr>
-                      <a:r>
-                        <a:rPr lang="en-US" sz="900" dirty="0">
-                          <a:solidFill>
-                            <a:srgbClr val="000000"/>
-                          </a:solidFill>
-                          <a:latin typeface="Arial" pitchFamily="34" charset="0"/>
-                          <a:ea typeface="Arial" pitchFamily="34" charset="-122"/>
-                          <a:cs typeface="Arial" pitchFamily="34" charset="-120"/>
-                        </a:rPr>
-                        <a:t>3.44</a:t>
-                      </a:r>
-                      <a:endParaRPr lang="en-US" sz="900" dirty="0">
-                        <a:latin typeface="Arial" charset="0"/>
-                        <a:ea typeface="Arial" charset="0"/>
-                        <a:cs typeface="Arial" charset="0"/>
-                      </a:endParaRPr>
-                    </a:p>
-                  </a:txBody>
-                  <a:tcPr marL="91440" marR="91440" marT="45720" marB="45720">
-                    <a:lnL w="6350" cap="flat" cmpd="sng" algn="ctr">
-                      <a:solidFill>
-                        <a:srgbClr val="CBD5E1"/>
-                      </a:solidFill>
-                      <a:prstDash val="solid"/>
-                      <a:round/>
-                      <a:headEnd type="none" w="med" len="med"/>
-                      <a:tailEnd type="none" w="med" len="med"/>
-                    </a:lnL>
-                    <a:lnR w="6350" cap="flat" cmpd="sng" algn="ctr">
-                      <a:solidFill>
-                        <a:srgbClr val="CBD5E1"/>
-                      </a:solidFill>
-                      <a:prstDash val="solid"/>
-                      <a:round/>
-                      <a:headEnd type="none" w="med" len="med"/>
-                      <a:tailEnd type="none" w="med" len="med"/>
-                    </a:lnR>
-                    <a:lnT w="6350" cap="flat" cmpd="sng" algn="ctr">
-                      <a:solidFill>
-                        <a:srgbClr val="CBD5E1"/>
-                      </a:solidFill>
-                      <a:prstDash val="solid"/>
-                      <a:round/>
-                      <a:headEnd type="none" w="med" len="med"/>
-                      <a:tailEnd type="none" w="med" len="med"/>
-                    </a:lnT>
-                    <a:lnB w="6350" cap="flat" cmpd="sng" algn="ctr">
-                      <a:solidFill>
-                        <a:srgbClr val="CBD5E1"/>
-                      </a:solidFill>
-                      <a:prstDash val="solid"/>
-                      <a:round/>
-                      <a:headEnd type="none" w="med" len="med"/>
-                      <a:tailEnd type="none" w="med" len="med"/>
-                    </a:lnB>
-                    <a:solidFill>
-                      <a:srgbClr val="FFFFFF"/>
-                    </a:solidFill>
-                  </a:tcPr>
-                </a:tc>
-                <a:tc>
-                  <a:txBody>
-                    <a:bodyPr/>
-                    <a:lstStyle/>
-                    <a:p>
-                      <a:pPr algn="ctr" indent="0" marL="0">
-                        <a:buNone/>
-                      </a:pPr>
-                      <a:r>
-                        <a:rPr lang="en-US" sz="900" dirty="0">
-                          <a:solidFill>
-                            <a:srgbClr val="000000"/>
-                          </a:solidFill>
-                          <a:latin typeface="Arial" pitchFamily="34" charset="0"/>
-                          <a:ea typeface="Arial" pitchFamily="34" charset="-122"/>
-                          <a:cs typeface="Arial" pitchFamily="34" charset="-120"/>
-                        </a:rPr>
-                        <a:t>/5 (×2)</a:t>
-                      </a:r>
-                      <a:endParaRPr lang="en-US" sz="900" dirty="0">
-                        <a:latin typeface="Arial" charset="0"/>
-                        <a:ea typeface="Arial" charset="0"/>
-                        <a:cs typeface="Arial" charset="0"/>
-                      </a:endParaRPr>
-                    </a:p>
-                  </a:txBody>
-                  <a:tcPr marL="91440" marR="91440" marT="45720" marB="45720">
-                    <a:lnL w="6350" cap="flat" cmpd="sng" algn="ctr">
-                      <a:solidFill>
-                        <a:srgbClr val="CBD5E1"/>
-                      </a:solidFill>
-                      <a:prstDash val="solid"/>
-                      <a:round/>
-                      <a:headEnd type="none" w="med" len="med"/>
-                      <a:tailEnd type="none" w="med" len="med"/>
-                    </a:lnL>
-                    <a:lnR w="6350" cap="flat" cmpd="sng" algn="ctr">
-                      <a:solidFill>
-                        <a:srgbClr val="CBD5E1"/>
-                      </a:solidFill>
-                      <a:prstDash val="solid"/>
-                      <a:round/>
-                      <a:headEnd type="none" w="med" len="med"/>
-                      <a:tailEnd type="none" w="med" len="med"/>
-                    </a:lnR>
-                    <a:lnT w="6350" cap="flat" cmpd="sng" algn="ctr">
-                      <a:solidFill>
-                        <a:srgbClr val="CBD5E1"/>
-                      </a:solidFill>
-                      <a:prstDash val="solid"/>
-                      <a:round/>
-                      <a:headEnd type="none" w="med" len="med"/>
-                      <a:tailEnd type="none" w="med" len="med"/>
-                    </a:lnT>
-                    <a:lnB w="6350" cap="flat" cmpd="sng" algn="ctr">
-                      <a:solidFill>
-                        <a:srgbClr val="CBD5E1"/>
-                      </a:solidFill>
-                      <a:prstDash val="solid"/>
-                      <a:round/>
-                      <a:headEnd type="none" w="med" len="med"/>
-                      <a:tailEnd type="none" w="med" len="med"/>
-                    </a:lnB>
-                    <a:solidFill>
-                      <a:srgbClr val="FFFFFF"/>
-                    </a:solidFill>
-                  </a:tcPr>
-                </a:tc>
-                <a:tc>
-                  <a:txBody>
-                    <a:bodyPr/>
-                    <a:lstStyle/>
-                    <a:p>
-                      <a:pPr algn="ctr" indent="0" marL="0">
-                        <a:buNone/>
-                      </a:pPr>
-                      <a:r>
-                        <a:rPr lang="en-US" sz="900" dirty="0">
-                          <a:solidFill>
-                            <a:srgbClr val="000000"/>
-                          </a:solidFill>
-                          <a:latin typeface="Arial" pitchFamily="34" charset="0"/>
-                          <a:ea typeface="Arial" pitchFamily="34" charset="-122"/>
-                          <a:cs typeface="Arial" pitchFamily="34" charset="-120"/>
-                        </a:rPr>
-                        <a:t>6.89</a:t>
-                      </a:r>
-                      <a:endParaRPr lang="en-US" sz="900" dirty="0">
-                        <a:latin typeface="Arial" charset="0"/>
-                        <a:ea typeface="Arial" charset="0"/>
-                        <a:cs typeface="Arial" charset="0"/>
-                      </a:endParaRPr>
-                    </a:p>
-                  </a:txBody>
-                  <a:tcPr marL="91440" marR="91440" marT="45720" marB="45720">
-                    <a:lnL w="6350" cap="flat" cmpd="sng" algn="ctr">
-                      <a:solidFill>
-                        <a:srgbClr val="CBD5E1"/>
-                      </a:solidFill>
-                      <a:prstDash val="solid"/>
-                      <a:round/>
-                      <a:headEnd type="none" w="med" len="med"/>
-                      <a:tailEnd type="none" w="med" len="med"/>
-                    </a:lnL>
-                    <a:lnR w="6350" cap="flat" cmpd="sng" algn="ctr">
-                      <a:solidFill>
-                        <a:srgbClr val="CBD5E1"/>
-                      </a:solidFill>
-                      <a:prstDash val="solid"/>
-                      <a:round/>
-                      <a:headEnd type="none" w="med" len="med"/>
-                      <a:tailEnd type="none" w="med" len="med"/>
-                    </a:lnR>
-                    <a:lnT w="6350" cap="flat" cmpd="sng" algn="ctr">
-                      <a:solidFill>
-                        <a:srgbClr val="CBD5E1"/>
-                      </a:solidFill>
-                      <a:prstDash val="solid"/>
-                      <a:round/>
-                      <a:headEnd type="none" w="med" len="med"/>
-                      <a:tailEnd type="none" w="med" len="med"/>
-                    </a:lnT>
-                    <a:lnB w="6350" cap="flat" cmpd="sng" algn="ctr">
-                      <a:solidFill>
-                        <a:srgbClr val="CBD5E1"/>
-                      </a:solidFill>
-                      <a:prstDash val="solid"/>
-                      <a:round/>
-                      <a:headEnd type="none" w="med" len="med"/>
-                      <a:tailEnd type="none" w="med" len="med"/>
-                    </a:lnB>
-                    <a:solidFill>
-                      <a:srgbClr val="FFFFFF"/>
-                    </a:solidFill>
-                  </a:tcPr>
-                </a:tc>
-              </a:tr>
-              <a:tr h="201168">
-                <a:tc>
-                  <a:txBody>
-                    <a:bodyPr/>
-                    <a:lstStyle/>
-                    <a:p>
-                      <a:pPr algn="ctr" indent="0" marL="0">
-                        <a:buNone/>
-                      </a:pPr>
-                      <a:r>
-                        <a:rPr lang="en-US" sz="900" dirty="0">
-                          <a:solidFill>
-                            <a:srgbClr val="000000"/>
-                          </a:solidFill>
-                          <a:latin typeface="Arial" pitchFamily="34" charset="0"/>
-                          <a:ea typeface="Arial" pitchFamily="34" charset="-122"/>
-                          <a:cs typeface="Arial" pitchFamily="34" charset="-120"/>
-                        </a:rPr>
-                        <a:t>楽天トラベル</a:t>
-                      </a:r>
-                      <a:endParaRPr lang="en-US" sz="900" dirty="0">
-                        <a:latin typeface="Arial" charset="0"/>
-                        <a:ea typeface="Arial" charset="0"/>
-                        <a:cs typeface="Arial" charset="0"/>
-                      </a:endParaRPr>
-                    </a:p>
-                  </a:txBody>
-                  <a:tcPr marL="91440" marR="91440" marT="45720" marB="45720">
-                    <a:lnL w="6350" cap="flat" cmpd="sng" algn="ctr">
-                      <a:solidFill>
-                        <a:srgbClr val="CBD5E1"/>
-                      </a:solidFill>
-                      <a:prstDash val="solid"/>
-                      <a:round/>
-                      <a:headEnd type="none" w="med" len="med"/>
-                      <a:tailEnd type="none" w="med" len="med"/>
-                    </a:lnL>
-                    <a:lnR w="6350" cap="flat" cmpd="sng" algn="ctr">
-                      <a:solidFill>
-                        <a:srgbClr val="CBD5E1"/>
-                      </a:solidFill>
-                      <a:prstDash val="solid"/>
-                      <a:round/>
-                      <a:headEnd type="none" w="med" len="med"/>
-                      <a:tailEnd type="none" w="med" len="med"/>
-                    </a:lnR>
-                    <a:lnT w="6350" cap="flat" cmpd="sng" algn="ctr">
-                      <a:solidFill>
-                        <a:srgbClr val="CBD5E1"/>
-                      </a:solidFill>
-                      <a:prstDash val="solid"/>
-                      <a:round/>
-                      <a:headEnd type="none" w="med" len="med"/>
-                      <a:tailEnd type="none" w="med" len="med"/>
-                    </a:lnT>
-                    <a:lnB w="6350" cap="flat" cmpd="sng" algn="ctr">
-                      <a:solidFill>
-                        <a:srgbClr val="CBD5E1"/>
-                      </a:solidFill>
-                      <a:prstDash val="solid"/>
-                      <a:round/>
-                      <a:headEnd type="none" w="med" len="med"/>
-                      <a:tailEnd type="none" w="med" len="med"/>
-                    </a:lnB>
-                    <a:solidFill>
-                      <a:srgbClr val="E8EFF8"/>
-                    </a:solidFill>
-                  </a:tcPr>
-                </a:tc>
-                <a:tc>
-                  <a:txBody>
-                    <a:bodyPr/>
-                    <a:lstStyle/>
-                    <a:p>
-                      <a:pPr algn="ctr" indent="0" marL="0">
-                        <a:buNone/>
-                      </a:pPr>
-                      <a:r>
-                        <a:rPr lang="en-US" sz="900" dirty="0">
-                          <a:solidFill>
-                            <a:srgbClr val="000000"/>
-                          </a:solidFill>
-                          <a:latin typeface="Arial" pitchFamily="34" charset="0"/>
-                          <a:ea typeface="Arial" pitchFamily="34" charset="-122"/>
-                          <a:cs typeface="Arial" pitchFamily="34" charset="-120"/>
-                        </a:rPr>
-                        <a:t>5</a:t>
-                      </a:r>
-                      <a:endParaRPr lang="en-US" sz="900" dirty="0">
-                        <a:latin typeface="Arial" charset="0"/>
-                        <a:ea typeface="Arial" charset="0"/>
-                        <a:cs typeface="Arial" charset="0"/>
-                      </a:endParaRPr>
-                    </a:p>
-                  </a:txBody>
-                  <a:tcPr marL="91440" marR="91440" marT="45720" marB="45720">
-                    <a:lnL w="6350" cap="flat" cmpd="sng" algn="ctr">
-                      <a:solidFill>
-                        <a:srgbClr val="CBD5E1"/>
-                      </a:solidFill>
-                      <a:prstDash val="solid"/>
-                      <a:round/>
-                      <a:headEnd type="none" w="med" len="med"/>
-                      <a:tailEnd type="none" w="med" len="med"/>
-                    </a:lnL>
-                    <a:lnR w="6350" cap="flat" cmpd="sng" algn="ctr">
-                      <a:solidFill>
-                        <a:srgbClr val="CBD5E1"/>
-                      </a:solidFill>
-                      <a:prstDash val="solid"/>
-                      <a:round/>
-                      <a:headEnd type="none" w="med" len="med"/>
-                      <a:tailEnd type="none" w="med" len="med"/>
-                    </a:lnR>
-                    <a:lnT w="6350" cap="flat" cmpd="sng" algn="ctr">
-                      <a:solidFill>
-                        <a:srgbClr val="CBD5E1"/>
-                      </a:solidFill>
-                      <a:prstDash val="solid"/>
-                      <a:round/>
-                      <a:headEnd type="none" w="med" len="med"/>
-                      <a:tailEnd type="none" w="med" len="med"/>
-                    </a:lnT>
-                    <a:lnB w="6350" cap="flat" cmpd="sng" algn="ctr">
-                      <a:solidFill>
-                        <a:srgbClr val="CBD5E1"/>
-                      </a:solidFill>
-                      <a:prstDash val="solid"/>
-                      <a:round/>
-                      <a:headEnd type="none" w="med" len="med"/>
-                      <a:tailEnd type="none" w="med" len="med"/>
-                    </a:lnB>
-                    <a:solidFill>
-                      <a:srgbClr val="E8EFF8"/>
-                    </a:solidFill>
-                  </a:tcPr>
-                </a:tc>
-                <a:tc>
-                  <a:txBody>
-                    <a:bodyPr/>
-                    <a:lstStyle/>
-                    <a:p>
-                      <a:pPr algn="ctr" indent="0" marL="0">
-                        <a:buNone/>
-                      </a:pPr>
-                      <a:r>
-                        <a:rPr lang="en-US" sz="900" dirty="0">
-                          <a:solidFill>
-                            <a:srgbClr val="000000"/>
-                          </a:solidFill>
-                          <a:latin typeface="Arial" pitchFamily="34" charset="0"/>
-                          <a:ea typeface="Arial" pitchFamily="34" charset="-122"/>
-                          <a:cs typeface="Arial" pitchFamily="34" charset="-120"/>
-                        </a:rPr>
-                        <a:t>3</a:t>
-                      </a:r>
-                      <a:endParaRPr lang="en-US" sz="900" dirty="0">
-                        <a:latin typeface="Arial" charset="0"/>
-                        <a:ea typeface="Arial" charset="0"/>
-                        <a:cs typeface="Arial" charset="0"/>
-                      </a:endParaRPr>
-                    </a:p>
-                  </a:txBody>
-                  <a:tcPr marL="91440" marR="91440" marT="45720" marB="45720">
-                    <a:lnL w="6350" cap="flat" cmpd="sng" algn="ctr">
-                      <a:solidFill>
-                        <a:srgbClr val="CBD5E1"/>
-                      </a:solidFill>
-                      <a:prstDash val="solid"/>
-                      <a:round/>
-                      <a:headEnd type="none" w="med" len="med"/>
-                      <a:tailEnd type="none" w="med" len="med"/>
-                    </a:lnL>
-                    <a:lnR w="6350" cap="flat" cmpd="sng" algn="ctr">
-                      <a:solidFill>
-                        <a:srgbClr val="CBD5E1"/>
-                      </a:solidFill>
-                      <a:prstDash val="solid"/>
-                      <a:round/>
-                      <a:headEnd type="none" w="med" len="med"/>
-                      <a:tailEnd type="none" w="med" len="med"/>
-                    </a:lnR>
-                    <a:lnT w="6350" cap="flat" cmpd="sng" algn="ctr">
-                      <a:solidFill>
-                        <a:srgbClr val="CBD5E1"/>
-                      </a:solidFill>
-                      <a:prstDash val="solid"/>
-                      <a:round/>
-                      <a:headEnd type="none" w="med" len="med"/>
-                      <a:tailEnd type="none" w="med" len="med"/>
-                    </a:lnT>
-                    <a:lnB w="6350" cap="flat" cmpd="sng" algn="ctr">
-                      <a:solidFill>
-                        <a:srgbClr val="CBD5E1"/>
-                      </a:solidFill>
-                      <a:prstDash val="solid"/>
-                      <a:round/>
-                      <a:headEnd type="none" w="med" len="med"/>
-                      <a:tailEnd type="none" w="med" len="med"/>
-                    </a:lnB>
-                    <a:solidFill>
-                      <a:srgbClr val="E8EFF8"/>
-                    </a:solidFill>
-                  </a:tcPr>
-                </a:tc>
-                <a:tc>
-                  <a:txBody>
-                    <a:bodyPr/>
-                    <a:lstStyle/>
-                    <a:p>
-                      <a:pPr algn="ctr" indent="0" marL="0">
-                        <a:buNone/>
-                      </a:pPr>
-                      <a:r>
-                        <a:rPr lang="en-US" sz="900" dirty="0">
-                          <a:solidFill>
-                            <a:srgbClr val="000000"/>
-                          </a:solidFill>
-                          <a:latin typeface="Arial" pitchFamily="34" charset="0"/>
-                          <a:ea typeface="Arial" pitchFamily="34" charset="-122"/>
-                          <a:cs typeface="Arial" pitchFamily="34" charset="-120"/>
-                        </a:rPr>
-                        <a:t>/5 (×2)</a:t>
-                      </a:r>
-                      <a:endParaRPr lang="en-US" sz="900" dirty="0">
-                        <a:latin typeface="Arial" charset="0"/>
-                        <a:ea typeface="Arial" charset="0"/>
-                        <a:cs typeface="Arial" charset="0"/>
-                      </a:endParaRPr>
-                    </a:p>
-                  </a:txBody>
-                  <a:tcPr marL="91440" marR="91440" marT="45720" marB="45720">
-                    <a:lnL w="6350" cap="flat" cmpd="sng" algn="ctr">
-                      <a:solidFill>
-                        <a:srgbClr val="CBD5E1"/>
-                      </a:solidFill>
-                      <a:prstDash val="solid"/>
-                      <a:round/>
-                      <a:headEnd type="none" w="med" len="med"/>
-                      <a:tailEnd type="none" w="med" len="med"/>
-                    </a:lnL>
-                    <a:lnR w="6350" cap="flat" cmpd="sng" algn="ctr">
-                      <a:solidFill>
-                        <a:srgbClr val="CBD5E1"/>
-                      </a:solidFill>
-                      <a:prstDash val="solid"/>
-                      <a:round/>
-                      <a:headEnd type="none" w="med" len="med"/>
-                      <a:tailEnd type="none" w="med" len="med"/>
-                    </a:lnR>
-                    <a:lnT w="6350" cap="flat" cmpd="sng" algn="ctr">
-                      <a:solidFill>
-                        <a:srgbClr val="CBD5E1"/>
-                      </a:solidFill>
-                      <a:prstDash val="solid"/>
-                      <a:round/>
-                      <a:headEnd type="none" w="med" len="med"/>
-                      <a:tailEnd type="none" w="med" len="med"/>
-                    </a:lnT>
-                    <a:lnB w="6350" cap="flat" cmpd="sng" algn="ctr">
-                      <a:solidFill>
-                        <a:srgbClr val="CBD5E1"/>
-                      </a:solidFill>
-                      <a:prstDash val="solid"/>
-                      <a:round/>
-                      <a:headEnd type="none" w="med" len="med"/>
-                      <a:tailEnd type="none" w="med" len="med"/>
-                    </a:lnB>
-                    <a:solidFill>
-                      <a:srgbClr val="E8EFF8"/>
-                    </a:solidFill>
-                  </a:tcPr>
-                </a:tc>
-                <a:tc>
-                  <a:txBody>
-                    <a:bodyPr/>
-                    <a:lstStyle/>
-                    <a:p>
-                      <a:pPr algn="ctr" indent="0" marL="0">
-                        <a:buNone/>
-                      </a:pPr>
-                      <a:r>
-                        <a:rPr lang="en-US" sz="900" dirty="0">
-                          <a:solidFill>
-                            <a:srgbClr val="000000"/>
-                          </a:solidFill>
-                          <a:latin typeface="Arial" pitchFamily="34" charset="0"/>
-                          <a:ea typeface="Arial" pitchFamily="34" charset="-122"/>
-                          <a:cs typeface="Arial" pitchFamily="34" charset="-120"/>
-                        </a:rPr>
-                        <a:t>6</a:t>
+                        <a:t>6.46</a:t>
                       </a:r>
                       <a:endParaRPr lang="en-US" sz="900" dirty="0">
                         <a:latin typeface="Arial" charset="0"/>
@@ -9902,7 +9885,7 @@
                 <a:ea typeface="Arial" pitchFamily="34" charset="-122"/>
                 <a:cs typeface="Arial" pitchFamily="34" charset="-120"/>
               </a:rPr>
-              <a:t>89件（63.6%）</a:t>
+              <a:t>58件（69.9%）</a:t>
             </a:r>
             <a:endParaRPr lang="en-US" sz="1100" dirty="0"/>
           </a:p>
@@ -10000,7 +9983,7 @@
                 <a:ea typeface="Arial" pitchFamily="34" charset="-122"/>
                 <a:cs typeface="Arial" pitchFamily="34" charset="-120"/>
               </a:rPr>
-              <a:t>35件（25.0%）</a:t>
+              <a:t>17件（20.5%）</a:t>
             </a:r>
             <a:endParaRPr lang="en-US" sz="1100" dirty="0"/>
           </a:p>
@@ -10098,7 +10081,7 @@
                 <a:ea typeface="Arial" pitchFamily="34" charset="-122"/>
                 <a:cs typeface="Arial" pitchFamily="34" charset="-120"/>
               </a:rPr>
-              <a:t>16件（11.4%）</a:t>
+              <a:t>8件（9.6%）</a:t>
             </a:r>
             <a:endParaRPr lang="en-US" sz="1100" dirty="0"/>
           </a:p>
@@ -10432,7 +10415,7 @@
                 <a:ea typeface="Arial" pitchFamily="34" charset="-122"/>
                 <a:cs typeface="Arial" pitchFamily="34" charset="-120"/>
               </a:rPr>
-              <a:t>50件+</a:t>
+              <a:t>20件+</a:t>
             </a:r>
             <a:endParaRPr lang="en-US" sz="900" dirty="0"/>
           </a:p>
@@ -10510,7 +10493,7 @@
                 <a:ea typeface="Arial" pitchFamily="34" charset="-122"/>
                 <a:cs typeface="Arial" pitchFamily="34" charset="-120"/>
               </a:rPr>
-              <a:t>位置很好，房間很舊，早餐有啲難食 立地は最高だが、部屋は古く、朝食は少し残念だった</a:t>
+              <a:t>立地はとても便利で、博多駅を出てすぐなので迷う心配はありません</a:t>
             </a:r>
             <a:endParaRPr lang="en-US" sz="900" dirty="0"/>
           </a:p>
@@ -10549,7 +10532,7 @@
                 <a:ea typeface="Arial" pitchFamily="34" charset="-122"/>
                 <a:cs typeface="Arial" pitchFamily="34" charset="-120"/>
               </a:rPr>
-              <a:t>「立地は超がつくほど良好」</a:t>
+              <a:t>「駅、地下鉄、バスターミナル、コンビニ、地下街、スタバ、飲食店」</a:t>
             </a:r>
             <a:endParaRPr lang="en-US" sz="900" dirty="0"/>
           </a:p>
@@ -10655,7 +10638,7 @@
                 <a:ea typeface="Arial" pitchFamily="34" charset="-122"/>
                 <a:cs typeface="Arial" pitchFamily="34" charset="-120"/>
               </a:rPr>
-              <a:t>50件+</a:t>
+              <a:t>20件+</a:t>
             </a:r>
             <a:endParaRPr lang="en-US" sz="900" dirty="0"/>
           </a:p>
@@ -10733,7 +10716,7 @@
                 <a:ea typeface="Arial" pitchFamily="34" charset="-122"/>
                 <a:cs typeface="Arial" pitchFamily="34" charset="-120"/>
               </a:rPr>
-              <a:t>位置很好，房間很舊，早餐有啲難食 立地は最高だが、部屋は古く、朝食は少し残念だった</a:t>
+              <a:t>朝食の場所は広くはないですが、スタッフさんがしっかり誘導してくれるのでスムーズ</a:t>
             </a:r>
             <a:endParaRPr lang="en-US" sz="900" dirty="0"/>
           </a:p>
@@ -10772,7 +10755,7 @@
                 <a:ea typeface="Arial" pitchFamily="34" charset="-122"/>
                 <a:cs typeface="Arial" pitchFamily="34" charset="-120"/>
               </a:rPr>
-              <a:t>「朝食のスタッフの方が案内などの対応がてきぱきされており良かった バスルームが古く、清潔感が低い　カビもみられる バ...」</a:t>
+              <a:t>「新しいホテルではありませんが、とても清潔で、朝食も美味しかったです」</a:t>
             </a:r>
             <a:endParaRPr lang="en-US" sz="900" dirty="0"/>
           </a:p>
@@ -10878,7 +10861,7 @@
                 <a:ea typeface="Arial" pitchFamily="34" charset="-122"/>
                 <a:cs typeface="Arial" pitchFamily="34" charset="-120"/>
               </a:rPr>
-              <a:t>20件+</a:t>
+              <a:t>10件+</a:t>
             </a:r>
             <a:endParaRPr lang="en-US" sz="900" dirty="0"/>
           </a:p>
@@ -10956,7 +10939,7 @@
                 <a:ea typeface="Arial" pitchFamily="34" charset="-122"/>
                 <a:cs typeface="Arial" pitchFamily="34" charset="-120"/>
               </a:rPr>
-              <a:t>朝食のスタッフの方が案内などの対応がてきぱきされており良かった バスルームが古く、清潔感が低い　カビもみられる バ...</a:t>
+              <a:t>朝食の場所は広くはないですが、スタッフさんがしっかり誘導してくれるのでスムーズ</a:t>
             </a:r>
             <a:endParaRPr lang="en-US" sz="900" dirty="0"/>
           </a:p>
@@ -10995,7 +10978,7 @@
                 <a:ea typeface="Arial" pitchFamily="34" charset="-122"/>
                 <a:cs typeface="Arial" pitchFamily="34" charset="-120"/>
               </a:rPr>
-              <a:t>「スタッフさんの対応も良かった」</a:t>
+              <a:t>「スタッフの方はとてもフレンドリーで、ホテルの場所は駅のすぐ前で移動するのに最適です」</a:t>
             </a:r>
             <a:endParaRPr lang="en-US" sz="900" dirty="0"/>
           </a:p>
@@ -11101,7 +11084,7 @@
                 <a:ea typeface="Arial" pitchFamily="34" charset="-122"/>
                 <a:cs typeface="Arial" pitchFamily="34" charset="-120"/>
               </a:rPr>
-              <a:t>20件+</a:t>
+              <a:t>10件+</a:t>
             </a:r>
             <a:endParaRPr lang="en-US" sz="900" dirty="0"/>
           </a:p>
@@ -11116,6 +11099,229 @@
         <p:spPr>
           <a:xfrm>
             <a:off x="594360" y="2953512"/>
+            <a:ext cx="1645920" cy="274320"/>
+          </a:xfrm>
+          <a:prstGeom prst="rect">
+            <a:avLst/>
+          </a:prstGeom>
+          <a:noFill/>
+          <a:ln/>
+        </p:spPr>
+        <p:txBody>
+          <a:bodyPr wrap="square" lIns="0" tIns="0" rIns="0" bIns="0" rtlCol="0" anchor="ctr"/>
+          <a:lstStyle/>
+          <a:p>
+            <a:pPr indent="0" marL="0">
+              <a:buNone/>
+            </a:pPr>
+            <a:r>
+              <a:rPr lang="en-US" sz="1300" b="1" dirty="0">
+                <a:solidFill>
+                  <a:srgbClr val="1A2744"/>
+                </a:solidFill>
+                <a:latin typeface="Arial" pitchFamily="34" charset="0"/>
+                <a:ea typeface="Arial" pitchFamily="34" charset="-122"/>
+                <a:cs typeface="Arial" pitchFamily="34" charset="-120"/>
+              </a:rPr>
+              <a:t>快適さ・設備</a:t>
+            </a:r>
+            <a:endParaRPr lang="en-US" sz="1300" dirty="0"/>
+          </a:p>
+        </p:txBody>
+      </p:sp>
+      <p:sp>
+        <p:nvSpPr>
+          <p:cNvPr id="31" name="Text 29"/>
+          <p:cNvSpPr/>
+          <p:nvPr/>
+        </p:nvSpPr>
+        <p:spPr>
+          <a:xfrm>
+            <a:off x="594360" y="3246120"/>
+            <a:ext cx="2377440" cy="365760"/>
+          </a:xfrm>
+          <a:prstGeom prst="rect">
+            <a:avLst/>
+          </a:prstGeom>
+          <a:noFill/>
+          <a:ln/>
+        </p:spPr>
+        <p:txBody>
+          <a:bodyPr wrap="square" lIns="0" tIns="0" rIns="0" bIns="0" rtlCol="0" anchor="ctr"/>
+          <a:lstStyle/>
+          <a:p>
+            <a:pPr indent="0" marL="0">
+              <a:buNone/>
+            </a:pPr>
+            <a:r>
+              <a:rPr lang="en-US" sz="900" dirty="0">
+                <a:solidFill>
+                  <a:srgbClr val="64748B"/>
+                </a:solidFill>
+                <a:latin typeface="Arial" pitchFamily="34" charset="0"/>
+                <a:ea typeface="Arial" pitchFamily="34" charset="-122"/>
+                <a:cs typeface="Arial" pitchFamily="34" charset="-120"/>
+              </a:rPr>
+              <a:t>部屋の広さはちょうど良いのですが、設備は少し古めです</a:t>
+            </a:r>
+            <a:endParaRPr lang="en-US" sz="900" dirty="0"/>
+          </a:p>
+        </p:txBody>
+      </p:sp>
+      <p:sp>
+        <p:nvSpPr>
+          <p:cNvPr id="32" name="Text 30"/>
+          <p:cNvSpPr/>
+          <p:nvPr/>
+        </p:nvSpPr>
+        <p:spPr>
+          <a:xfrm>
+            <a:off x="594360" y="3657600"/>
+            <a:ext cx="2377440" cy="640080"/>
+          </a:xfrm>
+          <a:prstGeom prst="rect">
+            <a:avLst/>
+          </a:prstGeom>
+          <a:noFill/>
+          <a:ln/>
+        </p:spPr>
+        <p:txBody>
+          <a:bodyPr wrap="square" lIns="0" tIns="0" rIns="0" bIns="0" rtlCol="0" anchor="ctr"/>
+          <a:lstStyle/>
+          <a:p>
+            <a:pPr indent="0" marL="0">
+              <a:buNone/>
+            </a:pPr>
+            <a:r>
+              <a:rPr lang="en-US" sz="900" i="1" dirty="0">
+                <a:solidFill>
+                  <a:srgbClr val="3B7DD8"/>
+                </a:solidFill>
+                <a:latin typeface="Arial" pitchFamily="34" charset="0"/>
+                <a:ea typeface="Arial" pitchFamily="34" charset="-122"/>
+                <a:cs typeface="Arial" pitchFamily="34" charset="-120"/>
+              </a:rPr>
+              <a:t>「ホテルの立地は博多駅に非常に近かったのですが、ホテルの設備は古びていました」</a:t>
+            </a:r>
+            <a:endParaRPr lang="en-US" sz="900" dirty="0"/>
+          </a:p>
+        </p:txBody>
+      </p:sp>
+      <p:sp>
+        <p:nvSpPr>
+          <p:cNvPr id="33" name="Shape 31"/>
+          <p:cNvSpPr/>
+          <p:nvPr/>
+        </p:nvSpPr>
+        <p:spPr>
+          <a:xfrm>
+            <a:off x="3291840" y="2880360"/>
+            <a:ext cx="2651760" cy="1600200"/>
+          </a:xfrm>
+          <a:prstGeom prst="rect">
+            <a:avLst/>
+          </a:prstGeom>
+          <a:solidFill>
+            <a:srgbClr val="FFFFFF"/>
+          </a:solidFill>
+          <a:ln/>
+          <a:effectLst>
+            <a:outerShdw sx="100000" sy="100000" kx="0" ky="0" algn="bl" rotWithShape="0" blurRad="50800" dist="25400" dir="8100000">
+              <a:srgbClr val="000000">
+                <a:alpha val="10000"/>
+              </a:srgbClr>
+            </a:outerShdw>
+          </a:effectLst>
+        </p:spPr>
+      </p:sp>
+      <p:sp>
+        <p:nvSpPr>
+          <p:cNvPr id="34" name="Shape 32"/>
+          <p:cNvSpPr/>
+          <p:nvPr/>
+        </p:nvSpPr>
+        <p:spPr>
+          <a:xfrm>
+            <a:off x="3291840" y="2880360"/>
+            <a:ext cx="54864" cy="1600200"/>
+          </a:xfrm>
+          <a:prstGeom prst="rect">
+            <a:avLst/>
+          </a:prstGeom>
+          <a:solidFill>
+            <a:srgbClr val="16A34A"/>
+          </a:solidFill>
+          <a:ln/>
+        </p:spPr>
+      </p:sp>
+      <p:sp>
+        <p:nvSpPr>
+          <p:cNvPr id="35" name="Shape 33"/>
+          <p:cNvSpPr/>
+          <p:nvPr/>
+        </p:nvSpPr>
+        <p:spPr>
+          <a:xfrm>
+            <a:off x="5120640" y="2953512"/>
+            <a:ext cx="658368" cy="228600"/>
+          </a:xfrm>
+          <a:prstGeom prst="rect">
+            <a:avLst/>
+          </a:prstGeom>
+          <a:solidFill>
+            <a:srgbClr val="DCFCE7"/>
+          </a:solidFill>
+          <a:ln/>
+        </p:spPr>
+      </p:sp>
+      <p:sp>
+        <p:nvSpPr>
+          <p:cNvPr id="36" name="Text 34"/>
+          <p:cNvSpPr/>
+          <p:nvPr/>
+        </p:nvSpPr>
+        <p:spPr>
+          <a:xfrm>
+            <a:off x="5120640" y="2953512"/>
+            <a:ext cx="658368" cy="228600"/>
+          </a:xfrm>
+          <a:prstGeom prst="rect">
+            <a:avLst/>
+          </a:prstGeom>
+          <a:noFill/>
+          <a:ln/>
+        </p:spPr>
+        <p:txBody>
+          <a:bodyPr wrap="square" lIns="0" tIns="0" rIns="0" bIns="0" rtlCol="0" anchor="ctr"/>
+          <a:lstStyle/>
+          <a:p>
+            <a:pPr algn="ctr" indent="0" marL="0">
+              <a:buNone/>
+            </a:pPr>
+            <a:r>
+              <a:rPr lang="en-US" sz="900" b="1" dirty="0">
+                <a:solidFill>
+                  <a:srgbClr val="16A34A"/>
+                </a:solidFill>
+                <a:latin typeface="Arial" pitchFamily="34" charset="0"/>
+                <a:ea typeface="Arial" pitchFamily="34" charset="-122"/>
+                <a:cs typeface="Arial" pitchFamily="34" charset="-120"/>
+              </a:rPr>
+              <a:t>10件+</a:t>
+            </a:r>
+            <a:endParaRPr lang="en-US" sz="900" dirty="0"/>
+          </a:p>
+        </p:txBody>
+      </p:sp>
+      <p:sp>
+        <p:nvSpPr>
+          <p:cNvPr id="37" name="Text 35"/>
+          <p:cNvSpPr/>
+          <p:nvPr/>
+        </p:nvSpPr>
+        <p:spPr>
+          <a:xfrm>
+            <a:off x="3429000" y="2953512"/>
             <a:ext cx="1645920" cy="274320"/>
           </a:xfrm>
           <a:prstGeom prst="rect">
@@ -11148,13 +11354,13 @@
       </p:sp>
       <p:sp>
         <p:nvSpPr>
-          <p:cNvPr id="31" name="Text 29"/>
-          <p:cNvSpPr/>
-          <p:nvPr/>
-        </p:nvSpPr>
-        <p:spPr>
-          <a:xfrm>
-            <a:off x="594360" y="3246120"/>
+          <p:cNvPr id="38" name="Text 36"/>
+          <p:cNvSpPr/>
+          <p:nvPr/>
+        </p:nvSpPr>
+        <p:spPr>
+          <a:xfrm>
+            <a:off x="3429000" y="3246120"/>
             <a:ext cx="2377440" cy="365760"/>
           </a:xfrm>
           <a:prstGeom prst="rect">
@@ -11179,7 +11385,7 @@
                 <a:ea typeface="Arial" pitchFamily="34" charset="-122"/>
                 <a:cs typeface="Arial" pitchFamily="34" charset="-120"/>
               </a:rPr>
-              <a:t>朝食のスタッフの方が案内などの対応がてきぱきされており良かった バスルームが古く、清潔感が低い　カビもみられる バ...</a:t>
+              <a:t>トイレは写真で見るほど清潔ではなく、チェックインした時には床に虫がいて、悪臭もしました</a:t>
             </a:r>
             <a:endParaRPr lang="en-US" sz="900" dirty="0"/>
           </a:p>
@@ -11187,13 +11393,13 @@
       </p:sp>
       <p:sp>
         <p:nvSpPr>
-          <p:cNvPr id="32" name="Text 30"/>
-          <p:cNvSpPr/>
-          <p:nvPr/>
-        </p:nvSpPr>
-        <p:spPr>
-          <a:xfrm>
-            <a:off x="594360" y="3657600"/>
+          <p:cNvPr id="39" name="Text 37"/>
+          <p:cNvSpPr/>
+          <p:nvPr/>
+        </p:nvSpPr>
+        <p:spPr>
+          <a:xfrm>
+            <a:off x="3429000" y="3657600"/>
             <a:ext cx="2377440" cy="640080"/>
           </a:xfrm>
           <a:prstGeom prst="rect">
@@ -11218,7 +11424,7 @@
                 <a:ea typeface="Arial" pitchFamily="34" charset="-122"/>
                 <a:cs typeface="Arial" pitchFamily="34" charset="-120"/>
               </a:rPr>
-              <a:t>「清掃、手入れの甘さを感じさせました」</a:t>
+              <a:t>「新しいホテルではありませんが、とても清潔で、朝食も美味しかったです」</a:t>
             </a:r>
             <a:endParaRPr lang="en-US" sz="900" dirty="0"/>
           </a:p>
@@ -11226,13 +11432,13 @@
       </p:sp>
       <p:sp>
         <p:nvSpPr>
-          <p:cNvPr id="33" name="Shape 31"/>
-          <p:cNvSpPr/>
-          <p:nvPr/>
-        </p:nvSpPr>
-        <p:spPr>
-          <a:xfrm>
-            <a:off x="3291840" y="2880360"/>
+          <p:cNvPr id="40" name="Shape 38"/>
+          <p:cNvSpPr/>
+          <p:nvPr/>
+        </p:nvSpPr>
+        <p:spPr>
+          <a:xfrm>
+            <a:off x="6126480" y="2880360"/>
             <a:ext cx="2651760" cy="1600200"/>
           </a:xfrm>
           <a:prstGeom prst="rect">
@@ -11253,13 +11459,13 @@
       </p:sp>
       <p:sp>
         <p:nvSpPr>
-          <p:cNvPr id="34" name="Shape 32"/>
-          <p:cNvSpPr/>
-          <p:nvPr/>
-        </p:nvSpPr>
-        <p:spPr>
-          <a:xfrm>
-            <a:off x="3291840" y="2880360"/>
+          <p:cNvPr id="41" name="Shape 39"/>
+          <p:cNvSpPr/>
+          <p:nvPr/>
+        </p:nvSpPr>
+        <p:spPr>
+          <a:xfrm>
+            <a:off x="6126480" y="2880360"/>
             <a:ext cx="54864" cy="1600200"/>
           </a:xfrm>
           <a:prstGeom prst="rect">
@@ -11273,13 +11479,13 @@
       </p:sp>
       <p:sp>
         <p:nvSpPr>
-          <p:cNvPr id="35" name="Shape 33"/>
-          <p:cNvSpPr/>
-          <p:nvPr/>
-        </p:nvSpPr>
-        <p:spPr>
-          <a:xfrm>
-            <a:off x="5120640" y="2953512"/>
+          <p:cNvPr id="42" name="Shape 40"/>
+          <p:cNvSpPr/>
+          <p:nvPr/>
+        </p:nvSpPr>
+        <p:spPr>
+          <a:xfrm>
+            <a:off x="7955280" y="2953512"/>
             <a:ext cx="658368" cy="228600"/>
           </a:xfrm>
           <a:prstGeom prst="rect">
@@ -11293,13 +11499,13 @@
       </p:sp>
       <p:sp>
         <p:nvSpPr>
-          <p:cNvPr id="36" name="Text 34"/>
-          <p:cNvSpPr/>
-          <p:nvPr/>
-        </p:nvSpPr>
-        <p:spPr>
-          <a:xfrm>
-            <a:off x="5120640" y="2953512"/>
+          <p:cNvPr id="43" name="Text 41"/>
+          <p:cNvSpPr/>
+          <p:nvPr/>
+        </p:nvSpPr>
+        <p:spPr>
+          <a:xfrm>
+            <a:off x="7955280" y="2953512"/>
             <a:ext cx="658368" cy="228600"/>
           </a:xfrm>
           <a:prstGeom prst="rect">
@@ -11324,230 +11530,7 @@
                 <a:ea typeface="Arial" pitchFamily="34" charset="-122"/>
                 <a:cs typeface="Arial" pitchFamily="34" charset="-120"/>
               </a:rPr>
-              <a:t>20件+</a:t>
-            </a:r>
-            <a:endParaRPr lang="en-US" sz="900" dirty="0"/>
-          </a:p>
-        </p:txBody>
-      </p:sp>
-      <p:sp>
-        <p:nvSpPr>
-          <p:cNvPr id="37" name="Text 35"/>
-          <p:cNvSpPr/>
-          <p:nvPr/>
-        </p:nvSpPr>
-        <p:spPr>
-          <a:xfrm>
-            <a:off x="3429000" y="2953512"/>
-            <a:ext cx="1645920" cy="274320"/>
-          </a:xfrm>
-          <a:prstGeom prst="rect">
-            <a:avLst/>
-          </a:prstGeom>
-          <a:noFill/>
-          <a:ln/>
-        </p:spPr>
-        <p:txBody>
-          <a:bodyPr wrap="square" lIns="0" tIns="0" rIns="0" bIns="0" rtlCol="0" anchor="ctr"/>
-          <a:lstStyle/>
-          <a:p>
-            <a:pPr indent="0" marL="0">
-              <a:buNone/>
-            </a:pPr>
-            <a:r>
-              <a:rPr lang="en-US" sz="1300" b="1" dirty="0">
-                <a:solidFill>
-                  <a:srgbClr val="1A2744"/>
-                </a:solidFill>
-                <a:latin typeface="Arial" pitchFamily="34" charset="0"/>
-                <a:ea typeface="Arial" pitchFamily="34" charset="-122"/>
-                <a:cs typeface="Arial" pitchFamily="34" charset="-120"/>
-              </a:rPr>
-              <a:t>快適さ・設備</a:t>
-            </a:r>
-            <a:endParaRPr lang="en-US" sz="1300" dirty="0"/>
-          </a:p>
-        </p:txBody>
-      </p:sp>
-      <p:sp>
-        <p:nvSpPr>
-          <p:cNvPr id="38" name="Text 36"/>
-          <p:cNvSpPr/>
-          <p:nvPr/>
-        </p:nvSpPr>
-        <p:spPr>
-          <a:xfrm>
-            <a:off x="3429000" y="3246120"/>
-            <a:ext cx="2377440" cy="365760"/>
-          </a:xfrm>
-          <a:prstGeom prst="rect">
-            <a:avLst/>
-          </a:prstGeom>
-          <a:noFill/>
-          <a:ln/>
-        </p:spPr>
-        <p:txBody>
-          <a:bodyPr wrap="square" lIns="0" tIns="0" rIns="0" bIns="0" rtlCol="0" anchor="ctr"/>
-          <a:lstStyle/>
-          <a:p>
-            <a:pPr indent="0" marL="0">
-              <a:buNone/>
-            </a:pPr>
-            <a:r>
-              <a:rPr lang="en-US" sz="900" dirty="0">
-                <a:solidFill>
-                  <a:srgbClr val="64748B"/>
-                </a:solidFill>
-                <a:latin typeface="Arial" pitchFamily="34" charset="0"/>
-                <a:ea typeface="Arial" pitchFamily="34" charset="-122"/>
-                <a:cs typeface="Arial" pitchFamily="34" charset="-120"/>
-              </a:rPr>
-              <a:t>それから設備の古さが目につく</a:t>
-            </a:r>
-            <a:endParaRPr lang="en-US" sz="900" dirty="0"/>
-          </a:p>
-        </p:txBody>
-      </p:sp>
-      <p:sp>
-        <p:nvSpPr>
-          <p:cNvPr id="39" name="Text 37"/>
-          <p:cNvSpPr/>
-          <p:nvPr/>
-        </p:nvSpPr>
-        <p:spPr>
-          <a:xfrm>
-            <a:off x="3429000" y="3657600"/>
-            <a:ext cx="2377440" cy="640080"/>
-          </a:xfrm>
-          <a:prstGeom prst="rect">
-            <a:avLst/>
-          </a:prstGeom>
-          <a:noFill/>
-          <a:ln/>
-        </p:spPr>
-        <p:txBody>
-          <a:bodyPr wrap="square" lIns="0" tIns="0" rIns="0" bIns="0" rtlCol="0" anchor="ctr"/>
-          <a:lstStyle/>
-          <a:p>
-            <a:pPr indent="0" marL="0">
-              <a:buNone/>
-            </a:pPr>
-            <a:r>
-              <a:rPr lang="en-US" sz="900" i="1" dirty="0">
-                <a:solidFill>
-                  <a:srgbClr val="3B7DD8"/>
-                </a:solidFill>
-                <a:latin typeface="Arial" pitchFamily="34" charset="0"/>
-                <a:ea typeface="Arial" pitchFamily="34" charset="-122"/>
-                <a:cs typeface="Arial" pitchFamily="34" charset="-120"/>
-              </a:rPr>
-              <a:t>「Comfortable住起來根本uncomfortable 房間的佈局、燈光、環境、設計爛的要命」</a:t>
-            </a:r>
-            <a:endParaRPr lang="en-US" sz="900" dirty="0"/>
-          </a:p>
-        </p:txBody>
-      </p:sp>
-      <p:sp>
-        <p:nvSpPr>
-          <p:cNvPr id="40" name="Shape 38"/>
-          <p:cNvSpPr/>
-          <p:nvPr/>
-        </p:nvSpPr>
-        <p:spPr>
-          <a:xfrm>
-            <a:off x="6126480" y="2880360"/>
-            <a:ext cx="2651760" cy="1600200"/>
-          </a:xfrm>
-          <a:prstGeom prst="rect">
-            <a:avLst/>
-          </a:prstGeom>
-          <a:solidFill>
-            <a:srgbClr val="FFFFFF"/>
-          </a:solidFill>
-          <a:ln/>
-          <a:effectLst>
-            <a:outerShdw sx="100000" sy="100000" kx="0" ky="0" algn="bl" rotWithShape="0" blurRad="50800" dist="25400" dir="8100000">
-              <a:srgbClr val="000000">
-                <a:alpha val="10000"/>
-              </a:srgbClr>
-            </a:outerShdw>
-          </a:effectLst>
-        </p:spPr>
-      </p:sp>
-      <p:sp>
-        <p:nvSpPr>
-          <p:cNvPr id="41" name="Shape 39"/>
-          <p:cNvSpPr/>
-          <p:nvPr/>
-        </p:nvSpPr>
-        <p:spPr>
-          <a:xfrm>
-            <a:off x="6126480" y="2880360"/>
-            <a:ext cx="54864" cy="1600200"/>
-          </a:xfrm>
-          <a:prstGeom prst="rect">
-            <a:avLst/>
-          </a:prstGeom>
-          <a:solidFill>
-            <a:srgbClr val="16A34A"/>
-          </a:solidFill>
-          <a:ln/>
-        </p:spPr>
-      </p:sp>
-      <p:sp>
-        <p:nvSpPr>
-          <p:cNvPr id="42" name="Shape 40"/>
-          <p:cNvSpPr/>
-          <p:nvPr/>
-        </p:nvSpPr>
-        <p:spPr>
-          <a:xfrm>
-            <a:off x="7955280" y="2953512"/>
-            <a:ext cx="658368" cy="228600"/>
-          </a:xfrm>
-          <a:prstGeom prst="rect">
-            <a:avLst/>
-          </a:prstGeom>
-          <a:solidFill>
-            <a:srgbClr val="DCFCE7"/>
-          </a:solidFill>
-          <a:ln/>
-        </p:spPr>
-      </p:sp>
-      <p:sp>
-        <p:nvSpPr>
-          <p:cNvPr id="43" name="Text 41"/>
-          <p:cNvSpPr/>
-          <p:nvPr/>
-        </p:nvSpPr>
-        <p:spPr>
-          <a:xfrm>
-            <a:off x="7955280" y="2953512"/>
-            <a:ext cx="658368" cy="228600"/>
-          </a:xfrm>
-          <a:prstGeom prst="rect">
-            <a:avLst/>
-          </a:prstGeom>
-          <a:noFill/>
-          <a:ln/>
-        </p:spPr>
-        <p:txBody>
-          <a:bodyPr wrap="square" lIns="0" tIns="0" rIns="0" bIns="0" rtlCol="0" anchor="ctr"/>
-          <a:lstStyle/>
-          <a:p>
-            <a:pPr algn="ctr" indent="0" marL="0">
-              <a:buNone/>
-            </a:pPr>
-            <a:r>
-              <a:rPr lang="en-US" sz="900" b="1" dirty="0">
-                <a:solidFill>
-                  <a:srgbClr val="16A34A"/>
-                </a:solidFill>
-                <a:latin typeface="Arial" pitchFamily="34" charset="0"/>
-                <a:ea typeface="Arial" pitchFamily="34" charset="-122"/>
-                <a:cs typeface="Arial" pitchFamily="34" charset="-120"/>
-              </a:rPr>
-              <a:t>10件+</a:t>
+              <a:t>8件</a:t>
             </a:r>
             <a:endParaRPr lang="en-US" sz="900" dirty="0"/>
           </a:p>
@@ -11625,7 +11608,7 @@
                 <a:ea typeface="Arial" pitchFamily="34" charset="-122"/>
                 <a:cs typeface="Arial" pitchFamily="34" charset="-120"/>
               </a:rPr>
-              <a:t>料金も手頃で、部屋も清潔です</a:t>
+              <a:t>料金は約1700円で、コストパフォーマンスに優れています</a:t>
             </a:r>
             <a:endParaRPr lang="en-US" sz="900" dirty="0"/>
           </a:p>
@@ -11664,7 +11647,7 @@
                 <a:ea typeface="Arial" pitchFamily="34" charset="-122"/>
                 <a:cs typeface="Arial" pitchFamily="34" charset="-120"/>
               </a:rPr>
-              <a:t>「手頃な価格で、料金に見合った広さがあり、立地も良く、朝食も付いています」</a:t>
+              <a:t>「料金も手頃で、部屋も清潔です」</a:t>
             </a:r>
             <a:endParaRPr lang="en-US" sz="900" dirty="0"/>
           </a:p>
@@ -12286,7 +12269,7 @@
                           <a:ea typeface="Arial" pitchFamily="34" charset="-122"/>
                           <a:cs typeface="Arial" pitchFamily="34" charset="-120"/>
                         </a:rPr>
-                        <a:t>浴室・水回り</a:t>
+                        <a:t>設備の老朽化</a:t>
                       </a:r>
                       <a:endParaRPr lang="en-US" sz="900" dirty="0">
                         <a:latin typeface="Arial" charset="0"/>
@@ -12354,7 +12337,7 @@
                           <a:ea typeface="Arial" pitchFamily="34" charset="-122"/>
                           <a:cs typeface="Arial" pitchFamily="34" charset="-120"/>
                         </a:rPr>
-                        <a:t>朝食のスタッフの方が案内などの対応がてきぱきされており良かった バスルームが古く、清潔感が低い　カビもみられる バ...</a:t>
+                        <a:t>部屋の広さはちょうど良いのですが、設備は少し古めです</a:t>
                       </a:r>
                       <a:endParaRPr lang="en-US" sz="900" dirty="0">
                         <a:latin typeface="Arial" charset="0"/>
@@ -12422,7 +12405,7 @@
                           <a:ea typeface="Arial" pitchFamily="34" charset="-122"/>
                           <a:cs typeface="Arial" pitchFamily="34" charset="-120"/>
                         </a:rPr>
-                        <a:t>23件</a:t>
+                        <a:t>13件</a:t>
                       </a:r>
                       <a:endParaRPr lang="en-US" sz="900" dirty="0">
                         <a:latin typeface="Arial" charset="0"/>
@@ -12560,7 +12543,7 @@
                           <a:ea typeface="Arial" pitchFamily="34" charset="-122"/>
                           <a:cs typeface="Arial" pitchFamily="34" charset="-120"/>
                         </a:rPr>
-                        <a:t>設備の老朽化</a:t>
+                        <a:t>浴室・水回り</a:t>
                       </a:r>
                       <a:endParaRPr lang="en-US" sz="900" dirty="0">
                         <a:latin typeface="Arial" charset="0"/>
@@ -12628,7 +12611,7 @@
                           <a:ea typeface="Arial" pitchFamily="34" charset="-122"/>
                           <a:cs typeface="Arial" pitchFamily="34" charset="-120"/>
                         </a:rPr>
-                        <a:t>それから設備の古さが目につく</a:t>
+                        <a:t>駅、地下鉄、バスターミナル、コンビニ、地下街、スタバ、飲食店</a:t>
                       </a:r>
                       <a:endParaRPr lang="en-US" sz="900" dirty="0">
                         <a:latin typeface="Arial" charset="0"/>
@@ -12696,7 +12679,7 @@
                           <a:ea typeface="Arial" pitchFamily="34" charset="-122"/>
                           <a:cs typeface="Arial" pitchFamily="34" charset="-120"/>
                         </a:rPr>
-                        <a:t>22件</a:t>
+                        <a:t>13件</a:t>
                       </a:r>
                       <a:endParaRPr lang="en-US" sz="900" dirty="0">
                         <a:latin typeface="Arial" charset="0"/>
@@ -12902,7 +12885,7 @@
                           <a:ea typeface="Arial" pitchFamily="34" charset="-122"/>
                           <a:cs typeface="Arial" pitchFamily="34" charset="-120"/>
                         </a:rPr>
-                        <a:t>壁紙が剥がれていたり、エアコンの吐き出し口がズレていたり、水まわりも年季が入っています</a:t>
+                        <a:t>The location of the hotel was actually very near to Hakat...</a:t>
                       </a:r>
                       <a:endParaRPr lang="en-US" sz="900" dirty="0">
                         <a:latin typeface="Arial" charset="0"/>
@@ -12970,7 +12953,7 @@
                           <a:ea typeface="Arial" pitchFamily="34" charset="-122"/>
                           <a:cs typeface="Arial" pitchFamily="34" charset="-120"/>
                         </a:rPr>
-                        <a:t>14件</a:t>
+                        <a:t>12件</a:t>
                       </a:r>
                       <a:endParaRPr lang="en-US" sz="900" dirty="0">
                         <a:latin typeface="Arial" charset="0"/>
@@ -13108,7 +13091,7 @@
                           <a:ea typeface="Arial" pitchFamily="34" charset="-122"/>
                           <a:cs typeface="Arial" pitchFamily="34" charset="-120"/>
                         </a:rPr>
-                        <a:t>清掃不備</a:t>
+                        <a:t>防音性能</a:t>
                       </a:r>
                       <a:endParaRPr lang="en-US" sz="900" dirty="0">
                         <a:latin typeface="Arial" charset="0"/>
@@ -13176,7 +13159,7 @@
                           <a:ea typeface="Arial" pitchFamily="34" charset="-122"/>
                           <a:cs typeface="Arial" pitchFamily="34" charset="-120"/>
                         </a:rPr>
-                        <a:t>水まわりが、正直汚い……</a:t>
+                        <a:t>宿泊箇所が10階以上なので、道路の声や音などは聞こえませんでした</a:t>
                       </a:r>
                       <a:endParaRPr lang="en-US" sz="900" dirty="0">
                         <a:latin typeface="Arial" charset="0"/>
@@ -13244,7 +13227,7 @@
                           <a:ea typeface="Arial" pitchFamily="34" charset="-122"/>
                           <a:cs typeface="Arial" pitchFamily="34" charset="-120"/>
                         </a:rPr>
-                        <a:t>14件</a:t>
+                        <a:t>9件</a:t>
                       </a:r>
                       <a:endParaRPr lang="en-US" sz="900" dirty="0">
                         <a:latin typeface="Arial" charset="0"/>
@@ -13382,7 +13365,7 @@
                           <a:ea typeface="Arial" pitchFamily="34" charset="-122"/>
                           <a:cs typeface="Arial" pitchFamily="34" charset="-120"/>
                         </a:rPr>
-                        <a:t>防音性能</a:t>
+                        <a:t>清掃不備</a:t>
                       </a:r>
                       <a:endParaRPr lang="en-US" sz="900" dirty="0">
                         <a:latin typeface="Arial" charset="0"/>
@@ -13450,7 +13433,7 @@
                           <a:ea typeface="Arial" pitchFamily="34" charset="-122"/>
                           <a:cs typeface="Arial" pitchFamily="34" charset="-120"/>
                         </a:rPr>
-                        <a:t>部屋の防音性が低く、隣の部屋がものすごくうるさい</a:t>
+                        <a:t>水まわりが、正直汚い……</a:t>
                       </a:r>
                       <a:endParaRPr lang="en-US" sz="900" dirty="0">
                         <a:latin typeface="Arial" charset="0"/>
@@ -13518,7 +13501,7 @@
                           <a:ea typeface="Arial" pitchFamily="34" charset="-122"/>
                           <a:cs typeface="Arial" pitchFamily="34" charset="-120"/>
                         </a:rPr>
-                        <a:t>13件</a:t>
+                        <a:t>6件</a:t>
                       </a:r>
                       <a:endParaRPr lang="en-US" sz="900" dirty="0">
                         <a:latin typeface="Arial" charset="0"/>
@@ -13724,7 +13707,7 @@
                           <a:ea typeface="Arial" pitchFamily="34" charset="-122"/>
                           <a:cs typeface="Arial" pitchFamily="34" charset="-120"/>
                         </a:rPr>
-                        <a:t>Only small issue sometimes bathroom smells</a:t>
+                        <a:t>朝食は会場が狭いのもあり、整列できないのか大人、子供もルール違反多く、大変</a:t>
                       </a:r>
                       <a:endParaRPr lang="en-US" sz="900" dirty="0">
                         <a:latin typeface="Arial" charset="0"/>
@@ -13792,7 +13775,7 @@
                           <a:ea typeface="Arial" pitchFamily="34" charset="-122"/>
                           <a:cs typeface="Arial" pitchFamily="34" charset="-120"/>
                         </a:rPr>
-                        <a:t>10件</a:t>
+                        <a:t>5件</a:t>
                       </a:r>
                       <a:endParaRPr lang="en-US" sz="900" dirty="0">
                         <a:latin typeface="Arial" charset="0"/>
@@ -13998,7 +13981,7 @@
                           <a:ea typeface="Arial" pitchFamily="34" charset="-122"/>
                           <a:cs typeface="Arial" pitchFamily="34" charset="-120"/>
                         </a:rPr>
-                        <a:t>どこから臭いがするのかは分かりません</a:t>
+                        <a:t>トイレは写真で見るほど清潔ではなく、チェックインした時には床に虫がいて、悪臭もしました</a:t>
                       </a:r>
                       <a:endParaRPr lang="en-US" sz="900" dirty="0">
                         <a:latin typeface="Arial" charset="0"/>
@@ -14066,7 +14049,7 @@
                           <a:ea typeface="Arial" pitchFamily="34" charset="-122"/>
                           <a:cs typeface="Arial" pitchFamily="34" charset="-120"/>
                         </a:rPr>
-                        <a:t>8件</a:t>
+                        <a:t>3件</a:t>
                       </a:r>
                       <a:endParaRPr lang="en-US" sz="900" dirty="0">
                         <a:latin typeface="Arial" charset="0"/>
@@ -14204,7 +14187,7 @@
                           <a:ea typeface="Arial" pitchFamily="34" charset="-122"/>
                           <a:cs typeface="Arial" pitchFamily="34" charset="-120"/>
                         </a:rPr>
-                        <a:t>窓・採光</a:t>
+                        <a:t>朝食の改善要望</a:t>
                       </a:r>
                       <a:endParaRPr lang="en-US" sz="900" dirty="0">
                         <a:latin typeface="Arial" charset="0"/>
@@ -14272,7 +14255,7 @@
                           <a:ea typeface="Arial" pitchFamily="34" charset="-122"/>
                           <a:cs typeface="Arial" pitchFamily="34" charset="-120"/>
                         </a:rPr>
-                        <a:t>朝食無料提供でルームコンディション大丈夫だったし、道路の辺りで夜に車音など若干の騒音があったのですが窓からは博多駅...</a:t>
+                        <a:t>朝食はほぼ毎日同じです</a:t>
                       </a:r>
                       <a:endParaRPr lang="en-US" sz="900" dirty="0">
                         <a:latin typeface="Arial" charset="0"/>
@@ -14340,7 +14323,7 @@
                           <a:ea typeface="Arial" pitchFamily="34" charset="-122"/>
                           <a:cs typeface="Arial" pitchFamily="34" charset="-120"/>
                         </a:rPr>
-                        <a:t>7件</a:t>
+                        <a:t>3件</a:t>
                       </a:r>
                       <a:endParaRPr lang="en-US" sz="900" dirty="0">
                         <a:latin typeface="Arial" charset="0"/>
@@ -14478,7 +14461,7 @@
                           <a:ea typeface="Arial" pitchFamily="34" charset="-122"/>
                           <a:cs typeface="Arial" pitchFamily="34" charset="-120"/>
                         </a:rPr>
-                        <a:t>朝食の改善要望</a:t>
+                        <a:t>対応・サービスの不満</a:t>
                       </a:r>
                       <a:endParaRPr lang="en-US" sz="900" dirty="0">
                         <a:latin typeface="Arial" charset="0"/>
@@ -14546,7 +14529,7 @@
                           <a:ea typeface="Arial" pitchFamily="34" charset="-122"/>
                           <a:cs typeface="Arial" pitchFamily="34" charset="-120"/>
                         </a:rPr>
-                        <a:t>朝食はほぼ毎日同じです</a:t>
+                        <a:t>位置很好，房間很舊，早餐有啲難食 立地は最高だが、部屋は古く、朝食は少し残念だった</a:t>
                       </a:r>
                       <a:endParaRPr lang="en-US" sz="900" dirty="0">
                         <a:latin typeface="Arial" charset="0"/>
@@ -14614,7 +14597,7 @@
                           <a:ea typeface="Arial" pitchFamily="34" charset="-122"/>
                           <a:cs typeface="Arial" pitchFamily="34" charset="-120"/>
                         </a:rPr>
-                        <a:t>5件</a:t>
+                        <a:t>3件</a:t>
                       </a:r>
                       <a:endParaRPr lang="en-US" sz="900" dirty="0">
                         <a:latin typeface="Arial" charset="0"/>

--- a/納品レポート/ホテル別レポート/comfort_hakata_口コミ分析レポート.pptx
+++ b/納品レポート/ホテル別レポート/comfort_hakata_口コミ分析レポート.pptx
@@ -4728,7 +4728,7 @@
                           <a:ea typeface="Arial" pitchFamily="34" charset="-122"/>
                           <a:cs typeface="Arial" pitchFamily="34" charset="-120"/>
                         </a:rPr>
-                        <a:t>約13件/期間</a:t>
+                        <a:t>約14件/期間</a:t>
                       </a:r>
                       <a:endParaRPr lang="en-US" sz="1000" dirty="0">
                         <a:latin typeface="Arial" charset="0"/>
@@ -4796,7 +4796,7 @@
                           <a:ea typeface="Arial" pitchFamily="34" charset="-122"/>
                           <a:cs typeface="Arial" pitchFamily="34" charset="-120"/>
                         </a:rPr>
-                        <a:t>6件以下</a:t>
+                        <a:t>7件以下</a:t>
                       </a:r>
                       <a:endParaRPr lang="en-US" sz="1000" dirty="0">
                         <a:latin typeface="Arial" charset="0"/>
@@ -12405,7 +12405,7 @@
                           <a:ea typeface="Arial" pitchFamily="34" charset="-122"/>
                           <a:cs typeface="Arial" pitchFamily="34" charset="-120"/>
                         </a:rPr>
-                        <a:t>13件</a:t>
+                        <a:t>14件</a:t>
                       </a:r>
                       <a:endParaRPr lang="en-US" sz="900" dirty="0">
                         <a:latin typeface="Arial" charset="0"/>

--- a/納品レポート/ホテル別レポート/comfort_hakata_口コミ分析レポート.pptx
+++ b/納品レポート/ホテル別レポート/comfort_hakata_口コミ分析レポート.pptx
@@ -205,16 +205,16 @@
                 <c:formatCode>General</c:formatCode>
                 <c:ptCount val="5"/>
                 <c:pt idx="0">
-                  <c:v>8.9</c:v>
+                  <c:v>8.88</c:v>
                 </c:pt>
                 <c:pt idx="1">
-                  <c:v>7.6</c:v>
+                  <c:v>7.67</c:v>
                 </c:pt>
                 <c:pt idx="2">
                   <c:v>7.5</c:v>
                 </c:pt>
                 <c:pt idx="3">
-                  <c:v>7.25</c:v>
+                  <c:v>7.24</c:v>
                 </c:pt>
                 <c:pt idx="4">
                   <c:v>6.46</c:v>
@@ -560,10 +560,10 @@
               <c:numCache>
                 <c:ptCount val="3"/>
                 <c:pt idx="0">
-                  <c:v>62</c:v>
+                  <c:v>64</c:v>
                 </c:pt>
                 <c:pt idx="1">
-                  <c:v>17</c:v>
+                  <c:v>19</c:v>
                 </c:pt>
                 <c:pt idx="2">
                   <c:v>8</c:v>
@@ -817,16 +817,16 @@
                 <c:formatCode>General</c:formatCode>
                 <c:ptCount val="9"/>
                 <c:pt idx="0">
-                  <c:v>28</c:v>
+                  <c:v>29</c:v>
                 </c:pt>
                 <c:pt idx="1">
                   <c:v>10</c:v>
                 </c:pt>
                 <c:pt idx="2">
-                  <c:v>24</c:v>
+                  <c:v>25</c:v>
                 </c:pt>
                 <c:pt idx="3">
-                  <c:v>6</c:v>
+                  <c:v>8</c:v>
                 </c:pt>
                 <c:pt idx="4">
                   <c:v>8</c:v>
@@ -2792,7 +2792,7 @@
                 <a:ea typeface="Arial" pitchFamily="34" charset="-122"/>
                 <a:cs typeface="Arial" pitchFamily="34" charset="-120"/>
               </a:rPr>
-              <a:t>レビュー総数：87件（5サイト）</a:t>
+              <a:t>レビュー総数：91件（5サイト）</a:t>
             </a:r>
             <a:endParaRPr lang="en-US" sz="1000" dirty="0"/>
           </a:p>
@@ -2812,7 +2812,7 @@
                 <a:ea typeface="Arial" pitchFamily="34" charset="-122"/>
                 <a:cs typeface="Arial" pitchFamily="34" charset="-120"/>
               </a:rPr>
-              <a:t>作成日：2026年4月6日</a:t>
+              <a:t>作成日：2026年4月7日</a:t>
             </a:r>
             <a:endParaRPr lang="en-US" sz="1000" dirty="0"/>
           </a:p>
@@ -3358,7 +3358,7 @@
                           <a:ea typeface="Arial" pitchFamily="34" charset="-122"/>
                           <a:cs typeface="Arial" pitchFamily="34" charset="-120"/>
                         </a:rPr>
-                        <a:t>7.94点</a:t>
+                        <a:t>7.95点</a:t>
                       </a:r>
                       <a:endParaRPr lang="en-US" sz="1000" dirty="0">
                         <a:latin typeface="Arial" charset="0"/>
@@ -3632,7 +3632,7 @@
                           <a:ea typeface="Arial" pitchFamily="34" charset="-122"/>
                           <a:cs typeface="Arial" pitchFamily="34" charset="-120"/>
                         </a:rPr>
-                        <a:t>71.3%</a:t>
+                        <a:t>70.3%</a:t>
                       </a:r>
                       <a:endParaRPr lang="en-US" sz="1000" dirty="0">
                         <a:latin typeface="Arial" charset="0"/>
@@ -3700,7 +3700,7 @@
                           <a:ea typeface="Arial" pitchFamily="34" charset="-122"/>
                           <a:cs typeface="Arial" pitchFamily="34" charset="-120"/>
                         </a:rPr>
-                        <a:t>76%以上</a:t>
+                        <a:t>75%以上</a:t>
                       </a:r>
                       <a:endParaRPr lang="en-US" sz="1000" dirty="0">
                         <a:latin typeface="Arial" charset="0"/>
@@ -3906,7 +3906,7 @@
                           <a:ea typeface="Arial" pitchFamily="34" charset="-122"/>
                           <a:cs typeface="Arial" pitchFamily="34" charset="-120"/>
                         </a:rPr>
-                        <a:t>9.2%</a:t>
+                        <a:t>8.8%</a:t>
                       </a:r>
                       <a:endParaRPr lang="en-US" sz="1000" dirty="0">
                         <a:latin typeface="Arial" charset="0"/>
@@ -4728,7 +4728,7 @@
                           <a:ea typeface="Arial" pitchFamily="34" charset="-122"/>
                           <a:cs typeface="Arial" pitchFamily="34" charset="-120"/>
                         </a:rPr>
-                        <a:t>約14件/期間</a:t>
+                        <a:t>約15件/期間</a:t>
                       </a:r>
                       <a:endParaRPr lang="en-US" sz="1000" dirty="0">
                         <a:latin typeface="Arial" charset="0"/>
@@ -5367,7 +5367,7 @@
                 <a:ea typeface="Arial" pitchFamily="34" charset="-122"/>
                 <a:cs typeface="Arial" pitchFamily="34" charset="-120"/>
               </a:rPr>
-              <a:t>7.94</a:t>
+              <a:t>7.95</a:t>
             </a:r>
             <a:endParaRPr lang="en-US" sz="3200" dirty="0"/>
           </a:p>
@@ -5492,7 +5492,7 @@
                 <a:ea typeface="Arial" pitchFamily="34" charset="-122"/>
                 <a:cs typeface="Arial" pitchFamily="34" charset="-120"/>
               </a:rPr>
-              <a:t>71.3%</a:t>
+              <a:t>70.3%</a:t>
             </a:r>
             <a:endParaRPr lang="en-US" sz="3200" dirty="0"/>
           </a:p>
@@ -5617,7 +5617,7 @@
                 <a:ea typeface="Arial" pitchFamily="34" charset="-122"/>
                 <a:cs typeface="Arial" pitchFamily="34" charset="-120"/>
               </a:rPr>
-              <a:t>9.2%</a:t>
+              <a:t>8.8%</a:t>
             </a:r>
             <a:endParaRPr lang="en-US" sz="3200" dirty="0"/>
           </a:p>
@@ -5742,7 +5742,7 @@
                 <a:ea typeface="Arial" pitchFamily="34" charset="-122"/>
                 <a:cs typeface="Arial" pitchFamily="34" charset="-120"/>
               </a:rPr>
-              <a:t>87件</a:t>
+              <a:t>91件</a:t>
             </a:r>
             <a:endParaRPr lang="en-US" sz="3200" dirty="0"/>
           </a:p>
@@ -6118,7 +6118,47 @@
                 <a:ea typeface="Arial" pitchFamily="34" charset="-122"/>
                 <a:cs typeface="Arial" pitchFamily="34" charset="-120"/>
               </a:rPr>
-              <a:t>  部屋の広さはちょうど良いのですが、設備は少し古めです</a:t>
+              <a:t>  호텔이 전체적으로 오래되었지만 청소부분이나 객실상태는 깔끔한편이었고 무엇보다 위치가 하카타역바로앞이라 ...</a:t>
+            </a:r>
+            <a:endParaRPr lang="en-US" sz="1100" dirty="0"/>
+          </a:p>
+          <a:p>
+            <a:pPr indent="0" marL="0">
+              <a:spcAft>
+                <a:spcPts val="200"/>
+              </a:spcAft>
+              <a:buNone/>
+            </a:pPr>
+            <a:r>
+              <a:rPr lang="en-US" sz="1100" b="1" dirty="0">
+                <a:solidFill>
+                  <a:srgbClr val="334155"/>
+                </a:solidFill>
+                <a:latin typeface="Arial" pitchFamily="34" charset="0"/>
+                <a:ea typeface="Arial" pitchFamily="34" charset="-122"/>
+                <a:cs typeface="Arial" pitchFamily="34" charset="-120"/>
+              </a:rPr>
+              <a:t>浴室・水回り </a:t>
+            </a:r>
+            <a:endParaRPr lang="en-US" sz="1100" dirty="0"/>
+          </a:p>
+          <a:p>
+            <a:pPr indent="0" marL="0">
+              <a:spcAft>
+                <a:spcPts val="200"/>
+              </a:spcAft>
+              <a:buNone/>
+            </a:pPr>
+            <a:r>
+              <a:rPr lang="en-US" sz="900" dirty="0">
+                <a:solidFill>
+                  <a:srgbClr val="64748B"/>
+                </a:solidFill>
+                <a:latin typeface="Arial" pitchFamily="34" charset="0"/>
+                <a:ea typeface="Arial" pitchFamily="34" charset="-122"/>
+                <a:cs typeface="Arial" pitchFamily="34" charset="-120"/>
+              </a:rPr>
+              <a:t>  部屋は広いが浴室が狭かった</a:t>
             </a:r>
             <a:endParaRPr lang="en-US" sz="1100" dirty="0"/>
           </a:p>
@@ -6159,46 +6199,6 @@
                 <a:cs typeface="Arial" pitchFamily="34" charset="-120"/>
               </a:rPr>
               <a:t>  Too crowded at the breakfast place</a:t>
-            </a:r>
-            <a:endParaRPr lang="en-US" sz="1100" dirty="0"/>
-          </a:p>
-          <a:p>
-            <a:pPr indent="0" marL="0">
-              <a:spcAft>
-                <a:spcPts val="200"/>
-              </a:spcAft>
-              <a:buNone/>
-            </a:pPr>
-            <a:r>
-              <a:rPr lang="en-US" sz="1100" b="1" dirty="0">
-                <a:solidFill>
-                  <a:srgbClr val="334155"/>
-                </a:solidFill>
-                <a:latin typeface="Arial" pitchFamily="34" charset="0"/>
-                <a:ea typeface="Arial" pitchFamily="34" charset="-122"/>
-                <a:cs typeface="Arial" pitchFamily="34" charset="-120"/>
-              </a:rPr>
-              <a:t>浴室・水回り </a:t>
-            </a:r>
-            <a:endParaRPr lang="en-US" sz="1100" dirty="0"/>
-          </a:p>
-          <a:p>
-            <a:pPr indent="0" marL="0">
-              <a:spcAft>
-                <a:spcPts val="200"/>
-              </a:spcAft>
-              <a:buNone/>
-            </a:pPr>
-            <a:r>
-              <a:rPr lang="en-US" sz="900" dirty="0">
-                <a:solidFill>
-                  <a:srgbClr val="64748B"/>
-                </a:solidFill>
-                <a:latin typeface="Arial" pitchFamily="34" charset="0"/>
-                <a:ea typeface="Arial" pitchFamily="34" charset="-122"/>
-                <a:cs typeface="Arial" pitchFamily="34" charset="-120"/>
-              </a:rPr>
-              <a:t>  駅、地下鉄、バスターミナル、コンビニ、地下街、スタバ、飲食店</a:t>
             </a:r>
             <a:endParaRPr lang="en-US" sz="1100" dirty="0"/>
           </a:p>
@@ -6551,7 +6551,7 @@
                 <a:ea typeface="Arial" pitchFamily="34" charset="-122"/>
                 <a:cs typeface="Arial" pitchFamily="34" charset="-120"/>
               </a:rPr>
-              <a:t>7.94</a:t>
+              <a:t>7.95</a:t>
             </a:r>
             <a:endParaRPr lang="en-US" sz="3200" dirty="0"/>
           </a:p>
@@ -6676,7 +6676,7 @@
                 <a:ea typeface="Arial" pitchFamily="34" charset="-122"/>
                 <a:cs typeface="Arial" pitchFamily="34" charset="-120"/>
               </a:rPr>
-              <a:t>71.3%</a:t>
+              <a:t>70.3%</a:t>
             </a:r>
             <a:endParaRPr lang="en-US" sz="3200" dirty="0"/>
           </a:p>
@@ -6801,7 +6801,7 @@
                 <a:ea typeface="Arial" pitchFamily="34" charset="-122"/>
                 <a:cs typeface="Arial" pitchFamily="34" charset="-120"/>
               </a:rPr>
-              <a:t>9.2%</a:t>
+              <a:t>8.8%</a:t>
             </a:r>
             <a:endParaRPr lang="en-US" sz="3200" dirty="0"/>
           </a:p>
@@ -6926,7 +6926,7 @@
                 <a:ea typeface="Arial" pitchFamily="34" charset="-122"/>
                 <a:cs typeface="Arial" pitchFamily="34" charset="-120"/>
               </a:rPr>
-              <a:t>87件</a:t>
+              <a:t>91件</a:t>
             </a:r>
             <a:endParaRPr lang="en-US" sz="3200" dirty="0"/>
           </a:p>
@@ -7347,7 +7347,7 @@
                 <a:ea typeface="Arial" pitchFamily="34" charset="-122"/>
                 <a:cs typeface="Arial" pitchFamily="34" charset="-120"/>
               </a:rPr>
-              <a:t>Trip.com(8.90)が最高スコア。</a:t>
+              <a:t>Trip.com(8.88)が最高スコア。</a:t>
             </a:r>
             <a:endParaRPr lang="en-US" sz="1100" dirty="0"/>
           </a:p>
@@ -7905,7 +7905,7 @@
                           <a:ea typeface="Arial" pitchFamily="34" charset="-122"/>
                           <a:cs typeface="Arial" pitchFamily="34" charset="-120"/>
                         </a:rPr>
-                        <a:t>41</a:t>
+                        <a:t>43</a:t>
                       </a:r>
                       <a:endParaRPr lang="en-US" sz="900" dirty="0">
                         <a:latin typeface="Arial" charset="0"/>
@@ -7973,7 +7973,7 @@
                           <a:ea typeface="Arial" pitchFamily="34" charset="-122"/>
                           <a:cs typeface="Arial" pitchFamily="34" charset="-120"/>
                         </a:rPr>
-                        <a:t>8.9</a:t>
+                        <a:t>8.88</a:t>
                       </a:r>
                       <a:endParaRPr lang="en-US" sz="900" dirty="0">
                         <a:latin typeface="Arial" charset="0"/>
@@ -8109,7 +8109,7 @@
                           <a:ea typeface="Arial" pitchFamily="34" charset="-122"/>
                           <a:cs typeface="Arial" pitchFamily="34" charset="-120"/>
                         </a:rPr>
-                        <a:t>8.9</a:t>
+                        <a:t>8.88</a:t>
                       </a:r>
                       <a:endParaRPr lang="en-US" sz="900" dirty="0">
                         <a:latin typeface="Arial" charset="0"/>
@@ -8247,7 +8247,7 @@
                           <a:ea typeface="Arial" pitchFamily="34" charset="-122"/>
                           <a:cs typeface="Arial" pitchFamily="34" charset="-120"/>
                         </a:rPr>
-                        <a:t>5</a:t>
+                        <a:t>6</a:t>
                       </a:r>
                       <a:endParaRPr lang="en-US" sz="900" dirty="0">
                         <a:latin typeface="Arial" charset="0"/>
@@ -8315,7 +8315,7 @@
                           <a:ea typeface="Arial" pitchFamily="34" charset="-122"/>
                           <a:cs typeface="Arial" pitchFamily="34" charset="-120"/>
                         </a:rPr>
-                        <a:t>3.8</a:t>
+                        <a:t>3.83</a:t>
                       </a:r>
                       <a:endParaRPr lang="en-US" sz="900" dirty="0">
                         <a:latin typeface="Arial" charset="0"/>
@@ -8451,7 +8451,7 @@
                           <a:ea typeface="Arial" pitchFamily="34" charset="-122"/>
                           <a:cs typeface="Arial" pitchFamily="34" charset="-120"/>
                         </a:rPr>
-                        <a:t>7.6</a:t>
+                        <a:t>7.67</a:t>
                       </a:r>
                       <a:endParaRPr lang="en-US" sz="900" dirty="0">
                         <a:latin typeface="Arial" charset="0"/>
@@ -8931,7 +8931,7 @@
                           <a:ea typeface="Arial" pitchFamily="34" charset="-122"/>
                           <a:cs typeface="Arial" pitchFamily="34" charset="-120"/>
                         </a:rPr>
-                        <a:t>24</a:t>
+                        <a:t>25</a:t>
                       </a:r>
                       <a:endParaRPr lang="en-US" sz="900" dirty="0">
                         <a:latin typeface="Arial" charset="0"/>
@@ -8999,7 +8999,7 @@
                           <a:ea typeface="Arial" pitchFamily="34" charset="-122"/>
                           <a:cs typeface="Arial" pitchFamily="34" charset="-120"/>
                         </a:rPr>
-                        <a:t>7.25</a:t>
+                        <a:t>7.24</a:t>
                       </a:r>
                       <a:endParaRPr lang="en-US" sz="900" dirty="0">
                         <a:latin typeface="Arial" charset="0"/>
@@ -9135,7 +9135,7 @@
                           <a:ea typeface="Arial" pitchFamily="34" charset="-122"/>
                           <a:cs typeface="Arial" pitchFamily="34" charset="-120"/>
                         </a:rPr>
-                        <a:t>7.25</a:t>
+                        <a:t>7.24</a:t>
                       </a:r>
                       <a:endParaRPr lang="en-US" sz="900" dirty="0">
                         <a:latin typeface="Arial" charset="0"/>
@@ -9885,7 +9885,7 @@
                 <a:ea typeface="Arial" pitchFamily="34" charset="-122"/>
                 <a:cs typeface="Arial" pitchFamily="34" charset="-120"/>
               </a:rPr>
-              <a:t>62件（71.3%）</a:t>
+              <a:t>64件（70.3%）</a:t>
             </a:r>
             <a:endParaRPr lang="en-US" sz="1100" dirty="0"/>
           </a:p>
@@ -9983,7 +9983,7 @@
                 <a:ea typeface="Arial" pitchFamily="34" charset="-122"/>
                 <a:cs typeface="Arial" pitchFamily="34" charset="-120"/>
               </a:rPr>
-              <a:t>17件（19.5%）</a:t>
+              <a:t>19件（20.9%）</a:t>
             </a:r>
             <a:endParaRPr lang="en-US" sz="1100" dirty="0"/>
           </a:p>
@@ -10081,7 +10081,7 @@
                 <a:ea typeface="Arial" pitchFamily="34" charset="-122"/>
                 <a:cs typeface="Arial" pitchFamily="34" charset="-120"/>
               </a:rPr>
-              <a:t>8件（9.2%）</a:t>
+              <a:t>8件（8.8%）</a:t>
             </a:r>
             <a:endParaRPr lang="en-US" sz="1100" dirty="0"/>
           </a:p>
@@ -10755,7 +10755,7 @@
                 <a:ea typeface="Arial" pitchFamily="34" charset="-122"/>
                 <a:cs typeface="Arial" pitchFamily="34" charset="-120"/>
               </a:rPr>
-              <a:t>「朝食の場所は広くはないですが、スタッフさんがしっかり誘導してくれるのでスムーズ」</a:t>
+              <a:t>「朝食はバラエティ豊かで美味しかったです」</a:t>
             </a:r>
             <a:endParaRPr lang="en-US" sz="900" dirty="0"/>
           </a:p>
@@ -11123,6 +11123,229 @@
                 <a:ea typeface="Arial" pitchFamily="34" charset="-122"/>
                 <a:cs typeface="Arial" pitchFamily="34" charset="-120"/>
               </a:rPr>
+              <a:t>清潔さ・清掃</a:t>
+            </a:r>
+            <a:endParaRPr lang="en-US" sz="1300" dirty="0"/>
+          </a:p>
+        </p:txBody>
+      </p:sp>
+      <p:sp>
+        <p:nvSpPr>
+          <p:cNvPr id="31" name="Text 29"/>
+          <p:cNvSpPr/>
+          <p:nvPr/>
+        </p:nvSpPr>
+        <p:spPr>
+          <a:xfrm>
+            <a:off x="594360" y="3246120"/>
+            <a:ext cx="2377440" cy="365760"/>
+          </a:xfrm>
+          <a:prstGeom prst="rect">
+            <a:avLst/>
+          </a:prstGeom>
+          <a:noFill/>
+          <a:ln/>
+        </p:spPr>
+        <p:txBody>
+          <a:bodyPr wrap="square" lIns="0" tIns="0" rIns="0" bIns="0" rtlCol="0" anchor="ctr"/>
+          <a:lstStyle/>
+          <a:p>
+            <a:pPr indent="0" marL="0">
+              <a:buNone/>
+            </a:pPr>
+            <a:r>
+              <a:rPr lang="en-US" sz="900" dirty="0">
+                <a:solidFill>
+                  <a:srgbClr val="64748B"/>
+                </a:solidFill>
+                <a:latin typeface="Arial" pitchFamily="34" charset="0"/>
+                <a:ea typeface="Arial" pitchFamily="34" charset="-122"/>
+                <a:cs typeface="Arial" pitchFamily="34" charset="-120"/>
+              </a:rPr>
+              <a:t>호텔이 전체적으로 오래되었지만 청소부분이나 객실상태는 깔끔한편이었고 무엇보다 위치가 하카타역바로앞이라 ...</a:t>
+            </a:r>
+            <a:endParaRPr lang="en-US" sz="900" dirty="0"/>
+          </a:p>
+        </p:txBody>
+      </p:sp>
+      <p:sp>
+        <p:nvSpPr>
+          <p:cNvPr id="32" name="Text 30"/>
+          <p:cNvSpPr/>
+          <p:nvPr/>
+        </p:nvSpPr>
+        <p:spPr>
+          <a:xfrm>
+            <a:off x="594360" y="3657600"/>
+            <a:ext cx="2377440" cy="640080"/>
+          </a:xfrm>
+          <a:prstGeom prst="rect">
+            <a:avLst/>
+          </a:prstGeom>
+          <a:noFill/>
+          <a:ln/>
+        </p:spPr>
+        <p:txBody>
+          <a:bodyPr wrap="square" lIns="0" tIns="0" rIns="0" bIns="0" rtlCol="0" anchor="ctr"/>
+          <a:lstStyle/>
+          <a:p>
+            <a:pPr indent="0" marL="0">
+              <a:buNone/>
+            </a:pPr>
+            <a:r>
+              <a:rPr lang="en-US" sz="900" i="1" dirty="0">
+                <a:solidFill>
+                  <a:srgbClr val="3B7DD8"/>
+                </a:solidFill>
+                <a:latin typeface="Arial" pitchFamily="34" charset="0"/>
+                <a:ea typeface="Arial" pitchFamily="34" charset="-122"/>
+                <a:cs typeface="Arial" pitchFamily="34" charset="-120"/>
+              </a:rPr>
+              <a:t>「トイレは写真で見るほど清潔ではなく、チェックインした時には床に虫がいて、悪臭もしました」</a:t>
+            </a:r>
+            <a:endParaRPr lang="en-US" sz="900" dirty="0"/>
+          </a:p>
+        </p:txBody>
+      </p:sp>
+      <p:sp>
+        <p:nvSpPr>
+          <p:cNvPr id="33" name="Shape 31"/>
+          <p:cNvSpPr/>
+          <p:nvPr/>
+        </p:nvSpPr>
+        <p:spPr>
+          <a:xfrm>
+            <a:off x="3291840" y="2880360"/>
+            <a:ext cx="2651760" cy="1600200"/>
+          </a:xfrm>
+          <a:prstGeom prst="rect">
+            <a:avLst/>
+          </a:prstGeom>
+          <a:solidFill>
+            <a:srgbClr val="FFFFFF"/>
+          </a:solidFill>
+          <a:ln/>
+          <a:effectLst>
+            <a:outerShdw sx="100000" sy="100000" kx="0" ky="0" algn="bl" rotWithShape="0" blurRad="50800" dist="25400" dir="8100000">
+              <a:srgbClr val="000000">
+                <a:alpha val="10000"/>
+              </a:srgbClr>
+            </a:outerShdw>
+          </a:effectLst>
+        </p:spPr>
+      </p:sp>
+      <p:sp>
+        <p:nvSpPr>
+          <p:cNvPr id="34" name="Shape 32"/>
+          <p:cNvSpPr/>
+          <p:nvPr/>
+        </p:nvSpPr>
+        <p:spPr>
+          <a:xfrm>
+            <a:off x="3291840" y="2880360"/>
+            <a:ext cx="54864" cy="1600200"/>
+          </a:xfrm>
+          <a:prstGeom prst="rect">
+            <a:avLst/>
+          </a:prstGeom>
+          <a:solidFill>
+            <a:srgbClr val="16A34A"/>
+          </a:solidFill>
+          <a:ln/>
+        </p:spPr>
+      </p:sp>
+      <p:sp>
+        <p:nvSpPr>
+          <p:cNvPr id="35" name="Shape 33"/>
+          <p:cNvSpPr/>
+          <p:nvPr/>
+        </p:nvSpPr>
+        <p:spPr>
+          <a:xfrm>
+            <a:off x="5120640" y="2953512"/>
+            <a:ext cx="658368" cy="228600"/>
+          </a:xfrm>
+          <a:prstGeom prst="rect">
+            <a:avLst/>
+          </a:prstGeom>
+          <a:solidFill>
+            <a:srgbClr val="DCFCE7"/>
+          </a:solidFill>
+          <a:ln/>
+        </p:spPr>
+      </p:sp>
+      <p:sp>
+        <p:nvSpPr>
+          <p:cNvPr id="36" name="Text 34"/>
+          <p:cNvSpPr/>
+          <p:nvPr/>
+        </p:nvSpPr>
+        <p:spPr>
+          <a:xfrm>
+            <a:off x="5120640" y="2953512"/>
+            <a:ext cx="658368" cy="228600"/>
+          </a:xfrm>
+          <a:prstGeom prst="rect">
+            <a:avLst/>
+          </a:prstGeom>
+          <a:noFill/>
+          <a:ln/>
+        </p:spPr>
+        <p:txBody>
+          <a:bodyPr wrap="square" lIns="0" tIns="0" rIns="0" bIns="0" rtlCol="0" anchor="ctr"/>
+          <a:lstStyle/>
+          <a:p>
+            <a:pPr algn="ctr" indent="0" marL="0">
+              <a:buNone/>
+            </a:pPr>
+            <a:r>
+              <a:rPr lang="en-US" sz="900" b="1" dirty="0">
+                <a:solidFill>
+                  <a:srgbClr val="16A34A"/>
+                </a:solidFill>
+                <a:latin typeface="Arial" pitchFamily="34" charset="0"/>
+                <a:ea typeface="Arial" pitchFamily="34" charset="-122"/>
+                <a:cs typeface="Arial" pitchFamily="34" charset="-120"/>
+              </a:rPr>
+              <a:t>10件+</a:t>
+            </a:r>
+            <a:endParaRPr lang="en-US" sz="900" dirty="0"/>
+          </a:p>
+        </p:txBody>
+      </p:sp>
+      <p:sp>
+        <p:nvSpPr>
+          <p:cNvPr id="37" name="Text 35"/>
+          <p:cNvSpPr/>
+          <p:nvPr/>
+        </p:nvSpPr>
+        <p:spPr>
+          <a:xfrm>
+            <a:off x="3429000" y="2953512"/>
+            <a:ext cx="1645920" cy="274320"/>
+          </a:xfrm>
+          <a:prstGeom prst="rect">
+            <a:avLst/>
+          </a:prstGeom>
+          <a:noFill/>
+          <a:ln/>
+        </p:spPr>
+        <p:txBody>
+          <a:bodyPr wrap="square" lIns="0" tIns="0" rIns="0" bIns="0" rtlCol="0" anchor="ctr"/>
+          <a:lstStyle/>
+          <a:p>
+            <a:pPr indent="0" marL="0">
+              <a:buNone/>
+            </a:pPr>
+            <a:r>
+              <a:rPr lang="en-US" sz="1300" b="1" dirty="0">
+                <a:solidFill>
+                  <a:srgbClr val="1A2744"/>
+                </a:solidFill>
+                <a:latin typeface="Arial" pitchFamily="34" charset="0"/>
+                <a:ea typeface="Arial" pitchFamily="34" charset="-122"/>
+                <a:cs typeface="Arial" pitchFamily="34" charset="-120"/>
+              </a:rPr>
               <a:t>快適さ・設備</a:t>
             </a:r>
             <a:endParaRPr lang="en-US" sz="1300" dirty="0"/>
@@ -11131,13 +11354,13 @@
       </p:sp>
       <p:sp>
         <p:nvSpPr>
-          <p:cNvPr id="31" name="Text 29"/>
-          <p:cNvSpPr/>
-          <p:nvPr/>
-        </p:nvSpPr>
-        <p:spPr>
-          <a:xfrm>
-            <a:off x="594360" y="3246120"/>
+          <p:cNvPr id="38" name="Text 36"/>
+          <p:cNvSpPr/>
+          <p:nvPr/>
+        </p:nvSpPr>
+        <p:spPr>
+          <a:xfrm>
+            <a:off x="3429000" y="3246120"/>
             <a:ext cx="2377440" cy="365760"/>
           </a:xfrm>
           <a:prstGeom prst="rect">
@@ -11170,13 +11393,13 @@
       </p:sp>
       <p:sp>
         <p:nvSpPr>
-          <p:cNvPr id="32" name="Text 30"/>
-          <p:cNvSpPr/>
-          <p:nvPr/>
-        </p:nvSpPr>
-        <p:spPr>
-          <a:xfrm>
-            <a:off x="594360" y="3657600"/>
+          <p:cNvPr id="39" name="Text 37"/>
+          <p:cNvSpPr/>
+          <p:nvPr/>
+        </p:nvSpPr>
+        <p:spPr>
+          <a:xfrm>
+            <a:off x="3429000" y="3657600"/>
             <a:ext cx="2377440" cy="640080"/>
           </a:xfrm>
           <a:prstGeom prst="rect">
@@ -11202,229 +11425,6 @@
                 <a:cs typeface="Arial" pitchFamily="34" charset="-120"/>
               </a:rPr>
               <a:t>「ホテルの立地は博多駅に非常に近かったのですが、ホテルの設備は古びていました」</a:t>
-            </a:r>
-            <a:endParaRPr lang="en-US" sz="900" dirty="0"/>
-          </a:p>
-        </p:txBody>
-      </p:sp>
-      <p:sp>
-        <p:nvSpPr>
-          <p:cNvPr id="33" name="Shape 31"/>
-          <p:cNvSpPr/>
-          <p:nvPr/>
-        </p:nvSpPr>
-        <p:spPr>
-          <a:xfrm>
-            <a:off x="3291840" y="2880360"/>
-            <a:ext cx="2651760" cy="1600200"/>
-          </a:xfrm>
-          <a:prstGeom prst="rect">
-            <a:avLst/>
-          </a:prstGeom>
-          <a:solidFill>
-            <a:srgbClr val="FFFFFF"/>
-          </a:solidFill>
-          <a:ln/>
-          <a:effectLst>
-            <a:outerShdw sx="100000" sy="100000" kx="0" ky="0" algn="bl" rotWithShape="0" blurRad="50800" dist="25400" dir="8100000">
-              <a:srgbClr val="000000">
-                <a:alpha val="10000"/>
-              </a:srgbClr>
-            </a:outerShdw>
-          </a:effectLst>
-        </p:spPr>
-      </p:sp>
-      <p:sp>
-        <p:nvSpPr>
-          <p:cNvPr id="34" name="Shape 32"/>
-          <p:cNvSpPr/>
-          <p:nvPr/>
-        </p:nvSpPr>
-        <p:spPr>
-          <a:xfrm>
-            <a:off x="3291840" y="2880360"/>
-            <a:ext cx="54864" cy="1600200"/>
-          </a:xfrm>
-          <a:prstGeom prst="rect">
-            <a:avLst/>
-          </a:prstGeom>
-          <a:solidFill>
-            <a:srgbClr val="16A34A"/>
-          </a:solidFill>
-          <a:ln/>
-        </p:spPr>
-      </p:sp>
-      <p:sp>
-        <p:nvSpPr>
-          <p:cNvPr id="35" name="Shape 33"/>
-          <p:cNvSpPr/>
-          <p:nvPr/>
-        </p:nvSpPr>
-        <p:spPr>
-          <a:xfrm>
-            <a:off x="5120640" y="2953512"/>
-            <a:ext cx="658368" cy="228600"/>
-          </a:xfrm>
-          <a:prstGeom prst="rect">
-            <a:avLst/>
-          </a:prstGeom>
-          <a:solidFill>
-            <a:srgbClr val="DCFCE7"/>
-          </a:solidFill>
-          <a:ln/>
-        </p:spPr>
-      </p:sp>
-      <p:sp>
-        <p:nvSpPr>
-          <p:cNvPr id="36" name="Text 34"/>
-          <p:cNvSpPr/>
-          <p:nvPr/>
-        </p:nvSpPr>
-        <p:spPr>
-          <a:xfrm>
-            <a:off x="5120640" y="2953512"/>
-            <a:ext cx="658368" cy="228600"/>
-          </a:xfrm>
-          <a:prstGeom prst="rect">
-            <a:avLst/>
-          </a:prstGeom>
-          <a:noFill/>
-          <a:ln/>
-        </p:spPr>
-        <p:txBody>
-          <a:bodyPr wrap="square" lIns="0" tIns="0" rIns="0" bIns="0" rtlCol="0" anchor="ctr"/>
-          <a:lstStyle/>
-          <a:p>
-            <a:pPr algn="ctr" indent="0" marL="0">
-              <a:buNone/>
-            </a:pPr>
-            <a:r>
-              <a:rPr lang="en-US" sz="900" b="1" dirty="0">
-                <a:solidFill>
-                  <a:srgbClr val="16A34A"/>
-                </a:solidFill>
-                <a:latin typeface="Arial" pitchFamily="34" charset="0"/>
-                <a:ea typeface="Arial" pitchFamily="34" charset="-122"/>
-                <a:cs typeface="Arial" pitchFamily="34" charset="-120"/>
-              </a:rPr>
-              <a:t>10件+</a:t>
-            </a:r>
-            <a:endParaRPr lang="en-US" sz="900" dirty="0"/>
-          </a:p>
-        </p:txBody>
-      </p:sp>
-      <p:sp>
-        <p:nvSpPr>
-          <p:cNvPr id="37" name="Text 35"/>
-          <p:cNvSpPr/>
-          <p:nvPr/>
-        </p:nvSpPr>
-        <p:spPr>
-          <a:xfrm>
-            <a:off x="3429000" y="2953512"/>
-            <a:ext cx="1645920" cy="274320"/>
-          </a:xfrm>
-          <a:prstGeom prst="rect">
-            <a:avLst/>
-          </a:prstGeom>
-          <a:noFill/>
-          <a:ln/>
-        </p:spPr>
-        <p:txBody>
-          <a:bodyPr wrap="square" lIns="0" tIns="0" rIns="0" bIns="0" rtlCol="0" anchor="ctr"/>
-          <a:lstStyle/>
-          <a:p>
-            <a:pPr indent="0" marL="0">
-              <a:buNone/>
-            </a:pPr>
-            <a:r>
-              <a:rPr lang="en-US" sz="1300" b="1" dirty="0">
-                <a:solidFill>
-                  <a:srgbClr val="1A2744"/>
-                </a:solidFill>
-                <a:latin typeface="Arial" pitchFamily="34" charset="0"/>
-                <a:ea typeface="Arial" pitchFamily="34" charset="-122"/>
-                <a:cs typeface="Arial" pitchFamily="34" charset="-120"/>
-              </a:rPr>
-              <a:t>清潔さ・清掃</a:t>
-            </a:r>
-            <a:endParaRPr lang="en-US" sz="1300" dirty="0"/>
-          </a:p>
-        </p:txBody>
-      </p:sp>
-      <p:sp>
-        <p:nvSpPr>
-          <p:cNvPr id="38" name="Text 36"/>
-          <p:cNvSpPr/>
-          <p:nvPr/>
-        </p:nvSpPr>
-        <p:spPr>
-          <a:xfrm>
-            <a:off x="3429000" y="3246120"/>
-            <a:ext cx="2377440" cy="365760"/>
-          </a:xfrm>
-          <a:prstGeom prst="rect">
-            <a:avLst/>
-          </a:prstGeom>
-          <a:noFill/>
-          <a:ln/>
-        </p:spPr>
-        <p:txBody>
-          <a:bodyPr wrap="square" lIns="0" tIns="0" rIns="0" bIns="0" rtlCol="0" anchor="ctr"/>
-          <a:lstStyle/>
-          <a:p>
-            <a:pPr indent="0" marL="0">
-              <a:buNone/>
-            </a:pPr>
-            <a:r>
-              <a:rPr lang="en-US" sz="900" dirty="0">
-                <a:solidFill>
-                  <a:srgbClr val="64748B"/>
-                </a:solidFill>
-                <a:latin typeface="Arial" pitchFamily="34" charset="0"/>
-                <a:ea typeface="Arial" pitchFamily="34" charset="-122"/>
-                <a:cs typeface="Arial" pitchFamily="34" charset="-120"/>
-              </a:rPr>
-              <a:t>トイレは写真で見るほど清潔ではなく、チェックインした時には床に虫がいて、悪臭もしました</a:t>
-            </a:r>
-            <a:endParaRPr lang="en-US" sz="900" dirty="0"/>
-          </a:p>
-        </p:txBody>
-      </p:sp>
-      <p:sp>
-        <p:nvSpPr>
-          <p:cNvPr id="39" name="Text 37"/>
-          <p:cNvSpPr/>
-          <p:nvPr/>
-        </p:nvSpPr>
-        <p:spPr>
-          <a:xfrm>
-            <a:off x="3429000" y="3657600"/>
-            <a:ext cx="2377440" cy="640080"/>
-          </a:xfrm>
-          <a:prstGeom prst="rect">
-            <a:avLst/>
-          </a:prstGeom>
-          <a:noFill/>
-          <a:ln/>
-        </p:spPr>
-        <p:txBody>
-          <a:bodyPr wrap="square" lIns="0" tIns="0" rIns="0" bIns="0" rtlCol="0" anchor="ctr"/>
-          <a:lstStyle/>
-          <a:p>
-            <a:pPr indent="0" marL="0">
-              <a:buNone/>
-            </a:pPr>
-            <a:r>
-              <a:rPr lang="en-US" sz="900" i="1" dirty="0">
-                <a:solidFill>
-                  <a:srgbClr val="3B7DD8"/>
-                </a:solidFill>
-                <a:latin typeface="Arial" pitchFamily="34" charset="0"/>
-                <a:ea typeface="Arial" pitchFamily="34" charset="-122"/>
-                <a:cs typeface="Arial" pitchFamily="34" charset="-120"/>
-              </a:rPr>
-              <a:t>「新しいホテルではありませんが、とても清潔で、朝食も美味しかったです」</a:t>
             </a:r>
             <a:endParaRPr lang="en-US" sz="900" dirty="0"/>
           </a:p>
@@ -12337,7 +12337,7 @@
                           <a:ea typeface="Arial" pitchFamily="34" charset="-122"/>
                           <a:cs typeface="Arial" pitchFamily="34" charset="-120"/>
                         </a:rPr>
-                        <a:t>部屋の広さはちょうど良いのですが、設備は少し古めです</a:t>
+                        <a:t>호텔이 전체적으로 오래되었지만 청소부분이나 객실상태는 깔끔한편이었고 무엇보다 위치가 하카타역바로앞이라 ...</a:t>
                       </a:r>
                       <a:endParaRPr lang="en-US" sz="900" dirty="0">
                         <a:latin typeface="Arial" charset="0"/>
@@ -12405,7 +12405,7 @@
                           <a:ea typeface="Arial" pitchFamily="34" charset="-122"/>
                           <a:cs typeface="Arial" pitchFamily="34" charset="-120"/>
                         </a:rPr>
-                        <a:t>14件</a:t>
+                        <a:t>15件</a:t>
                       </a:r>
                       <a:endParaRPr lang="en-US" sz="900" dirty="0">
                         <a:latin typeface="Arial" charset="0"/>
@@ -12543,7 +12543,7 @@
                           <a:ea typeface="Arial" pitchFamily="34" charset="-122"/>
                           <a:cs typeface="Arial" pitchFamily="34" charset="-120"/>
                         </a:rPr>
-                        <a:t>エアコン・空調</a:t>
+                        <a:t>浴室・水回り</a:t>
                       </a:r>
                       <a:endParaRPr lang="en-US" sz="900" dirty="0">
                         <a:latin typeface="Arial" charset="0"/>
@@ -12611,7 +12611,7 @@
                           <a:ea typeface="Arial" pitchFamily="34" charset="-122"/>
                           <a:cs typeface="Arial" pitchFamily="34" charset="-120"/>
                         </a:rPr>
-                        <a:t>Too crowded at the breakfast place</a:t>
+                        <a:t>部屋は広いが浴室が狭かった</a:t>
                       </a:r>
                       <a:endParaRPr lang="en-US" sz="900" dirty="0">
                         <a:latin typeface="Arial" charset="0"/>
@@ -12817,7 +12817,7 @@
                           <a:ea typeface="Arial" pitchFamily="34" charset="-122"/>
                           <a:cs typeface="Arial" pitchFamily="34" charset="-120"/>
                         </a:rPr>
-                        <a:t>浴室・水回り</a:t>
+                        <a:t>エアコン・空調</a:t>
                       </a:r>
                       <a:endParaRPr lang="en-US" sz="900" dirty="0">
                         <a:latin typeface="Arial" charset="0"/>
@@ -12885,7 +12885,7 @@
                           <a:ea typeface="Arial" pitchFamily="34" charset="-122"/>
                           <a:cs typeface="Arial" pitchFamily="34" charset="-120"/>
                         </a:rPr>
-                        <a:t>駅、地下鉄、バスターミナル、コンビニ、地下街、スタバ、飲食店</a:t>
+                        <a:t>Too crowded at the breakfast place</a:t>
                       </a:r>
                       <a:endParaRPr lang="en-US" sz="900" dirty="0">
                         <a:latin typeface="Arial" charset="0"/>
@@ -12953,7 +12953,7 @@
                           <a:ea typeface="Arial" pitchFamily="34" charset="-122"/>
                           <a:cs typeface="Arial" pitchFamily="34" charset="-120"/>
                         </a:rPr>
-                        <a:t>13件</a:t>
+                        <a:t>14件</a:t>
                       </a:r>
                       <a:endParaRPr lang="en-US" sz="900" dirty="0">
                         <a:latin typeface="Arial" charset="0"/>
@@ -13365,7 +13365,7 @@
                           <a:ea typeface="Arial" pitchFamily="34" charset="-122"/>
                           <a:cs typeface="Arial" pitchFamily="34" charset="-120"/>
                         </a:rPr>
-                        <a:t>清掃不備</a:t>
+                        <a:t>部屋の狭さ</a:t>
                       </a:r>
                       <a:endParaRPr lang="en-US" sz="900" dirty="0">
                         <a:latin typeface="Arial" charset="0"/>
@@ -13433,7 +13433,7 @@
                           <a:ea typeface="Arial" pitchFamily="34" charset="-122"/>
                           <a:cs typeface="Arial" pitchFamily="34" charset="-120"/>
                         </a:rPr>
-                        <a:t>水まわりが、正直汚い……</a:t>
+                        <a:t>ロビーも狭い</a:t>
                       </a:r>
                       <a:endParaRPr lang="en-US" sz="900" dirty="0">
                         <a:latin typeface="Arial" charset="0"/>
@@ -13639,7 +13639,7 @@
                           <a:ea typeface="Arial" pitchFamily="34" charset="-122"/>
                           <a:cs typeface="Arial" pitchFamily="34" charset="-120"/>
                         </a:rPr>
-                        <a:t>部屋の狭さ</a:t>
+                        <a:t>清掃不備</a:t>
                       </a:r>
                       <a:endParaRPr lang="en-US" sz="900" dirty="0">
                         <a:latin typeface="Arial" charset="0"/>
@@ -13707,7 +13707,7 @@
                           <a:ea typeface="Arial" pitchFamily="34" charset="-122"/>
                           <a:cs typeface="Arial" pitchFamily="34" charset="-120"/>
                         </a:rPr>
-                        <a:t>朝食は会場が狭いのもあり、整列できないのか大人、子供もルール違反多く、大変</a:t>
+                        <a:t>水まわりが、正直汚い……</a:t>
                       </a:r>
                       <a:endParaRPr lang="en-US" sz="900" dirty="0">
                         <a:latin typeface="Arial" charset="0"/>
@@ -13775,7 +13775,7 @@
                           <a:ea typeface="Arial" pitchFamily="34" charset="-122"/>
                           <a:cs typeface="Arial" pitchFamily="34" charset="-120"/>
                         </a:rPr>
-                        <a:t>5件</a:t>
+                        <a:t>6件</a:t>
                       </a:r>
                       <a:endParaRPr lang="en-US" sz="900" dirty="0">
                         <a:latin typeface="Arial" charset="0"/>

--- a/納品レポート/ホテル別レポート/comfort_hakata_口コミ分析レポート.pptx
+++ b/納品レポート/ホテル別レポート/comfort_hakata_口コミ分析レポート.pptx
@@ -2812,7 +2812,7 @@
                 <a:ea typeface="Arial" pitchFamily="34" charset="-122"/>
                 <a:cs typeface="Arial" pitchFamily="34" charset="-120"/>
               </a:rPr>
-              <a:t>作成日：2026年4月7日</a:t>
+              <a:t>作成日：2026年4月8日</a:t>
             </a:r>
             <a:endParaRPr lang="en-US" sz="1000" dirty="0"/>
           </a:p>

--- a/納品レポート/ホテル別レポート/comfort_hakata_口コミ分析レポート.pptx
+++ b/納品レポート/ホテル別レポート/comfort_hakata_口コミ分析レポート.pptx
@@ -2812,7 +2812,7 @@
                 <a:ea typeface="Arial" pitchFamily="34" charset="-122"/>
                 <a:cs typeface="Arial" pitchFamily="34" charset="-120"/>
               </a:rPr>
-              <a:t>作成日：2026年4月10日</a:t>
+              <a:t>作成日：2026年4月11日</a:t>
             </a:r>
             <a:endParaRPr lang="en-US" sz="1000" dirty="0"/>
           </a:p>

--- a/納品レポート/ホテル別レポート/comfort_hakata_口コミ分析レポート.pptx
+++ b/納品レポート/ホテル別レポート/comfort_hakata_口コミ分析レポート.pptx
@@ -2812,7 +2812,7 @@
                 <a:ea typeface="Arial" pitchFamily="34" charset="-122"/>
                 <a:cs typeface="Arial" pitchFamily="34" charset="-120"/>
               </a:rPr>
-              <a:t>作成日：2026年4月11日</a:t>
+              <a:t>作成日：2026年4月13日</a:t>
             </a:r>
             <a:endParaRPr lang="en-US" sz="1000" dirty="0"/>
           </a:p>

--- a/納品レポート/ホテル別レポート/comfort_hakata_口コミ分析レポート.pptx
+++ b/納品レポート/ホテル別レポート/comfort_hakata_口コミ分析レポート.pptx
@@ -2812,7 +2812,7 @@
                 <a:ea typeface="Arial" pitchFamily="34" charset="-122"/>
                 <a:cs typeface="Arial" pitchFamily="34" charset="-120"/>
               </a:rPr>
-              <a:t>作成日：2026年4月13日</a:t>
+              <a:t>作成日：2026年4月15日</a:t>
             </a:r>
             <a:endParaRPr lang="en-US" sz="1000" dirty="0"/>
           </a:p>
@@ -12679,7 +12679,7 @@
                           <a:ea typeface="Arial" pitchFamily="34" charset="-122"/>
                           <a:cs typeface="Arial" pitchFamily="34" charset="-120"/>
                         </a:rPr>
-                        <a:t>10件</a:t>
+                        <a:t>9件</a:t>
                       </a:r>
                       <a:endParaRPr lang="en-US" sz="900" dirty="0">
                         <a:latin typeface="Arial" charset="0"/>

--- a/納品レポート/ホテル別レポート/comfort_hakata_口コミ分析レポート.pptx
+++ b/納品レポート/ホテル別レポート/comfort_hakata_口コミ分析レポート.pptx
@@ -183,16 +183,16 @@
                     <c:v>Trip.com</c:v>
                   </c:pt>
                   <c:pt idx="1">
+                    <c:v>じゃらん</c:v>
+                  </c:pt>
+                  <c:pt idx="2">
                     <c:v>Booking.com</c:v>
                   </c:pt>
-                  <c:pt idx="2">
-                    <c:v>Google</c:v>
-                  </c:pt>
                   <c:pt idx="3">
-                    <c:v>じゃらん</c:v>
+                    <c:v>楽天トラベル</c:v>
                   </c:pt>
                   <c:pt idx="4">
-                    <c:v>楽天トラベル</c:v>
+                    <c:v>Google</c:v>
                   </c:pt>
                 </c:lvl>
               </c:multiLvlStrCache>
@@ -205,19 +205,19 @@
                 <c:formatCode>General</c:formatCode>
                 <c:ptCount val="5"/>
                 <c:pt idx="0">
-                  <c:v>9.04</c:v>
+                  <c:v>9.03</c:v>
                 </c:pt>
                 <c:pt idx="1">
-                  <c:v>6.97</c:v>
+                  <c:v>8</c:v>
                 </c:pt>
                 <c:pt idx="2">
-                  <c:v>6.97</c:v>
+                  <c:v>7</c:v>
                 </c:pt>
                 <c:pt idx="3">
-                  <c:v>6.89</c:v>
+                  <c:v>6.67</c:v>
                 </c:pt>
                 <c:pt idx="4">
-                  <c:v>6</c:v>
+                  <c:v>6.33</c:v>
                 </c:pt>
               </c:numCache>
             </c:numRef>
@@ -560,13 +560,13 @@
               <c:numCache>
                 <c:ptCount val="3"/>
                 <c:pt idx="0">
-                  <c:v>89</c:v>
+                  <c:v>49</c:v>
                 </c:pt>
                 <c:pt idx="1">
-                  <c:v>35</c:v>
+                  <c:v>13</c:v>
                 </c:pt>
                 <c:pt idx="2">
-                  <c:v>16</c:v>
+                  <c:v>8</c:v>
                 </c:pt>
               </c:numCache>
             </c:numRef>
@@ -773,22 +773,11 @@
               <a:effectLst/>
             </c:spPr>
           </c:dPt>
-          <c:dPt>
-            <c:idx val="9"/>
-            <c:invertIfNegative val="0"/>
-            <c:bubble3D val="0"/>
-            <c:spPr>
-              <a:solidFill>
-                <a:srgbClr val="DC2626"/>
-              </a:solidFill>
-              <a:effectLst/>
-            </c:spPr>
-          </c:dPt>
           <c:cat>
             <c:multiLvlStrRef>
-              <c:f>Sheet1!$A$2:$A$11</c:f>
+              <c:f>Sheet1!$A$2:$A$10</c:f>
               <c:multiLvlStrCache>
-                <c:ptCount val="10"/>
+                <c:ptCount val="9"/>
                 <c:lvl>
                   <c:pt idx="0">
                     <c:v>10点</c:v>
@@ -817,48 +806,42 @@
                   <c:pt idx="8">
                     <c:v>2点</c:v>
                   </c:pt>
-                  <c:pt idx="9">
-                    <c:v>1点</c:v>
-                  </c:pt>
                 </c:lvl>
               </c:multiLvlStrCache>
             </c:multiLvlStrRef>
           </c:cat>
           <c:val>
             <c:numRef>
-              <c:f>Sheet1!$B$2:$B$11</c:f>
+              <c:f>Sheet1!$B$2:$B$10</c:f>
               <c:numCache>
                 <c:formatCode>General</c:formatCode>
-                <c:ptCount val="10"/>
+                <c:ptCount val="9"/>
                 <c:pt idx="0">
-                  <c:v>45</c:v>
+                  <c:v>23</c:v>
                 </c:pt>
                 <c:pt idx="1">
-                  <c:v>13</c:v>
+                  <c:v>7</c:v>
                 </c:pt>
                 <c:pt idx="2">
-                  <c:v>31</c:v>
+                  <c:v>19</c:v>
                 </c:pt>
                 <c:pt idx="3">
-                  <c:v>9</c:v>
+                  <c:v>4</c:v>
                 </c:pt>
                 <c:pt idx="4">
-                  <c:v>22</c:v>
+                  <c:v>6</c:v>
                 </c:pt>
                 <c:pt idx="5">
-                  <c:v>4</c:v>
+                  <c:v>3</c:v>
                 </c:pt>
                 <c:pt idx="6">
-                  <c:v>9</c:v>
+                  <c:v>3</c:v>
                 </c:pt>
                 <c:pt idx="7">
-                  <c:v>3</c:v>
+                  <c:v>2</c:v>
                 </c:pt>
                 <c:pt idx="8">
                   <c:v>3</c:v>
-                </c:pt>
-                <c:pt idx="9">
-                  <c:v>1</c:v>
                 </c:pt>
               </c:numCache>
             </c:numRef>
@@ -2789,7 +2772,7 @@
                 <a:ea typeface="Arial" pitchFamily="34" charset="-122"/>
                 <a:cs typeface="Arial" pitchFamily="34" charset="-120"/>
               </a:rPr>
-              <a:t>分析対象期間：2026年2月〜3月</a:t>
+              <a:t>分析対象期間：2026年3月</a:t>
             </a:r>
             <a:endParaRPr lang="en-US" sz="1000" dirty="0"/>
           </a:p>
@@ -2809,7 +2792,7 @@
                 <a:ea typeface="Arial" pitchFamily="34" charset="-122"/>
                 <a:cs typeface="Arial" pitchFamily="34" charset="-120"/>
               </a:rPr>
-              <a:t>レビュー総数：140件（5サイト）</a:t>
+              <a:t>レビュー総数：70件（5サイト）</a:t>
             </a:r>
             <a:endParaRPr lang="en-US" sz="1000" dirty="0"/>
           </a:p>
@@ -2829,7 +2812,7 @@
                 <a:ea typeface="Arial" pitchFamily="34" charset="-122"/>
                 <a:cs typeface="Arial" pitchFamily="34" charset="-120"/>
               </a:rPr>
-              <a:t>作成日：2026年4月16日</a:t>
+              <a:t>作成日：2026年4月20日</a:t>
             </a:r>
             <a:endParaRPr lang="en-US" sz="1000" dirty="0"/>
           </a:p>
@@ -3375,7 +3358,7 @@
                           <a:ea typeface="Arial" pitchFamily="34" charset="-122"/>
                           <a:cs typeface="Arial" pitchFamily="34" charset="-120"/>
                         </a:rPr>
-                        <a:t>7.73点</a:t>
+                        <a:t>7.83点</a:t>
                       </a:r>
                       <a:endParaRPr lang="en-US" sz="1000" dirty="0">
                         <a:latin typeface="Arial" charset="0"/>
@@ -3443,7 +3426,7 @@
                           <a:ea typeface="Arial" pitchFamily="34" charset="-122"/>
                           <a:cs typeface="Arial" pitchFamily="34" charset="-120"/>
                         </a:rPr>
-                        <a:t>8.2点以上</a:t>
+                        <a:t>8.3点以上</a:t>
                       </a:r>
                       <a:endParaRPr lang="en-US" sz="1000" dirty="0">
                         <a:latin typeface="Arial" charset="0"/>
@@ -3649,7 +3632,7 @@
                           <a:ea typeface="Arial" pitchFamily="34" charset="-122"/>
                           <a:cs typeface="Arial" pitchFamily="34" charset="-120"/>
                         </a:rPr>
-                        <a:t>63.6%</a:t>
+                        <a:t>70.0%</a:t>
                       </a:r>
                       <a:endParaRPr lang="en-US" sz="1000" dirty="0">
                         <a:latin typeface="Arial" charset="0"/>
@@ -3717,7 +3700,7 @@
                           <a:ea typeface="Arial" pitchFamily="34" charset="-122"/>
                           <a:cs typeface="Arial" pitchFamily="34" charset="-120"/>
                         </a:rPr>
-                        <a:t>74%以上</a:t>
+                        <a:t>75%以上</a:t>
                       </a:r>
                       <a:endParaRPr lang="en-US" sz="1000" dirty="0">
                         <a:latin typeface="Arial" charset="0"/>
@@ -4129,7 +4112,7 @@
                           <a:ea typeface="Arial" pitchFamily="34" charset="-122"/>
                           <a:cs typeface="Arial" pitchFamily="34" charset="-120"/>
                         </a:rPr>
-                        <a:t>楽天トラベル平均評価</a:t>
+                        <a:t>Google平均評価</a:t>
                       </a:r>
                       <a:endParaRPr lang="en-US" sz="1000" dirty="0">
                         <a:latin typeface="Arial" charset="0"/>
@@ -4197,7 +4180,7 @@
                           <a:ea typeface="Arial" pitchFamily="34" charset="-122"/>
                           <a:cs typeface="Arial" pitchFamily="34" charset="-120"/>
                         </a:rPr>
-                        <a:t>6.0点</a:t>
+                        <a:t>6.3点</a:t>
                       </a:r>
                       <a:endParaRPr lang="en-US" sz="1000" dirty="0">
                         <a:latin typeface="Arial" charset="0"/>
@@ -4265,7 +4248,7 @@
                           <a:ea typeface="Arial" pitchFamily="34" charset="-122"/>
                           <a:cs typeface="Arial" pitchFamily="34" charset="-120"/>
                         </a:rPr>
-                        <a:t>7.0点以上</a:t>
+                        <a:t>7.3点以上</a:t>
                       </a:r>
                       <a:endParaRPr lang="en-US" sz="1000" dirty="0">
                         <a:latin typeface="Arial" charset="0"/>
@@ -4745,7 +4728,7 @@
                           <a:ea typeface="Arial" pitchFamily="34" charset="-122"/>
                           <a:cs typeface="Arial" pitchFamily="34" charset="-120"/>
                         </a:rPr>
-                        <a:t>約23件/期間</a:t>
+                        <a:t>約11件/期間</a:t>
                       </a:r>
                       <a:endParaRPr lang="en-US" sz="1000" dirty="0">
                         <a:latin typeface="Arial" charset="0"/>
@@ -4813,7 +4796,7 @@
                           <a:ea typeface="Arial" pitchFamily="34" charset="-122"/>
                           <a:cs typeface="Arial" pitchFamily="34" charset="-120"/>
                         </a:rPr>
-                        <a:t>11件以下</a:t>
+                        <a:t>5件以下</a:t>
                       </a:r>
                       <a:endParaRPr lang="en-US" sz="1000" dirty="0">
                         <a:latin typeface="Arial" charset="0"/>
@@ -5384,7 +5367,7 @@
                 <a:ea typeface="Arial" pitchFamily="34" charset="-122"/>
                 <a:cs typeface="Arial" pitchFamily="34" charset="-120"/>
               </a:rPr>
-              <a:t>7.73</a:t>
+              <a:t>7.83</a:t>
             </a:r>
             <a:endParaRPr lang="en-US" sz="3200" dirty="0"/>
           </a:p>
@@ -5509,7 +5492,7 @@
                 <a:ea typeface="Arial" pitchFamily="34" charset="-122"/>
                 <a:cs typeface="Arial" pitchFamily="34" charset="-120"/>
               </a:rPr>
-              <a:t>63.6%</a:t>
+              <a:t>70.0%</a:t>
             </a:r>
             <a:endParaRPr lang="en-US" sz="3200" dirty="0"/>
           </a:p>
@@ -5759,7 +5742,7 @@
                 <a:ea typeface="Arial" pitchFamily="34" charset="-122"/>
                 <a:cs typeface="Arial" pitchFamily="34" charset="-120"/>
               </a:rPr>
-              <a:t>140件</a:t>
+              <a:t>70件</a:t>
             </a:r>
             <a:endParaRPr lang="en-US" sz="3200" dirty="0"/>
           </a:p>
@@ -6568,7 +6551,7 @@
                 <a:ea typeface="Arial" pitchFamily="34" charset="-122"/>
                 <a:cs typeface="Arial" pitchFamily="34" charset="-120"/>
               </a:rPr>
-              <a:t>7.73</a:t>
+              <a:t>7.83</a:t>
             </a:r>
             <a:endParaRPr lang="en-US" sz="3200" dirty="0"/>
           </a:p>
@@ -6693,7 +6676,7 @@
                 <a:ea typeface="Arial" pitchFamily="34" charset="-122"/>
                 <a:cs typeface="Arial" pitchFamily="34" charset="-120"/>
               </a:rPr>
-              <a:t>63.6%</a:t>
+              <a:t>70.0%</a:t>
             </a:r>
             <a:endParaRPr lang="en-US" sz="3200" dirty="0"/>
           </a:p>
@@ -6943,7 +6926,7 @@
                 <a:ea typeface="Arial" pitchFamily="34" charset="-122"/>
                 <a:cs typeface="Arial" pitchFamily="34" charset="-120"/>
               </a:rPr>
-              <a:t>140件</a:t>
+              <a:t>70件</a:t>
             </a:r>
             <a:endParaRPr lang="en-US" sz="3200" dirty="0"/>
           </a:p>
@@ -7364,7 +7347,7 @@
                 <a:ea typeface="Arial" pitchFamily="34" charset="-122"/>
                 <a:cs typeface="Arial" pitchFamily="34" charset="-120"/>
               </a:rPr>
-              <a:t>Trip.com(9.04)が最高スコア。</a:t>
+              <a:t>Trip.com(9.03)が最高スコア。</a:t>
             </a:r>
             <a:endParaRPr lang="en-US" sz="1100" dirty="0"/>
           </a:p>
@@ -7413,7 +7396,7 @@
                 <a:ea typeface="Arial" pitchFamily="34" charset="-122"/>
                 <a:cs typeface="Arial" pitchFamily="34" charset="-120"/>
               </a:rPr>
-              <a:t>楽天トラベル(6.0)が相対的に低い。口コミ返信の強化が急務</a:t>
+              <a:t>Google(6.3)が相対的に低い。口コミ返信の強化が急務</a:t>
             </a:r>
             <a:endParaRPr lang="en-US" sz="1100" dirty="0"/>
           </a:p>
@@ -7922,7 +7905,7 @@
                           <a:ea typeface="Arial" pitchFamily="34" charset="-122"/>
                           <a:cs typeface="Arial" pitchFamily="34" charset="-120"/>
                         </a:rPr>
-                        <a:t>54</a:t>
+                        <a:t>31</a:t>
                       </a:r>
                       <a:endParaRPr lang="en-US" sz="900" dirty="0">
                         <a:latin typeface="Arial" charset="0"/>
@@ -7990,7 +7973,7 @@
                           <a:ea typeface="Arial" pitchFamily="34" charset="-122"/>
                           <a:cs typeface="Arial" pitchFamily="34" charset="-120"/>
                         </a:rPr>
-                        <a:t>9.04</a:t>
+                        <a:t>9.03</a:t>
                       </a:r>
                       <a:endParaRPr lang="en-US" sz="900" dirty="0">
                         <a:latin typeface="Arial" charset="0"/>
@@ -8126,7 +8109,7 @@
                           <a:ea typeface="Arial" pitchFamily="34" charset="-122"/>
                           <a:cs typeface="Arial" pitchFamily="34" charset="-120"/>
                         </a:rPr>
-                        <a:t>9.04</a:t>
+                        <a:t>9.03</a:t>
                       </a:r>
                       <a:endParaRPr lang="en-US" sz="900" dirty="0">
                         <a:latin typeface="Arial" charset="0"/>
@@ -8174,6 +8157,348 @@
                     </a:lnB>
                     <a:solidFill>
                       <a:srgbClr val="E8EFF8"/>
+                    </a:solidFill>
+                  </a:tcPr>
+                </a:tc>
+              </a:tr>
+              <a:tr h="201168">
+                <a:tc>
+                  <a:txBody>
+                    <a:bodyPr/>
+                    <a:lstStyle/>
+                    <a:p>
+                      <a:pPr algn="ctr" indent="0" marL="0">
+                        <a:buNone/>
+                      </a:pPr>
+                      <a:r>
+                        <a:rPr lang="en-US" sz="900" dirty="0">
+                          <a:solidFill>
+                            <a:srgbClr val="000000"/>
+                          </a:solidFill>
+                          <a:latin typeface="Arial" pitchFamily="34" charset="0"/>
+                          <a:ea typeface="Arial" pitchFamily="34" charset="-122"/>
+                          <a:cs typeface="Arial" pitchFamily="34" charset="-120"/>
+                        </a:rPr>
+                        <a:t>じゃらん</a:t>
+                      </a:r>
+                      <a:endParaRPr lang="en-US" sz="900" dirty="0">
+                        <a:latin typeface="Arial" charset="0"/>
+                        <a:ea typeface="Arial" charset="0"/>
+                        <a:cs typeface="Arial" charset="0"/>
+                      </a:endParaRPr>
+                    </a:p>
+                  </a:txBody>
+                  <a:tcPr marL="91440" marR="91440" marT="45720" marB="45720">
+                    <a:lnL w="6350" cap="flat" cmpd="sng" algn="ctr">
+                      <a:solidFill>
+                        <a:srgbClr val="CBD5E1"/>
+                      </a:solidFill>
+                      <a:prstDash val="solid"/>
+                      <a:round/>
+                      <a:headEnd type="none" w="med" len="med"/>
+                      <a:tailEnd type="none" w="med" len="med"/>
+                    </a:lnL>
+                    <a:lnR w="6350" cap="flat" cmpd="sng" algn="ctr">
+                      <a:solidFill>
+                        <a:srgbClr val="CBD5E1"/>
+                      </a:solidFill>
+                      <a:prstDash val="solid"/>
+                      <a:round/>
+                      <a:headEnd type="none" w="med" len="med"/>
+                      <a:tailEnd type="none" w="med" len="med"/>
+                    </a:lnR>
+                    <a:lnT w="6350" cap="flat" cmpd="sng" algn="ctr">
+                      <a:solidFill>
+                        <a:srgbClr val="CBD5E1"/>
+                      </a:solidFill>
+                      <a:prstDash val="solid"/>
+                      <a:round/>
+                      <a:headEnd type="none" w="med" len="med"/>
+                      <a:tailEnd type="none" w="med" len="med"/>
+                    </a:lnT>
+                    <a:lnB w="6350" cap="flat" cmpd="sng" algn="ctr">
+                      <a:solidFill>
+                        <a:srgbClr val="CBD5E1"/>
+                      </a:solidFill>
+                      <a:prstDash val="solid"/>
+                      <a:round/>
+                      <a:headEnd type="none" w="med" len="med"/>
+                      <a:tailEnd type="none" w="med" len="med"/>
+                    </a:lnB>
+                    <a:solidFill>
+                      <a:srgbClr val="FFFFFF"/>
+                    </a:solidFill>
+                  </a:tcPr>
+                </a:tc>
+                <a:tc>
+                  <a:txBody>
+                    <a:bodyPr/>
+                    <a:lstStyle/>
+                    <a:p>
+                      <a:pPr algn="ctr" indent="0" marL="0">
+                        <a:buNone/>
+                      </a:pPr>
+                      <a:r>
+                        <a:rPr lang="en-US" sz="900" dirty="0">
+                          <a:solidFill>
+                            <a:srgbClr val="000000"/>
+                          </a:solidFill>
+                          <a:latin typeface="Arial" pitchFamily="34" charset="0"/>
+                          <a:ea typeface="Arial" pitchFamily="34" charset="-122"/>
+                          <a:cs typeface="Arial" pitchFamily="34" charset="-120"/>
+                        </a:rPr>
+                        <a:t>4</a:t>
+                      </a:r>
+                      <a:endParaRPr lang="en-US" sz="900" dirty="0">
+                        <a:latin typeface="Arial" charset="0"/>
+                        <a:ea typeface="Arial" charset="0"/>
+                        <a:cs typeface="Arial" charset="0"/>
+                      </a:endParaRPr>
+                    </a:p>
+                  </a:txBody>
+                  <a:tcPr marL="91440" marR="91440" marT="45720" marB="45720">
+                    <a:lnL w="6350" cap="flat" cmpd="sng" algn="ctr">
+                      <a:solidFill>
+                        <a:srgbClr val="CBD5E1"/>
+                      </a:solidFill>
+                      <a:prstDash val="solid"/>
+                      <a:round/>
+                      <a:headEnd type="none" w="med" len="med"/>
+                      <a:tailEnd type="none" w="med" len="med"/>
+                    </a:lnL>
+                    <a:lnR w="6350" cap="flat" cmpd="sng" algn="ctr">
+                      <a:solidFill>
+                        <a:srgbClr val="CBD5E1"/>
+                      </a:solidFill>
+                      <a:prstDash val="solid"/>
+                      <a:round/>
+                      <a:headEnd type="none" w="med" len="med"/>
+                      <a:tailEnd type="none" w="med" len="med"/>
+                    </a:lnR>
+                    <a:lnT w="6350" cap="flat" cmpd="sng" algn="ctr">
+                      <a:solidFill>
+                        <a:srgbClr val="CBD5E1"/>
+                      </a:solidFill>
+                      <a:prstDash val="solid"/>
+                      <a:round/>
+                      <a:headEnd type="none" w="med" len="med"/>
+                      <a:tailEnd type="none" w="med" len="med"/>
+                    </a:lnT>
+                    <a:lnB w="6350" cap="flat" cmpd="sng" algn="ctr">
+                      <a:solidFill>
+                        <a:srgbClr val="CBD5E1"/>
+                      </a:solidFill>
+                      <a:prstDash val="solid"/>
+                      <a:round/>
+                      <a:headEnd type="none" w="med" len="med"/>
+                      <a:tailEnd type="none" w="med" len="med"/>
+                    </a:lnB>
+                    <a:solidFill>
+                      <a:srgbClr val="FFFFFF"/>
+                    </a:solidFill>
+                  </a:tcPr>
+                </a:tc>
+                <a:tc>
+                  <a:txBody>
+                    <a:bodyPr/>
+                    <a:lstStyle/>
+                    <a:p>
+                      <a:pPr algn="ctr" indent="0" marL="0">
+                        <a:buNone/>
+                      </a:pPr>
+                      <a:r>
+                        <a:rPr lang="en-US" sz="900" dirty="0">
+                          <a:solidFill>
+                            <a:srgbClr val="000000"/>
+                          </a:solidFill>
+                          <a:latin typeface="Arial" pitchFamily="34" charset="0"/>
+                          <a:ea typeface="Arial" pitchFamily="34" charset="-122"/>
+                          <a:cs typeface="Arial" pitchFamily="34" charset="-120"/>
+                        </a:rPr>
+                        <a:t>4</a:t>
+                      </a:r>
+                      <a:endParaRPr lang="en-US" sz="900" dirty="0">
+                        <a:latin typeface="Arial" charset="0"/>
+                        <a:ea typeface="Arial" charset="0"/>
+                        <a:cs typeface="Arial" charset="0"/>
+                      </a:endParaRPr>
+                    </a:p>
+                  </a:txBody>
+                  <a:tcPr marL="91440" marR="91440" marT="45720" marB="45720">
+                    <a:lnL w="6350" cap="flat" cmpd="sng" algn="ctr">
+                      <a:solidFill>
+                        <a:srgbClr val="CBD5E1"/>
+                      </a:solidFill>
+                      <a:prstDash val="solid"/>
+                      <a:round/>
+                      <a:headEnd type="none" w="med" len="med"/>
+                      <a:tailEnd type="none" w="med" len="med"/>
+                    </a:lnL>
+                    <a:lnR w="6350" cap="flat" cmpd="sng" algn="ctr">
+                      <a:solidFill>
+                        <a:srgbClr val="CBD5E1"/>
+                      </a:solidFill>
+                      <a:prstDash val="solid"/>
+                      <a:round/>
+                      <a:headEnd type="none" w="med" len="med"/>
+                      <a:tailEnd type="none" w="med" len="med"/>
+                    </a:lnR>
+                    <a:lnT w="6350" cap="flat" cmpd="sng" algn="ctr">
+                      <a:solidFill>
+                        <a:srgbClr val="CBD5E1"/>
+                      </a:solidFill>
+                      <a:prstDash val="solid"/>
+                      <a:round/>
+                      <a:headEnd type="none" w="med" len="med"/>
+                      <a:tailEnd type="none" w="med" len="med"/>
+                    </a:lnT>
+                    <a:lnB w="6350" cap="flat" cmpd="sng" algn="ctr">
+                      <a:solidFill>
+                        <a:srgbClr val="CBD5E1"/>
+                      </a:solidFill>
+                      <a:prstDash val="solid"/>
+                      <a:round/>
+                      <a:headEnd type="none" w="med" len="med"/>
+                      <a:tailEnd type="none" w="med" len="med"/>
+                    </a:lnB>
+                    <a:solidFill>
+                      <a:srgbClr val="FFFFFF"/>
+                    </a:solidFill>
+                  </a:tcPr>
+                </a:tc>
+                <a:tc>
+                  <a:txBody>
+                    <a:bodyPr/>
+                    <a:lstStyle/>
+                    <a:p>
+                      <a:pPr algn="ctr" indent="0" marL="0">
+                        <a:buNone/>
+                      </a:pPr>
+                      <a:r>
+                        <a:rPr lang="en-US" sz="900" dirty="0">
+                          <a:solidFill>
+                            <a:srgbClr val="000000"/>
+                          </a:solidFill>
+                          <a:latin typeface="Arial" pitchFamily="34" charset="0"/>
+                          <a:ea typeface="Arial" pitchFamily="34" charset="-122"/>
+                          <a:cs typeface="Arial" pitchFamily="34" charset="-120"/>
+                        </a:rPr>
+                        <a:t>/5 (×2)</a:t>
+                      </a:r>
+                      <a:endParaRPr lang="en-US" sz="900" dirty="0">
+                        <a:latin typeface="Arial" charset="0"/>
+                        <a:ea typeface="Arial" charset="0"/>
+                        <a:cs typeface="Arial" charset="0"/>
+                      </a:endParaRPr>
+                    </a:p>
+                  </a:txBody>
+                  <a:tcPr marL="91440" marR="91440" marT="45720" marB="45720">
+                    <a:lnL w="6350" cap="flat" cmpd="sng" algn="ctr">
+                      <a:solidFill>
+                        <a:srgbClr val="CBD5E1"/>
+                      </a:solidFill>
+                      <a:prstDash val="solid"/>
+                      <a:round/>
+                      <a:headEnd type="none" w="med" len="med"/>
+                      <a:tailEnd type="none" w="med" len="med"/>
+                    </a:lnL>
+                    <a:lnR w="6350" cap="flat" cmpd="sng" algn="ctr">
+                      <a:solidFill>
+                        <a:srgbClr val="CBD5E1"/>
+                      </a:solidFill>
+                      <a:prstDash val="solid"/>
+                      <a:round/>
+                      <a:headEnd type="none" w="med" len="med"/>
+                      <a:tailEnd type="none" w="med" len="med"/>
+                    </a:lnR>
+                    <a:lnT w="6350" cap="flat" cmpd="sng" algn="ctr">
+                      <a:solidFill>
+                        <a:srgbClr val="CBD5E1"/>
+                      </a:solidFill>
+                      <a:prstDash val="solid"/>
+                      <a:round/>
+                      <a:headEnd type="none" w="med" len="med"/>
+                      <a:tailEnd type="none" w="med" len="med"/>
+                    </a:lnT>
+                    <a:lnB w="6350" cap="flat" cmpd="sng" algn="ctr">
+                      <a:solidFill>
+                        <a:srgbClr val="CBD5E1"/>
+                      </a:solidFill>
+                      <a:prstDash val="solid"/>
+                      <a:round/>
+                      <a:headEnd type="none" w="med" len="med"/>
+                      <a:tailEnd type="none" w="med" len="med"/>
+                    </a:lnB>
+                    <a:solidFill>
+                      <a:srgbClr val="FFFFFF"/>
+                    </a:solidFill>
+                  </a:tcPr>
+                </a:tc>
+                <a:tc>
+                  <a:txBody>
+                    <a:bodyPr/>
+                    <a:lstStyle/>
+                    <a:p>
+                      <a:pPr algn="ctr" indent="0" marL="0">
+                        <a:buNone/>
+                      </a:pPr>
+                      <a:r>
+                        <a:rPr lang="en-US" sz="900" dirty="0">
+                          <a:solidFill>
+                            <a:srgbClr val="000000"/>
+                          </a:solidFill>
+                          <a:latin typeface="Arial" pitchFamily="34" charset="0"/>
+                          <a:ea typeface="Arial" pitchFamily="34" charset="-122"/>
+                          <a:cs typeface="Arial" pitchFamily="34" charset="-120"/>
+                        </a:rPr>
+                        <a:t>8</a:t>
+                      </a:r>
+                      <a:endParaRPr lang="en-US" sz="900" dirty="0">
+                        <a:latin typeface="Arial" charset="0"/>
+                        <a:ea typeface="Arial" charset="0"/>
+                        <a:cs typeface="Arial" charset="0"/>
+                      </a:endParaRPr>
+                    </a:p>
+                  </a:txBody>
+                  <a:tcPr marL="91440" marR="91440" marT="45720" marB="45720">
+                    <a:lnL w="6350" cap="flat" cmpd="sng" algn="ctr">
+                      <a:solidFill>
+                        <a:srgbClr val="CBD5E1"/>
+                      </a:solidFill>
+                      <a:prstDash val="solid"/>
+                      <a:round/>
+                      <a:headEnd type="none" w="med" len="med"/>
+                      <a:tailEnd type="none" w="med" len="med"/>
+                    </a:lnL>
+                    <a:lnR w="6350" cap="flat" cmpd="sng" algn="ctr">
+                      <a:solidFill>
+                        <a:srgbClr val="CBD5E1"/>
+                      </a:solidFill>
+                      <a:prstDash val="solid"/>
+                      <a:round/>
+                      <a:headEnd type="none" w="med" len="med"/>
+                      <a:tailEnd type="none" w="med" len="med"/>
+                    </a:lnR>
+                    <a:lnT w="6350" cap="flat" cmpd="sng" algn="ctr">
+                      <a:solidFill>
+                        <a:srgbClr val="CBD5E1"/>
+                      </a:solidFill>
+                      <a:prstDash val="solid"/>
+                      <a:round/>
+                      <a:headEnd type="none" w="med" len="med"/>
+                      <a:tailEnd type="none" w="med" len="med"/>
+                    </a:lnT>
+                    <a:lnB w="6350" cap="flat" cmpd="sng" algn="ctr">
+                      <a:solidFill>
+                        <a:srgbClr val="CBD5E1"/>
+                      </a:solidFill>
+                      <a:prstDash val="solid"/>
+                      <a:round/>
+                      <a:headEnd type="none" w="med" len="med"/>
+                      <a:tailEnd type="none" w="med" len="med"/>
+                    </a:lnB>
+                    <a:solidFill>
+                      <a:srgbClr val="FFFFFF"/>
                     </a:solidFill>
                   </a:tcPr>
                 </a:tc>
@@ -8243,7 +8568,7 @@
                       <a:tailEnd type="none" w="med" len="med"/>
                     </a:lnB>
                     <a:solidFill>
-                      <a:srgbClr val="FFFFFF"/>
+                      <a:srgbClr val="E8EFF8"/>
                     </a:solidFill>
                   </a:tcPr>
                 </a:tc>
@@ -8264,7 +8589,7 @@
                           <a:ea typeface="Arial" pitchFamily="34" charset="-122"/>
                           <a:cs typeface="Arial" pitchFamily="34" charset="-120"/>
                         </a:rPr>
-                        <a:t>39</a:t>
+                        <a:t>20</a:t>
                       </a:r>
                       <a:endParaRPr lang="en-US" sz="900" dirty="0">
                         <a:latin typeface="Arial" charset="0"/>
@@ -8311,7 +8636,7 @@
                       <a:tailEnd type="none" w="med" len="med"/>
                     </a:lnB>
                     <a:solidFill>
-                      <a:srgbClr val="FFFFFF"/>
+                      <a:srgbClr val="E8EFF8"/>
                     </a:solidFill>
                   </a:tcPr>
                 </a:tc>
@@ -8332,7 +8657,7 @@
                           <a:ea typeface="Arial" pitchFamily="34" charset="-122"/>
                           <a:cs typeface="Arial" pitchFamily="34" charset="-120"/>
                         </a:rPr>
-                        <a:t>6.97</a:t>
+                        <a:t>7</a:t>
                       </a:r>
                       <a:endParaRPr lang="en-US" sz="900" dirty="0">
                         <a:latin typeface="Arial" charset="0"/>
@@ -8379,7 +8704,7 @@
                       <a:tailEnd type="none" w="med" len="med"/>
                     </a:lnB>
                     <a:solidFill>
-                      <a:srgbClr val="FFFFFF"/>
+                      <a:srgbClr val="E8EFF8"/>
                     </a:solidFill>
                   </a:tcPr>
                 </a:tc>
@@ -8447,6 +8772,144 @@
                       <a:tailEnd type="none" w="med" len="med"/>
                     </a:lnB>
                     <a:solidFill>
+                      <a:srgbClr val="E8EFF8"/>
+                    </a:solidFill>
+                  </a:tcPr>
+                </a:tc>
+                <a:tc>
+                  <a:txBody>
+                    <a:bodyPr/>
+                    <a:lstStyle/>
+                    <a:p>
+                      <a:pPr algn="ctr" indent="0" marL="0">
+                        <a:buNone/>
+                      </a:pPr>
+                      <a:r>
+                        <a:rPr lang="en-US" sz="900" dirty="0">
+                          <a:solidFill>
+                            <a:srgbClr val="000000"/>
+                          </a:solidFill>
+                          <a:latin typeface="Arial" pitchFamily="34" charset="0"/>
+                          <a:ea typeface="Arial" pitchFamily="34" charset="-122"/>
+                          <a:cs typeface="Arial" pitchFamily="34" charset="-120"/>
+                        </a:rPr>
+                        <a:t>7</a:t>
+                      </a:r>
+                      <a:endParaRPr lang="en-US" sz="900" dirty="0">
+                        <a:latin typeface="Arial" charset="0"/>
+                        <a:ea typeface="Arial" charset="0"/>
+                        <a:cs typeface="Arial" charset="0"/>
+                      </a:endParaRPr>
+                    </a:p>
+                  </a:txBody>
+                  <a:tcPr marL="91440" marR="91440" marT="45720" marB="45720">
+                    <a:lnL w="6350" cap="flat" cmpd="sng" algn="ctr">
+                      <a:solidFill>
+                        <a:srgbClr val="CBD5E1"/>
+                      </a:solidFill>
+                      <a:prstDash val="solid"/>
+                      <a:round/>
+                      <a:headEnd type="none" w="med" len="med"/>
+                      <a:tailEnd type="none" w="med" len="med"/>
+                    </a:lnL>
+                    <a:lnR w="6350" cap="flat" cmpd="sng" algn="ctr">
+                      <a:solidFill>
+                        <a:srgbClr val="CBD5E1"/>
+                      </a:solidFill>
+                      <a:prstDash val="solid"/>
+                      <a:round/>
+                      <a:headEnd type="none" w="med" len="med"/>
+                      <a:tailEnd type="none" w="med" len="med"/>
+                    </a:lnR>
+                    <a:lnT w="6350" cap="flat" cmpd="sng" algn="ctr">
+                      <a:solidFill>
+                        <a:srgbClr val="CBD5E1"/>
+                      </a:solidFill>
+                      <a:prstDash val="solid"/>
+                      <a:round/>
+                      <a:headEnd type="none" w="med" len="med"/>
+                      <a:tailEnd type="none" w="med" len="med"/>
+                    </a:lnT>
+                    <a:lnB w="6350" cap="flat" cmpd="sng" algn="ctr">
+                      <a:solidFill>
+                        <a:srgbClr val="CBD5E1"/>
+                      </a:solidFill>
+                      <a:prstDash val="solid"/>
+                      <a:round/>
+                      <a:headEnd type="none" w="med" len="med"/>
+                      <a:tailEnd type="none" w="med" len="med"/>
+                    </a:lnB>
+                    <a:solidFill>
+                      <a:srgbClr val="E8EFF8"/>
+                    </a:solidFill>
+                  </a:tcPr>
+                </a:tc>
+              </a:tr>
+              <a:tr h="201168">
+                <a:tc>
+                  <a:txBody>
+                    <a:bodyPr/>
+                    <a:lstStyle/>
+                    <a:p>
+                      <a:pPr algn="ctr" indent="0" marL="0">
+                        <a:buNone/>
+                      </a:pPr>
+                      <a:r>
+                        <a:rPr lang="en-US" sz="900" dirty="0">
+                          <a:solidFill>
+                            <a:srgbClr val="000000"/>
+                          </a:solidFill>
+                          <a:latin typeface="Arial" pitchFamily="34" charset="0"/>
+                          <a:ea typeface="Arial" pitchFamily="34" charset="-122"/>
+                          <a:cs typeface="Arial" pitchFamily="34" charset="-120"/>
+                        </a:rPr>
+                        <a:t>楽天トラベル</a:t>
+                      </a:r>
+                      <a:endParaRPr lang="en-US" sz="900" dirty="0">
+                        <a:latin typeface="Arial" charset="0"/>
+                        <a:ea typeface="Arial" charset="0"/>
+                        <a:cs typeface="Arial" charset="0"/>
+                      </a:endParaRPr>
+                    </a:p>
+                  </a:txBody>
+                  <a:tcPr marL="91440" marR="91440" marT="45720" marB="45720">
+                    <a:lnL w="6350" cap="flat" cmpd="sng" algn="ctr">
+                      <a:solidFill>
+                        <a:srgbClr val="CBD5E1"/>
+                      </a:solidFill>
+                      <a:prstDash val="solid"/>
+                      <a:round/>
+                      <a:headEnd type="none" w="med" len="med"/>
+                      <a:tailEnd type="none" w="med" len="med"/>
+                    </a:lnL>
+                    <a:lnR w="6350" cap="flat" cmpd="sng" algn="ctr">
+                      <a:solidFill>
+                        <a:srgbClr val="CBD5E1"/>
+                      </a:solidFill>
+                      <a:prstDash val="solid"/>
+                      <a:round/>
+                      <a:headEnd type="none" w="med" len="med"/>
+                      <a:tailEnd type="none" w="med" len="med"/>
+                    </a:lnR>
+                    <a:lnT w="6350" cap="flat" cmpd="sng" algn="ctr">
+                      <a:solidFill>
+                        <a:srgbClr val="CBD5E1"/>
+                      </a:solidFill>
+                      <a:prstDash val="solid"/>
+                      <a:round/>
+                      <a:headEnd type="none" w="med" len="med"/>
+                      <a:tailEnd type="none" w="med" len="med"/>
+                    </a:lnT>
+                    <a:lnB w="6350" cap="flat" cmpd="sng" algn="ctr">
+                      <a:solidFill>
+                        <a:srgbClr val="CBD5E1"/>
+                      </a:solidFill>
+                      <a:prstDash val="solid"/>
+                      <a:round/>
+                      <a:headEnd type="none" w="med" len="med"/>
+                      <a:tailEnd type="none" w="med" len="med"/>
+                    </a:lnB>
+                    <a:solidFill>
                       <a:srgbClr val="FFFFFF"/>
                     </a:solidFill>
                   </a:tcPr>
@@ -8468,7 +8931,211 @@
                           <a:ea typeface="Arial" pitchFamily="34" charset="-122"/>
                           <a:cs typeface="Arial" pitchFamily="34" charset="-120"/>
                         </a:rPr>
-                        <a:t>6.97</a:t>
+                        <a:t>3</a:t>
+                      </a:r>
+                      <a:endParaRPr lang="en-US" sz="900" dirty="0">
+                        <a:latin typeface="Arial" charset="0"/>
+                        <a:ea typeface="Arial" charset="0"/>
+                        <a:cs typeface="Arial" charset="0"/>
+                      </a:endParaRPr>
+                    </a:p>
+                  </a:txBody>
+                  <a:tcPr marL="91440" marR="91440" marT="45720" marB="45720">
+                    <a:lnL w="6350" cap="flat" cmpd="sng" algn="ctr">
+                      <a:solidFill>
+                        <a:srgbClr val="CBD5E1"/>
+                      </a:solidFill>
+                      <a:prstDash val="solid"/>
+                      <a:round/>
+                      <a:headEnd type="none" w="med" len="med"/>
+                      <a:tailEnd type="none" w="med" len="med"/>
+                    </a:lnL>
+                    <a:lnR w="6350" cap="flat" cmpd="sng" algn="ctr">
+                      <a:solidFill>
+                        <a:srgbClr val="CBD5E1"/>
+                      </a:solidFill>
+                      <a:prstDash val="solid"/>
+                      <a:round/>
+                      <a:headEnd type="none" w="med" len="med"/>
+                      <a:tailEnd type="none" w="med" len="med"/>
+                    </a:lnR>
+                    <a:lnT w="6350" cap="flat" cmpd="sng" algn="ctr">
+                      <a:solidFill>
+                        <a:srgbClr val="CBD5E1"/>
+                      </a:solidFill>
+                      <a:prstDash val="solid"/>
+                      <a:round/>
+                      <a:headEnd type="none" w="med" len="med"/>
+                      <a:tailEnd type="none" w="med" len="med"/>
+                    </a:lnT>
+                    <a:lnB w="6350" cap="flat" cmpd="sng" algn="ctr">
+                      <a:solidFill>
+                        <a:srgbClr val="CBD5E1"/>
+                      </a:solidFill>
+                      <a:prstDash val="solid"/>
+                      <a:round/>
+                      <a:headEnd type="none" w="med" len="med"/>
+                      <a:tailEnd type="none" w="med" len="med"/>
+                    </a:lnB>
+                    <a:solidFill>
+                      <a:srgbClr val="FFFFFF"/>
+                    </a:solidFill>
+                  </a:tcPr>
+                </a:tc>
+                <a:tc>
+                  <a:txBody>
+                    <a:bodyPr/>
+                    <a:lstStyle/>
+                    <a:p>
+                      <a:pPr algn="ctr" indent="0" marL="0">
+                        <a:buNone/>
+                      </a:pPr>
+                      <a:r>
+                        <a:rPr lang="en-US" sz="900" dirty="0">
+                          <a:solidFill>
+                            <a:srgbClr val="000000"/>
+                          </a:solidFill>
+                          <a:latin typeface="Arial" pitchFamily="34" charset="0"/>
+                          <a:ea typeface="Arial" pitchFamily="34" charset="-122"/>
+                          <a:cs typeface="Arial" pitchFamily="34" charset="-120"/>
+                        </a:rPr>
+                        <a:t>3.33</a:t>
+                      </a:r>
+                      <a:endParaRPr lang="en-US" sz="900" dirty="0">
+                        <a:latin typeface="Arial" charset="0"/>
+                        <a:ea typeface="Arial" charset="0"/>
+                        <a:cs typeface="Arial" charset="0"/>
+                      </a:endParaRPr>
+                    </a:p>
+                  </a:txBody>
+                  <a:tcPr marL="91440" marR="91440" marT="45720" marB="45720">
+                    <a:lnL w="6350" cap="flat" cmpd="sng" algn="ctr">
+                      <a:solidFill>
+                        <a:srgbClr val="CBD5E1"/>
+                      </a:solidFill>
+                      <a:prstDash val="solid"/>
+                      <a:round/>
+                      <a:headEnd type="none" w="med" len="med"/>
+                      <a:tailEnd type="none" w="med" len="med"/>
+                    </a:lnL>
+                    <a:lnR w="6350" cap="flat" cmpd="sng" algn="ctr">
+                      <a:solidFill>
+                        <a:srgbClr val="CBD5E1"/>
+                      </a:solidFill>
+                      <a:prstDash val="solid"/>
+                      <a:round/>
+                      <a:headEnd type="none" w="med" len="med"/>
+                      <a:tailEnd type="none" w="med" len="med"/>
+                    </a:lnR>
+                    <a:lnT w="6350" cap="flat" cmpd="sng" algn="ctr">
+                      <a:solidFill>
+                        <a:srgbClr val="CBD5E1"/>
+                      </a:solidFill>
+                      <a:prstDash val="solid"/>
+                      <a:round/>
+                      <a:headEnd type="none" w="med" len="med"/>
+                      <a:tailEnd type="none" w="med" len="med"/>
+                    </a:lnT>
+                    <a:lnB w="6350" cap="flat" cmpd="sng" algn="ctr">
+                      <a:solidFill>
+                        <a:srgbClr val="CBD5E1"/>
+                      </a:solidFill>
+                      <a:prstDash val="solid"/>
+                      <a:round/>
+                      <a:headEnd type="none" w="med" len="med"/>
+                      <a:tailEnd type="none" w="med" len="med"/>
+                    </a:lnB>
+                    <a:solidFill>
+                      <a:srgbClr val="FFFFFF"/>
+                    </a:solidFill>
+                  </a:tcPr>
+                </a:tc>
+                <a:tc>
+                  <a:txBody>
+                    <a:bodyPr/>
+                    <a:lstStyle/>
+                    <a:p>
+                      <a:pPr algn="ctr" indent="0" marL="0">
+                        <a:buNone/>
+                      </a:pPr>
+                      <a:r>
+                        <a:rPr lang="en-US" sz="900" dirty="0">
+                          <a:solidFill>
+                            <a:srgbClr val="000000"/>
+                          </a:solidFill>
+                          <a:latin typeface="Arial" pitchFamily="34" charset="0"/>
+                          <a:ea typeface="Arial" pitchFamily="34" charset="-122"/>
+                          <a:cs typeface="Arial" pitchFamily="34" charset="-120"/>
+                        </a:rPr>
+                        <a:t>/5 (×2)</a:t>
+                      </a:r>
+                      <a:endParaRPr lang="en-US" sz="900" dirty="0">
+                        <a:latin typeface="Arial" charset="0"/>
+                        <a:ea typeface="Arial" charset="0"/>
+                        <a:cs typeface="Arial" charset="0"/>
+                      </a:endParaRPr>
+                    </a:p>
+                  </a:txBody>
+                  <a:tcPr marL="91440" marR="91440" marT="45720" marB="45720">
+                    <a:lnL w="6350" cap="flat" cmpd="sng" algn="ctr">
+                      <a:solidFill>
+                        <a:srgbClr val="CBD5E1"/>
+                      </a:solidFill>
+                      <a:prstDash val="solid"/>
+                      <a:round/>
+                      <a:headEnd type="none" w="med" len="med"/>
+                      <a:tailEnd type="none" w="med" len="med"/>
+                    </a:lnL>
+                    <a:lnR w="6350" cap="flat" cmpd="sng" algn="ctr">
+                      <a:solidFill>
+                        <a:srgbClr val="CBD5E1"/>
+                      </a:solidFill>
+                      <a:prstDash val="solid"/>
+                      <a:round/>
+                      <a:headEnd type="none" w="med" len="med"/>
+                      <a:tailEnd type="none" w="med" len="med"/>
+                    </a:lnR>
+                    <a:lnT w="6350" cap="flat" cmpd="sng" algn="ctr">
+                      <a:solidFill>
+                        <a:srgbClr val="CBD5E1"/>
+                      </a:solidFill>
+                      <a:prstDash val="solid"/>
+                      <a:round/>
+                      <a:headEnd type="none" w="med" len="med"/>
+                      <a:tailEnd type="none" w="med" len="med"/>
+                    </a:lnT>
+                    <a:lnB w="6350" cap="flat" cmpd="sng" algn="ctr">
+                      <a:solidFill>
+                        <a:srgbClr val="CBD5E1"/>
+                      </a:solidFill>
+                      <a:prstDash val="solid"/>
+                      <a:round/>
+                      <a:headEnd type="none" w="med" len="med"/>
+                      <a:tailEnd type="none" w="med" len="med"/>
+                    </a:lnB>
+                    <a:solidFill>
+                      <a:srgbClr val="FFFFFF"/>
+                    </a:solidFill>
+                  </a:tcPr>
+                </a:tc>
+                <a:tc>
+                  <a:txBody>
+                    <a:bodyPr/>
+                    <a:lstStyle/>
+                    <a:p>
+                      <a:pPr algn="ctr" indent="0" marL="0">
+                        <a:buNone/>
+                      </a:pPr>
+                      <a:r>
+                        <a:rPr lang="en-US" sz="900" dirty="0">
+                          <a:solidFill>
+                            <a:srgbClr val="000000"/>
+                          </a:solidFill>
+                          <a:latin typeface="Arial" pitchFamily="34" charset="0"/>
+                          <a:ea typeface="Arial" pitchFamily="34" charset="-122"/>
+                          <a:cs typeface="Arial" pitchFamily="34" charset="-120"/>
+                        </a:rPr>
+                        <a:t>6.67</a:t>
                       </a:r>
                       <a:endParaRPr lang="en-US" sz="900" dirty="0">
                         <a:latin typeface="Arial" charset="0"/>
@@ -8606,7 +9273,7 @@
                           <a:ea typeface="Arial" pitchFamily="34" charset="-122"/>
                           <a:cs typeface="Arial" pitchFamily="34" charset="-120"/>
                         </a:rPr>
-                        <a:t>33</a:t>
+                        <a:t>12</a:t>
                       </a:r>
                       <a:endParaRPr lang="en-US" sz="900" dirty="0">
                         <a:latin typeface="Arial" charset="0"/>
@@ -8674,7 +9341,7 @@
                           <a:ea typeface="Arial" pitchFamily="34" charset="-122"/>
                           <a:cs typeface="Arial" pitchFamily="34" charset="-120"/>
                         </a:rPr>
-                        <a:t>3.48</a:t>
+                        <a:t>3.17</a:t>
                       </a:r>
                       <a:endParaRPr lang="en-US" sz="900" dirty="0">
                         <a:latin typeface="Arial" charset="0"/>
@@ -8810,691 +9477,7 @@
                           <a:ea typeface="Arial" pitchFamily="34" charset="-122"/>
                           <a:cs typeface="Arial" pitchFamily="34" charset="-120"/>
                         </a:rPr>
-                        <a:t>6.97</a:t>
-                      </a:r>
-                      <a:endParaRPr lang="en-US" sz="900" dirty="0">
-                        <a:latin typeface="Arial" charset="0"/>
-                        <a:ea typeface="Arial" charset="0"/>
-                        <a:cs typeface="Arial" charset="0"/>
-                      </a:endParaRPr>
-                    </a:p>
-                  </a:txBody>
-                  <a:tcPr marL="91440" marR="91440" marT="45720" marB="45720">
-                    <a:lnL w="6350" cap="flat" cmpd="sng" algn="ctr">
-                      <a:solidFill>
-                        <a:srgbClr val="CBD5E1"/>
-                      </a:solidFill>
-                      <a:prstDash val="solid"/>
-                      <a:round/>
-                      <a:headEnd type="none" w="med" len="med"/>
-                      <a:tailEnd type="none" w="med" len="med"/>
-                    </a:lnL>
-                    <a:lnR w="6350" cap="flat" cmpd="sng" algn="ctr">
-                      <a:solidFill>
-                        <a:srgbClr val="CBD5E1"/>
-                      </a:solidFill>
-                      <a:prstDash val="solid"/>
-                      <a:round/>
-                      <a:headEnd type="none" w="med" len="med"/>
-                      <a:tailEnd type="none" w="med" len="med"/>
-                    </a:lnR>
-                    <a:lnT w="6350" cap="flat" cmpd="sng" algn="ctr">
-                      <a:solidFill>
-                        <a:srgbClr val="CBD5E1"/>
-                      </a:solidFill>
-                      <a:prstDash val="solid"/>
-                      <a:round/>
-                      <a:headEnd type="none" w="med" len="med"/>
-                      <a:tailEnd type="none" w="med" len="med"/>
-                    </a:lnT>
-                    <a:lnB w="6350" cap="flat" cmpd="sng" algn="ctr">
-                      <a:solidFill>
-                        <a:srgbClr val="CBD5E1"/>
-                      </a:solidFill>
-                      <a:prstDash val="solid"/>
-                      <a:round/>
-                      <a:headEnd type="none" w="med" len="med"/>
-                      <a:tailEnd type="none" w="med" len="med"/>
-                    </a:lnB>
-                    <a:solidFill>
-                      <a:srgbClr val="E8EFF8"/>
-                    </a:solidFill>
-                  </a:tcPr>
-                </a:tc>
-              </a:tr>
-              <a:tr h="201168">
-                <a:tc>
-                  <a:txBody>
-                    <a:bodyPr/>
-                    <a:lstStyle/>
-                    <a:p>
-                      <a:pPr algn="ctr" indent="0" marL="0">
-                        <a:buNone/>
-                      </a:pPr>
-                      <a:r>
-                        <a:rPr lang="en-US" sz="900" dirty="0">
-                          <a:solidFill>
-                            <a:srgbClr val="000000"/>
-                          </a:solidFill>
-                          <a:latin typeface="Arial" pitchFamily="34" charset="0"/>
-                          <a:ea typeface="Arial" pitchFamily="34" charset="-122"/>
-                          <a:cs typeface="Arial" pitchFamily="34" charset="-120"/>
-                        </a:rPr>
-                        <a:t>じゃらん</a:t>
-                      </a:r>
-                      <a:endParaRPr lang="en-US" sz="900" dirty="0">
-                        <a:latin typeface="Arial" charset="0"/>
-                        <a:ea typeface="Arial" charset="0"/>
-                        <a:cs typeface="Arial" charset="0"/>
-                      </a:endParaRPr>
-                    </a:p>
-                  </a:txBody>
-                  <a:tcPr marL="91440" marR="91440" marT="45720" marB="45720">
-                    <a:lnL w="6350" cap="flat" cmpd="sng" algn="ctr">
-                      <a:solidFill>
-                        <a:srgbClr val="CBD5E1"/>
-                      </a:solidFill>
-                      <a:prstDash val="solid"/>
-                      <a:round/>
-                      <a:headEnd type="none" w="med" len="med"/>
-                      <a:tailEnd type="none" w="med" len="med"/>
-                    </a:lnL>
-                    <a:lnR w="6350" cap="flat" cmpd="sng" algn="ctr">
-                      <a:solidFill>
-                        <a:srgbClr val="CBD5E1"/>
-                      </a:solidFill>
-                      <a:prstDash val="solid"/>
-                      <a:round/>
-                      <a:headEnd type="none" w="med" len="med"/>
-                      <a:tailEnd type="none" w="med" len="med"/>
-                    </a:lnR>
-                    <a:lnT w="6350" cap="flat" cmpd="sng" algn="ctr">
-                      <a:solidFill>
-                        <a:srgbClr val="CBD5E1"/>
-                      </a:solidFill>
-                      <a:prstDash val="solid"/>
-                      <a:round/>
-                      <a:headEnd type="none" w="med" len="med"/>
-                      <a:tailEnd type="none" w="med" len="med"/>
-                    </a:lnT>
-                    <a:lnB w="6350" cap="flat" cmpd="sng" algn="ctr">
-                      <a:solidFill>
-                        <a:srgbClr val="CBD5E1"/>
-                      </a:solidFill>
-                      <a:prstDash val="solid"/>
-                      <a:round/>
-                      <a:headEnd type="none" w="med" len="med"/>
-                      <a:tailEnd type="none" w="med" len="med"/>
-                    </a:lnB>
-                    <a:solidFill>
-                      <a:srgbClr val="FFFFFF"/>
-                    </a:solidFill>
-                  </a:tcPr>
-                </a:tc>
-                <a:tc>
-                  <a:txBody>
-                    <a:bodyPr/>
-                    <a:lstStyle/>
-                    <a:p>
-                      <a:pPr algn="ctr" indent="0" marL="0">
-                        <a:buNone/>
-                      </a:pPr>
-                      <a:r>
-                        <a:rPr lang="en-US" sz="900" dirty="0">
-                          <a:solidFill>
-                            <a:srgbClr val="000000"/>
-                          </a:solidFill>
-                          <a:latin typeface="Arial" pitchFamily="34" charset="0"/>
-                          <a:ea typeface="Arial" pitchFamily="34" charset="-122"/>
-                          <a:cs typeface="Arial" pitchFamily="34" charset="-120"/>
-                        </a:rPr>
-                        <a:t>9</a:t>
-                      </a:r>
-                      <a:endParaRPr lang="en-US" sz="900" dirty="0">
-                        <a:latin typeface="Arial" charset="0"/>
-                        <a:ea typeface="Arial" charset="0"/>
-                        <a:cs typeface="Arial" charset="0"/>
-                      </a:endParaRPr>
-                    </a:p>
-                  </a:txBody>
-                  <a:tcPr marL="91440" marR="91440" marT="45720" marB="45720">
-                    <a:lnL w="6350" cap="flat" cmpd="sng" algn="ctr">
-                      <a:solidFill>
-                        <a:srgbClr val="CBD5E1"/>
-                      </a:solidFill>
-                      <a:prstDash val="solid"/>
-                      <a:round/>
-                      <a:headEnd type="none" w="med" len="med"/>
-                      <a:tailEnd type="none" w="med" len="med"/>
-                    </a:lnL>
-                    <a:lnR w="6350" cap="flat" cmpd="sng" algn="ctr">
-                      <a:solidFill>
-                        <a:srgbClr val="CBD5E1"/>
-                      </a:solidFill>
-                      <a:prstDash val="solid"/>
-                      <a:round/>
-                      <a:headEnd type="none" w="med" len="med"/>
-                      <a:tailEnd type="none" w="med" len="med"/>
-                    </a:lnR>
-                    <a:lnT w="6350" cap="flat" cmpd="sng" algn="ctr">
-                      <a:solidFill>
-                        <a:srgbClr val="CBD5E1"/>
-                      </a:solidFill>
-                      <a:prstDash val="solid"/>
-                      <a:round/>
-                      <a:headEnd type="none" w="med" len="med"/>
-                      <a:tailEnd type="none" w="med" len="med"/>
-                    </a:lnT>
-                    <a:lnB w="6350" cap="flat" cmpd="sng" algn="ctr">
-                      <a:solidFill>
-                        <a:srgbClr val="CBD5E1"/>
-                      </a:solidFill>
-                      <a:prstDash val="solid"/>
-                      <a:round/>
-                      <a:headEnd type="none" w="med" len="med"/>
-                      <a:tailEnd type="none" w="med" len="med"/>
-                    </a:lnB>
-                    <a:solidFill>
-                      <a:srgbClr val="FFFFFF"/>
-                    </a:solidFill>
-                  </a:tcPr>
-                </a:tc>
-                <a:tc>
-                  <a:txBody>
-                    <a:bodyPr/>
-                    <a:lstStyle/>
-                    <a:p>
-                      <a:pPr algn="ctr" indent="0" marL="0">
-                        <a:buNone/>
-                      </a:pPr>
-                      <a:r>
-                        <a:rPr lang="en-US" sz="900" dirty="0">
-                          <a:solidFill>
-                            <a:srgbClr val="000000"/>
-                          </a:solidFill>
-                          <a:latin typeface="Arial" pitchFamily="34" charset="0"/>
-                          <a:ea typeface="Arial" pitchFamily="34" charset="-122"/>
-                          <a:cs typeface="Arial" pitchFamily="34" charset="-120"/>
-                        </a:rPr>
-                        <a:t>3.44</a:t>
-                      </a:r>
-                      <a:endParaRPr lang="en-US" sz="900" dirty="0">
-                        <a:latin typeface="Arial" charset="0"/>
-                        <a:ea typeface="Arial" charset="0"/>
-                        <a:cs typeface="Arial" charset="0"/>
-                      </a:endParaRPr>
-                    </a:p>
-                  </a:txBody>
-                  <a:tcPr marL="91440" marR="91440" marT="45720" marB="45720">
-                    <a:lnL w="6350" cap="flat" cmpd="sng" algn="ctr">
-                      <a:solidFill>
-                        <a:srgbClr val="CBD5E1"/>
-                      </a:solidFill>
-                      <a:prstDash val="solid"/>
-                      <a:round/>
-                      <a:headEnd type="none" w="med" len="med"/>
-                      <a:tailEnd type="none" w="med" len="med"/>
-                    </a:lnL>
-                    <a:lnR w="6350" cap="flat" cmpd="sng" algn="ctr">
-                      <a:solidFill>
-                        <a:srgbClr val="CBD5E1"/>
-                      </a:solidFill>
-                      <a:prstDash val="solid"/>
-                      <a:round/>
-                      <a:headEnd type="none" w="med" len="med"/>
-                      <a:tailEnd type="none" w="med" len="med"/>
-                    </a:lnR>
-                    <a:lnT w="6350" cap="flat" cmpd="sng" algn="ctr">
-                      <a:solidFill>
-                        <a:srgbClr val="CBD5E1"/>
-                      </a:solidFill>
-                      <a:prstDash val="solid"/>
-                      <a:round/>
-                      <a:headEnd type="none" w="med" len="med"/>
-                      <a:tailEnd type="none" w="med" len="med"/>
-                    </a:lnT>
-                    <a:lnB w="6350" cap="flat" cmpd="sng" algn="ctr">
-                      <a:solidFill>
-                        <a:srgbClr val="CBD5E1"/>
-                      </a:solidFill>
-                      <a:prstDash val="solid"/>
-                      <a:round/>
-                      <a:headEnd type="none" w="med" len="med"/>
-                      <a:tailEnd type="none" w="med" len="med"/>
-                    </a:lnB>
-                    <a:solidFill>
-                      <a:srgbClr val="FFFFFF"/>
-                    </a:solidFill>
-                  </a:tcPr>
-                </a:tc>
-                <a:tc>
-                  <a:txBody>
-                    <a:bodyPr/>
-                    <a:lstStyle/>
-                    <a:p>
-                      <a:pPr algn="ctr" indent="0" marL="0">
-                        <a:buNone/>
-                      </a:pPr>
-                      <a:r>
-                        <a:rPr lang="en-US" sz="900" dirty="0">
-                          <a:solidFill>
-                            <a:srgbClr val="000000"/>
-                          </a:solidFill>
-                          <a:latin typeface="Arial" pitchFamily="34" charset="0"/>
-                          <a:ea typeface="Arial" pitchFamily="34" charset="-122"/>
-                          <a:cs typeface="Arial" pitchFamily="34" charset="-120"/>
-                        </a:rPr>
-                        <a:t>/5 (×2)</a:t>
-                      </a:r>
-                      <a:endParaRPr lang="en-US" sz="900" dirty="0">
-                        <a:latin typeface="Arial" charset="0"/>
-                        <a:ea typeface="Arial" charset="0"/>
-                        <a:cs typeface="Arial" charset="0"/>
-                      </a:endParaRPr>
-                    </a:p>
-                  </a:txBody>
-                  <a:tcPr marL="91440" marR="91440" marT="45720" marB="45720">
-                    <a:lnL w="6350" cap="flat" cmpd="sng" algn="ctr">
-                      <a:solidFill>
-                        <a:srgbClr val="CBD5E1"/>
-                      </a:solidFill>
-                      <a:prstDash val="solid"/>
-                      <a:round/>
-                      <a:headEnd type="none" w="med" len="med"/>
-                      <a:tailEnd type="none" w="med" len="med"/>
-                    </a:lnL>
-                    <a:lnR w="6350" cap="flat" cmpd="sng" algn="ctr">
-                      <a:solidFill>
-                        <a:srgbClr val="CBD5E1"/>
-                      </a:solidFill>
-                      <a:prstDash val="solid"/>
-                      <a:round/>
-                      <a:headEnd type="none" w="med" len="med"/>
-                      <a:tailEnd type="none" w="med" len="med"/>
-                    </a:lnR>
-                    <a:lnT w="6350" cap="flat" cmpd="sng" algn="ctr">
-                      <a:solidFill>
-                        <a:srgbClr val="CBD5E1"/>
-                      </a:solidFill>
-                      <a:prstDash val="solid"/>
-                      <a:round/>
-                      <a:headEnd type="none" w="med" len="med"/>
-                      <a:tailEnd type="none" w="med" len="med"/>
-                    </a:lnT>
-                    <a:lnB w="6350" cap="flat" cmpd="sng" algn="ctr">
-                      <a:solidFill>
-                        <a:srgbClr val="CBD5E1"/>
-                      </a:solidFill>
-                      <a:prstDash val="solid"/>
-                      <a:round/>
-                      <a:headEnd type="none" w="med" len="med"/>
-                      <a:tailEnd type="none" w="med" len="med"/>
-                    </a:lnB>
-                    <a:solidFill>
-                      <a:srgbClr val="FFFFFF"/>
-                    </a:solidFill>
-                  </a:tcPr>
-                </a:tc>
-                <a:tc>
-                  <a:txBody>
-                    <a:bodyPr/>
-                    <a:lstStyle/>
-                    <a:p>
-                      <a:pPr algn="ctr" indent="0" marL="0">
-                        <a:buNone/>
-                      </a:pPr>
-                      <a:r>
-                        <a:rPr lang="en-US" sz="900" dirty="0">
-                          <a:solidFill>
-                            <a:srgbClr val="000000"/>
-                          </a:solidFill>
-                          <a:latin typeface="Arial" pitchFamily="34" charset="0"/>
-                          <a:ea typeface="Arial" pitchFamily="34" charset="-122"/>
-                          <a:cs typeface="Arial" pitchFamily="34" charset="-120"/>
-                        </a:rPr>
-                        <a:t>6.89</a:t>
-                      </a:r>
-                      <a:endParaRPr lang="en-US" sz="900" dirty="0">
-                        <a:latin typeface="Arial" charset="0"/>
-                        <a:ea typeface="Arial" charset="0"/>
-                        <a:cs typeface="Arial" charset="0"/>
-                      </a:endParaRPr>
-                    </a:p>
-                  </a:txBody>
-                  <a:tcPr marL="91440" marR="91440" marT="45720" marB="45720">
-                    <a:lnL w="6350" cap="flat" cmpd="sng" algn="ctr">
-                      <a:solidFill>
-                        <a:srgbClr val="CBD5E1"/>
-                      </a:solidFill>
-                      <a:prstDash val="solid"/>
-                      <a:round/>
-                      <a:headEnd type="none" w="med" len="med"/>
-                      <a:tailEnd type="none" w="med" len="med"/>
-                    </a:lnL>
-                    <a:lnR w="6350" cap="flat" cmpd="sng" algn="ctr">
-                      <a:solidFill>
-                        <a:srgbClr val="CBD5E1"/>
-                      </a:solidFill>
-                      <a:prstDash val="solid"/>
-                      <a:round/>
-                      <a:headEnd type="none" w="med" len="med"/>
-                      <a:tailEnd type="none" w="med" len="med"/>
-                    </a:lnR>
-                    <a:lnT w="6350" cap="flat" cmpd="sng" algn="ctr">
-                      <a:solidFill>
-                        <a:srgbClr val="CBD5E1"/>
-                      </a:solidFill>
-                      <a:prstDash val="solid"/>
-                      <a:round/>
-                      <a:headEnd type="none" w="med" len="med"/>
-                      <a:tailEnd type="none" w="med" len="med"/>
-                    </a:lnT>
-                    <a:lnB w="6350" cap="flat" cmpd="sng" algn="ctr">
-                      <a:solidFill>
-                        <a:srgbClr val="CBD5E1"/>
-                      </a:solidFill>
-                      <a:prstDash val="solid"/>
-                      <a:round/>
-                      <a:headEnd type="none" w="med" len="med"/>
-                      <a:tailEnd type="none" w="med" len="med"/>
-                    </a:lnB>
-                    <a:solidFill>
-                      <a:srgbClr val="FFFFFF"/>
-                    </a:solidFill>
-                  </a:tcPr>
-                </a:tc>
-              </a:tr>
-              <a:tr h="201168">
-                <a:tc>
-                  <a:txBody>
-                    <a:bodyPr/>
-                    <a:lstStyle/>
-                    <a:p>
-                      <a:pPr algn="ctr" indent="0" marL="0">
-                        <a:buNone/>
-                      </a:pPr>
-                      <a:r>
-                        <a:rPr lang="en-US" sz="900" dirty="0">
-                          <a:solidFill>
-                            <a:srgbClr val="000000"/>
-                          </a:solidFill>
-                          <a:latin typeface="Arial" pitchFamily="34" charset="0"/>
-                          <a:ea typeface="Arial" pitchFamily="34" charset="-122"/>
-                          <a:cs typeface="Arial" pitchFamily="34" charset="-120"/>
-                        </a:rPr>
-                        <a:t>楽天トラベル</a:t>
-                      </a:r>
-                      <a:endParaRPr lang="en-US" sz="900" dirty="0">
-                        <a:latin typeface="Arial" charset="0"/>
-                        <a:ea typeface="Arial" charset="0"/>
-                        <a:cs typeface="Arial" charset="0"/>
-                      </a:endParaRPr>
-                    </a:p>
-                  </a:txBody>
-                  <a:tcPr marL="91440" marR="91440" marT="45720" marB="45720">
-                    <a:lnL w="6350" cap="flat" cmpd="sng" algn="ctr">
-                      <a:solidFill>
-                        <a:srgbClr val="CBD5E1"/>
-                      </a:solidFill>
-                      <a:prstDash val="solid"/>
-                      <a:round/>
-                      <a:headEnd type="none" w="med" len="med"/>
-                      <a:tailEnd type="none" w="med" len="med"/>
-                    </a:lnL>
-                    <a:lnR w="6350" cap="flat" cmpd="sng" algn="ctr">
-                      <a:solidFill>
-                        <a:srgbClr val="CBD5E1"/>
-                      </a:solidFill>
-                      <a:prstDash val="solid"/>
-                      <a:round/>
-                      <a:headEnd type="none" w="med" len="med"/>
-                      <a:tailEnd type="none" w="med" len="med"/>
-                    </a:lnR>
-                    <a:lnT w="6350" cap="flat" cmpd="sng" algn="ctr">
-                      <a:solidFill>
-                        <a:srgbClr val="CBD5E1"/>
-                      </a:solidFill>
-                      <a:prstDash val="solid"/>
-                      <a:round/>
-                      <a:headEnd type="none" w="med" len="med"/>
-                      <a:tailEnd type="none" w="med" len="med"/>
-                    </a:lnT>
-                    <a:lnB w="6350" cap="flat" cmpd="sng" algn="ctr">
-                      <a:solidFill>
-                        <a:srgbClr val="CBD5E1"/>
-                      </a:solidFill>
-                      <a:prstDash val="solid"/>
-                      <a:round/>
-                      <a:headEnd type="none" w="med" len="med"/>
-                      <a:tailEnd type="none" w="med" len="med"/>
-                    </a:lnB>
-                    <a:solidFill>
-                      <a:srgbClr val="E8EFF8"/>
-                    </a:solidFill>
-                  </a:tcPr>
-                </a:tc>
-                <a:tc>
-                  <a:txBody>
-                    <a:bodyPr/>
-                    <a:lstStyle/>
-                    <a:p>
-                      <a:pPr algn="ctr" indent="0" marL="0">
-                        <a:buNone/>
-                      </a:pPr>
-                      <a:r>
-                        <a:rPr lang="en-US" sz="900" dirty="0">
-                          <a:solidFill>
-                            <a:srgbClr val="000000"/>
-                          </a:solidFill>
-                          <a:latin typeface="Arial" pitchFamily="34" charset="0"/>
-                          <a:ea typeface="Arial" pitchFamily="34" charset="-122"/>
-                          <a:cs typeface="Arial" pitchFamily="34" charset="-120"/>
-                        </a:rPr>
-                        <a:t>5</a:t>
-                      </a:r>
-                      <a:endParaRPr lang="en-US" sz="900" dirty="0">
-                        <a:latin typeface="Arial" charset="0"/>
-                        <a:ea typeface="Arial" charset="0"/>
-                        <a:cs typeface="Arial" charset="0"/>
-                      </a:endParaRPr>
-                    </a:p>
-                  </a:txBody>
-                  <a:tcPr marL="91440" marR="91440" marT="45720" marB="45720">
-                    <a:lnL w="6350" cap="flat" cmpd="sng" algn="ctr">
-                      <a:solidFill>
-                        <a:srgbClr val="CBD5E1"/>
-                      </a:solidFill>
-                      <a:prstDash val="solid"/>
-                      <a:round/>
-                      <a:headEnd type="none" w="med" len="med"/>
-                      <a:tailEnd type="none" w="med" len="med"/>
-                    </a:lnL>
-                    <a:lnR w="6350" cap="flat" cmpd="sng" algn="ctr">
-                      <a:solidFill>
-                        <a:srgbClr val="CBD5E1"/>
-                      </a:solidFill>
-                      <a:prstDash val="solid"/>
-                      <a:round/>
-                      <a:headEnd type="none" w="med" len="med"/>
-                      <a:tailEnd type="none" w="med" len="med"/>
-                    </a:lnR>
-                    <a:lnT w="6350" cap="flat" cmpd="sng" algn="ctr">
-                      <a:solidFill>
-                        <a:srgbClr val="CBD5E1"/>
-                      </a:solidFill>
-                      <a:prstDash val="solid"/>
-                      <a:round/>
-                      <a:headEnd type="none" w="med" len="med"/>
-                      <a:tailEnd type="none" w="med" len="med"/>
-                    </a:lnT>
-                    <a:lnB w="6350" cap="flat" cmpd="sng" algn="ctr">
-                      <a:solidFill>
-                        <a:srgbClr val="CBD5E1"/>
-                      </a:solidFill>
-                      <a:prstDash val="solid"/>
-                      <a:round/>
-                      <a:headEnd type="none" w="med" len="med"/>
-                      <a:tailEnd type="none" w="med" len="med"/>
-                    </a:lnB>
-                    <a:solidFill>
-                      <a:srgbClr val="E8EFF8"/>
-                    </a:solidFill>
-                  </a:tcPr>
-                </a:tc>
-                <a:tc>
-                  <a:txBody>
-                    <a:bodyPr/>
-                    <a:lstStyle/>
-                    <a:p>
-                      <a:pPr algn="ctr" indent="0" marL="0">
-                        <a:buNone/>
-                      </a:pPr>
-                      <a:r>
-                        <a:rPr lang="en-US" sz="900" dirty="0">
-                          <a:solidFill>
-                            <a:srgbClr val="000000"/>
-                          </a:solidFill>
-                          <a:latin typeface="Arial" pitchFamily="34" charset="0"/>
-                          <a:ea typeface="Arial" pitchFamily="34" charset="-122"/>
-                          <a:cs typeface="Arial" pitchFamily="34" charset="-120"/>
-                        </a:rPr>
-                        <a:t>3</a:t>
-                      </a:r>
-                      <a:endParaRPr lang="en-US" sz="900" dirty="0">
-                        <a:latin typeface="Arial" charset="0"/>
-                        <a:ea typeface="Arial" charset="0"/>
-                        <a:cs typeface="Arial" charset="0"/>
-                      </a:endParaRPr>
-                    </a:p>
-                  </a:txBody>
-                  <a:tcPr marL="91440" marR="91440" marT="45720" marB="45720">
-                    <a:lnL w="6350" cap="flat" cmpd="sng" algn="ctr">
-                      <a:solidFill>
-                        <a:srgbClr val="CBD5E1"/>
-                      </a:solidFill>
-                      <a:prstDash val="solid"/>
-                      <a:round/>
-                      <a:headEnd type="none" w="med" len="med"/>
-                      <a:tailEnd type="none" w="med" len="med"/>
-                    </a:lnL>
-                    <a:lnR w="6350" cap="flat" cmpd="sng" algn="ctr">
-                      <a:solidFill>
-                        <a:srgbClr val="CBD5E1"/>
-                      </a:solidFill>
-                      <a:prstDash val="solid"/>
-                      <a:round/>
-                      <a:headEnd type="none" w="med" len="med"/>
-                      <a:tailEnd type="none" w="med" len="med"/>
-                    </a:lnR>
-                    <a:lnT w="6350" cap="flat" cmpd="sng" algn="ctr">
-                      <a:solidFill>
-                        <a:srgbClr val="CBD5E1"/>
-                      </a:solidFill>
-                      <a:prstDash val="solid"/>
-                      <a:round/>
-                      <a:headEnd type="none" w="med" len="med"/>
-                      <a:tailEnd type="none" w="med" len="med"/>
-                    </a:lnT>
-                    <a:lnB w="6350" cap="flat" cmpd="sng" algn="ctr">
-                      <a:solidFill>
-                        <a:srgbClr val="CBD5E1"/>
-                      </a:solidFill>
-                      <a:prstDash val="solid"/>
-                      <a:round/>
-                      <a:headEnd type="none" w="med" len="med"/>
-                      <a:tailEnd type="none" w="med" len="med"/>
-                    </a:lnB>
-                    <a:solidFill>
-                      <a:srgbClr val="E8EFF8"/>
-                    </a:solidFill>
-                  </a:tcPr>
-                </a:tc>
-                <a:tc>
-                  <a:txBody>
-                    <a:bodyPr/>
-                    <a:lstStyle/>
-                    <a:p>
-                      <a:pPr algn="ctr" indent="0" marL="0">
-                        <a:buNone/>
-                      </a:pPr>
-                      <a:r>
-                        <a:rPr lang="en-US" sz="900" dirty="0">
-                          <a:solidFill>
-                            <a:srgbClr val="000000"/>
-                          </a:solidFill>
-                          <a:latin typeface="Arial" pitchFamily="34" charset="0"/>
-                          <a:ea typeface="Arial" pitchFamily="34" charset="-122"/>
-                          <a:cs typeface="Arial" pitchFamily="34" charset="-120"/>
-                        </a:rPr>
-                        <a:t>/5 (×2)</a:t>
-                      </a:r>
-                      <a:endParaRPr lang="en-US" sz="900" dirty="0">
-                        <a:latin typeface="Arial" charset="0"/>
-                        <a:ea typeface="Arial" charset="0"/>
-                        <a:cs typeface="Arial" charset="0"/>
-                      </a:endParaRPr>
-                    </a:p>
-                  </a:txBody>
-                  <a:tcPr marL="91440" marR="91440" marT="45720" marB="45720">
-                    <a:lnL w="6350" cap="flat" cmpd="sng" algn="ctr">
-                      <a:solidFill>
-                        <a:srgbClr val="CBD5E1"/>
-                      </a:solidFill>
-                      <a:prstDash val="solid"/>
-                      <a:round/>
-                      <a:headEnd type="none" w="med" len="med"/>
-                      <a:tailEnd type="none" w="med" len="med"/>
-                    </a:lnL>
-                    <a:lnR w="6350" cap="flat" cmpd="sng" algn="ctr">
-                      <a:solidFill>
-                        <a:srgbClr val="CBD5E1"/>
-                      </a:solidFill>
-                      <a:prstDash val="solid"/>
-                      <a:round/>
-                      <a:headEnd type="none" w="med" len="med"/>
-                      <a:tailEnd type="none" w="med" len="med"/>
-                    </a:lnR>
-                    <a:lnT w="6350" cap="flat" cmpd="sng" algn="ctr">
-                      <a:solidFill>
-                        <a:srgbClr val="CBD5E1"/>
-                      </a:solidFill>
-                      <a:prstDash val="solid"/>
-                      <a:round/>
-                      <a:headEnd type="none" w="med" len="med"/>
-                      <a:tailEnd type="none" w="med" len="med"/>
-                    </a:lnT>
-                    <a:lnB w="6350" cap="flat" cmpd="sng" algn="ctr">
-                      <a:solidFill>
-                        <a:srgbClr val="CBD5E1"/>
-                      </a:solidFill>
-                      <a:prstDash val="solid"/>
-                      <a:round/>
-                      <a:headEnd type="none" w="med" len="med"/>
-                      <a:tailEnd type="none" w="med" len="med"/>
-                    </a:lnB>
-                    <a:solidFill>
-                      <a:srgbClr val="E8EFF8"/>
-                    </a:solidFill>
-                  </a:tcPr>
-                </a:tc>
-                <a:tc>
-                  <a:txBody>
-                    <a:bodyPr/>
-                    <a:lstStyle/>
-                    <a:p>
-                      <a:pPr algn="ctr" indent="0" marL="0">
-                        <a:buNone/>
-                      </a:pPr>
-                      <a:r>
-                        <a:rPr lang="en-US" sz="900" dirty="0">
-                          <a:solidFill>
-                            <a:srgbClr val="000000"/>
-                          </a:solidFill>
-                          <a:latin typeface="Arial" pitchFamily="34" charset="0"/>
-                          <a:ea typeface="Arial" pitchFamily="34" charset="-122"/>
-                          <a:cs typeface="Arial" pitchFamily="34" charset="-120"/>
-                        </a:rPr>
-                        <a:t>6</a:t>
+                        <a:t>6.33</a:t>
                       </a:r>
                       <a:endParaRPr lang="en-US" sz="900" dirty="0">
                         <a:latin typeface="Arial" charset="0"/>
@@ -9902,7 +9885,7 @@
                 <a:ea typeface="Arial" pitchFamily="34" charset="-122"/>
                 <a:cs typeface="Arial" pitchFamily="34" charset="-120"/>
               </a:rPr>
-              <a:t>89件（63.6%）</a:t>
+              <a:t>49件（70.0%）</a:t>
             </a:r>
             <a:endParaRPr lang="en-US" sz="1100" dirty="0"/>
           </a:p>
@@ -10000,7 +9983,7 @@
                 <a:ea typeface="Arial" pitchFamily="34" charset="-122"/>
                 <a:cs typeface="Arial" pitchFamily="34" charset="-120"/>
               </a:rPr>
-              <a:t>35件（25.0%）</a:t>
+              <a:t>13件（18.6%）</a:t>
             </a:r>
             <a:endParaRPr lang="en-US" sz="1100" dirty="0"/>
           </a:p>
@@ -10098,7 +10081,7 @@
                 <a:ea typeface="Arial" pitchFamily="34" charset="-122"/>
                 <a:cs typeface="Arial" pitchFamily="34" charset="-120"/>
               </a:rPr>
-              <a:t>16件（11.4%）</a:t>
+              <a:t>8件（11.4%）</a:t>
             </a:r>
             <a:endParaRPr lang="en-US" sz="1100" dirty="0"/>
           </a:p>
@@ -10432,7 +10415,7 @@
                 <a:ea typeface="Arial" pitchFamily="34" charset="-122"/>
                 <a:cs typeface="Arial" pitchFamily="34" charset="-120"/>
               </a:rPr>
-              <a:t>50件+</a:t>
+              <a:t>20件+</a:t>
             </a:r>
             <a:endParaRPr lang="en-US" sz="900" dirty="0"/>
           </a:p>
@@ -10655,7 +10638,7 @@
                 <a:ea typeface="Arial" pitchFamily="34" charset="-122"/>
                 <a:cs typeface="Arial" pitchFamily="34" charset="-120"/>
               </a:rPr>
-              <a:t>50件+</a:t>
+              <a:t>20件+</a:t>
             </a:r>
             <a:endParaRPr lang="en-US" sz="900" dirty="0"/>
           </a:p>
@@ -10878,7 +10861,7 @@
                 <a:ea typeface="Arial" pitchFamily="34" charset="-122"/>
                 <a:cs typeface="Arial" pitchFamily="34" charset="-120"/>
               </a:rPr>
-              <a:t>20件+</a:t>
+              <a:t>10件+</a:t>
             </a:r>
             <a:endParaRPr lang="en-US" sz="900" dirty="0"/>
           </a:p>
@@ -11101,7 +11084,7 @@
                 <a:ea typeface="Arial" pitchFamily="34" charset="-122"/>
                 <a:cs typeface="Arial" pitchFamily="34" charset="-120"/>
               </a:rPr>
-              <a:t>20件+</a:t>
+              <a:t>10件+</a:t>
             </a:r>
             <a:endParaRPr lang="en-US" sz="900" dirty="0"/>
           </a:p>
@@ -11116,6 +11099,229 @@
         <p:spPr>
           <a:xfrm>
             <a:off x="594360" y="2953512"/>
+            <a:ext cx="1645920" cy="274320"/>
+          </a:xfrm>
+          <a:prstGeom prst="rect">
+            <a:avLst/>
+          </a:prstGeom>
+          <a:noFill/>
+          <a:ln/>
+        </p:spPr>
+        <p:txBody>
+          <a:bodyPr wrap="square" lIns="0" tIns="0" rIns="0" bIns="0" rtlCol="0" anchor="ctr"/>
+          <a:lstStyle/>
+          <a:p>
+            <a:pPr indent="0" marL="0">
+              <a:buNone/>
+            </a:pPr>
+            <a:r>
+              <a:rPr lang="en-US" sz="1300" b="1" dirty="0">
+                <a:solidFill>
+                  <a:srgbClr val="1A2744"/>
+                </a:solidFill>
+                <a:latin typeface="Arial" pitchFamily="34" charset="0"/>
+                <a:ea typeface="Arial" pitchFamily="34" charset="-122"/>
+                <a:cs typeface="Arial" pitchFamily="34" charset="-120"/>
+              </a:rPr>
+              <a:t>快適さ・設備</a:t>
+            </a:r>
+            <a:endParaRPr lang="en-US" sz="1300" dirty="0"/>
+          </a:p>
+        </p:txBody>
+      </p:sp>
+      <p:sp>
+        <p:nvSpPr>
+          <p:cNvPr id="31" name="Text 29"/>
+          <p:cNvSpPr/>
+          <p:nvPr/>
+        </p:nvSpPr>
+        <p:spPr>
+          <a:xfrm>
+            <a:off x="594360" y="3246120"/>
+            <a:ext cx="2377440" cy="365760"/>
+          </a:xfrm>
+          <a:prstGeom prst="rect">
+            <a:avLst/>
+          </a:prstGeom>
+          <a:noFill/>
+          <a:ln/>
+        </p:spPr>
+        <p:txBody>
+          <a:bodyPr wrap="square" lIns="0" tIns="0" rIns="0" bIns="0" rtlCol="0" anchor="ctr"/>
+          <a:lstStyle/>
+          <a:p>
+            <a:pPr indent="0" marL="0">
+              <a:buNone/>
+            </a:pPr>
+            <a:r>
+              <a:rPr lang="en-US" sz="900" dirty="0">
+                <a:solidFill>
+                  <a:srgbClr val="64748B"/>
+                </a:solidFill>
+                <a:latin typeface="Arial" pitchFamily="34" charset="0"/>
+                <a:ea typeface="Arial" pitchFamily="34" charset="-122"/>
+                <a:cs typeface="Arial" pitchFamily="34" charset="-120"/>
+              </a:rPr>
+              <a:t>それから設備の古さが目につく</a:t>
+            </a:r>
+            <a:endParaRPr lang="en-US" sz="900" dirty="0"/>
+          </a:p>
+        </p:txBody>
+      </p:sp>
+      <p:sp>
+        <p:nvSpPr>
+          <p:cNvPr id="32" name="Text 30"/>
+          <p:cNvSpPr/>
+          <p:nvPr/>
+        </p:nvSpPr>
+        <p:spPr>
+          <a:xfrm>
+            <a:off x="594360" y="3657600"/>
+            <a:ext cx="2377440" cy="640080"/>
+          </a:xfrm>
+          <a:prstGeom prst="rect">
+            <a:avLst/>
+          </a:prstGeom>
+          <a:noFill/>
+          <a:ln/>
+        </p:spPr>
+        <p:txBody>
+          <a:bodyPr wrap="square" lIns="0" tIns="0" rIns="0" bIns="0" rtlCol="0" anchor="ctr"/>
+          <a:lstStyle/>
+          <a:p>
+            <a:pPr indent="0" marL="0">
+              <a:buNone/>
+            </a:pPr>
+            <a:r>
+              <a:rPr lang="en-US" sz="900" i="1" dirty="0">
+                <a:solidFill>
+                  <a:srgbClr val="3B7DD8"/>
+                </a:solidFill>
+                <a:latin typeface="Arial" pitchFamily="34" charset="0"/>
+                <a:ea typeface="Arial" pitchFamily="34" charset="-122"/>
+                <a:cs typeface="Arial" pitchFamily="34" charset="-120"/>
+              </a:rPr>
+              <a:t>「Comfortable住起來根本uncomfortable 房間的佈局、燈光、環境、設計爛的要命」</a:t>
+            </a:r>
+            <a:endParaRPr lang="en-US" sz="900" dirty="0"/>
+          </a:p>
+        </p:txBody>
+      </p:sp>
+      <p:sp>
+        <p:nvSpPr>
+          <p:cNvPr id="33" name="Shape 31"/>
+          <p:cNvSpPr/>
+          <p:nvPr/>
+        </p:nvSpPr>
+        <p:spPr>
+          <a:xfrm>
+            <a:off x="3291840" y="2880360"/>
+            <a:ext cx="2651760" cy="1600200"/>
+          </a:xfrm>
+          <a:prstGeom prst="rect">
+            <a:avLst/>
+          </a:prstGeom>
+          <a:solidFill>
+            <a:srgbClr val="FFFFFF"/>
+          </a:solidFill>
+          <a:ln/>
+          <a:effectLst>
+            <a:outerShdw sx="100000" sy="100000" kx="0" ky="0" algn="bl" rotWithShape="0" blurRad="50800" dist="25400" dir="8100000">
+              <a:srgbClr val="000000">
+                <a:alpha val="10000"/>
+              </a:srgbClr>
+            </a:outerShdw>
+          </a:effectLst>
+        </p:spPr>
+      </p:sp>
+      <p:sp>
+        <p:nvSpPr>
+          <p:cNvPr id="34" name="Shape 32"/>
+          <p:cNvSpPr/>
+          <p:nvPr/>
+        </p:nvSpPr>
+        <p:spPr>
+          <a:xfrm>
+            <a:off x="3291840" y="2880360"/>
+            <a:ext cx="54864" cy="1600200"/>
+          </a:xfrm>
+          <a:prstGeom prst="rect">
+            <a:avLst/>
+          </a:prstGeom>
+          <a:solidFill>
+            <a:srgbClr val="16A34A"/>
+          </a:solidFill>
+          <a:ln/>
+        </p:spPr>
+      </p:sp>
+      <p:sp>
+        <p:nvSpPr>
+          <p:cNvPr id="35" name="Shape 33"/>
+          <p:cNvSpPr/>
+          <p:nvPr/>
+        </p:nvSpPr>
+        <p:spPr>
+          <a:xfrm>
+            <a:off x="5120640" y="2953512"/>
+            <a:ext cx="658368" cy="228600"/>
+          </a:xfrm>
+          <a:prstGeom prst="rect">
+            <a:avLst/>
+          </a:prstGeom>
+          <a:solidFill>
+            <a:srgbClr val="DCFCE7"/>
+          </a:solidFill>
+          <a:ln/>
+        </p:spPr>
+      </p:sp>
+      <p:sp>
+        <p:nvSpPr>
+          <p:cNvPr id="36" name="Text 34"/>
+          <p:cNvSpPr/>
+          <p:nvPr/>
+        </p:nvSpPr>
+        <p:spPr>
+          <a:xfrm>
+            <a:off x="5120640" y="2953512"/>
+            <a:ext cx="658368" cy="228600"/>
+          </a:xfrm>
+          <a:prstGeom prst="rect">
+            <a:avLst/>
+          </a:prstGeom>
+          <a:noFill/>
+          <a:ln/>
+        </p:spPr>
+        <p:txBody>
+          <a:bodyPr wrap="square" lIns="0" tIns="0" rIns="0" bIns="0" rtlCol="0" anchor="ctr"/>
+          <a:lstStyle/>
+          <a:p>
+            <a:pPr algn="ctr" indent="0" marL="0">
+              <a:buNone/>
+            </a:pPr>
+            <a:r>
+              <a:rPr lang="en-US" sz="900" b="1" dirty="0">
+                <a:solidFill>
+                  <a:srgbClr val="16A34A"/>
+                </a:solidFill>
+                <a:latin typeface="Arial" pitchFamily="34" charset="0"/>
+                <a:ea typeface="Arial" pitchFamily="34" charset="-122"/>
+                <a:cs typeface="Arial" pitchFamily="34" charset="-120"/>
+              </a:rPr>
+              <a:t>10件+</a:t>
+            </a:r>
+            <a:endParaRPr lang="en-US" sz="900" dirty="0"/>
+          </a:p>
+        </p:txBody>
+      </p:sp>
+      <p:sp>
+        <p:nvSpPr>
+          <p:cNvPr id="37" name="Text 35"/>
+          <p:cNvSpPr/>
+          <p:nvPr/>
+        </p:nvSpPr>
+        <p:spPr>
+          <a:xfrm>
+            <a:off x="3429000" y="2953512"/>
             <a:ext cx="1645920" cy="274320"/>
           </a:xfrm>
           <a:prstGeom prst="rect">
@@ -11148,13 +11354,13 @@
       </p:sp>
       <p:sp>
         <p:nvSpPr>
-          <p:cNvPr id="31" name="Text 29"/>
-          <p:cNvSpPr/>
-          <p:nvPr/>
-        </p:nvSpPr>
-        <p:spPr>
-          <a:xfrm>
-            <a:off x="594360" y="3246120"/>
+          <p:cNvPr id="38" name="Text 36"/>
+          <p:cNvSpPr/>
+          <p:nvPr/>
+        </p:nvSpPr>
+        <p:spPr>
+          <a:xfrm>
+            <a:off x="3429000" y="3246120"/>
             <a:ext cx="2377440" cy="365760"/>
           </a:xfrm>
           <a:prstGeom prst="rect">
@@ -11187,13 +11393,13 @@
       </p:sp>
       <p:sp>
         <p:nvSpPr>
-          <p:cNvPr id="32" name="Text 30"/>
-          <p:cNvSpPr/>
-          <p:nvPr/>
-        </p:nvSpPr>
-        <p:spPr>
-          <a:xfrm>
-            <a:off x="594360" y="3657600"/>
+          <p:cNvPr id="39" name="Text 37"/>
+          <p:cNvSpPr/>
+          <p:nvPr/>
+        </p:nvSpPr>
+        <p:spPr>
+          <a:xfrm>
+            <a:off x="3429000" y="3657600"/>
             <a:ext cx="2377440" cy="640080"/>
           </a:xfrm>
           <a:prstGeom prst="rect">
@@ -11226,13 +11432,13 @@
       </p:sp>
       <p:sp>
         <p:nvSpPr>
-          <p:cNvPr id="33" name="Shape 31"/>
-          <p:cNvSpPr/>
-          <p:nvPr/>
-        </p:nvSpPr>
-        <p:spPr>
-          <a:xfrm>
-            <a:off x="3291840" y="2880360"/>
+          <p:cNvPr id="40" name="Shape 38"/>
+          <p:cNvSpPr/>
+          <p:nvPr/>
+        </p:nvSpPr>
+        <p:spPr>
+          <a:xfrm>
+            <a:off x="6126480" y="2880360"/>
             <a:ext cx="2651760" cy="1600200"/>
           </a:xfrm>
           <a:prstGeom prst="rect">
@@ -11253,13 +11459,13 @@
       </p:sp>
       <p:sp>
         <p:nvSpPr>
-          <p:cNvPr id="34" name="Shape 32"/>
-          <p:cNvSpPr/>
-          <p:nvPr/>
-        </p:nvSpPr>
-        <p:spPr>
-          <a:xfrm>
-            <a:off x="3291840" y="2880360"/>
+          <p:cNvPr id="41" name="Shape 39"/>
+          <p:cNvSpPr/>
+          <p:nvPr/>
+        </p:nvSpPr>
+        <p:spPr>
+          <a:xfrm>
+            <a:off x="6126480" y="2880360"/>
             <a:ext cx="54864" cy="1600200"/>
           </a:xfrm>
           <a:prstGeom prst="rect">
@@ -11273,13 +11479,13 @@
       </p:sp>
       <p:sp>
         <p:nvSpPr>
-          <p:cNvPr id="35" name="Shape 33"/>
-          <p:cNvSpPr/>
-          <p:nvPr/>
-        </p:nvSpPr>
-        <p:spPr>
-          <a:xfrm>
-            <a:off x="5120640" y="2953512"/>
+          <p:cNvPr id="42" name="Shape 40"/>
+          <p:cNvSpPr/>
+          <p:nvPr/>
+        </p:nvSpPr>
+        <p:spPr>
+          <a:xfrm>
+            <a:off x="7955280" y="2953512"/>
             <a:ext cx="658368" cy="228600"/>
           </a:xfrm>
           <a:prstGeom prst="rect">
@@ -11293,13 +11499,13 @@
       </p:sp>
       <p:sp>
         <p:nvSpPr>
-          <p:cNvPr id="36" name="Text 34"/>
-          <p:cNvSpPr/>
-          <p:nvPr/>
-        </p:nvSpPr>
-        <p:spPr>
-          <a:xfrm>
-            <a:off x="5120640" y="2953512"/>
+          <p:cNvPr id="43" name="Text 41"/>
+          <p:cNvSpPr/>
+          <p:nvPr/>
+        </p:nvSpPr>
+        <p:spPr>
+          <a:xfrm>
+            <a:off x="7955280" y="2953512"/>
             <a:ext cx="658368" cy="228600"/>
           </a:xfrm>
           <a:prstGeom prst="rect">
@@ -11324,230 +11530,7 @@
                 <a:ea typeface="Arial" pitchFamily="34" charset="-122"/>
                 <a:cs typeface="Arial" pitchFamily="34" charset="-120"/>
               </a:rPr>
-              <a:t>20件+</a:t>
-            </a:r>
-            <a:endParaRPr lang="en-US" sz="900" dirty="0"/>
-          </a:p>
-        </p:txBody>
-      </p:sp>
-      <p:sp>
-        <p:nvSpPr>
-          <p:cNvPr id="37" name="Text 35"/>
-          <p:cNvSpPr/>
-          <p:nvPr/>
-        </p:nvSpPr>
-        <p:spPr>
-          <a:xfrm>
-            <a:off x="3429000" y="2953512"/>
-            <a:ext cx="1645920" cy="274320"/>
-          </a:xfrm>
-          <a:prstGeom prst="rect">
-            <a:avLst/>
-          </a:prstGeom>
-          <a:noFill/>
-          <a:ln/>
-        </p:spPr>
-        <p:txBody>
-          <a:bodyPr wrap="square" lIns="0" tIns="0" rIns="0" bIns="0" rtlCol="0" anchor="ctr"/>
-          <a:lstStyle/>
-          <a:p>
-            <a:pPr indent="0" marL="0">
-              <a:buNone/>
-            </a:pPr>
-            <a:r>
-              <a:rPr lang="en-US" sz="1300" b="1" dirty="0">
-                <a:solidFill>
-                  <a:srgbClr val="1A2744"/>
-                </a:solidFill>
-                <a:latin typeface="Arial" pitchFamily="34" charset="0"/>
-                <a:ea typeface="Arial" pitchFamily="34" charset="-122"/>
-                <a:cs typeface="Arial" pitchFamily="34" charset="-120"/>
-              </a:rPr>
-              <a:t>快適さ・設備</a:t>
-            </a:r>
-            <a:endParaRPr lang="en-US" sz="1300" dirty="0"/>
-          </a:p>
-        </p:txBody>
-      </p:sp>
-      <p:sp>
-        <p:nvSpPr>
-          <p:cNvPr id="38" name="Text 36"/>
-          <p:cNvSpPr/>
-          <p:nvPr/>
-        </p:nvSpPr>
-        <p:spPr>
-          <a:xfrm>
-            <a:off x="3429000" y="3246120"/>
-            <a:ext cx="2377440" cy="365760"/>
-          </a:xfrm>
-          <a:prstGeom prst="rect">
-            <a:avLst/>
-          </a:prstGeom>
-          <a:noFill/>
-          <a:ln/>
-        </p:spPr>
-        <p:txBody>
-          <a:bodyPr wrap="square" lIns="0" tIns="0" rIns="0" bIns="0" rtlCol="0" anchor="ctr"/>
-          <a:lstStyle/>
-          <a:p>
-            <a:pPr indent="0" marL="0">
-              <a:buNone/>
-            </a:pPr>
-            <a:r>
-              <a:rPr lang="en-US" sz="900" dirty="0">
-                <a:solidFill>
-                  <a:srgbClr val="64748B"/>
-                </a:solidFill>
-                <a:latin typeface="Arial" pitchFamily="34" charset="0"/>
-                <a:ea typeface="Arial" pitchFamily="34" charset="-122"/>
-                <a:cs typeface="Arial" pitchFamily="34" charset="-120"/>
-              </a:rPr>
-              <a:t>それから設備の古さが目につく</a:t>
-            </a:r>
-            <a:endParaRPr lang="en-US" sz="900" dirty="0"/>
-          </a:p>
-        </p:txBody>
-      </p:sp>
-      <p:sp>
-        <p:nvSpPr>
-          <p:cNvPr id="39" name="Text 37"/>
-          <p:cNvSpPr/>
-          <p:nvPr/>
-        </p:nvSpPr>
-        <p:spPr>
-          <a:xfrm>
-            <a:off x="3429000" y="3657600"/>
-            <a:ext cx="2377440" cy="640080"/>
-          </a:xfrm>
-          <a:prstGeom prst="rect">
-            <a:avLst/>
-          </a:prstGeom>
-          <a:noFill/>
-          <a:ln/>
-        </p:spPr>
-        <p:txBody>
-          <a:bodyPr wrap="square" lIns="0" tIns="0" rIns="0" bIns="0" rtlCol="0" anchor="ctr"/>
-          <a:lstStyle/>
-          <a:p>
-            <a:pPr indent="0" marL="0">
-              <a:buNone/>
-            </a:pPr>
-            <a:r>
-              <a:rPr lang="en-US" sz="900" i="1" dirty="0">
-                <a:solidFill>
-                  <a:srgbClr val="3B7DD8"/>
-                </a:solidFill>
-                <a:latin typeface="Arial" pitchFamily="34" charset="0"/>
-                <a:ea typeface="Arial" pitchFamily="34" charset="-122"/>
-                <a:cs typeface="Arial" pitchFamily="34" charset="-120"/>
-              </a:rPr>
-              <a:t>「Comfortable住起來根本uncomfortable 房間的佈局、燈光、環境、設計爛的要命」</a:t>
-            </a:r>
-            <a:endParaRPr lang="en-US" sz="900" dirty="0"/>
-          </a:p>
-        </p:txBody>
-      </p:sp>
-      <p:sp>
-        <p:nvSpPr>
-          <p:cNvPr id="40" name="Shape 38"/>
-          <p:cNvSpPr/>
-          <p:nvPr/>
-        </p:nvSpPr>
-        <p:spPr>
-          <a:xfrm>
-            <a:off x="6126480" y="2880360"/>
-            <a:ext cx="2651760" cy="1600200"/>
-          </a:xfrm>
-          <a:prstGeom prst="rect">
-            <a:avLst/>
-          </a:prstGeom>
-          <a:solidFill>
-            <a:srgbClr val="FFFFFF"/>
-          </a:solidFill>
-          <a:ln/>
-          <a:effectLst>
-            <a:outerShdw sx="100000" sy="100000" kx="0" ky="0" algn="bl" rotWithShape="0" blurRad="50800" dist="25400" dir="8100000">
-              <a:srgbClr val="000000">
-                <a:alpha val="10000"/>
-              </a:srgbClr>
-            </a:outerShdw>
-          </a:effectLst>
-        </p:spPr>
-      </p:sp>
-      <p:sp>
-        <p:nvSpPr>
-          <p:cNvPr id="41" name="Shape 39"/>
-          <p:cNvSpPr/>
-          <p:nvPr/>
-        </p:nvSpPr>
-        <p:spPr>
-          <a:xfrm>
-            <a:off x="6126480" y="2880360"/>
-            <a:ext cx="54864" cy="1600200"/>
-          </a:xfrm>
-          <a:prstGeom prst="rect">
-            <a:avLst/>
-          </a:prstGeom>
-          <a:solidFill>
-            <a:srgbClr val="16A34A"/>
-          </a:solidFill>
-          <a:ln/>
-        </p:spPr>
-      </p:sp>
-      <p:sp>
-        <p:nvSpPr>
-          <p:cNvPr id="42" name="Shape 40"/>
-          <p:cNvSpPr/>
-          <p:nvPr/>
-        </p:nvSpPr>
-        <p:spPr>
-          <a:xfrm>
-            <a:off x="7955280" y="2953512"/>
-            <a:ext cx="658368" cy="228600"/>
-          </a:xfrm>
-          <a:prstGeom prst="rect">
-            <a:avLst/>
-          </a:prstGeom>
-          <a:solidFill>
-            <a:srgbClr val="DCFCE7"/>
-          </a:solidFill>
-          <a:ln/>
-        </p:spPr>
-      </p:sp>
-      <p:sp>
-        <p:nvSpPr>
-          <p:cNvPr id="43" name="Text 41"/>
-          <p:cNvSpPr/>
-          <p:nvPr/>
-        </p:nvSpPr>
-        <p:spPr>
-          <a:xfrm>
-            <a:off x="7955280" y="2953512"/>
-            <a:ext cx="658368" cy="228600"/>
-          </a:xfrm>
-          <a:prstGeom prst="rect">
-            <a:avLst/>
-          </a:prstGeom>
-          <a:noFill/>
-          <a:ln/>
-        </p:spPr>
-        <p:txBody>
-          <a:bodyPr wrap="square" lIns="0" tIns="0" rIns="0" bIns="0" rtlCol="0" anchor="ctr"/>
-          <a:lstStyle/>
-          <a:p>
-            <a:pPr algn="ctr" indent="0" marL="0">
-              <a:buNone/>
-            </a:pPr>
-            <a:r>
-              <a:rPr lang="en-US" sz="900" b="1" dirty="0">
-                <a:solidFill>
-                  <a:srgbClr val="16A34A"/>
-                </a:solidFill>
-                <a:latin typeface="Arial" pitchFamily="34" charset="0"/>
-                <a:ea typeface="Arial" pitchFamily="34" charset="-122"/>
-                <a:cs typeface="Arial" pitchFamily="34" charset="-120"/>
-              </a:rPr>
-              <a:t>10件+</a:t>
+              <a:t>7件</a:t>
             </a:r>
             <a:endParaRPr lang="en-US" sz="900" dirty="0"/>
           </a:p>
@@ -12422,7 +12405,7 @@
                           <a:ea typeface="Arial" pitchFamily="34" charset="-122"/>
                           <a:cs typeface="Arial" pitchFamily="34" charset="-120"/>
                         </a:rPr>
-                        <a:t>23件</a:t>
+                        <a:t>11件</a:t>
                       </a:r>
                       <a:endParaRPr lang="en-US" sz="900" dirty="0">
                         <a:latin typeface="Arial" charset="0"/>
@@ -12696,7 +12679,7 @@
                           <a:ea typeface="Arial" pitchFamily="34" charset="-122"/>
                           <a:cs typeface="Arial" pitchFamily="34" charset="-120"/>
                         </a:rPr>
-                        <a:t>22件</a:t>
+                        <a:t>10件</a:t>
                       </a:r>
                       <a:endParaRPr lang="en-US" sz="900" dirty="0">
                         <a:latin typeface="Arial" charset="0"/>
@@ -12970,7 +12953,7 @@
                           <a:ea typeface="Arial" pitchFamily="34" charset="-122"/>
                           <a:cs typeface="Arial" pitchFamily="34" charset="-120"/>
                         </a:rPr>
-                        <a:t>14件</a:t>
+                        <a:t>8件</a:t>
                       </a:r>
                       <a:endParaRPr lang="en-US" sz="900" dirty="0">
                         <a:latin typeface="Arial" charset="0"/>
@@ -13108,7 +13091,7 @@
                           <a:ea typeface="Arial" pitchFamily="34" charset="-122"/>
                           <a:cs typeface="Arial" pitchFamily="34" charset="-120"/>
                         </a:rPr>
-                        <a:t>清掃不備</a:t>
+                        <a:t>防音性能</a:t>
                       </a:r>
                       <a:endParaRPr lang="en-US" sz="900" dirty="0">
                         <a:latin typeface="Arial" charset="0"/>
@@ -13176,7 +13159,7 @@
                           <a:ea typeface="Arial" pitchFamily="34" charset="-122"/>
                           <a:cs typeface="Arial" pitchFamily="34" charset="-120"/>
                         </a:rPr>
-                        <a:t>水まわりが、正直汚い……</a:t>
+                        <a:t>部屋の防音性が低く、隣の部屋がものすごくうるさい</a:t>
                       </a:r>
                       <a:endParaRPr lang="en-US" sz="900" dirty="0">
                         <a:latin typeface="Arial" charset="0"/>
@@ -13244,7 +13227,7 @@
                           <a:ea typeface="Arial" pitchFamily="34" charset="-122"/>
                           <a:cs typeface="Arial" pitchFamily="34" charset="-120"/>
                         </a:rPr>
-                        <a:t>14件</a:t>
+                        <a:t>7件</a:t>
                       </a:r>
                       <a:endParaRPr lang="en-US" sz="900" dirty="0">
                         <a:latin typeface="Arial" charset="0"/>
@@ -13382,7 +13365,7 @@
                           <a:ea typeface="Arial" pitchFamily="34" charset="-122"/>
                           <a:cs typeface="Arial" pitchFamily="34" charset="-120"/>
                         </a:rPr>
-                        <a:t>防音性能</a:t>
+                        <a:t>清掃不備</a:t>
                       </a:r>
                       <a:endParaRPr lang="en-US" sz="900" dirty="0">
                         <a:latin typeface="Arial" charset="0"/>
@@ -13450,7 +13433,7 @@
                           <a:ea typeface="Arial" pitchFamily="34" charset="-122"/>
                           <a:cs typeface="Arial" pitchFamily="34" charset="-120"/>
                         </a:rPr>
-                        <a:t>部屋の防音性が低く、隣の部屋がものすごくうるさい</a:t>
+                        <a:t>水まわりが、正直汚い……</a:t>
                       </a:r>
                       <a:endParaRPr lang="en-US" sz="900" dirty="0">
                         <a:latin typeface="Arial" charset="0"/>
@@ -13518,7 +13501,7 @@
                           <a:ea typeface="Arial" pitchFamily="34" charset="-122"/>
                           <a:cs typeface="Arial" pitchFamily="34" charset="-120"/>
                         </a:rPr>
-                        <a:t>13件</a:t>
+                        <a:t>6件</a:t>
                       </a:r>
                       <a:endParaRPr lang="en-US" sz="900" dirty="0">
                         <a:latin typeface="Arial" charset="0"/>
@@ -13792,7 +13775,7 @@
                           <a:ea typeface="Arial" pitchFamily="34" charset="-122"/>
                           <a:cs typeface="Arial" pitchFamily="34" charset="-120"/>
                         </a:rPr>
-                        <a:t>10件</a:t>
+                        <a:t>4件</a:t>
                       </a:r>
                       <a:endParaRPr lang="en-US" sz="900" dirty="0">
                         <a:latin typeface="Arial" charset="0"/>
@@ -13930,7 +13913,7 @@
                           <a:ea typeface="Arial" pitchFamily="34" charset="-122"/>
                           <a:cs typeface="Arial" pitchFamily="34" charset="-120"/>
                         </a:rPr>
-                        <a:t>臭い・匂い</a:t>
+                        <a:t>朝食の改善要望</a:t>
                       </a:r>
                       <a:endParaRPr lang="en-US" sz="900" dirty="0">
                         <a:latin typeface="Arial" charset="0"/>
@@ -13998,7 +13981,7 @@
                           <a:ea typeface="Arial" pitchFamily="34" charset="-122"/>
                           <a:cs typeface="Arial" pitchFamily="34" charset="-120"/>
                         </a:rPr>
-                        <a:t>どこから臭いがするのかは分かりません</a:t>
+                        <a:t>朝食はほぼ毎日同じです</a:t>
                       </a:r>
                       <a:endParaRPr lang="en-US" sz="900" dirty="0">
                         <a:latin typeface="Arial" charset="0"/>
@@ -14066,7 +14049,7 @@
                           <a:ea typeface="Arial" pitchFamily="34" charset="-122"/>
                           <a:cs typeface="Arial" pitchFamily="34" charset="-120"/>
                         </a:rPr>
-                        <a:t>8件</a:t>
+                        <a:t>3件</a:t>
                       </a:r>
                       <a:endParaRPr lang="en-US" sz="900" dirty="0">
                         <a:latin typeface="Arial" charset="0"/>
@@ -14204,7 +14187,7 @@
                           <a:ea typeface="Arial" pitchFamily="34" charset="-122"/>
                           <a:cs typeface="Arial" pitchFamily="34" charset="-120"/>
                         </a:rPr>
-                        <a:t>窓・採光</a:t>
+                        <a:t>対応・サービスの不満</a:t>
                       </a:r>
                       <a:endParaRPr lang="en-US" sz="900" dirty="0">
                         <a:latin typeface="Arial" charset="0"/>
@@ -14272,7 +14255,7 @@
                           <a:ea typeface="Arial" pitchFamily="34" charset="-122"/>
                           <a:cs typeface="Arial" pitchFamily="34" charset="-120"/>
                         </a:rPr>
-                        <a:t>朝食無料提供でルームコンディション大丈夫だったし、道路沿いの夜に車音など若干の騒音があったのですが窓からは博多駅広...</a:t>
+                        <a:t>位置很好，房間很舊，早餐有啲難食 立地は最高だが、部屋は古く、朝食は少し残念だった</a:t>
                       </a:r>
                       <a:endParaRPr lang="en-US" sz="900" dirty="0">
                         <a:latin typeface="Arial" charset="0"/>
@@ -14340,7 +14323,7 @@
                           <a:ea typeface="Arial" pitchFamily="34" charset="-122"/>
                           <a:cs typeface="Arial" pitchFamily="34" charset="-120"/>
                         </a:rPr>
-                        <a:t>7件</a:t>
+                        <a:t>3件</a:t>
                       </a:r>
                       <a:endParaRPr lang="en-US" sz="900" dirty="0">
                         <a:latin typeface="Arial" charset="0"/>
@@ -14478,7 +14461,7 @@
                           <a:ea typeface="Arial" pitchFamily="34" charset="-122"/>
                           <a:cs typeface="Arial" pitchFamily="34" charset="-120"/>
                         </a:rPr>
-                        <a:t>朝食の改善要望</a:t>
+                        <a:t>臭い・匂い</a:t>
                       </a:r>
                       <a:endParaRPr lang="en-US" sz="900" dirty="0">
                         <a:latin typeface="Arial" charset="0"/>
@@ -14546,7 +14529,7 @@
                           <a:ea typeface="Arial" pitchFamily="34" charset="-122"/>
                           <a:cs typeface="Arial" pitchFamily="34" charset="-120"/>
                         </a:rPr>
-                        <a:t>朝食はほぼ毎日同じです</a:t>
+                        <a:t>どこから臭いがするのかは分かりません</a:t>
                       </a:r>
                       <a:endParaRPr lang="en-US" sz="900" dirty="0">
                         <a:latin typeface="Arial" charset="0"/>
@@ -14614,7 +14597,7 @@
                           <a:ea typeface="Arial" pitchFamily="34" charset="-122"/>
                           <a:cs typeface="Arial" pitchFamily="34" charset="-120"/>
                         </a:rPr>
-                        <a:t>5件</a:t>
+                        <a:t>2件</a:t>
                       </a:r>
                       <a:endParaRPr lang="en-US" sz="900" dirty="0">
                         <a:latin typeface="Arial" charset="0"/>

--- a/納品レポート/ホテル別レポート/comfort_hakata_口コミ分析レポート.pptx
+++ b/納品レポート/ホテル別レポート/comfort_hakata_口コミ分析レポート.pptx
@@ -2812,7 +2812,7 @@
                 <a:ea typeface="Arial" pitchFamily="34" charset="-122"/>
                 <a:cs typeface="Arial" pitchFamily="34" charset="-120"/>
               </a:rPr>
-              <a:t>作成日：2026年4月20日</a:t>
+              <a:t>作成日：2026年4月21日</a:t>
             </a:r>
             <a:endParaRPr lang="en-US" sz="1000" dirty="0"/>
           </a:p>

--- a/納品レポート/ホテル別レポート/comfort_hakata_口コミ分析レポート.pptx
+++ b/納品レポート/ホテル別レポート/comfort_hakata_口コミ分析レポート.pptx
@@ -2812,7 +2812,7 @@
                 <a:ea typeface="Arial" pitchFamily="34" charset="-122"/>
                 <a:cs typeface="Arial" pitchFamily="34" charset="-120"/>
               </a:rPr>
-              <a:t>作成日：2026年4月21日</a:t>
+              <a:t>作成日：2026年4月22日</a:t>
             </a:r>
             <a:endParaRPr lang="en-US" sz="1000" dirty="0"/>
           </a:p>
